--- a/unit6-lesson23-nuwa.pptx
+++ b/unit6-lesson23-nuwa.pptx
@@ -11,6 +11,8 @@
     <p:sldId id="259" r:id="rId10"/>
     <p:sldId id="260" r:id="rId11"/>
     <p:sldId id="261" r:id="rId12"/>
+    <p:sldId id="262" r:id="rId13"/>
+    <p:sldId id="263" r:id="rId14"/>
   </p:sldIdLst>
   <p:sldSz cx="12191695" cy="6858000" type="screen4x3"/>
   <p:notesSz cx="6858000" cy="9144000"/>
@@ -3095,7 +3097,7 @@
       <p:grpSpPr/>
       <p:pic>
         <p:nvPicPr>
-          <p:cNvPr id="2" name="Picture 1" descr="bg_gushi.png"/>
+          <p:cNvPr id="2" name="Picture 1" descr="bg_nuwa.png"/>
           <p:cNvPicPr>
             <a:picLocks noChangeAspect="1"/>
           </p:cNvPicPr>
@@ -3134,7 +3136,7 @@
           <a:noFill/>
           <a:ln w="31750">
             <a:solidFill>
-              <a:srgbClr val="50825A"/>
+              <a:srgbClr val="5A8C5A"/>
             </a:solidFill>
           </a:ln>
         </p:spPr>
@@ -3160,16 +3162,150 @@
           </a:p>
         </p:txBody>
       </p:sp>
-      <p:sp>
-        <p:nvSpPr>
-          <p:cNvPr id="4" name="TextBox 3"/>
+      <p:pic>
+        <p:nvPicPr>
+          <p:cNvPr id="4" name="Picture 3" descr="corner_nuwa_tl.png"/>
+          <p:cNvPicPr>
+            <a:picLocks noChangeAspect="1"/>
+          </p:cNvPicPr>
+          <p:nvPr/>
+        </p:nvPicPr>
+        <p:blipFill>
+          <a:blip r:embed="rId3"/>
+          <a:stretch>
+            <a:fillRect/>
+          </a:stretch>
+        </p:blipFill>
+        <p:spPr>
+          <a:xfrm>
+            <a:off x="-45720" y="-45720"/>
+            <a:ext cx="2011680" cy="2011680"/>
+          </a:xfrm>
+          <a:prstGeom prst="rect">
+            <a:avLst/>
+          </a:prstGeom>
+        </p:spPr>
+      </p:pic>
+      <p:pic>
+        <p:nvPicPr>
+          <p:cNvPr id="5" name="Picture 4" descr="corner_nuwa_tr.png"/>
+          <p:cNvPicPr>
+            <a:picLocks noChangeAspect="1"/>
+          </p:cNvPicPr>
+          <p:nvPr/>
+        </p:nvPicPr>
+        <p:blipFill>
+          <a:blip r:embed="rId4"/>
+          <a:stretch>
+            <a:fillRect/>
+          </a:stretch>
+        </p:blipFill>
+        <p:spPr>
+          <a:xfrm>
+            <a:off x="9875520" y="-45720"/>
+            <a:ext cx="2011680" cy="2011680"/>
+          </a:xfrm>
+          <a:prstGeom prst="rect">
+            <a:avLst/>
+          </a:prstGeom>
+        </p:spPr>
+      </p:pic>
+      <p:sp>
+        <p:nvSpPr>
+          <p:cNvPr id="6" name="Rectangle 5"/>
+          <p:cNvSpPr/>
+          <p:nvPr/>
+        </p:nvSpPr>
+        <p:spPr>
+          <a:xfrm>
+            <a:off x="292608" y="274320"/>
+            <a:ext cx="11594592" cy="6300216"/>
+          </a:xfrm>
+          <a:prstGeom prst="rect">
+            <a:avLst/>
+          </a:prstGeom>
+          <a:noFill/>
+          <a:ln w="31750">
+            <a:solidFill>
+              <a:srgbClr val="5A8C5A"/>
+            </a:solidFill>
+          </a:ln>
+        </p:spPr>
+        <p:style>
+          <a:lnRef idx="1">
+            <a:schemeClr val="accent1"/>
+          </a:lnRef>
+          <a:fillRef idx="3">
+            <a:schemeClr val="accent1"/>
+          </a:fillRef>
+          <a:effectRef idx="2">
+            <a:schemeClr val="accent1"/>
+          </a:effectRef>
+          <a:fontRef idx="minor">
+            <a:schemeClr val="lt1"/>
+          </a:fontRef>
+        </p:style>
+        <p:txBody>
+          <a:bodyPr rtlCol="0" anchor="ctr"/>
+          <a:lstStyle/>
+          <a:p>
+            <a:pPr algn="ctr"/>
+          </a:p>
+        </p:txBody>
+      </p:sp>
+      <p:sp>
+        <p:nvSpPr>
+          <p:cNvPr id="7" name="Rectangle 6"/>
+          <p:cNvSpPr/>
+          <p:nvPr/>
+        </p:nvSpPr>
+        <p:spPr>
+          <a:xfrm>
+            <a:off x="347472" y="329184"/>
+            <a:ext cx="11484864" cy="6190488"/>
+          </a:xfrm>
+          <a:prstGeom prst="rect">
+            <a:avLst/>
+          </a:prstGeom>
+          <a:noFill/>
+          <a:ln w="12700">
+            <a:solidFill>
+              <a:srgbClr val="A0C896"/>
+            </a:solidFill>
+          </a:ln>
+        </p:spPr>
+        <p:style>
+          <a:lnRef idx="1">
+            <a:schemeClr val="accent1"/>
+          </a:lnRef>
+          <a:fillRef idx="3">
+            <a:schemeClr val="accent1"/>
+          </a:fillRef>
+          <a:effectRef idx="2">
+            <a:schemeClr val="accent1"/>
+          </a:effectRef>
+          <a:fontRef idx="minor">
+            <a:schemeClr val="lt1"/>
+          </a:fontRef>
+        </p:style>
+        <p:txBody>
+          <a:bodyPr rtlCol="0" anchor="ctr"/>
+          <a:lstStyle/>
+          <a:p>
+            <a:pPr algn="ctr"/>
+          </a:p>
+        </p:txBody>
+      </p:sp>
+      <p:sp>
+        <p:nvSpPr>
+          <p:cNvPr id="8" name="TextBox 7"/>
           <p:cNvSpPr txBox="1"/>
           <p:nvPr/>
         </p:nvSpPr>
         <p:spPr>
           <a:xfrm>
-            <a:off x="5029200" y="1645920"/>
-            <a:ext cx="1371600" cy="1371600"/>
+            <a:off x="1371600" y="1828800"/>
+            <a:ext cx="9418320" cy="1828800"/>
           </a:xfrm>
           <a:prstGeom prst="rect">
             <a:avLst/>
@@ -3184,174 +3320,77 @@
           <a:p>
             <a:pPr algn="ctr">
               <a:spcAft>
-                <a:spcPts val="800"/>
+                <a:spcPts val="1000"/>
               </a:spcAft>
             </a:pPr>
             <a:r>
-              <a:rPr sz="7200" b="1">
-                <a:solidFill>
-                  <a:srgbClr val="50825A"/>
+              <a:rPr sz="5200" b="1">
+                <a:solidFill>
+                  <a:srgbClr val="468250"/>
                 </a:solidFill>
                 <a:latin typeface="Microsoft YaHei"/>
               </a:rPr>
-              <a:t>女</a:t>
-            </a:r>
-          </a:p>
-        </p:txBody>
-      </p:sp>
-      <p:sp>
-        <p:nvSpPr>
-          <p:cNvPr id="5" name="TextBox 4"/>
-          <p:cNvSpPr txBox="1"/>
-          <p:nvPr/>
-        </p:nvSpPr>
-        <p:spPr>
-          <a:xfrm>
-            <a:off x="6217920" y="1920240"/>
-            <a:ext cx="1371600" cy="1371600"/>
-          </a:xfrm>
-          <a:prstGeom prst="rect">
-            <a:avLst/>
-          </a:prstGeom>
-          <a:noFill/>
-        </p:spPr>
-        <p:txBody>
-          <a:bodyPr wrap="none">
-            <a:spAutoFit/>
-          </a:bodyPr>
-          <a:lstStyle/>
+              <a:t>女娲造人</a:t>
+            </a:r>
+          </a:p>
           <a:p>
             <a:pPr algn="ctr">
               <a:spcAft>
-                <a:spcPts val="800"/>
+                <a:spcPts val="1000"/>
               </a:spcAft>
             </a:pPr>
             <a:r>
-              <a:rPr sz="7200" b="1">
-                <a:solidFill>
-                  <a:srgbClr val="50825A"/>
+              <a:rPr sz="2600" b="0">
+                <a:solidFill>
+                  <a:srgbClr val="28462D"/>
                 </a:solidFill>
                 <a:latin typeface="Microsoft YaHei"/>
               </a:rPr>
-              <a:t>娲</a:t>
-            </a:r>
-          </a:p>
-        </p:txBody>
-      </p:sp>
-      <p:sp>
-        <p:nvSpPr>
-          <p:cNvPr id="6" name="TextBox 5"/>
-          <p:cNvSpPr txBox="1"/>
-          <p:nvPr/>
-        </p:nvSpPr>
-        <p:spPr>
-          <a:xfrm>
-            <a:off x="7406640" y="2194560"/>
-            <a:ext cx="1371600" cy="1371600"/>
-          </a:xfrm>
-          <a:prstGeom prst="rect">
-            <a:avLst/>
-          </a:prstGeom>
-          <a:noFill/>
-        </p:spPr>
-        <p:txBody>
-          <a:bodyPr wrap="none">
-            <a:spAutoFit/>
-          </a:bodyPr>
-          <a:lstStyle/>
-          <a:p>
-            <a:pPr algn="ctr">
-              <a:spcAft>
-                <a:spcPts val="800"/>
-              </a:spcAft>
-            </a:pPr>
-            <a:r>
-              <a:rPr sz="7200" b="1">
-                <a:solidFill>
-                  <a:srgbClr val="50825A"/>
-                </a:solidFill>
-                <a:latin typeface="Microsoft YaHei"/>
-              </a:rPr>
-              <a:t>造</a:t>
-            </a:r>
-          </a:p>
-        </p:txBody>
-      </p:sp>
-      <p:sp>
-        <p:nvSpPr>
-          <p:cNvPr id="7" name="TextBox 6"/>
-          <p:cNvSpPr txBox="1"/>
-          <p:nvPr/>
-        </p:nvSpPr>
-        <p:spPr>
-          <a:xfrm>
-            <a:off x="8595360" y="2468880"/>
-            <a:ext cx="1371600" cy="1371600"/>
-          </a:xfrm>
-          <a:prstGeom prst="rect">
-            <a:avLst/>
-          </a:prstGeom>
-          <a:noFill/>
-        </p:spPr>
-        <p:txBody>
-          <a:bodyPr wrap="none">
-            <a:spAutoFit/>
-          </a:bodyPr>
-          <a:lstStyle/>
-          <a:p>
-            <a:pPr algn="ctr">
-              <a:spcAft>
-                <a:spcPts val="800"/>
-              </a:spcAft>
-            </a:pPr>
-            <a:r>
-              <a:rPr sz="7200" b="1">
-                <a:solidFill>
-                  <a:srgbClr val="50825A"/>
-                </a:solidFill>
-                <a:latin typeface="Microsoft YaHei"/>
-              </a:rPr>
-              <a:t>人</a:t>
-            </a:r>
-          </a:p>
-        </p:txBody>
-      </p:sp>
-      <p:sp>
-        <p:nvSpPr>
-          <p:cNvPr id="8" name="TextBox 7"/>
-          <p:cNvSpPr txBox="1"/>
-          <p:nvPr/>
-        </p:nvSpPr>
-        <p:spPr>
-          <a:xfrm>
-            <a:off x="3200400" y="4572000"/>
-            <a:ext cx="5760720" cy="548640"/>
-          </a:xfrm>
-          <a:prstGeom prst="rect">
-            <a:avLst/>
-          </a:prstGeom>
-          <a:noFill/>
-        </p:spPr>
-        <p:txBody>
-          <a:bodyPr wrap="none">
-            <a:spAutoFit/>
-          </a:bodyPr>
-          <a:lstStyle/>
-          <a:p>
-            <a:pPr algn="ctr">
-              <a:spcAft>
-                <a:spcPts val="800"/>
-              </a:spcAft>
-            </a:pPr>
-            <a:r>
-              <a:rPr sz="2600" b="0">
-                <a:solidFill>
-                  <a:srgbClr val="284632"/>
-                </a:solidFill>
-                <a:latin typeface="Microsoft YaHei"/>
-              </a:rPr>
-              <a:t>袁珂 · 母题：创造与生命</a:t>
-            </a:r>
+              <a:t>第23课 · 第六、七课时 · 创造与生命</a:t>
+            </a:r>
+          </a:p>
+        </p:txBody>
+      </p:sp>
+      <p:sp>
+        <p:nvSpPr>
+          <p:cNvPr id="9" name="Rectangle 8"/>
+          <p:cNvSpPr/>
+          <p:nvPr/>
+        </p:nvSpPr>
+        <p:spPr>
+          <a:xfrm>
+            <a:off x="3200400" y="5029200"/>
+            <a:ext cx="5760720" cy="27432"/>
+          </a:xfrm>
+          <a:prstGeom prst="rect">
+            <a:avLst/>
+          </a:prstGeom>
+          <a:solidFill>
+            <a:srgbClr val="A0C896"/>
+          </a:solidFill>
+          <a:ln>
+            <a:noFill/>
+          </a:ln>
+        </p:spPr>
+        <p:style>
+          <a:lnRef idx="1">
+            <a:schemeClr val="accent1"/>
+          </a:lnRef>
+          <a:fillRef idx="3">
+            <a:schemeClr val="accent1"/>
+          </a:fillRef>
+          <a:effectRef idx="2">
+            <a:schemeClr val="accent1"/>
+          </a:effectRef>
+          <a:fontRef idx="minor">
+            <a:schemeClr val="lt1"/>
+          </a:fontRef>
+        </p:style>
+        <p:txBody>
+          <a:bodyPr rtlCol="0" anchor="ctr"/>
+          <a:lstStyle/>
+          <a:p>
+            <a:pPr algn="ctr"/>
           </a:p>
         </p:txBody>
       </p:sp>
@@ -3375,7 +3414,7 @@
       <p:grpSpPr/>
       <p:pic>
         <p:nvPicPr>
-          <p:cNvPr id="2" name="Picture 1" descr="bg_gushi.png"/>
+          <p:cNvPr id="2" name="Picture 1" descr="bg_nuwa.png"/>
           <p:cNvPicPr>
             <a:picLocks noChangeAspect="1"/>
           </p:cNvPicPr>
@@ -3414,7 +3453,7 @@
           <a:noFill/>
           <a:ln w="31750">
             <a:solidFill>
-              <a:srgbClr val="50825A"/>
+              <a:srgbClr val="5A8C5A"/>
             </a:solidFill>
           </a:ln>
         </p:spPr>
@@ -3440,61 +3479,70 @@
           </a:p>
         </p:txBody>
       </p:sp>
-      <p:sp>
-        <p:nvSpPr>
-          <p:cNvPr id="4" name="TextBox 3"/>
-          <p:cNvSpPr txBox="1"/>
-          <p:nvPr/>
-        </p:nvSpPr>
-        <p:spPr>
-          <a:xfrm>
-            <a:off x="3200400" y="640080"/>
-            <a:ext cx="5760720" cy="731520"/>
-          </a:xfrm>
-          <a:prstGeom prst="rect">
-            <a:avLst/>
-          </a:prstGeom>
-          <a:noFill/>
-        </p:spPr>
-        <p:txBody>
-          <a:bodyPr wrap="none">
-            <a:spAutoFit/>
-          </a:bodyPr>
-          <a:lstStyle/>
-          <a:p>
-            <a:pPr algn="ctr">
-              <a:spcAft>
-                <a:spcPts val="800"/>
-              </a:spcAft>
-            </a:pPr>
-            <a:r>
-              <a:rPr sz="4000" b="1">
-                <a:solidFill>
-                  <a:srgbClr val="50825A"/>
-                </a:solidFill>
-                <a:latin typeface="Microsoft YaHei"/>
-              </a:rPr>
-              <a:t>文学常识</a:t>
-            </a:r>
-          </a:p>
-        </p:txBody>
-      </p:sp>
-      <p:sp>
-        <p:nvSpPr>
-          <p:cNvPr id="5" name="Oval 4"/>
+      <p:pic>
+        <p:nvPicPr>
+          <p:cNvPr id="4" name="Picture 3" descr="corner_nuwa_tl.png"/>
+          <p:cNvPicPr>
+            <a:picLocks noChangeAspect="1"/>
+          </p:cNvPicPr>
+          <p:nvPr/>
+        </p:nvPicPr>
+        <p:blipFill>
+          <a:blip r:embed="rId3"/>
+          <a:stretch>
+            <a:fillRect/>
+          </a:stretch>
+        </p:blipFill>
+        <p:spPr>
+          <a:xfrm>
+            <a:off x="-45720" y="-45720"/>
+            <a:ext cx="2011680" cy="2011680"/>
+          </a:xfrm>
+          <a:prstGeom prst="rect">
+            <a:avLst/>
+          </a:prstGeom>
+        </p:spPr>
+      </p:pic>
+      <p:pic>
+        <p:nvPicPr>
+          <p:cNvPr id="5" name="Picture 4" descr="corner_nuwa_tr.png"/>
+          <p:cNvPicPr>
+            <a:picLocks noChangeAspect="1"/>
+          </p:cNvPicPr>
+          <p:nvPr/>
+        </p:nvPicPr>
+        <p:blipFill>
+          <a:blip r:embed="rId4"/>
+          <a:stretch>
+            <a:fillRect/>
+          </a:stretch>
+        </p:blipFill>
+        <p:spPr>
+          <a:xfrm>
+            <a:off x="9875520" y="-45720"/>
+            <a:ext cx="2011680" cy="2011680"/>
+          </a:xfrm>
+          <a:prstGeom prst="rect">
+            <a:avLst/>
+          </a:prstGeom>
+        </p:spPr>
+      </p:pic>
+      <p:sp>
+        <p:nvSpPr>
+          <p:cNvPr id="6" name="Rounded Rectangle 5"/>
           <p:cNvSpPr/>
           <p:nvPr/>
         </p:nvSpPr>
         <p:spPr>
           <a:xfrm>
-            <a:off x="1371600" y="1645920"/>
-            <a:ext cx="411480" cy="411480"/>
-          </a:xfrm>
-          <a:prstGeom prst="ellipse">
+            <a:off x="4953304" y="502920"/>
+            <a:ext cx="2286000" cy="411480"/>
+          </a:xfrm>
+          <a:prstGeom prst="roundRect">
             <a:avLst/>
           </a:prstGeom>
           <a:solidFill>
-            <a:srgbClr val="50825A"/>
+            <a:srgbClr val="A0C896"/>
           </a:solidFill>
           <a:ln>
             <a:noFill/>
@@ -3524,14 +3572,14 @@
       </p:sp>
       <p:sp>
         <p:nvSpPr>
-          <p:cNvPr id="6" name="TextBox 5"/>
+          <p:cNvPr id="7" name="TextBox 6"/>
           <p:cNvSpPr txBox="1"/>
           <p:nvPr/>
         </p:nvSpPr>
         <p:spPr>
           <a:xfrm>
-            <a:off x="1371600" y="1673352"/>
-            <a:ext cx="411480" cy="384048"/>
+            <a:off x="4953304" y="521208"/>
+            <a:ext cx="2286000" cy="384048"/>
           </a:xfrm>
           <a:prstGeom prst="rect">
             <a:avLst/>
@@ -3546,31 +3594,31 @@
           <a:p>
             <a:pPr algn="ctr">
               <a:spcAft>
-                <a:spcPts val="800"/>
+                <a:spcPts val="1000"/>
               </a:spcAft>
             </a:pPr>
             <a:r>
-              <a:rPr sz="1600" b="1">
-                <a:solidFill>
-                  <a:srgbClr val="FFFFFF"/>
+              <a:rPr sz="1800" b="1">
+                <a:solidFill>
+                  <a:srgbClr val="28462D"/>
                 </a:solidFill>
                 <a:latin typeface="Microsoft YaHei"/>
               </a:rPr>
-              <a:t>1</a:t>
-            </a:r>
-          </a:p>
-        </p:txBody>
-      </p:sp>
-      <p:sp>
-        <p:nvSpPr>
-          <p:cNvPr id="7" name="TextBox 6"/>
+              <a:t>课堂笔记</a:t>
+            </a:r>
+          </a:p>
+        </p:txBody>
+      </p:sp>
+      <p:sp>
+        <p:nvSpPr>
+          <p:cNvPr id="8" name="TextBox 7"/>
           <p:cNvSpPr txBox="1"/>
           <p:nvPr/>
         </p:nvSpPr>
         <p:spPr>
           <a:xfrm>
-            <a:off x="2011680" y="1627632"/>
-            <a:ext cx="9144000" cy="594360"/>
+            <a:off x="1371600" y="1051560"/>
+            <a:ext cx="9418320" cy="822960"/>
           </a:xfrm>
           <a:prstGeom prst="rect">
             <a:avLst/>
@@ -3578,53 +3626,44 @@
           <a:noFill/>
         </p:spPr>
         <p:txBody>
-          <a:bodyPr wrap="none">
+          <a:bodyPr wrap="square">
             <a:spAutoFit/>
           </a:bodyPr>
           <a:lstStyle/>
           <a:p>
-            <a:pPr algn="l">
+            <a:pPr algn="ctr">
               <a:spcAft>
-                <a:spcPts val="800"/>
+                <a:spcPts val="1000"/>
               </a:spcAft>
             </a:pPr>
             <a:r>
-              <a:rPr sz="2400" b="1">
-                <a:solidFill>
-                  <a:srgbClr val="50825A"/>
+              <a:rPr sz="3600" b="1">
+                <a:solidFill>
+                  <a:srgbClr val="468250"/>
                 </a:solidFill>
                 <a:latin typeface="Microsoft YaHei"/>
               </a:rPr>
-              <a:t>作者：</a:t>
-            </a:r>
-            <a:r>
-              <a:rPr sz="2400" b="0">
-                <a:solidFill>
-                  <a:srgbClr val="284632"/>
-                </a:solidFill>
-                <a:latin typeface="Microsoft YaHei"/>
-              </a:rPr>
-              <a:t>袁珂（现代作家，神话研究专家）</a:t>
-            </a:r>
-          </a:p>
-        </p:txBody>
-      </p:sp>
-      <p:sp>
-        <p:nvSpPr>
-          <p:cNvPr id="8" name="Oval 7"/>
+              <a:t>文学常识</a:t>
+            </a:r>
+          </a:p>
+        </p:txBody>
+      </p:sp>
+      <p:sp>
+        <p:nvSpPr>
+          <p:cNvPr id="9" name="Rectangle 8"/>
           <p:cNvSpPr/>
           <p:nvPr/>
         </p:nvSpPr>
         <p:spPr>
           <a:xfrm>
-            <a:off x="1371600" y="2304288"/>
-            <a:ext cx="411480" cy="411480"/>
-          </a:xfrm>
-          <a:prstGeom prst="ellipse">
+            <a:off x="3200400" y="1691640"/>
+            <a:ext cx="5760720" cy="27432"/>
+          </a:xfrm>
+          <a:prstGeom prst="rect">
             <a:avLst/>
           </a:prstGeom>
           <a:solidFill>
-            <a:srgbClr val="50825A"/>
+            <a:srgbClr val="A0C896"/>
           </a:solidFill>
           <a:ln>
             <a:noFill/>
@@ -3654,110 +3693,25 @@
       </p:sp>
       <p:sp>
         <p:nvSpPr>
-          <p:cNvPr id="9" name="TextBox 8"/>
-          <p:cNvSpPr txBox="1"/>
-          <p:nvPr/>
-        </p:nvSpPr>
-        <p:spPr>
-          <a:xfrm>
-            <a:off x="1371600" y="2331720"/>
-            <a:ext cx="411480" cy="384048"/>
-          </a:xfrm>
-          <a:prstGeom prst="rect">
-            <a:avLst/>
-          </a:prstGeom>
-          <a:noFill/>
-        </p:spPr>
-        <p:txBody>
-          <a:bodyPr wrap="none">
-            <a:spAutoFit/>
-          </a:bodyPr>
-          <a:lstStyle/>
-          <a:p>
-            <a:pPr algn="ctr">
-              <a:spcAft>
-                <a:spcPts val="800"/>
-              </a:spcAft>
-            </a:pPr>
-            <a:r>
-              <a:rPr sz="1600" b="1">
-                <a:solidFill>
-                  <a:srgbClr val="FFFFFF"/>
-                </a:solidFill>
-                <a:latin typeface="Microsoft YaHei"/>
-              </a:rPr>
-              <a:t>2</a:t>
-            </a:r>
-          </a:p>
-        </p:txBody>
-      </p:sp>
-      <p:sp>
-        <p:nvSpPr>
-          <p:cNvPr id="10" name="TextBox 9"/>
-          <p:cNvSpPr txBox="1"/>
-          <p:nvPr/>
-        </p:nvSpPr>
-        <p:spPr>
-          <a:xfrm>
-            <a:off x="2011680" y="2286000"/>
-            <a:ext cx="9144000" cy="594360"/>
-          </a:xfrm>
-          <a:prstGeom prst="rect">
-            <a:avLst/>
-          </a:prstGeom>
-          <a:noFill/>
-        </p:spPr>
-        <p:txBody>
-          <a:bodyPr wrap="none">
-            <a:spAutoFit/>
-          </a:bodyPr>
-          <a:lstStyle/>
-          <a:p>
-            <a:pPr algn="l">
-              <a:spcAft>
-                <a:spcPts val="800"/>
-              </a:spcAft>
-            </a:pPr>
-            <a:r>
-              <a:rPr sz="2400" b="1">
-                <a:solidFill>
-                  <a:srgbClr val="50825A"/>
-                </a:solidFill>
-                <a:latin typeface="Microsoft YaHei"/>
-              </a:rPr>
-              <a:t>文体：</a:t>
-            </a:r>
-            <a:r>
-              <a:rPr sz="2400" b="0">
-                <a:solidFill>
-                  <a:srgbClr val="284632"/>
-                </a:solidFill>
-                <a:latin typeface="Microsoft YaHei"/>
-              </a:rPr>
-              <a:t>神话——用想象解释自然与人类起源</a:t>
-            </a:r>
-          </a:p>
-        </p:txBody>
-      </p:sp>
-      <p:sp>
-        <p:nvSpPr>
-          <p:cNvPr id="11" name="Oval 10"/>
+          <p:cNvPr id="10" name="Rounded Rectangle 9"/>
           <p:cNvSpPr/>
           <p:nvPr/>
         </p:nvSpPr>
         <p:spPr>
           <a:xfrm>
-            <a:off x="1371600" y="2962656"/>
-            <a:ext cx="411480" cy="411480"/>
-          </a:xfrm>
-          <a:prstGeom prst="ellipse">
+            <a:off x="1249984" y="1810512"/>
+            <a:ext cx="9692640" cy="3319272"/>
+          </a:xfrm>
+          <a:prstGeom prst="roundRect">
             <a:avLst/>
           </a:prstGeom>
           <a:solidFill>
-            <a:srgbClr val="50825A"/>
+            <a:srgbClr val="F8FCF5"/>
           </a:solidFill>
-          <a:ln>
-            <a:noFill/>
+          <a:ln w="19050">
+            <a:solidFill>
+              <a:srgbClr val="A0C896"/>
+            </a:solidFill>
           </a:ln>
         </p:spPr>
         <p:style>
@@ -3784,14 +3738,14 @@
       </p:sp>
       <p:sp>
         <p:nvSpPr>
-          <p:cNvPr id="12" name="TextBox 11"/>
+          <p:cNvPr id="11" name="TextBox 10"/>
           <p:cNvSpPr txBox="1"/>
           <p:nvPr/>
         </p:nvSpPr>
         <p:spPr>
           <a:xfrm>
-            <a:off x="1371600" y="2990088"/>
-            <a:ext cx="411480" cy="384048"/>
+            <a:off x="1463040" y="1920240"/>
+            <a:ext cx="2103120" cy="502920"/>
           </a:xfrm>
           <a:prstGeom prst="rect">
             <a:avLst/>
@@ -3804,33 +3758,33 @@
           </a:bodyPr>
           <a:lstStyle/>
           <a:p>
-            <a:pPr algn="ctr">
+            <a:pPr algn="r">
               <a:spcAft>
-                <a:spcPts val="800"/>
+                <a:spcPts val="1000"/>
               </a:spcAft>
             </a:pPr>
             <a:r>
-              <a:rPr sz="1600" b="1">
-                <a:solidFill>
-                  <a:srgbClr val="FFFFFF"/>
+              <a:rPr sz="2200" b="1">
+                <a:solidFill>
+                  <a:srgbClr val="468250"/>
                 </a:solidFill>
                 <a:latin typeface="Microsoft YaHei"/>
               </a:rPr>
-              <a:t>3</a:t>
-            </a:r>
-          </a:p>
-        </p:txBody>
-      </p:sp>
-      <p:sp>
-        <p:nvSpPr>
-          <p:cNvPr id="13" name="TextBox 12"/>
+              <a:t>作者</a:t>
+            </a:r>
+          </a:p>
+        </p:txBody>
+      </p:sp>
+      <p:sp>
+        <p:nvSpPr>
+          <p:cNvPr id="12" name="TextBox 11"/>
           <p:cNvSpPr txBox="1"/>
           <p:nvPr/>
         </p:nvSpPr>
         <p:spPr>
           <a:xfrm>
-            <a:off x="2011680" y="2944368"/>
-            <a:ext cx="9144000" cy="594360"/>
+            <a:off x="3749039" y="1920240"/>
+            <a:ext cx="7132320" cy="685800"/>
           </a:xfrm>
           <a:prstGeom prst="rect">
             <a:avLst/>
@@ -3845,22 +3799,169 @@
           <a:p>
             <a:pPr algn="l">
               <a:spcAft>
-                <a:spcPts val="800"/>
+                <a:spcPts val="1000"/>
               </a:spcAft>
             </a:pPr>
             <a:r>
-              <a:rPr sz="2400" b="1">
-                <a:solidFill>
-                  <a:srgbClr val="50825A"/>
+              <a:rPr sz="2200" b="0">
+                <a:solidFill>
+                  <a:srgbClr val="28462D"/>
                 </a:solidFill>
                 <a:latin typeface="Microsoft YaHei"/>
               </a:rPr>
-              <a:t>特点：</a:t>
-            </a:r>
-            <a:r>
-              <a:rPr sz="2400" b="0">
-                <a:solidFill>
-                  <a:srgbClr val="284632"/>
+              <a:t>袁珂（现代作家，神话研究专家）</a:t>
+            </a:r>
+          </a:p>
+        </p:txBody>
+      </p:sp>
+      <p:sp>
+        <p:nvSpPr>
+          <p:cNvPr id="13" name="TextBox 12"/>
+          <p:cNvSpPr txBox="1"/>
+          <p:nvPr/>
+        </p:nvSpPr>
+        <p:spPr>
+          <a:xfrm>
+            <a:off x="1463040" y="2670048"/>
+            <a:ext cx="2103120" cy="502920"/>
+          </a:xfrm>
+          <a:prstGeom prst="rect">
+            <a:avLst/>
+          </a:prstGeom>
+          <a:noFill/>
+        </p:spPr>
+        <p:txBody>
+          <a:bodyPr wrap="none">
+            <a:spAutoFit/>
+          </a:bodyPr>
+          <a:lstStyle/>
+          <a:p>
+            <a:pPr algn="r">
+              <a:spcAft>
+                <a:spcPts val="1000"/>
+              </a:spcAft>
+            </a:pPr>
+            <a:r>
+              <a:rPr sz="2200" b="1">
+                <a:solidFill>
+                  <a:srgbClr val="468250"/>
+                </a:solidFill>
+                <a:latin typeface="Microsoft YaHei"/>
+              </a:rPr>
+              <a:t>文体</a:t>
+            </a:r>
+          </a:p>
+        </p:txBody>
+      </p:sp>
+      <p:sp>
+        <p:nvSpPr>
+          <p:cNvPr id="14" name="TextBox 13"/>
+          <p:cNvSpPr txBox="1"/>
+          <p:nvPr/>
+        </p:nvSpPr>
+        <p:spPr>
+          <a:xfrm>
+            <a:off x="3749039" y="2670048"/>
+            <a:ext cx="7132320" cy="685800"/>
+          </a:xfrm>
+          <a:prstGeom prst="rect">
+            <a:avLst/>
+          </a:prstGeom>
+          <a:noFill/>
+        </p:spPr>
+        <p:txBody>
+          <a:bodyPr wrap="none">
+            <a:spAutoFit/>
+          </a:bodyPr>
+          <a:lstStyle/>
+          <a:p>
+            <a:pPr algn="l">
+              <a:spcAft>
+                <a:spcPts val="1000"/>
+              </a:spcAft>
+            </a:pPr>
+            <a:r>
+              <a:rPr sz="2200" b="0">
+                <a:solidFill>
+                  <a:srgbClr val="28462D"/>
+                </a:solidFill>
+                <a:latin typeface="Microsoft YaHei"/>
+              </a:rPr>
+              <a:t>神话——用想象解释自然与人类起源</a:t>
+            </a:r>
+          </a:p>
+        </p:txBody>
+      </p:sp>
+      <p:sp>
+        <p:nvSpPr>
+          <p:cNvPr id="15" name="TextBox 14"/>
+          <p:cNvSpPr txBox="1"/>
+          <p:nvPr/>
+        </p:nvSpPr>
+        <p:spPr>
+          <a:xfrm>
+            <a:off x="1463040" y="3419856"/>
+            <a:ext cx="2103120" cy="502920"/>
+          </a:xfrm>
+          <a:prstGeom prst="rect">
+            <a:avLst/>
+          </a:prstGeom>
+          <a:noFill/>
+        </p:spPr>
+        <p:txBody>
+          <a:bodyPr wrap="none">
+            <a:spAutoFit/>
+          </a:bodyPr>
+          <a:lstStyle/>
+          <a:p>
+            <a:pPr algn="r">
+              <a:spcAft>
+                <a:spcPts val="1000"/>
+              </a:spcAft>
+            </a:pPr>
+            <a:r>
+              <a:rPr sz="2200" b="1">
+                <a:solidFill>
+                  <a:srgbClr val="468250"/>
+                </a:solidFill>
+                <a:latin typeface="Microsoft YaHei"/>
+              </a:rPr>
+              <a:t>改写特点</a:t>
+            </a:r>
+          </a:p>
+        </p:txBody>
+      </p:sp>
+      <p:sp>
+        <p:nvSpPr>
+          <p:cNvPr id="16" name="TextBox 15"/>
+          <p:cNvSpPr txBox="1"/>
+          <p:nvPr/>
+        </p:nvSpPr>
+        <p:spPr>
+          <a:xfrm>
+            <a:off x="3749039" y="3419856"/>
+            <a:ext cx="7132320" cy="685800"/>
+          </a:xfrm>
+          <a:prstGeom prst="rect">
+            <a:avLst/>
+          </a:prstGeom>
+          <a:noFill/>
+        </p:spPr>
+        <p:txBody>
+          <a:bodyPr wrap="none">
+            <a:spAutoFit/>
+          </a:bodyPr>
+          <a:lstStyle/>
+          <a:p>
+            <a:pPr algn="l">
+              <a:spcAft>
+                <a:spcPts val="1000"/>
+              </a:spcAft>
+            </a:pPr>
+            <a:r>
+              <a:rPr sz="2200" b="0">
+                <a:solidFill>
+                  <a:srgbClr val="28462D"/>
                 </a:solidFill>
                 <a:latin typeface="Microsoft YaHei"/>
               </a:rPr>
@@ -3871,57 +3972,14 @@
       </p:sp>
       <p:sp>
         <p:nvSpPr>
-          <p:cNvPr id="14" name="Oval 13"/>
-          <p:cNvSpPr/>
-          <p:nvPr/>
-        </p:nvSpPr>
-        <p:spPr>
-          <a:xfrm>
-            <a:off x="1371600" y="3621024"/>
-            <a:ext cx="411480" cy="411480"/>
-          </a:xfrm>
-          <a:prstGeom prst="ellipse">
-            <a:avLst/>
-          </a:prstGeom>
-          <a:solidFill>
-            <a:srgbClr val="50825A"/>
-          </a:solidFill>
-          <a:ln>
-            <a:noFill/>
-          </a:ln>
-        </p:spPr>
-        <p:style>
-          <a:lnRef idx="1">
-            <a:schemeClr val="accent1"/>
-          </a:lnRef>
-          <a:fillRef idx="3">
-            <a:schemeClr val="accent1"/>
-          </a:fillRef>
-          <a:effectRef idx="2">
-            <a:schemeClr val="accent1"/>
-          </a:effectRef>
-          <a:fontRef idx="minor">
-            <a:schemeClr val="lt1"/>
-          </a:fontRef>
-        </p:style>
-        <p:txBody>
-          <a:bodyPr rtlCol="0" anchor="ctr"/>
-          <a:lstStyle/>
-          <a:p>
-            <a:pPr algn="ctr"/>
-          </a:p>
-        </p:txBody>
-      </p:sp>
-      <p:sp>
-        <p:nvSpPr>
-          <p:cNvPr id="15" name="TextBox 14"/>
+          <p:cNvPr id="17" name="TextBox 16"/>
           <p:cNvSpPr txBox="1"/>
           <p:nvPr/>
         </p:nvSpPr>
         <p:spPr>
           <a:xfrm>
-            <a:off x="1371600" y="3648456"/>
-            <a:ext cx="411480" cy="384048"/>
+            <a:off x="1463040" y="4169664"/>
+            <a:ext cx="2103120" cy="502920"/>
           </a:xfrm>
           <a:prstGeom prst="rect">
             <a:avLst/>
@@ -3934,33 +3992,33 @@
           </a:bodyPr>
           <a:lstStyle/>
           <a:p>
-            <a:pPr algn="ctr">
+            <a:pPr algn="r">
               <a:spcAft>
-                <a:spcPts val="800"/>
+                <a:spcPts val="1000"/>
               </a:spcAft>
             </a:pPr>
             <a:r>
-              <a:rPr sz="1600" b="1">
-                <a:solidFill>
-                  <a:srgbClr val="FFFFFF"/>
+              <a:rPr sz="2200" b="1">
+                <a:solidFill>
+                  <a:srgbClr val="468250"/>
                 </a:solidFill>
                 <a:latin typeface="Microsoft YaHei"/>
               </a:rPr>
-              <a:t>4</a:t>
-            </a:r>
-          </a:p>
-        </p:txBody>
-      </p:sp>
-      <p:sp>
-        <p:nvSpPr>
-          <p:cNvPr id="16" name="TextBox 15"/>
+              <a:t>对比材料</a:t>
+            </a:r>
+          </a:p>
+        </p:txBody>
+      </p:sp>
+      <p:sp>
+        <p:nvSpPr>
+          <p:cNvPr id="18" name="TextBox 17"/>
           <p:cNvSpPr txBox="1"/>
           <p:nvPr/>
         </p:nvSpPr>
         <p:spPr>
           <a:xfrm>
-            <a:off x="2011680" y="3602736"/>
-            <a:ext cx="9144000" cy="594360"/>
+            <a:off x="3749039" y="4169664"/>
+            <a:ext cx="7132320" cy="685800"/>
           </a:xfrm>
           <a:prstGeom prst="rect">
             <a:avLst/>
@@ -3975,26 +4033,17 @@
           <a:p>
             <a:pPr algn="l">
               <a:spcAft>
-                <a:spcPts val="800"/>
+                <a:spcPts val="1000"/>
               </a:spcAft>
             </a:pPr>
             <a:r>
-              <a:rPr sz="2400" b="1">
-                <a:solidFill>
-                  <a:srgbClr val="50825A"/>
+              <a:rPr sz="2200" b="0">
+                <a:solidFill>
+                  <a:srgbClr val="28462D"/>
                 </a:solidFill>
                 <a:latin typeface="Microsoft YaHei"/>
               </a:rPr>
-              <a:t>材料：</a:t>
-            </a:r>
-            <a:r>
-              <a:rPr sz="2400" b="0">
-                <a:solidFill>
-                  <a:srgbClr val="284632"/>
-                </a:solidFill>
-                <a:latin typeface="Microsoft YaHei"/>
-              </a:rPr>
-              <a:t>对比教材「阅读提示」中的《风俗通》</a:t>
+              <a:t>教材「阅读提示」中的《风俗通》记载</a:t>
             </a:r>
           </a:p>
         </p:txBody>
@@ -4019,7 +4068,7 @@
       <p:grpSpPr/>
       <p:pic>
         <p:nvPicPr>
-          <p:cNvPr id="2" name="Picture 1" descr="bg_gushi.png"/>
+          <p:cNvPr id="2" name="Picture 1" descr="bg_nuwa.png"/>
           <p:cNvPicPr>
             <a:picLocks noChangeAspect="1"/>
           </p:cNvPicPr>
@@ -4058,7 +4107,7 @@
           <a:noFill/>
           <a:ln w="31750">
             <a:solidFill>
-              <a:srgbClr val="50825A"/>
+              <a:srgbClr val="5A8C5A"/>
             </a:solidFill>
           </a:ln>
         </p:spPr>
@@ -4084,61 +4133,70 @@
           </a:p>
         </p:txBody>
       </p:sp>
-      <p:sp>
-        <p:nvSpPr>
-          <p:cNvPr id="4" name="TextBox 3"/>
-          <p:cNvSpPr txBox="1"/>
-          <p:nvPr/>
-        </p:nvSpPr>
-        <p:spPr>
-          <a:xfrm>
-            <a:off x="3200400" y="640080"/>
-            <a:ext cx="5760720" cy="731520"/>
-          </a:xfrm>
-          <a:prstGeom prst="rect">
-            <a:avLst/>
-          </a:prstGeom>
-          <a:noFill/>
-        </p:spPr>
-        <p:txBody>
-          <a:bodyPr wrap="none">
-            <a:spAutoFit/>
-          </a:bodyPr>
-          <a:lstStyle/>
-          <a:p>
-            <a:pPr algn="ctr">
-              <a:spcAft>
-                <a:spcPts val="800"/>
-              </a:spcAft>
-            </a:pPr>
-            <a:r>
-              <a:rPr sz="4000" b="1">
-                <a:solidFill>
-                  <a:srgbClr val="50825A"/>
-                </a:solidFill>
-                <a:latin typeface="Microsoft YaHei"/>
-              </a:rPr>
-              <a:t>造人过程</a:t>
-            </a:r>
-          </a:p>
-        </p:txBody>
-      </p:sp>
-      <p:sp>
-        <p:nvSpPr>
-          <p:cNvPr id="5" name="Oval 4"/>
+      <p:pic>
+        <p:nvPicPr>
+          <p:cNvPr id="4" name="Picture 3" descr="corner_nuwa_tl.png"/>
+          <p:cNvPicPr>
+            <a:picLocks noChangeAspect="1"/>
+          </p:cNvPicPr>
+          <p:nvPr/>
+        </p:nvPicPr>
+        <p:blipFill>
+          <a:blip r:embed="rId3"/>
+          <a:stretch>
+            <a:fillRect/>
+          </a:stretch>
+        </p:blipFill>
+        <p:spPr>
+          <a:xfrm>
+            <a:off x="-45720" y="-45720"/>
+            <a:ext cx="2011680" cy="2011680"/>
+          </a:xfrm>
+          <a:prstGeom prst="rect">
+            <a:avLst/>
+          </a:prstGeom>
+        </p:spPr>
+      </p:pic>
+      <p:pic>
+        <p:nvPicPr>
+          <p:cNvPr id="5" name="Picture 4" descr="corner_nuwa_tr.png"/>
+          <p:cNvPicPr>
+            <a:picLocks noChangeAspect="1"/>
+          </p:cNvPicPr>
+          <p:nvPr/>
+        </p:nvPicPr>
+        <p:blipFill>
+          <a:blip r:embed="rId4"/>
+          <a:stretch>
+            <a:fillRect/>
+          </a:stretch>
+        </p:blipFill>
+        <p:spPr>
+          <a:xfrm>
+            <a:off x="9875520" y="-45720"/>
+            <a:ext cx="2011680" cy="2011680"/>
+          </a:xfrm>
+          <a:prstGeom prst="rect">
+            <a:avLst/>
+          </a:prstGeom>
+        </p:spPr>
+      </p:pic>
+      <p:sp>
+        <p:nvSpPr>
+          <p:cNvPr id="6" name="Rounded Rectangle 5"/>
           <p:cNvSpPr/>
           <p:nvPr/>
         </p:nvSpPr>
         <p:spPr>
           <a:xfrm>
-            <a:off x="1371600" y="1645920"/>
-            <a:ext cx="411480" cy="411480"/>
-          </a:xfrm>
-          <a:prstGeom prst="ellipse">
+            <a:off x="4953304" y="502920"/>
+            <a:ext cx="2286000" cy="411480"/>
+          </a:xfrm>
+          <a:prstGeom prst="roundRect">
             <a:avLst/>
           </a:prstGeom>
           <a:solidFill>
-            <a:srgbClr val="50825A"/>
+            <a:srgbClr val="A0C896"/>
           </a:solidFill>
           <a:ln>
             <a:noFill/>
@@ -4168,14 +4226,14 @@
       </p:sp>
       <p:sp>
         <p:nvSpPr>
-          <p:cNvPr id="6" name="TextBox 5"/>
+          <p:cNvPr id="7" name="TextBox 6"/>
           <p:cNvSpPr txBox="1"/>
           <p:nvPr/>
         </p:nvSpPr>
         <p:spPr>
           <a:xfrm>
-            <a:off x="1371600" y="1673352"/>
-            <a:ext cx="411480" cy="384048"/>
+            <a:off x="4953304" y="521208"/>
+            <a:ext cx="2286000" cy="384048"/>
           </a:xfrm>
           <a:prstGeom prst="rect">
             <a:avLst/>
@@ -4190,31 +4248,31 @@
           <a:p>
             <a:pPr algn="ctr">
               <a:spcAft>
-                <a:spcPts val="800"/>
+                <a:spcPts val="1000"/>
               </a:spcAft>
             </a:pPr>
             <a:r>
-              <a:rPr sz="1600" b="1">
-                <a:solidFill>
-                  <a:srgbClr val="FFFFFF"/>
+              <a:rPr sz="1800" b="1">
+                <a:solidFill>
+                  <a:srgbClr val="28462D"/>
                 </a:solidFill>
                 <a:latin typeface="Microsoft YaHei"/>
               </a:rPr>
-              <a:t>1</a:t>
-            </a:r>
-          </a:p>
-        </p:txBody>
-      </p:sp>
-      <p:sp>
-        <p:nvSpPr>
-          <p:cNvPr id="7" name="TextBox 6"/>
+              <a:t>情节笔记</a:t>
+            </a:r>
+          </a:p>
+        </p:txBody>
+      </p:sp>
+      <p:sp>
+        <p:nvSpPr>
+          <p:cNvPr id="8" name="TextBox 7"/>
           <p:cNvSpPr txBox="1"/>
           <p:nvPr/>
         </p:nvSpPr>
         <p:spPr>
           <a:xfrm>
-            <a:off x="2011680" y="1627632"/>
-            <a:ext cx="9144000" cy="594360"/>
+            <a:off x="1371600" y="1051560"/>
+            <a:ext cx="9418320" cy="822960"/>
           </a:xfrm>
           <a:prstGeom prst="rect">
             <a:avLst/>
@@ -4222,53 +4280,44 @@
           <a:noFill/>
         </p:spPr>
         <p:txBody>
-          <a:bodyPr wrap="none">
+          <a:bodyPr wrap="square">
             <a:spAutoFit/>
           </a:bodyPr>
           <a:lstStyle/>
           <a:p>
-            <a:pPr algn="l">
+            <a:pPr algn="ctr">
               <a:spcAft>
-                <a:spcPts val="800"/>
+                <a:spcPts val="1000"/>
               </a:spcAft>
             </a:pPr>
             <a:r>
-              <a:rPr sz="2400" b="1">
-                <a:solidFill>
-                  <a:srgbClr val="50825A"/>
+              <a:rPr sz="3600" b="1">
+                <a:solidFill>
+                  <a:srgbClr val="468250"/>
                 </a:solidFill>
                 <a:latin typeface="Microsoft YaHei"/>
               </a:rPr>
-              <a:t>起因：</a:t>
-            </a:r>
-            <a:r>
-              <a:rPr sz="2400" b="0">
-                <a:solidFill>
-                  <a:srgbClr val="284632"/>
-                </a:solidFill>
-                <a:latin typeface="Microsoft YaHei"/>
-              </a:rPr>
-              <a:t>女娲行走世间，感到孤独寂寞</a:t>
-            </a:r>
-          </a:p>
-        </p:txBody>
-      </p:sp>
-      <p:sp>
-        <p:nvSpPr>
-          <p:cNvPr id="8" name="Oval 7"/>
+              <a:t>造人过程</a:t>
+            </a:r>
+          </a:p>
+        </p:txBody>
+      </p:sp>
+      <p:sp>
+        <p:nvSpPr>
+          <p:cNvPr id="9" name="Rectangle 8"/>
           <p:cNvSpPr/>
           <p:nvPr/>
         </p:nvSpPr>
         <p:spPr>
           <a:xfrm>
-            <a:off x="1371600" y="2304288"/>
-            <a:ext cx="411480" cy="411480"/>
-          </a:xfrm>
-          <a:prstGeom prst="ellipse">
+            <a:off x="3200400" y="1691640"/>
+            <a:ext cx="5760720" cy="27432"/>
+          </a:xfrm>
+          <a:prstGeom prst="rect">
             <a:avLst/>
           </a:prstGeom>
           <a:solidFill>
-            <a:srgbClr val="50825A"/>
+            <a:srgbClr val="A0C896"/>
           </a:solidFill>
           <a:ln>
             <a:noFill/>
@@ -4298,110 +4347,25 @@
       </p:sp>
       <p:sp>
         <p:nvSpPr>
-          <p:cNvPr id="9" name="TextBox 8"/>
-          <p:cNvSpPr txBox="1"/>
-          <p:nvPr/>
-        </p:nvSpPr>
-        <p:spPr>
-          <a:xfrm>
-            <a:off x="1371600" y="2331720"/>
-            <a:ext cx="411480" cy="384048"/>
-          </a:xfrm>
-          <a:prstGeom prst="rect">
-            <a:avLst/>
-          </a:prstGeom>
-          <a:noFill/>
-        </p:spPr>
-        <p:txBody>
-          <a:bodyPr wrap="none">
-            <a:spAutoFit/>
-          </a:bodyPr>
-          <a:lstStyle/>
-          <a:p>
-            <a:pPr algn="ctr">
-              <a:spcAft>
-                <a:spcPts val="800"/>
-              </a:spcAft>
-            </a:pPr>
-            <a:r>
-              <a:rPr sz="1600" b="1">
-                <a:solidFill>
-                  <a:srgbClr val="FFFFFF"/>
-                </a:solidFill>
-                <a:latin typeface="Microsoft YaHei"/>
-              </a:rPr>
-              <a:t>2</a:t>
-            </a:r>
-          </a:p>
-        </p:txBody>
-      </p:sp>
-      <p:sp>
-        <p:nvSpPr>
-          <p:cNvPr id="10" name="TextBox 9"/>
-          <p:cNvSpPr txBox="1"/>
-          <p:nvPr/>
-        </p:nvSpPr>
-        <p:spPr>
-          <a:xfrm>
-            <a:off x="2011680" y="2286000"/>
-            <a:ext cx="9144000" cy="594360"/>
-          </a:xfrm>
-          <a:prstGeom prst="rect">
-            <a:avLst/>
-          </a:prstGeom>
-          <a:noFill/>
-        </p:spPr>
-        <p:txBody>
-          <a:bodyPr wrap="none">
-            <a:spAutoFit/>
-          </a:bodyPr>
-          <a:lstStyle/>
-          <a:p>
-            <a:pPr algn="l">
-              <a:spcAft>
-                <a:spcPts val="800"/>
-              </a:spcAft>
-            </a:pPr>
-            <a:r>
-              <a:rPr sz="2400" b="1">
-                <a:solidFill>
-                  <a:srgbClr val="50825A"/>
-                </a:solidFill>
-                <a:latin typeface="Microsoft YaHei"/>
-              </a:rPr>
-              <a:t>方法一：</a:t>
-            </a:r>
-            <a:r>
-              <a:rPr sz="2400" b="0">
-                <a:solidFill>
-                  <a:srgbClr val="284632"/>
-                </a:solidFill>
-                <a:latin typeface="Microsoft YaHei"/>
-              </a:rPr>
-              <a:t>黄泥和水揉成小泥人，落地即活</a:t>
-            </a:r>
-          </a:p>
-        </p:txBody>
-      </p:sp>
-      <p:sp>
-        <p:nvSpPr>
-          <p:cNvPr id="11" name="Oval 10"/>
+          <p:cNvPr id="10" name="Rounded Rectangle 9"/>
           <p:cNvSpPr/>
           <p:nvPr/>
         </p:nvSpPr>
         <p:spPr>
           <a:xfrm>
-            <a:off x="1371600" y="2962656"/>
-            <a:ext cx="411480" cy="411480"/>
-          </a:xfrm>
-          <a:prstGeom prst="ellipse">
+            <a:off x="1249984" y="1810512"/>
+            <a:ext cx="9692640" cy="3319272"/>
+          </a:xfrm>
+          <a:prstGeom prst="roundRect">
             <a:avLst/>
           </a:prstGeom>
           <a:solidFill>
-            <a:srgbClr val="50825A"/>
+            <a:srgbClr val="F8FCF5"/>
           </a:solidFill>
-          <a:ln>
-            <a:noFill/>
+          <a:ln w="19050">
+            <a:solidFill>
+              <a:srgbClr val="A0C896"/>
+            </a:solidFill>
           </a:ln>
         </p:spPr>
         <p:style>
@@ -4428,14 +4392,14 @@
       </p:sp>
       <p:sp>
         <p:nvSpPr>
-          <p:cNvPr id="12" name="TextBox 11"/>
+          <p:cNvPr id="11" name="TextBox 10"/>
           <p:cNvSpPr txBox="1"/>
           <p:nvPr/>
         </p:nvSpPr>
         <p:spPr>
           <a:xfrm>
-            <a:off x="1371600" y="2990088"/>
-            <a:ext cx="411480" cy="384048"/>
+            <a:off x="1463040" y="1920240"/>
+            <a:ext cx="2103120" cy="502920"/>
           </a:xfrm>
           <a:prstGeom prst="rect">
             <a:avLst/>
@@ -4448,33 +4412,33 @@
           </a:bodyPr>
           <a:lstStyle/>
           <a:p>
-            <a:pPr algn="ctr">
+            <a:pPr algn="r">
               <a:spcAft>
-                <a:spcPts val="800"/>
+                <a:spcPts val="1000"/>
               </a:spcAft>
             </a:pPr>
             <a:r>
-              <a:rPr sz="1600" b="1">
-                <a:solidFill>
-                  <a:srgbClr val="FFFFFF"/>
+              <a:rPr sz="2200" b="1">
+                <a:solidFill>
+                  <a:srgbClr val="468250"/>
                 </a:solidFill>
                 <a:latin typeface="Microsoft YaHei"/>
               </a:rPr>
-              <a:t>3</a:t>
-            </a:r>
-          </a:p>
-        </p:txBody>
-      </p:sp>
-      <p:sp>
-        <p:nvSpPr>
-          <p:cNvPr id="13" name="TextBox 12"/>
+              <a:t>起因</a:t>
+            </a:r>
+          </a:p>
+        </p:txBody>
+      </p:sp>
+      <p:sp>
+        <p:nvSpPr>
+          <p:cNvPr id="12" name="TextBox 11"/>
           <p:cNvSpPr txBox="1"/>
           <p:nvPr/>
         </p:nvSpPr>
         <p:spPr>
           <a:xfrm>
-            <a:off x="2011680" y="2944368"/>
-            <a:ext cx="9144000" cy="594360"/>
+            <a:off x="3749039" y="1920240"/>
+            <a:ext cx="7132320" cy="685800"/>
           </a:xfrm>
           <a:prstGeom prst="rect">
             <a:avLst/>
@@ -4489,83 +4453,31 @@
           <a:p>
             <a:pPr algn="l">
               <a:spcAft>
-                <a:spcPts val="800"/>
+                <a:spcPts val="1000"/>
               </a:spcAft>
             </a:pPr>
             <a:r>
-              <a:rPr sz="2400" b="1">
-                <a:solidFill>
-                  <a:srgbClr val="50825A"/>
+              <a:rPr sz="2200" b="0">
+                <a:solidFill>
+                  <a:srgbClr val="28462D"/>
                 </a:solidFill>
                 <a:latin typeface="Microsoft YaHei"/>
               </a:rPr>
-              <a:t>方法二：</a:t>
-            </a:r>
-            <a:r>
-              <a:rPr sz="2400" b="0">
-                <a:solidFill>
-                  <a:srgbClr val="284632"/>
-                </a:solidFill>
-                <a:latin typeface="Microsoft YaHei"/>
-              </a:rPr>
-              <a:t>藤条蘸泥浆挥洒，泥点也变成人</a:t>
-            </a:r>
-          </a:p>
-        </p:txBody>
-      </p:sp>
-      <p:sp>
-        <p:nvSpPr>
-          <p:cNvPr id="14" name="Oval 13"/>
-          <p:cNvSpPr/>
-          <p:nvPr/>
-        </p:nvSpPr>
-        <p:spPr>
-          <a:xfrm>
-            <a:off x="1371600" y="3621024"/>
-            <a:ext cx="411480" cy="411480"/>
-          </a:xfrm>
-          <a:prstGeom prst="ellipse">
-            <a:avLst/>
-          </a:prstGeom>
-          <a:solidFill>
-            <a:srgbClr val="50825A"/>
-          </a:solidFill>
-          <a:ln>
-            <a:noFill/>
-          </a:ln>
-        </p:spPr>
-        <p:style>
-          <a:lnRef idx="1">
-            <a:schemeClr val="accent1"/>
-          </a:lnRef>
-          <a:fillRef idx="3">
-            <a:schemeClr val="accent1"/>
-          </a:fillRef>
-          <a:effectRef idx="2">
-            <a:schemeClr val="accent1"/>
-          </a:effectRef>
-          <a:fontRef idx="minor">
-            <a:schemeClr val="lt1"/>
-          </a:fontRef>
-        </p:style>
-        <p:txBody>
-          <a:bodyPr rtlCol="0" anchor="ctr"/>
-          <a:lstStyle/>
-          <a:p>
-            <a:pPr algn="ctr"/>
-          </a:p>
-        </p:txBody>
-      </p:sp>
-      <p:sp>
-        <p:nvSpPr>
-          <p:cNvPr id="15" name="TextBox 14"/>
+              <a:t>女娲行走世间，感到孤独寂寞</a:t>
+            </a:r>
+          </a:p>
+        </p:txBody>
+      </p:sp>
+      <p:sp>
+        <p:nvSpPr>
+          <p:cNvPr id="13" name="TextBox 12"/>
           <p:cNvSpPr txBox="1"/>
           <p:nvPr/>
         </p:nvSpPr>
         <p:spPr>
           <a:xfrm>
-            <a:off x="1371600" y="3648456"/>
-            <a:ext cx="411480" cy="384048"/>
+            <a:off x="1463040" y="2670048"/>
+            <a:ext cx="2103120" cy="502920"/>
           </a:xfrm>
           <a:prstGeom prst="rect">
             <a:avLst/>
@@ -4578,33 +4490,33 @@
           </a:bodyPr>
           <a:lstStyle/>
           <a:p>
-            <a:pPr algn="ctr">
+            <a:pPr algn="r">
               <a:spcAft>
-                <a:spcPts val="800"/>
+                <a:spcPts val="1000"/>
               </a:spcAft>
             </a:pPr>
             <a:r>
-              <a:rPr sz="1600" b="1">
-                <a:solidFill>
-                  <a:srgbClr val="FFFFFF"/>
+              <a:rPr sz="2200" b="1">
+                <a:solidFill>
+                  <a:srgbClr val="468250"/>
                 </a:solidFill>
                 <a:latin typeface="Microsoft YaHei"/>
               </a:rPr>
-              <a:t>4</a:t>
-            </a:r>
-          </a:p>
-        </p:txBody>
-      </p:sp>
-      <p:sp>
-        <p:nvSpPr>
-          <p:cNvPr id="16" name="TextBox 15"/>
+              <a:t>方法一</a:t>
+            </a:r>
+          </a:p>
+        </p:txBody>
+      </p:sp>
+      <p:sp>
+        <p:nvSpPr>
+          <p:cNvPr id="14" name="TextBox 13"/>
           <p:cNvSpPr txBox="1"/>
           <p:nvPr/>
         </p:nvSpPr>
         <p:spPr>
           <a:xfrm>
-            <a:off x="2011680" y="3602736"/>
-            <a:ext cx="9144000" cy="594360"/>
+            <a:off x="3749039" y="2670048"/>
+            <a:ext cx="7132320" cy="685800"/>
           </a:xfrm>
           <a:prstGeom prst="rect">
             <a:avLst/>
@@ -4619,22 +4531,169 @@
           <a:p>
             <a:pPr algn="l">
               <a:spcAft>
-                <a:spcPts val="800"/>
+                <a:spcPts val="1000"/>
               </a:spcAft>
             </a:pPr>
             <a:r>
-              <a:rPr sz="2400" b="1">
-                <a:solidFill>
-                  <a:srgbClr val="50825A"/>
+              <a:rPr sz="2200" b="0">
+                <a:solidFill>
+                  <a:srgbClr val="28462D"/>
                 </a:solidFill>
                 <a:latin typeface="Microsoft YaHei"/>
               </a:rPr>
-              <a:t>结果：</a:t>
-            </a:r>
-            <a:r>
-              <a:rPr sz="2400" b="0">
-                <a:solidFill>
-                  <a:srgbClr val="284632"/>
+              <a:t>黄泥和水，揉成小泥人，泥人落地即活</a:t>
+            </a:r>
+          </a:p>
+        </p:txBody>
+      </p:sp>
+      <p:sp>
+        <p:nvSpPr>
+          <p:cNvPr id="15" name="TextBox 14"/>
+          <p:cNvSpPr txBox="1"/>
+          <p:nvPr/>
+        </p:nvSpPr>
+        <p:spPr>
+          <a:xfrm>
+            <a:off x="1463040" y="3419856"/>
+            <a:ext cx="2103120" cy="502920"/>
+          </a:xfrm>
+          <a:prstGeom prst="rect">
+            <a:avLst/>
+          </a:prstGeom>
+          <a:noFill/>
+        </p:spPr>
+        <p:txBody>
+          <a:bodyPr wrap="none">
+            <a:spAutoFit/>
+          </a:bodyPr>
+          <a:lstStyle/>
+          <a:p>
+            <a:pPr algn="r">
+              <a:spcAft>
+                <a:spcPts val="1000"/>
+              </a:spcAft>
+            </a:pPr>
+            <a:r>
+              <a:rPr sz="2200" b="1">
+                <a:solidFill>
+                  <a:srgbClr val="468250"/>
+                </a:solidFill>
+                <a:latin typeface="Microsoft YaHei"/>
+              </a:rPr>
+              <a:t>方法二</a:t>
+            </a:r>
+          </a:p>
+        </p:txBody>
+      </p:sp>
+      <p:sp>
+        <p:nvSpPr>
+          <p:cNvPr id="16" name="TextBox 15"/>
+          <p:cNvSpPr txBox="1"/>
+          <p:nvPr/>
+        </p:nvSpPr>
+        <p:spPr>
+          <a:xfrm>
+            <a:off x="3749039" y="3419856"/>
+            <a:ext cx="7132320" cy="685800"/>
+          </a:xfrm>
+          <a:prstGeom prst="rect">
+            <a:avLst/>
+          </a:prstGeom>
+          <a:noFill/>
+        </p:spPr>
+        <p:txBody>
+          <a:bodyPr wrap="none">
+            <a:spAutoFit/>
+          </a:bodyPr>
+          <a:lstStyle/>
+          <a:p>
+            <a:pPr algn="l">
+              <a:spcAft>
+                <a:spcPts val="1000"/>
+              </a:spcAft>
+            </a:pPr>
+            <a:r>
+              <a:rPr sz="2200" b="0">
+                <a:solidFill>
+                  <a:srgbClr val="28462D"/>
+                </a:solidFill>
+                <a:latin typeface="Microsoft YaHei"/>
+              </a:rPr>
+              <a:t>藤条蘸泥浆挥洒，溅落的泥点也变成人</a:t>
+            </a:r>
+          </a:p>
+        </p:txBody>
+      </p:sp>
+      <p:sp>
+        <p:nvSpPr>
+          <p:cNvPr id="17" name="TextBox 16"/>
+          <p:cNvSpPr txBox="1"/>
+          <p:nvPr/>
+        </p:nvSpPr>
+        <p:spPr>
+          <a:xfrm>
+            <a:off x="1463040" y="4169664"/>
+            <a:ext cx="2103120" cy="502920"/>
+          </a:xfrm>
+          <a:prstGeom prst="rect">
+            <a:avLst/>
+          </a:prstGeom>
+          <a:noFill/>
+        </p:spPr>
+        <p:txBody>
+          <a:bodyPr wrap="none">
+            <a:spAutoFit/>
+          </a:bodyPr>
+          <a:lstStyle/>
+          <a:p>
+            <a:pPr algn="r">
+              <a:spcAft>
+                <a:spcPts val="1000"/>
+              </a:spcAft>
+            </a:pPr>
+            <a:r>
+              <a:rPr sz="2200" b="1">
+                <a:solidFill>
+                  <a:srgbClr val="468250"/>
+                </a:solidFill>
+                <a:latin typeface="Microsoft YaHei"/>
+              </a:rPr>
+              <a:t>结果</a:t>
+            </a:r>
+          </a:p>
+        </p:txBody>
+      </p:sp>
+      <p:sp>
+        <p:nvSpPr>
+          <p:cNvPr id="18" name="TextBox 17"/>
+          <p:cNvSpPr txBox="1"/>
+          <p:nvPr/>
+        </p:nvSpPr>
+        <p:spPr>
+          <a:xfrm>
+            <a:off x="3749039" y="4169664"/>
+            <a:ext cx="7132320" cy="685800"/>
+          </a:xfrm>
+          <a:prstGeom prst="rect">
+            <a:avLst/>
+          </a:prstGeom>
+          <a:noFill/>
+        </p:spPr>
+        <p:txBody>
+          <a:bodyPr wrap="none">
+            <a:spAutoFit/>
+          </a:bodyPr>
+          <a:lstStyle/>
+          <a:p>
+            <a:pPr algn="l">
+              <a:spcAft>
+                <a:spcPts val="1000"/>
+              </a:spcAft>
+            </a:pPr>
+            <a:r>
+              <a:rPr sz="2200" b="0">
+                <a:solidFill>
+                  <a:srgbClr val="28462D"/>
                 </a:solidFill>
                 <a:latin typeface="Microsoft YaHei"/>
               </a:rPr>
@@ -4663,7 +4722,7 @@
       <p:grpSpPr/>
       <p:pic>
         <p:nvPicPr>
-          <p:cNvPr id="2" name="Picture 1" descr="bg_gushi.png"/>
+          <p:cNvPr id="2" name="Picture 1" descr="bg_nuwa.png"/>
           <p:cNvPicPr>
             <a:picLocks noChangeAspect="1"/>
           </p:cNvPicPr>
@@ -4702,7 +4761,7 @@
           <a:noFill/>
           <a:ln w="31750">
             <a:solidFill>
-              <a:srgbClr val="50825A"/>
+              <a:srgbClr val="5A8C5A"/>
             </a:solidFill>
           </a:ln>
         </p:spPr>
@@ -4728,61 +4787,70 @@
           </a:p>
         </p:txBody>
       </p:sp>
-      <p:sp>
-        <p:nvSpPr>
-          <p:cNvPr id="4" name="TextBox 3"/>
-          <p:cNvSpPr txBox="1"/>
-          <p:nvPr/>
-        </p:nvSpPr>
-        <p:spPr>
-          <a:xfrm>
-            <a:off x="3200400" y="640080"/>
-            <a:ext cx="5760720" cy="731520"/>
-          </a:xfrm>
-          <a:prstGeom prst="rect">
-            <a:avLst/>
-          </a:prstGeom>
-          <a:noFill/>
-        </p:spPr>
-        <p:txBody>
-          <a:bodyPr wrap="none">
-            <a:spAutoFit/>
-          </a:bodyPr>
-          <a:lstStyle/>
-          <a:p>
-            <a:pPr algn="ctr">
-              <a:spcAft>
-                <a:spcPts val="800"/>
-              </a:spcAft>
-            </a:pPr>
-            <a:r>
-              <a:rPr sz="4000" b="1">
-                <a:solidFill>
-                  <a:srgbClr val="50825A"/>
-                </a:solidFill>
-                <a:latin typeface="Microsoft YaHei"/>
-              </a:rPr>
-              <a:t>想象特点</a:t>
-            </a:r>
-          </a:p>
-        </p:txBody>
-      </p:sp>
-      <p:sp>
-        <p:nvSpPr>
-          <p:cNvPr id="5" name="Oval 4"/>
+      <p:pic>
+        <p:nvPicPr>
+          <p:cNvPr id="4" name="Picture 3" descr="corner_nuwa_tl.png"/>
+          <p:cNvPicPr>
+            <a:picLocks noChangeAspect="1"/>
+          </p:cNvPicPr>
+          <p:nvPr/>
+        </p:nvPicPr>
+        <p:blipFill>
+          <a:blip r:embed="rId3"/>
+          <a:stretch>
+            <a:fillRect/>
+          </a:stretch>
+        </p:blipFill>
+        <p:spPr>
+          <a:xfrm>
+            <a:off x="-45720" y="-45720"/>
+            <a:ext cx="2011680" cy="2011680"/>
+          </a:xfrm>
+          <a:prstGeom prst="rect">
+            <a:avLst/>
+          </a:prstGeom>
+        </p:spPr>
+      </p:pic>
+      <p:pic>
+        <p:nvPicPr>
+          <p:cNvPr id="5" name="Picture 4" descr="corner_nuwa_tr.png"/>
+          <p:cNvPicPr>
+            <a:picLocks noChangeAspect="1"/>
+          </p:cNvPicPr>
+          <p:nvPr/>
+        </p:nvPicPr>
+        <p:blipFill>
+          <a:blip r:embed="rId4"/>
+          <a:stretch>
+            <a:fillRect/>
+          </a:stretch>
+        </p:blipFill>
+        <p:spPr>
+          <a:xfrm>
+            <a:off x="9875520" y="-45720"/>
+            <a:ext cx="2011680" cy="2011680"/>
+          </a:xfrm>
+          <a:prstGeom prst="rect">
+            <a:avLst/>
+          </a:prstGeom>
+        </p:spPr>
+      </p:pic>
+      <p:sp>
+        <p:nvSpPr>
+          <p:cNvPr id="6" name="Rounded Rectangle 5"/>
           <p:cNvSpPr/>
           <p:nvPr/>
         </p:nvSpPr>
         <p:spPr>
           <a:xfrm>
-            <a:off x="1371600" y="1645920"/>
-            <a:ext cx="411480" cy="411480"/>
-          </a:xfrm>
-          <a:prstGeom prst="ellipse">
+            <a:off x="4953304" y="502920"/>
+            <a:ext cx="2286000" cy="411480"/>
+          </a:xfrm>
+          <a:prstGeom prst="roundRect">
             <a:avLst/>
           </a:prstGeom>
           <a:solidFill>
-            <a:srgbClr val="50825A"/>
+            <a:srgbClr val="A0C896"/>
           </a:solidFill>
           <a:ln>
             <a:noFill/>
@@ -4812,14 +4880,14 @@
       </p:sp>
       <p:sp>
         <p:nvSpPr>
-          <p:cNvPr id="6" name="TextBox 5"/>
+          <p:cNvPr id="7" name="TextBox 6"/>
           <p:cNvSpPr txBox="1"/>
           <p:nvPr/>
         </p:nvSpPr>
         <p:spPr>
           <a:xfrm>
-            <a:off x="1371600" y="1673352"/>
-            <a:ext cx="411480" cy="384048"/>
+            <a:off x="4953304" y="521208"/>
+            <a:ext cx="2286000" cy="384048"/>
           </a:xfrm>
           <a:prstGeom prst="rect">
             <a:avLst/>
@@ -4834,31 +4902,31 @@
           <a:p>
             <a:pPr algn="ctr">
               <a:spcAft>
-                <a:spcPts val="800"/>
+                <a:spcPts val="1000"/>
               </a:spcAft>
             </a:pPr>
             <a:r>
-              <a:rPr sz="1600" b="1">
-                <a:solidFill>
-                  <a:srgbClr val="FFFFFF"/>
+              <a:rPr sz="1800" b="1">
+                <a:solidFill>
+                  <a:srgbClr val="28462D"/>
                 </a:solidFill>
                 <a:latin typeface="Microsoft YaHei"/>
               </a:rPr>
-              <a:t>1</a:t>
-            </a:r>
-          </a:p>
-        </p:txBody>
-      </p:sp>
-      <p:sp>
-        <p:nvSpPr>
-          <p:cNvPr id="7" name="TextBox 6"/>
+              <a:t>写法笔记</a:t>
+            </a:r>
+          </a:p>
+        </p:txBody>
+      </p:sp>
+      <p:sp>
+        <p:nvSpPr>
+          <p:cNvPr id="8" name="TextBox 7"/>
           <p:cNvSpPr txBox="1"/>
           <p:nvPr/>
         </p:nvSpPr>
         <p:spPr>
           <a:xfrm>
-            <a:off x="2011680" y="1627632"/>
-            <a:ext cx="9144000" cy="594360"/>
+            <a:off x="1371600" y="1051560"/>
+            <a:ext cx="9418320" cy="822960"/>
           </a:xfrm>
           <a:prstGeom prst="rect">
             <a:avLst/>
@@ -4866,53 +4934,44 @@
           <a:noFill/>
         </p:spPr>
         <p:txBody>
-          <a:bodyPr wrap="none">
+          <a:bodyPr wrap="square">
             <a:spAutoFit/>
           </a:bodyPr>
           <a:lstStyle/>
           <a:p>
-            <a:pPr algn="l">
+            <a:pPr algn="ctr">
               <a:spcAft>
-                <a:spcPts val="800"/>
+                <a:spcPts val="1000"/>
               </a:spcAft>
             </a:pPr>
             <a:r>
-              <a:rPr sz="2400" b="1">
-                <a:solidFill>
-                  <a:srgbClr val="50825A"/>
+              <a:rPr sz="3600" b="1">
+                <a:solidFill>
+                  <a:srgbClr val="468250"/>
                 </a:solidFill>
                 <a:latin typeface="Microsoft YaHei"/>
               </a:rPr>
-              <a:t>具体：</a:t>
-            </a:r>
-            <a:r>
-              <a:rPr sz="2400" b="0">
-                <a:solidFill>
-                  <a:srgbClr val="284632"/>
-                </a:solidFill>
-                <a:latin typeface="Microsoft YaHei"/>
-              </a:rPr>
-              <a:t>池水照影见自己面容→想到造同类</a:t>
-            </a:r>
-          </a:p>
-        </p:txBody>
-      </p:sp>
-      <p:sp>
-        <p:nvSpPr>
-          <p:cNvPr id="8" name="Oval 7"/>
+              <a:t>想象特点</a:t>
+            </a:r>
+          </a:p>
+        </p:txBody>
+      </p:sp>
+      <p:sp>
+        <p:nvSpPr>
+          <p:cNvPr id="9" name="Rectangle 8"/>
           <p:cNvSpPr/>
           <p:nvPr/>
         </p:nvSpPr>
         <p:spPr>
           <a:xfrm>
-            <a:off x="1371600" y="2304288"/>
-            <a:ext cx="411480" cy="411480"/>
-          </a:xfrm>
-          <a:prstGeom prst="ellipse">
+            <a:off x="3200400" y="1691640"/>
+            <a:ext cx="5760720" cy="27432"/>
+          </a:xfrm>
+          <a:prstGeom prst="rect">
             <a:avLst/>
           </a:prstGeom>
           <a:solidFill>
-            <a:srgbClr val="50825A"/>
+            <a:srgbClr val="A0C896"/>
           </a:solidFill>
           <a:ln>
             <a:noFill/>
@@ -4942,110 +5001,25 @@
       </p:sp>
       <p:sp>
         <p:nvSpPr>
-          <p:cNvPr id="9" name="TextBox 8"/>
-          <p:cNvSpPr txBox="1"/>
-          <p:nvPr/>
-        </p:nvSpPr>
-        <p:spPr>
-          <a:xfrm>
-            <a:off x="1371600" y="2331720"/>
-            <a:ext cx="411480" cy="384048"/>
-          </a:xfrm>
-          <a:prstGeom prst="rect">
-            <a:avLst/>
-          </a:prstGeom>
-          <a:noFill/>
-        </p:spPr>
-        <p:txBody>
-          <a:bodyPr wrap="none">
-            <a:spAutoFit/>
-          </a:bodyPr>
-          <a:lstStyle/>
-          <a:p>
-            <a:pPr algn="ctr">
-              <a:spcAft>
-                <a:spcPts val="800"/>
-              </a:spcAft>
-            </a:pPr>
-            <a:r>
-              <a:rPr sz="1600" b="1">
-                <a:solidFill>
-                  <a:srgbClr val="FFFFFF"/>
-                </a:solidFill>
-                <a:latin typeface="Microsoft YaHei"/>
-              </a:rPr>
-              <a:t>2</a:t>
-            </a:r>
-          </a:p>
-        </p:txBody>
-      </p:sp>
-      <p:sp>
-        <p:nvSpPr>
-          <p:cNvPr id="10" name="TextBox 9"/>
-          <p:cNvSpPr txBox="1"/>
-          <p:nvPr/>
-        </p:nvSpPr>
-        <p:spPr>
-          <a:xfrm>
-            <a:off x="2011680" y="2286000"/>
-            <a:ext cx="9144000" cy="594360"/>
-          </a:xfrm>
-          <a:prstGeom prst="rect">
-            <a:avLst/>
-          </a:prstGeom>
-          <a:noFill/>
-        </p:spPr>
-        <p:txBody>
-          <a:bodyPr wrap="none">
-            <a:spAutoFit/>
-          </a:bodyPr>
-          <a:lstStyle/>
-          <a:p>
-            <a:pPr algn="l">
-              <a:spcAft>
-                <a:spcPts val="800"/>
-              </a:spcAft>
-            </a:pPr>
-            <a:r>
-              <a:rPr sz="2400" b="1">
-                <a:solidFill>
-                  <a:srgbClr val="50825A"/>
-                </a:solidFill>
-                <a:latin typeface="Microsoft YaHei"/>
-              </a:rPr>
-              <a:t>生动：</a:t>
-            </a:r>
-            <a:r>
-              <a:rPr sz="2400" b="0">
-                <a:solidFill>
-                  <a:srgbClr val="284632"/>
-                </a:solidFill>
-                <a:latin typeface="Microsoft YaHei"/>
-              </a:rPr>
-              <a:t>藤条一挥，满天泥浆洒落</a:t>
-            </a:r>
-          </a:p>
-        </p:txBody>
-      </p:sp>
-      <p:sp>
-        <p:nvSpPr>
-          <p:cNvPr id="11" name="Oval 10"/>
+          <p:cNvPr id="10" name="Rounded Rectangle 9"/>
           <p:cNvSpPr/>
           <p:nvPr/>
         </p:nvSpPr>
         <p:spPr>
           <a:xfrm>
-            <a:off x="1371600" y="2962656"/>
-            <a:ext cx="411480" cy="411480"/>
-          </a:xfrm>
-          <a:prstGeom prst="ellipse">
+            <a:off x="1249984" y="1810512"/>
+            <a:ext cx="9692640" cy="3319272"/>
+          </a:xfrm>
+          <a:prstGeom prst="roundRect">
             <a:avLst/>
           </a:prstGeom>
           <a:solidFill>
-            <a:srgbClr val="50825A"/>
+            <a:srgbClr val="F8FCF5"/>
           </a:solidFill>
-          <a:ln>
-            <a:noFill/>
+          <a:ln w="19050">
+            <a:solidFill>
+              <a:srgbClr val="A0C896"/>
+            </a:solidFill>
           </a:ln>
         </p:spPr>
         <p:style>
@@ -5072,14 +5046,14 @@
       </p:sp>
       <p:sp>
         <p:nvSpPr>
-          <p:cNvPr id="12" name="TextBox 11"/>
+          <p:cNvPr id="11" name="TextBox 10"/>
           <p:cNvSpPr txBox="1"/>
           <p:nvPr/>
         </p:nvSpPr>
         <p:spPr>
           <a:xfrm>
-            <a:off x="1371600" y="2990088"/>
-            <a:ext cx="411480" cy="384048"/>
+            <a:off x="1463040" y="1920240"/>
+            <a:ext cx="2103120" cy="502920"/>
           </a:xfrm>
           <a:prstGeom prst="rect">
             <a:avLst/>
@@ -5092,33 +5066,33 @@
           </a:bodyPr>
           <a:lstStyle/>
           <a:p>
-            <a:pPr algn="ctr">
+            <a:pPr algn="r">
               <a:spcAft>
-                <a:spcPts val="800"/>
+                <a:spcPts val="1000"/>
               </a:spcAft>
             </a:pPr>
             <a:r>
-              <a:rPr sz="1600" b="1">
-                <a:solidFill>
-                  <a:srgbClr val="FFFFFF"/>
+              <a:rPr sz="2200" b="1">
+                <a:solidFill>
+                  <a:srgbClr val="468250"/>
                 </a:solidFill>
                 <a:latin typeface="Microsoft YaHei"/>
               </a:rPr>
-              <a:t>3</a:t>
-            </a:r>
-          </a:p>
-        </p:txBody>
-      </p:sp>
-      <p:sp>
-        <p:nvSpPr>
-          <p:cNvPr id="13" name="TextBox 12"/>
+              <a:t>具体</a:t>
+            </a:r>
+          </a:p>
+        </p:txBody>
+      </p:sp>
+      <p:sp>
+        <p:nvSpPr>
+          <p:cNvPr id="12" name="TextBox 11"/>
           <p:cNvSpPr txBox="1"/>
           <p:nvPr/>
         </p:nvSpPr>
         <p:spPr>
           <a:xfrm>
-            <a:off x="2011680" y="2944368"/>
-            <a:ext cx="9144000" cy="594360"/>
+            <a:off x="3749039" y="1920240"/>
+            <a:ext cx="7132320" cy="685800"/>
           </a:xfrm>
           <a:prstGeom prst="rect">
             <a:avLst/>
@@ -5133,83 +5107,31 @@
           <a:p>
             <a:pPr algn="l">
               <a:spcAft>
-                <a:spcPts val="800"/>
+                <a:spcPts val="1000"/>
               </a:spcAft>
             </a:pPr>
             <a:r>
-              <a:rPr sz="2400" b="1">
-                <a:solidFill>
-                  <a:srgbClr val="50825A"/>
+              <a:rPr sz="2200" b="0">
+                <a:solidFill>
+                  <a:srgbClr val="28462D"/>
                 </a:solidFill>
                 <a:latin typeface="Microsoft YaHei"/>
               </a:rPr>
-              <a:t>温暖：</a:t>
-            </a:r>
-            <a:r>
-              <a:rPr sz="2400" b="0">
-                <a:solidFill>
-                  <a:srgbClr val="284632"/>
-                </a:solidFill>
-                <a:latin typeface="Microsoft YaHei"/>
-              </a:rPr>
-              <a:t>造人后的疲倦、喜悦，神有人的情感</a:t>
-            </a:r>
-          </a:p>
-        </p:txBody>
-      </p:sp>
-      <p:sp>
-        <p:nvSpPr>
-          <p:cNvPr id="14" name="Oval 13"/>
-          <p:cNvSpPr/>
-          <p:nvPr/>
-        </p:nvSpPr>
-        <p:spPr>
-          <a:xfrm>
-            <a:off x="1371600" y="3621024"/>
-            <a:ext cx="411480" cy="411480"/>
-          </a:xfrm>
-          <a:prstGeom prst="ellipse">
-            <a:avLst/>
-          </a:prstGeom>
-          <a:solidFill>
-            <a:srgbClr val="50825A"/>
-          </a:solidFill>
-          <a:ln>
-            <a:noFill/>
-          </a:ln>
-        </p:spPr>
-        <p:style>
-          <a:lnRef idx="1">
-            <a:schemeClr val="accent1"/>
-          </a:lnRef>
-          <a:fillRef idx="3">
-            <a:schemeClr val="accent1"/>
-          </a:fillRef>
-          <a:effectRef idx="2">
-            <a:schemeClr val="accent1"/>
-          </a:effectRef>
-          <a:fontRef idx="minor">
-            <a:schemeClr val="lt1"/>
-          </a:fontRef>
-        </p:style>
-        <p:txBody>
-          <a:bodyPr rtlCol="0" anchor="ctr"/>
-          <a:lstStyle/>
-          <a:p>
-            <a:pPr algn="ctr"/>
-          </a:p>
-        </p:txBody>
-      </p:sp>
-      <p:sp>
-        <p:nvSpPr>
-          <p:cNvPr id="15" name="TextBox 14"/>
+              <a:t>池水照影见自己面容→想到造同类</a:t>
+            </a:r>
+          </a:p>
+        </p:txBody>
+      </p:sp>
+      <p:sp>
+        <p:nvSpPr>
+          <p:cNvPr id="13" name="TextBox 12"/>
           <p:cNvSpPr txBox="1"/>
           <p:nvPr/>
         </p:nvSpPr>
         <p:spPr>
           <a:xfrm>
-            <a:off x="1371600" y="3648456"/>
-            <a:ext cx="411480" cy="384048"/>
+            <a:off x="1463040" y="2670048"/>
+            <a:ext cx="2103120" cy="502920"/>
           </a:xfrm>
           <a:prstGeom prst="rect">
             <a:avLst/>
@@ -5222,33 +5144,33 @@
           </a:bodyPr>
           <a:lstStyle/>
           <a:p>
-            <a:pPr algn="ctr">
+            <a:pPr algn="r">
               <a:spcAft>
-                <a:spcPts val="800"/>
+                <a:spcPts val="1000"/>
               </a:spcAft>
             </a:pPr>
             <a:r>
-              <a:rPr sz="1600" b="1">
-                <a:solidFill>
-                  <a:srgbClr val="FFFFFF"/>
+              <a:rPr sz="2200" b="1">
+                <a:solidFill>
+                  <a:srgbClr val="468250"/>
                 </a:solidFill>
                 <a:latin typeface="Microsoft YaHei"/>
               </a:rPr>
-              <a:t>4</a:t>
-            </a:r>
-          </a:p>
-        </p:txBody>
-      </p:sp>
-      <p:sp>
-        <p:nvSpPr>
-          <p:cNvPr id="16" name="TextBox 15"/>
+              <a:t>生动</a:t>
+            </a:r>
+          </a:p>
+        </p:txBody>
+      </p:sp>
+      <p:sp>
+        <p:nvSpPr>
+          <p:cNvPr id="14" name="TextBox 13"/>
           <p:cNvSpPr txBox="1"/>
           <p:nvPr/>
         </p:nvSpPr>
         <p:spPr>
           <a:xfrm>
-            <a:off x="2011680" y="3602736"/>
-            <a:ext cx="9144000" cy="594360"/>
+            <a:off x="3749039" y="2670048"/>
+            <a:ext cx="7132320" cy="685800"/>
           </a:xfrm>
           <a:prstGeom prst="rect">
             <a:avLst/>
@@ -5263,26 +5185,173 @@
           <a:p>
             <a:pPr algn="l">
               <a:spcAft>
-                <a:spcPts val="800"/>
+                <a:spcPts val="1000"/>
               </a:spcAft>
             </a:pPr>
             <a:r>
-              <a:rPr sz="2400" b="1">
-                <a:solidFill>
-                  <a:srgbClr val="50825A"/>
+              <a:rPr sz="2200" b="0">
+                <a:solidFill>
+                  <a:srgbClr val="28462D"/>
                 </a:solidFill>
                 <a:latin typeface="Microsoft YaHei"/>
               </a:rPr>
-              <a:t>规律：</a:t>
-            </a:r>
-            <a:r>
-              <a:rPr sz="2400" b="0">
-                <a:solidFill>
-                  <a:srgbClr val="284632"/>
+              <a:t>「藤条一挥，满天泥浆洒落」画面感强</a:t>
+            </a:r>
+          </a:p>
+        </p:txBody>
+      </p:sp>
+      <p:sp>
+        <p:nvSpPr>
+          <p:cNvPr id="15" name="TextBox 14"/>
+          <p:cNvSpPr txBox="1"/>
+          <p:nvPr/>
+        </p:nvSpPr>
+        <p:spPr>
+          <a:xfrm>
+            <a:off x="1463040" y="3419856"/>
+            <a:ext cx="2103120" cy="502920"/>
+          </a:xfrm>
+          <a:prstGeom prst="rect">
+            <a:avLst/>
+          </a:prstGeom>
+          <a:noFill/>
+        </p:spPr>
+        <p:txBody>
+          <a:bodyPr wrap="none">
+            <a:spAutoFit/>
+          </a:bodyPr>
+          <a:lstStyle/>
+          <a:p>
+            <a:pPr algn="r">
+              <a:spcAft>
+                <a:spcPts val="1000"/>
+              </a:spcAft>
+            </a:pPr>
+            <a:r>
+              <a:rPr sz="2200" b="1">
+                <a:solidFill>
+                  <a:srgbClr val="468250"/>
                 </a:solidFill>
                 <a:latin typeface="Microsoft YaHei"/>
               </a:rPr>
-              <a:t>想象基于生活经验，又超越现实</a:t>
+              <a:t>温暖</a:t>
+            </a:r>
+          </a:p>
+        </p:txBody>
+      </p:sp>
+      <p:sp>
+        <p:nvSpPr>
+          <p:cNvPr id="16" name="TextBox 15"/>
+          <p:cNvSpPr txBox="1"/>
+          <p:nvPr/>
+        </p:nvSpPr>
+        <p:spPr>
+          <a:xfrm>
+            <a:off x="3749039" y="3419856"/>
+            <a:ext cx="7132320" cy="685800"/>
+          </a:xfrm>
+          <a:prstGeom prst="rect">
+            <a:avLst/>
+          </a:prstGeom>
+          <a:noFill/>
+        </p:spPr>
+        <p:txBody>
+          <a:bodyPr wrap="none">
+            <a:spAutoFit/>
+          </a:bodyPr>
+          <a:lstStyle/>
+          <a:p>
+            <a:pPr algn="l">
+              <a:spcAft>
+                <a:spcPts val="1000"/>
+              </a:spcAft>
+            </a:pPr>
+            <a:r>
+              <a:rPr sz="2200" b="0">
+                <a:solidFill>
+                  <a:srgbClr val="28462D"/>
+                </a:solidFill>
+                <a:latin typeface="Microsoft YaHei"/>
+              </a:rPr>
+              <a:t>造人后的疲倦、喜悦，赋予神以人的情感</a:t>
+            </a:r>
+          </a:p>
+        </p:txBody>
+      </p:sp>
+      <p:sp>
+        <p:nvSpPr>
+          <p:cNvPr id="17" name="TextBox 16"/>
+          <p:cNvSpPr txBox="1"/>
+          <p:nvPr/>
+        </p:nvSpPr>
+        <p:spPr>
+          <a:xfrm>
+            <a:off x="1463040" y="4169664"/>
+            <a:ext cx="2103120" cy="502920"/>
+          </a:xfrm>
+          <a:prstGeom prst="rect">
+            <a:avLst/>
+          </a:prstGeom>
+          <a:noFill/>
+        </p:spPr>
+        <p:txBody>
+          <a:bodyPr wrap="none">
+            <a:spAutoFit/>
+          </a:bodyPr>
+          <a:lstStyle/>
+          <a:p>
+            <a:pPr algn="r">
+              <a:spcAft>
+                <a:spcPts val="1000"/>
+              </a:spcAft>
+            </a:pPr>
+            <a:r>
+              <a:rPr sz="2200" b="1">
+                <a:solidFill>
+                  <a:srgbClr val="468250"/>
+                </a:solidFill>
+                <a:latin typeface="Microsoft YaHei"/>
+              </a:rPr>
+              <a:t>规律</a:t>
+            </a:r>
+          </a:p>
+        </p:txBody>
+      </p:sp>
+      <p:sp>
+        <p:nvSpPr>
+          <p:cNvPr id="18" name="TextBox 17"/>
+          <p:cNvSpPr txBox="1"/>
+          <p:nvPr/>
+        </p:nvSpPr>
+        <p:spPr>
+          <a:xfrm>
+            <a:off x="3749039" y="4169664"/>
+            <a:ext cx="7132320" cy="685800"/>
+          </a:xfrm>
+          <a:prstGeom prst="rect">
+            <a:avLst/>
+          </a:prstGeom>
+          <a:noFill/>
+        </p:spPr>
+        <p:txBody>
+          <a:bodyPr wrap="none">
+            <a:spAutoFit/>
+          </a:bodyPr>
+          <a:lstStyle/>
+          <a:p>
+            <a:pPr algn="l">
+              <a:spcAft>
+                <a:spcPts val="1000"/>
+              </a:spcAft>
+            </a:pPr>
+            <a:r>
+              <a:rPr sz="2200" b="0">
+                <a:solidFill>
+                  <a:srgbClr val="28462D"/>
+                </a:solidFill>
+                <a:latin typeface="Microsoft YaHei"/>
+              </a:rPr>
+              <a:t>想象基于生活经验（和泥、洒水），又超越现实</a:t>
             </a:r>
           </a:p>
         </p:txBody>
@@ -5307,7 +5376,7 @@
       <p:grpSpPr/>
       <p:pic>
         <p:nvPicPr>
-          <p:cNvPr id="2" name="Picture 1" descr="bg_gushi.png"/>
+          <p:cNvPr id="2" name="Picture 1" descr="bg_nuwa.png"/>
           <p:cNvPicPr>
             <a:picLocks noChangeAspect="1"/>
           </p:cNvPicPr>
@@ -5346,7 +5415,7 @@
           <a:noFill/>
           <a:ln w="31750">
             <a:solidFill>
-              <a:srgbClr val="50825A"/>
+              <a:srgbClr val="5A8C5A"/>
             </a:solidFill>
           </a:ln>
         </p:spPr>
@@ -5372,295 +5441,70 @@
           </a:p>
         </p:txBody>
       </p:sp>
-      <p:sp>
-        <p:nvSpPr>
-          <p:cNvPr id="4" name="TextBox 3"/>
-          <p:cNvSpPr txBox="1"/>
-          <p:nvPr/>
-        </p:nvSpPr>
-        <p:spPr>
-          <a:xfrm>
-            <a:off x="1828800" y="548640"/>
-            <a:ext cx="8503920" cy="640080"/>
-          </a:xfrm>
-          <a:prstGeom prst="rect">
-            <a:avLst/>
-          </a:prstGeom>
-          <a:noFill/>
-        </p:spPr>
-        <p:txBody>
-          <a:bodyPr wrap="none">
-            <a:spAutoFit/>
-          </a:bodyPr>
-          <a:lstStyle/>
-          <a:p>
-            <a:pPr algn="ctr">
-              <a:spcAft>
-                <a:spcPts val="800"/>
-              </a:spcAft>
-            </a:pPr>
-            <a:r>
-              <a:rPr sz="3600" b="1">
-                <a:solidFill>
-                  <a:srgbClr val="50825A"/>
-                </a:solidFill>
-                <a:latin typeface="Microsoft YaHei"/>
-              </a:rPr>
-              <a:t>比较阅读：古籍与课文</a:t>
-            </a:r>
-          </a:p>
-        </p:txBody>
-      </p:sp>
-      <p:sp>
-        <p:nvSpPr>
-          <p:cNvPr id="5" name="TextBox 4"/>
-          <p:cNvSpPr txBox="1"/>
-          <p:nvPr/>
-        </p:nvSpPr>
-        <p:spPr>
-          <a:xfrm>
-            <a:off x="1097280" y="1463040"/>
-            <a:ext cx="2926080" cy="411480"/>
-          </a:xfrm>
-          <a:prstGeom prst="rect">
-            <a:avLst/>
-          </a:prstGeom>
-          <a:noFill/>
-        </p:spPr>
-        <p:txBody>
-          <a:bodyPr wrap="none">
-            <a:spAutoFit/>
-          </a:bodyPr>
-          <a:lstStyle/>
-          <a:p>
-            <a:pPr algn="ctr">
-              <a:spcAft>
-                <a:spcPts val="800"/>
-              </a:spcAft>
-            </a:pPr>
-            <a:r>
-              <a:rPr sz="2200" b="1">
-                <a:solidFill>
-                  <a:srgbClr val="50825A"/>
-                </a:solidFill>
-                <a:latin typeface="Microsoft YaHei"/>
-              </a:rPr>
-              <a:t>项目</a:t>
-            </a:r>
-          </a:p>
-        </p:txBody>
-      </p:sp>
-      <p:sp>
-        <p:nvSpPr>
-          <p:cNvPr id="6" name="TextBox 5"/>
-          <p:cNvSpPr txBox="1"/>
-          <p:nvPr/>
-        </p:nvSpPr>
-        <p:spPr>
-          <a:xfrm>
-            <a:off x="4114800" y="1463040"/>
-            <a:ext cx="2926080" cy="411480"/>
-          </a:xfrm>
-          <a:prstGeom prst="rect">
-            <a:avLst/>
-          </a:prstGeom>
-          <a:noFill/>
-        </p:spPr>
-        <p:txBody>
-          <a:bodyPr wrap="none">
-            <a:spAutoFit/>
-          </a:bodyPr>
-          <a:lstStyle/>
-          <a:p>
-            <a:pPr algn="ctr">
-              <a:spcAft>
-                <a:spcPts val="800"/>
-              </a:spcAft>
-            </a:pPr>
-            <a:r>
-              <a:rPr sz="2200" b="1">
-                <a:solidFill>
-                  <a:srgbClr val="50825A"/>
-                </a:solidFill>
-                <a:latin typeface="Microsoft YaHei"/>
-              </a:rPr>
-              <a:t>《风俗通》</a:t>
-            </a:r>
-          </a:p>
-        </p:txBody>
-      </p:sp>
-      <p:sp>
-        <p:nvSpPr>
-          <p:cNvPr id="7" name="TextBox 6"/>
-          <p:cNvSpPr txBox="1"/>
-          <p:nvPr/>
-        </p:nvSpPr>
-        <p:spPr>
-          <a:xfrm>
-            <a:off x="7772400" y="1463040"/>
-            <a:ext cx="2926080" cy="411480"/>
-          </a:xfrm>
-          <a:prstGeom prst="rect">
-            <a:avLst/>
-          </a:prstGeom>
-          <a:noFill/>
-        </p:spPr>
-        <p:txBody>
-          <a:bodyPr wrap="none">
-            <a:spAutoFit/>
-          </a:bodyPr>
-          <a:lstStyle/>
-          <a:p>
-            <a:pPr algn="ctr">
-              <a:spcAft>
-                <a:spcPts val="800"/>
-              </a:spcAft>
-            </a:pPr>
-            <a:r>
-              <a:rPr sz="2200" b="1">
-                <a:solidFill>
-                  <a:srgbClr val="50825A"/>
-                </a:solidFill>
-                <a:latin typeface="Microsoft YaHei"/>
-              </a:rPr>
-              <a:t>课文</a:t>
-            </a:r>
-          </a:p>
-        </p:txBody>
-      </p:sp>
-      <p:sp>
-        <p:nvSpPr>
-          <p:cNvPr id="8" name="TextBox 7"/>
-          <p:cNvSpPr txBox="1"/>
-          <p:nvPr/>
-        </p:nvSpPr>
-        <p:spPr>
-          <a:xfrm>
-            <a:off x="1097280" y="2011680"/>
-            <a:ext cx="2926080" cy="640080"/>
-          </a:xfrm>
-          <a:prstGeom prst="rect">
-            <a:avLst/>
-          </a:prstGeom>
-          <a:noFill/>
-        </p:spPr>
-        <p:txBody>
-          <a:bodyPr wrap="none">
-            <a:spAutoFit/>
-          </a:bodyPr>
-          <a:lstStyle/>
-          <a:p>
-            <a:pPr algn="l">
-              <a:spcAft>
-                <a:spcPts val="800"/>
-              </a:spcAft>
-            </a:pPr>
-            <a:r>
-              <a:rPr sz="2000" b="1">
-                <a:solidFill>
-                  <a:srgbClr val="284632"/>
-                </a:solidFill>
-                <a:latin typeface="Microsoft YaHei"/>
-              </a:rPr>
-              <a:t>记载风格</a:t>
-            </a:r>
-          </a:p>
-        </p:txBody>
-      </p:sp>
-      <p:sp>
-        <p:nvSpPr>
-          <p:cNvPr id="9" name="TextBox 8"/>
-          <p:cNvSpPr txBox="1"/>
-          <p:nvPr/>
-        </p:nvSpPr>
-        <p:spPr>
-          <a:xfrm>
-            <a:off x="4114800" y="2011680"/>
-            <a:ext cx="2926080" cy="640080"/>
-          </a:xfrm>
-          <a:prstGeom prst="rect">
-            <a:avLst/>
-          </a:prstGeom>
-          <a:noFill/>
-        </p:spPr>
-        <p:txBody>
-          <a:bodyPr wrap="none">
-            <a:spAutoFit/>
-          </a:bodyPr>
-          <a:lstStyle/>
-          <a:p>
-            <a:pPr algn="ctr">
-              <a:spcAft>
-                <a:spcPts val="800"/>
-              </a:spcAft>
-            </a:pPr>
-            <a:r>
-              <a:rPr sz="2000" b="0">
-                <a:solidFill>
-                  <a:srgbClr val="284632"/>
-                </a:solidFill>
-                <a:latin typeface="Microsoft YaHei"/>
-              </a:rPr>
-              <a:t>简洁，重在说明方法</a:t>
-            </a:r>
-          </a:p>
-        </p:txBody>
-      </p:sp>
-      <p:sp>
-        <p:nvSpPr>
-          <p:cNvPr id="10" name="TextBox 9"/>
-          <p:cNvSpPr txBox="1"/>
-          <p:nvPr/>
-        </p:nvSpPr>
-        <p:spPr>
-          <a:xfrm>
-            <a:off x="7772400" y="2011680"/>
-            <a:ext cx="2926080" cy="640080"/>
-          </a:xfrm>
-          <a:prstGeom prst="rect">
-            <a:avLst/>
-          </a:prstGeom>
-          <a:noFill/>
-        </p:spPr>
-        <p:txBody>
-          <a:bodyPr wrap="none">
-            <a:spAutoFit/>
-          </a:bodyPr>
-          <a:lstStyle/>
-          <a:p>
-            <a:pPr algn="ctr">
-              <a:spcAft>
-                <a:spcPts val="800"/>
-              </a:spcAft>
-            </a:pPr>
-            <a:r>
-              <a:rPr sz="2000" b="0">
-                <a:solidFill>
-                  <a:srgbClr val="284632"/>
-                </a:solidFill>
-                <a:latin typeface="Microsoft YaHei"/>
-              </a:rPr>
-              <a:t>增加心理、细节、情感</a:t>
-            </a:r>
-          </a:p>
-        </p:txBody>
-      </p:sp>
-      <p:sp>
-        <p:nvSpPr>
-          <p:cNvPr id="11" name="Rectangle 10"/>
+      <p:pic>
+        <p:nvPicPr>
+          <p:cNvPr id="4" name="Picture 3" descr="corner_nuwa_tl.png"/>
+          <p:cNvPicPr>
+            <a:picLocks noChangeAspect="1"/>
+          </p:cNvPicPr>
+          <p:nvPr/>
+        </p:nvPicPr>
+        <p:blipFill>
+          <a:blip r:embed="rId3"/>
+          <a:stretch>
+            <a:fillRect/>
+          </a:stretch>
+        </p:blipFill>
+        <p:spPr>
+          <a:xfrm>
+            <a:off x="-45720" y="-45720"/>
+            <a:ext cx="2011680" cy="2011680"/>
+          </a:xfrm>
+          <a:prstGeom prst="rect">
+            <a:avLst/>
+          </a:prstGeom>
+        </p:spPr>
+      </p:pic>
+      <p:pic>
+        <p:nvPicPr>
+          <p:cNvPr id="5" name="Picture 4" descr="corner_nuwa_tr.png"/>
+          <p:cNvPicPr>
+            <a:picLocks noChangeAspect="1"/>
+          </p:cNvPicPr>
+          <p:nvPr/>
+        </p:nvPicPr>
+        <p:blipFill>
+          <a:blip r:embed="rId4"/>
+          <a:stretch>
+            <a:fillRect/>
+          </a:stretch>
+        </p:blipFill>
+        <p:spPr>
+          <a:xfrm>
+            <a:off x="9875520" y="-45720"/>
+            <a:ext cx="2011680" cy="2011680"/>
+          </a:xfrm>
+          <a:prstGeom prst="rect">
+            <a:avLst/>
+          </a:prstGeom>
+        </p:spPr>
+      </p:pic>
+      <p:sp>
+        <p:nvSpPr>
+          <p:cNvPr id="6" name="Rounded Rectangle 5"/>
           <p:cNvSpPr/>
           <p:nvPr/>
         </p:nvSpPr>
         <p:spPr>
           <a:xfrm>
-            <a:off x="914400" y="2697480"/>
-            <a:ext cx="10332720" cy="13716"/>
-          </a:xfrm>
-          <a:prstGeom prst="rect">
+            <a:off x="4953304" y="502920"/>
+            <a:ext cx="2286000" cy="411480"/>
+          </a:xfrm>
+          <a:prstGeom prst="roundRect">
             <a:avLst/>
           </a:prstGeom>
           <a:solidFill>
-            <a:srgbClr val="B4D2B4"/>
+            <a:srgbClr val="A0C896"/>
           </a:solidFill>
           <a:ln>
             <a:noFill/>
@@ -5690,14 +5534,14 @@
       </p:sp>
       <p:sp>
         <p:nvSpPr>
-          <p:cNvPr id="12" name="TextBox 11"/>
+          <p:cNvPr id="7" name="TextBox 6"/>
           <p:cNvSpPr txBox="1"/>
           <p:nvPr/>
         </p:nvSpPr>
         <p:spPr>
           <a:xfrm>
-            <a:off x="1097280" y="2788920"/>
-            <a:ext cx="2926080" cy="640080"/>
+            <a:off x="4953304" y="521208"/>
+            <a:ext cx="2286000" cy="384048"/>
           </a:xfrm>
           <a:prstGeom prst="rect">
             <a:avLst/>
@@ -5710,33 +5554,33 @@
           </a:bodyPr>
           <a:lstStyle/>
           <a:p>
-            <a:pPr algn="l">
+            <a:pPr algn="ctr">
               <a:spcAft>
-                <a:spcPts val="800"/>
+                <a:spcPts val="1000"/>
               </a:spcAft>
             </a:pPr>
             <a:r>
-              <a:rPr sz="2000" b="1">
-                <a:solidFill>
-                  <a:srgbClr val="284632"/>
+              <a:rPr sz="1800" b="1">
+                <a:solidFill>
+                  <a:srgbClr val="28462D"/>
                 </a:solidFill>
                 <a:latin typeface="Microsoft YaHei"/>
               </a:rPr>
-              <a:t>造人动机</a:t>
-            </a:r>
-          </a:p>
-        </p:txBody>
-      </p:sp>
-      <p:sp>
-        <p:nvSpPr>
-          <p:cNvPr id="13" name="TextBox 12"/>
+              <a:t>主题笔记</a:t>
+            </a:r>
+          </a:p>
+        </p:txBody>
+      </p:sp>
+      <p:sp>
+        <p:nvSpPr>
+          <p:cNvPr id="8" name="TextBox 7"/>
           <p:cNvSpPr txBox="1"/>
           <p:nvPr/>
         </p:nvSpPr>
         <p:spPr>
           <a:xfrm>
-            <a:off x="4114800" y="2788920"/>
-            <a:ext cx="2926080" cy="640080"/>
+            <a:off x="1371600" y="1051560"/>
+            <a:ext cx="9418320" cy="822960"/>
           </a:xfrm>
           <a:prstGeom prst="rect">
             <a:avLst/>
@@ -5744,83 +5588,44 @@
           <a:noFill/>
         </p:spPr>
         <p:txBody>
-          <a:bodyPr wrap="none">
+          <a:bodyPr wrap="square">
             <a:spAutoFit/>
           </a:bodyPr>
           <a:lstStyle/>
           <a:p>
             <a:pPr algn="ctr">
               <a:spcAft>
-                <a:spcPts val="800"/>
+                <a:spcPts val="1000"/>
               </a:spcAft>
             </a:pPr>
             <a:r>
-              <a:rPr sz="2000" b="0">
-                <a:solidFill>
-                  <a:srgbClr val="284632"/>
+              <a:rPr sz="3600" b="1">
+                <a:solidFill>
+                  <a:srgbClr val="468250"/>
                 </a:solidFill>
                 <a:latin typeface="Microsoft YaHei"/>
               </a:rPr>
-              <a:t>未详写</a:t>
-            </a:r>
-          </a:p>
-        </p:txBody>
-      </p:sp>
-      <p:sp>
-        <p:nvSpPr>
-          <p:cNvPr id="14" name="TextBox 13"/>
-          <p:cNvSpPr txBox="1"/>
-          <p:nvPr/>
-        </p:nvSpPr>
-        <p:spPr>
-          <a:xfrm>
-            <a:off x="7772400" y="2788920"/>
-            <a:ext cx="2926080" cy="640080"/>
-          </a:xfrm>
-          <a:prstGeom prst="rect">
-            <a:avLst/>
-          </a:prstGeom>
-          <a:noFill/>
-        </p:spPr>
-        <p:txBody>
-          <a:bodyPr wrap="none">
-            <a:spAutoFit/>
-          </a:bodyPr>
-          <a:lstStyle/>
-          <a:p>
-            <a:pPr algn="ctr">
-              <a:spcAft>
-                <a:spcPts val="800"/>
-              </a:spcAft>
-            </a:pPr>
-            <a:r>
-              <a:rPr sz="2000" b="0">
-                <a:solidFill>
-                  <a:srgbClr val="284632"/>
-                </a:solidFill>
-                <a:latin typeface="Microsoft YaHei"/>
-              </a:rPr>
-              <a:t>突出孤独寂寞</a:t>
-            </a:r>
-          </a:p>
-        </p:txBody>
-      </p:sp>
-      <p:sp>
-        <p:nvSpPr>
-          <p:cNvPr id="15" name="Rectangle 14"/>
+              <a:t>比较阅读</a:t>
+            </a:r>
+          </a:p>
+        </p:txBody>
+      </p:sp>
+      <p:sp>
+        <p:nvSpPr>
+          <p:cNvPr id="9" name="Rectangle 8"/>
           <p:cNvSpPr/>
           <p:nvPr/>
         </p:nvSpPr>
         <p:spPr>
           <a:xfrm>
-            <a:off x="914400" y="3474720"/>
-            <a:ext cx="10332720" cy="13716"/>
+            <a:off x="3200400" y="1691640"/>
+            <a:ext cx="5760720" cy="27432"/>
           </a:xfrm>
           <a:prstGeom prst="rect">
             <a:avLst/>
           </a:prstGeom>
           <a:solidFill>
-            <a:srgbClr val="B4D2B4"/>
+            <a:srgbClr val="A0C896"/>
           </a:solidFill>
           <a:ln>
             <a:noFill/>
@@ -5850,140 +5655,25 @@
       </p:sp>
       <p:sp>
         <p:nvSpPr>
-          <p:cNvPr id="16" name="TextBox 15"/>
-          <p:cNvSpPr txBox="1"/>
-          <p:nvPr/>
-        </p:nvSpPr>
-        <p:spPr>
-          <a:xfrm>
-            <a:off x="1097280" y="3566160"/>
-            <a:ext cx="2926080" cy="640080"/>
-          </a:xfrm>
-          <a:prstGeom prst="rect">
-            <a:avLst/>
-          </a:prstGeom>
-          <a:noFill/>
-        </p:spPr>
-        <p:txBody>
-          <a:bodyPr wrap="none">
-            <a:spAutoFit/>
-          </a:bodyPr>
-          <a:lstStyle/>
-          <a:p>
-            <a:pPr algn="l">
-              <a:spcAft>
-                <a:spcPts val="800"/>
-              </a:spcAft>
-            </a:pPr>
-            <a:r>
-              <a:rPr sz="2000" b="1">
-                <a:solidFill>
-                  <a:srgbClr val="284632"/>
-                </a:solidFill>
-                <a:latin typeface="Microsoft YaHei"/>
-              </a:rPr>
-              <a:t>改写意图</a:t>
-            </a:r>
-          </a:p>
-        </p:txBody>
-      </p:sp>
-      <p:sp>
-        <p:nvSpPr>
-          <p:cNvPr id="17" name="TextBox 16"/>
-          <p:cNvSpPr txBox="1"/>
-          <p:nvPr/>
-        </p:nvSpPr>
-        <p:spPr>
-          <a:xfrm>
-            <a:off x="4114800" y="3566160"/>
-            <a:ext cx="2926080" cy="640080"/>
-          </a:xfrm>
-          <a:prstGeom prst="rect">
-            <a:avLst/>
-          </a:prstGeom>
-          <a:noFill/>
-        </p:spPr>
-        <p:txBody>
-          <a:bodyPr wrap="none">
-            <a:spAutoFit/>
-          </a:bodyPr>
-          <a:lstStyle/>
-          <a:p>
-            <a:pPr algn="ctr">
-              <a:spcAft>
-                <a:spcPts val="800"/>
-              </a:spcAft>
-            </a:pPr>
-            <a:r>
-              <a:rPr sz="2000" b="0">
-                <a:solidFill>
-                  <a:srgbClr val="284632"/>
-                </a:solidFill>
-                <a:latin typeface="Microsoft YaHei"/>
-              </a:rPr>
-              <a:t>——</a:t>
-            </a:r>
-          </a:p>
-        </p:txBody>
-      </p:sp>
-      <p:sp>
-        <p:nvSpPr>
-          <p:cNvPr id="18" name="TextBox 17"/>
-          <p:cNvSpPr txBox="1"/>
-          <p:nvPr/>
-        </p:nvSpPr>
-        <p:spPr>
-          <a:xfrm>
-            <a:off x="7772400" y="3566160"/>
-            <a:ext cx="2926080" cy="640080"/>
-          </a:xfrm>
-          <a:prstGeom prst="rect">
-            <a:avLst/>
-          </a:prstGeom>
-          <a:noFill/>
-        </p:spPr>
-        <p:txBody>
-          <a:bodyPr wrap="none">
-            <a:spAutoFit/>
-          </a:bodyPr>
-          <a:lstStyle/>
-          <a:p>
-            <a:pPr algn="ctr">
-              <a:spcAft>
-                <a:spcPts val="800"/>
-              </a:spcAft>
-            </a:pPr>
-            <a:r>
-              <a:rPr sz="2000" b="0">
-                <a:solidFill>
-                  <a:srgbClr val="284632"/>
-                </a:solidFill>
-                <a:latin typeface="Microsoft YaHei"/>
-              </a:rPr>
-              <a:t>表达对生命与创造的礼赞</a:t>
-            </a:r>
-          </a:p>
-        </p:txBody>
-      </p:sp>
-      <p:sp>
-        <p:nvSpPr>
-          <p:cNvPr id="19" name="Rectangle 18"/>
+          <p:cNvPr id="10" name="Rounded Rectangle 9"/>
           <p:cNvSpPr/>
           <p:nvPr/>
         </p:nvSpPr>
         <p:spPr>
           <a:xfrm>
-            <a:off x="914400" y="4251960"/>
-            <a:ext cx="10332720" cy="13716"/>
-          </a:xfrm>
-          <a:prstGeom prst="rect">
+            <a:off x="1249984" y="1810512"/>
+            <a:ext cx="9692640" cy="3319272"/>
+          </a:xfrm>
+          <a:prstGeom prst="roundRect">
             <a:avLst/>
           </a:prstGeom>
           <a:solidFill>
-            <a:srgbClr val="B4D2B4"/>
+            <a:srgbClr val="F8FCF5"/>
           </a:solidFill>
-          <a:ln>
-            <a:noFill/>
+          <a:ln w="19050">
+            <a:solidFill>
+              <a:srgbClr val="A0C896"/>
+            </a:solidFill>
           </a:ln>
         </p:spPr>
         <p:style>
@@ -6005,6 +5695,318 @@
           <a:lstStyle/>
           <a:p>
             <a:pPr algn="ctr"/>
+          </a:p>
+        </p:txBody>
+      </p:sp>
+      <p:sp>
+        <p:nvSpPr>
+          <p:cNvPr id="11" name="TextBox 10"/>
+          <p:cNvSpPr txBox="1"/>
+          <p:nvPr/>
+        </p:nvSpPr>
+        <p:spPr>
+          <a:xfrm>
+            <a:off x="1463040" y="1920240"/>
+            <a:ext cx="2103120" cy="502920"/>
+          </a:xfrm>
+          <a:prstGeom prst="rect">
+            <a:avLst/>
+          </a:prstGeom>
+          <a:noFill/>
+        </p:spPr>
+        <p:txBody>
+          <a:bodyPr wrap="none">
+            <a:spAutoFit/>
+          </a:bodyPr>
+          <a:lstStyle/>
+          <a:p>
+            <a:pPr algn="r">
+              <a:spcAft>
+                <a:spcPts val="1000"/>
+              </a:spcAft>
+            </a:pPr>
+            <a:r>
+              <a:rPr sz="2200" b="1">
+                <a:solidFill>
+                  <a:srgbClr val="468250"/>
+                </a:solidFill>
+                <a:latin typeface="Microsoft YaHei"/>
+              </a:rPr>
+              <a:t>《风俗通》</a:t>
+            </a:r>
+          </a:p>
+        </p:txBody>
+      </p:sp>
+      <p:sp>
+        <p:nvSpPr>
+          <p:cNvPr id="12" name="TextBox 11"/>
+          <p:cNvSpPr txBox="1"/>
+          <p:nvPr/>
+        </p:nvSpPr>
+        <p:spPr>
+          <a:xfrm>
+            <a:off x="3749039" y="1920240"/>
+            <a:ext cx="7132320" cy="685800"/>
+          </a:xfrm>
+          <a:prstGeom prst="rect">
+            <a:avLst/>
+          </a:prstGeom>
+          <a:noFill/>
+        </p:spPr>
+        <p:txBody>
+          <a:bodyPr wrap="none">
+            <a:spAutoFit/>
+          </a:bodyPr>
+          <a:lstStyle/>
+          <a:p>
+            <a:pPr algn="l">
+              <a:spcAft>
+                <a:spcPts val="1000"/>
+              </a:spcAft>
+            </a:pPr>
+            <a:r>
+              <a:rPr sz="2200" b="0">
+                <a:solidFill>
+                  <a:srgbClr val="28462D"/>
+                </a:solidFill>
+                <a:latin typeface="Microsoft YaHei"/>
+              </a:rPr>
+              <a:t>记载简洁，重在说明造人方法</a:t>
+            </a:r>
+          </a:p>
+        </p:txBody>
+      </p:sp>
+      <p:sp>
+        <p:nvSpPr>
+          <p:cNvPr id="13" name="TextBox 12"/>
+          <p:cNvSpPr txBox="1"/>
+          <p:nvPr/>
+        </p:nvSpPr>
+        <p:spPr>
+          <a:xfrm>
+            <a:off x="1463040" y="2670048"/>
+            <a:ext cx="2103120" cy="502920"/>
+          </a:xfrm>
+          <a:prstGeom prst="rect">
+            <a:avLst/>
+          </a:prstGeom>
+          <a:noFill/>
+        </p:spPr>
+        <p:txBody>
+          <a:bodyPr wrap="none">
+            <a:spAutoFit/>
+          </a:bodyPr>
+          <a:lstStyle/>
+          <a:p>
+            <a:pPr algn="r">
+              <a:spcAft>
+                <a:spcPts val="1000"/>
+              </a:spcAft>
+            </a:pPr>
+            <a:r>
+              <a:rPr sz="2200" b="1">
+                <a:solidFill>
+                  <a:srgbClr val="468250"/>
+                </a:solidFill>
+                <a:latin typeface="Microsoft YaHei"/>
+              </a:rPr>
+              <a:t>课文</a:t>
+            </a:r>
+          </a:p>
+        </p:txBody>
+      </p:sp>
+      <p:sp>
+        <p:nvSpPr>
+          <p:cNvPr id="14" name="TextBox 13"/>
+          <p:cNvSpPr txBox="1"/>
+          <p:nvPr/>
+        </p:nvSpPr>
+        <p:spPr>
+          <a:xfrm>
+            <a:off x="3749039" y="2670048"/>
+            <a:ext cx="7132320" cy="685800"/>
+          </a:xfrm>
+          <a:prstGeom prst="rect">
+            <a:avLst/>
+          </a:prstGeom>
+          <a:noFill/>
+        </p:spPr>
+        <p:txBody>
+          <a:bodyPr wrap="none">
+            <a:spAutoFit/>
+          </a:bodyPr>
+          <a:lstStyle/>
+          <a:p>
+            <a:pPr algn="l">
+              <a:spcAft>
+                <a:spcPts val="1000"/>
+              </a:spcAft>
+            </a:pPr>
+            <a:r>
+              <a:rPr sz="2200" b="0">
+                <a:solidFill>
+                  <a:srgbClr val="28462D"/>
+                </a:solidFill>
+                <a:latin typeface="Microsoft YaHei"/>
+              </a:rPr>
+              <a:t>增加孤独心理、造人细节、情感描写</a:t>
+            </a:r>
+          </a:p>
+        </p:txBody>
+      </p:sp>
+      <p:sp>
+        <p:nvSpPr>
+          <p:cNvPr id="15" name="TextBox 14"/>
+          <p:cNvSpPr txBox="1"/>
+          <p:nvPr/>
+        </p:nvSpPr>
+        <p:spPr>
+          <a:xfrm>
+            <a:off x="1463040" y="3419856"/>
+            <a:ext cx="2103120" cy="502920"/>
+          </a:xfrm>
+          <a:prstGeom prst="rect">
+            <a:avLst/>
+          </a:prstGeom>
+          <a:noFill/>
+        </p:spPr>
+        <p:txBody>
+          <a:bodyPr wrap="none">
+            <a:spAutoFit/>
+          </a:bodyPr>
+          <a:lstStyle/>
+          <a:p>
+            <a:pPr algn="r">
+              <a:spcAft>
+                <a:spcPts val="1000"/>
+              </a:spcAft>
+            </a:pPr>
+            <a:r>
+              <a:rPr sz="2200" b="1">
+                <a:solidFill>
+                  <a:srgbClr val="468250"/>
+                </a:solidFill>
+                <a:latin typeface="Microsoft YaHei"/>
+              </a:rPr>
+              <a:t>改写意图</a:t>
+            </a:r>
+          </a:p>
+        </p:txBody>
+      </p:sp>
+      <p:sp>
+        <p:nvSpPr>
+          <p:cNvPr id="16" name="TextBox 15"/>
+          <p:cNvSpPr txBox="1"/>
+          <p:nvPr/>
+        </p:nvSpPr>
+        <p:spPr>
+          <a:xfrm>
+            <a:off x="3749039" y="3419856"/>
+            <a:ext cx="7132320" cy="685800"/>
+          </a:xfrm>
+          <a:prstGeom prst="rect">
+            <a:avLst/>
+          </a:prstGeom>
+          <a:noFill/>
+        </p:spPr>
+        <p:txBody>
+          <a:bodyPr wrap="none">
+            <a:spAutoFit/>
+          </a:bodyPr>
+          <a:lstStyle/>
+          <a:p>
+            <a:pPr algn="l">
+              <a:spcAft>
+                <a:spcPts val="1000"/>
+              </a:spcAft>
+            </a:pPr>
+            <a:r>
+              <a:rPr sz="2200" b="0">
+                <a:solidFill>
+                  <a:srgbClr val="28462D"/>
+                </a:solidFill>
+                <a:latin typeface="Microsoft YaHei"/>
+              </a:rPr>
+              <a:t>让神话更生动，表达对生命与创造的礼赞</a:t>
+            </a:r>
+          </a:p>
+        </p:txBody>
+      </p:sp>
+      <p:sp>
+        <p:nvSpPr>
+          <p:cNvPr id="17" name="TextBox 16"/>
+          <p:cNvSpPr txBox="1"/>
+          <p:nvPr/>
+        </p:nvSpPr>
+        <p:spPr>
+          <a:xfrm>
+            <a:off x="1463040" y="4169664"/>
+            <a:ext cx="2103120" cy="502920"/>
+          </a:xfrm>
+          <a:prstGeom prst="rect">
+            <a:avLst/>
+          </a:prstGeom>
+          <a:noFill/>
+        </p:spPr>
+        <p:txBody>
+          <a:bodyPr wrap="none">
+            <a:spAutoFit/>
+          </a:bodyPr>
+          <a:lstStyle/>
+          <a:p>
+            <a:pPr algn="r">
+              <a:spcAft>
+                <a:spcPts val="1000"/>
+              </a:spcAft>
+            </a:pPr>
+            <a:r>
+              <a:rPr sz="2200" b="1">
+                <a:solidFill>
+                  <a:srgbClr val="468250"/>
+                </a:solidFill>
+                <a:latin typeface="Microsoft YaHei"/>
+              </a:rPr>
+              <a:t>策展主题</a:t>
+            </a:r>
+          </a:p>
+        </p:txBody>
+      </p:sp>
+      <p:sp>
+        <p:nvSpPr>
+          <p:cNvPr id="18" name="TextBox 17"/>
+          <p:cNvSpPr txBox="1"/>
+          <p:nvPr/>
+        </p:nvSpPr>
+        <p:spPr>
+          <a:xfrm>
+            <a:off x="3749039" y="4169664"/>
+            <a:ext cx="7132320" cy="685800"/>
+          </a:xfrm>
+          <a:prstGeom prst="rect">
+            <a:avLst/>
+          </a:prstGeom>
+          <a:noFill/>
+        </p:spPr>
+        <p:txBody>
+          <a:bodyPr wrap="none">
+            <a:spAutoFit/>
+          </a:bodyPr>
+          <a:lstStyle/>
+          <a:p>
+            <a:pPr algn="l">
+              <a:spcAft>
+                <a:spcPts val="1000"/>
+              </a:spcAft>
+            </a:pPr>
+            <a:r>
+              <a:rPr sz="2200" b="0">
+                <a:solidFill>
+                  <a:srgbClr val="28462D"/>
+                </a:solidFill>
+                <a:latin typeface="Microsoft YaHei"/>
+              </a:rPr>
+              <a:t>生命来之不易，创造值得珍视（创造与生命）</a:t>
+            </a:r>
           </a:p>
         </p:txBody>
       </p:sp>
@@ -6028,7 +6030,7 @@
       <p:grpSpPr/>
       <p:pic>
         <p:nvPicPr>
-          <p:cNvPr id="2" name="Picture 1" descr="bg_gushi.png"/>
+          <p:cNvPr id="2" name="Picture 1" descr="bg_nuwa.png"/>
           <p:cNvPicPr>
             <a:picLocks noChangeAspect="1"/>
           </p:cNvPicPr>
@@ -6067,7 +6069,7 @@
           <a:noFill/>
           <a:ln w="31750">
             <a:solidFill>
-              <a:srgbClr val="50825A"/>
+              <a:srgbClr val="5A8C5A"/>
             </a:solidFill>
           </a:ln>
         </p:spPr>
@@ -6093,61 +6095,70 @@
           </a:p>
         </p:txBody>
       </p:sp>
-      <p:sp>
-        <p:nvSpPr>
-          <p:cNvPr id="4" name="TextBox 3"/>
-          <p:cNvSpPr txBox="1"/>
-          <p:nvPr/>
-        </p:nvSpPr>
-        <p:spPr>
-          <a:xfrm>
-            <a:off x="3200400" y="640080"/>
-            <a:ext cx="5760720" cy="731520"/>
-          </a:xfrm>
-          <a:prstGeom prst="rect">
-            <a:avLst/>
-          </a:prstGeom>
-          <a:noFill/>
-        </p:spPr>
-        <p:txBody>
-          <a:bodyPr wrap="none">
-            <a:spAutoFit/>
-          </a:bodyPr>
-          <a:lstStyle/>
-          <a:p>
-            <a:pPr algn="ctr">
-              <a:spcAft>
-                <a:spcPts val="800"/>
-              </a:spcAft>
-            </a:pPr>
-            <a:r>
-              <a:rPr sz="4000" b="1">
-                <a:solidFill>
-                  <a:srgbClr val="50825A"/>
-                </a:solidFill>
-                <a:latin typeface="Microsoft YaHei"/>
-              </a:rPr>
-              <a:t>学习任务</a:t>
-            </a:r>
-          </a:p>
-        </p:txBody>
-      </p:sp>
-      <p:sp>
-        <p:nvSpPr>
-          <p:cNvPr id="5" name="Oval 4"/>
+      <p:pic>
+        <p:nvPicPr>
+          <p:cNvPr id="4" name="Picture 3" descr="corner_nuwa_tl.png"/>
+          <p:cNvPicPr>
+            <a:picLocks noChangeAspect="1"/>
+          </p:cNvPicPr>
+          <p:nvPr/>
+        </p:nvPicPr>
+        <p:blipFill>
+          <a:blip r:embed="rId3"/>
+          <a:stretch>
+            <a:fillRect/>
+          </a:stretch>
+        </p:blipFill>
+        <p:spPr>
+          <a:xfrm>
+            <a:off x="-45720" y="-45720"/>
+            <a:ext cx="2011680" cy="2011680"/>
+          </a:xfrm>
+          <a:prstGeom prst="rect">
+            <a:avLst/>
+          </a:prstGeom>
+        </p:spPr>
+      </p:pic>
+      <p:pic>
+        <p:nvPicPr>
+          <p:cNvPr id="5" name="Picture 4" descr="corner_nuwa_tr.png"/>
+          <p:cNvPicPr>
+            <a:picLocks noChangeAspect="1"/>
+          </p:cNvPicPr>
+          <p:nvPr/>
+        </p:nvPicPr>
+        <p:blipFill>
+          <a:blip r:embed="rId4"/>
+          <a:stretch>
+            <a:fillRect/>
+          </a:stretch>
+        </p:blipFill>
+        <p:spPr>
+          <a:xfrm>
+            <a:off x="9875520" y="-45720"/>
+            <a:ext cx="2011680" cy="2011680"/>
+          </a:xfrm>
+          <a:prstGeom prst="rect">
+            <a:avLst/>
+          </a:prstGeom>
+        </p:spPr>
+      </p:pic>
+      <p:sp>
+        <p:nvSpPr>
+          <p:cNvPr id="6" name="Rounded Rectangle 5"/>
           <p:cNvSpPr/>
           <p:nvPr/>
         </p:nvSpPr>
         <p:spPr>
           <a:xfrm>
-            <a:off x="1371600" y="1645920"/>
-            <a:ext cx="411480" cy="411480"/>
-          </a:xfrm>
-          <a:prstGeom prst="ellipse">
+            <a:off x="4953304" y="502920"/>
+            <a:ext cx="2286000" cy="411480"/>
+          </a:xfrm>
+          <a:prstGeom prst="roundRect">
             <a:avLst/>
           </a:prstGeom>
           <a:solidFill>
-            <a:srgbClr val="50825A"/>
+            <a:srgbClr val="A0C896"/>
           </a:solidFill>
           <a:ln>
             <a:noFill/>
@@ -6177,14 +6188,14 @@
       </p:sp>
       <p:sp>
         <p:nvSpPr>
-          <p:cNvPr id="6" name="TextBox 5"/>
+          <p:cNvPr id="7" name="TextBox 6"/>
           <p:cNvSpPr txBox="1"/>
           <p:nvPr/>
         </p:nvSpPr>
         <p:spPr>
           <a:xfrm>
-            <a:off x="1371600" y="1673352"/>
-            <a:ext cx="411480" cy="384048"/>
+            <a:off x="4953304" y="521208"/>
+            <a:ext cx="2286000" cy="384048"/>
           </a:xfrm>
           <a:prstGeom prst="rect">
             <a:avLst/>
@@ -6199,31 +6210,31 @@
           <a:p>
             <a:pPr algn="ctr">
               <a:spcAft>
-                <a:spcPts val="800"/>
+                <a:spcPts val="1000"/>
               </a:spcAft>
             </a:pPr>
             <a:r>
-              <a:rPr sz="1600" b="1">
-                <a:solidFill>
-                  <a:srgbClr val="FFFFFF"/>
+              <a:rPr sz="1800" b="1">
+                <a:solidFill>
+                  <a:srgbClr val="28462D"/>
                 </a:solidFill>
                 <a:latin typeface="Microsoft YaHei"/>
               </a:rPr>
-              <a:t>1</a:t>
-            </a:r>
-          </a:p>
-        </p:txBody>
-      </p:sp>
-      <p:sp>
-        <p:nvSpPr>
-          <p:cNvPr id="7" name="TextBox 6"/>
+              <a:t>课堂活动</a:t>
+            </a:r>
+          </a:p>
+        </p:txBody>
+      </p:sp>
+      <p:sp>
+        <p:nvSpPr>
+          <p:cNvPr id="8" name="TextBox 7"/>
           <p:cNvSpPr txBox="1"/>
           <p:nvPr/>
         </p:nvSpPr>
         <p:spPr>
           <a:xfrm>
-            <a:off x="2011680" y="1627632"/>
-            <a:ext cx="9144000" cy="594360"/>
+            <a:off x="1371600" y="1051560"/>
+            <a:ext cx="9418320" cy="822960"/>
           </a:xfrm>
           <a:prstGeom prst="rect">
             <a:avLst/>
@@ -6231,44 +6242,44 @@
           <a:noFill/>
         </p:spPr>
         <p:txBody>
-          <a:bodyPr wrap="none">
+          <a:bodyPr wrap="square">
             <a:spAutoFit/>
           </a:bodyPr>
           <a:lstStyle/>
           <a:p>
-            <a:pPr algn="l">
+            <a:pPr algn="ctr">
               <a:spcAft>
-                <a:spcPts val="800"/>
+                <a:spcPts val="1000"/>
               </a:spcAft>
             </a:pPr>
             <a:r>
-              <a:rPr sz="2400" b="0">
-                <a:solidFill>
-                  <a:srgbClr val="284632"/>
+              <a:rPr sz="3600" b="1">
+                <a:solidFill>
+                  <a:srgbClr val="468250"/>
                 </a:solidFill>
                 <a:latin typeface="Microsoft YaHei"/>
               </a:rPr>
-              <a:t>给女娲行动排序，比较两种造人方法</a:t>
-            </a:r>
-          </a:p>
-        </p:txBody>
-      </p:sp>
-      <p:sp>
-        <p:nvSpPr>
-          <p:cNvPr id="8" name="Oval 7"/>
+              <a:t>学习任务</a:t>
+            </a:r>
+          </a:p>
+        </p:txBody>
+      </p:sp>
+      <p:sp>
+        <p:nvSpPr>
+          <p:cNvPr id="9" name="Rectangle 8"/>
           <p:cNvSpPr/>
           <p:nvPr/>
         </p:nvSpPr>
         <p:spPr>
           <a:xfrm>
-            <a:off x="1371600" y="2304288"/>
-            <a:ext cx="411480" cy="411480"/>
-          </a:xfrm>
-          <a:prstGeom prst="ellipse">
+            <a:off x="3200400" y="1691640"/>
+            <a:ext cx="5760720" cy="27432"/>
+          </a:xfrm>
+          <a:prstGeom prst="rect">
             <a:avLst/>
           </a:prstGeom>
           <a:solidFill>
-            <a:srgbClr val="50825A"/>
+            <a:srgbClr val="A0C896"/>
           </a:solidFill>
           <a:ln>
             <a:noFill/>
@@ -6298,101 +6309,25 @@
       </p:sp>
       <p:sp>
         <p:nvSpPr>
-          <p:cNvPr id="9" name="TextBox 8"/>
-          <p:cNvSpPr txBox="1"/>
-          <p:nvPr/>
-        </p:nvSpPr>
-        <p:spPr>
-          <a:xfrm>
-            <a:off x="1371600" y="2331720"/>
-            <a:ext cx="411480" cy="384048"/>
-          </a:xfrm>
-          <a:prstGeom prst="rect">
-            <a:avLst/>
-          </a:prstGeom>
-          <a:noFill/>
-        </p:spPr>
-        <p:txBody>
-          <a:bodyPr wrap="none">
-            <a:spAutoFit/>
-          </a:bodyPr>
-          <a:lstStyle/>
-          <a:p>
-            <a:pPr algn="ctr">
-              <a:spcAft>
-                <a:spcPts val="800"/>
-              </a:spcAft>
-            </a:pPr>
-            <a:r>
-              <a:rPr sz="1600" b="1">
-                <a:solidFill>
-                  <a:srgbClr val="FFFFFF"/>
-                </a:solidFill>
-                <a:latin typeface="Microsoft YaHei"/>
-              </a:rPr>
-              <a:t>2</a:t>
-            </a:r>
-          </a:p>
-        </p:txBody>
-      </p:sp>
-      <p:sp>
-        <p:nvSpPr>
-          <p:cNvPr id="10" name="TextBox 9"/>
-          <p:cNvSpPr txBox="1"/>
-          <p:nvPr/>
-        </p:nvSpPr>
-        <p:spPr>
-          <a:xfrm>
-            <a:off x="2011680" y="2286000"/>
-            <a:ext cx="9144000" cy="594360"/>
-          </a:xfrm>
-          <a:prstGeom prst="rect">
-            <a:avLst/>
-          </a:prstGeom>
-          <a:noFill/>
-        </p:spPr>
-        <p:txBody>
-          <a:bodyPr wrap="none">
-            <a:spAutoFit/>
-          </a:bodyPr>
-          <a:lstStyle/>
-          <a:p>
-            <a:pPr algn="l">
-              <a:spcAft>
-                <a:spcPts val="800"/>
-              </a:spcAft>
-            </a:pPr>
-            <a:r>
-              <a:rPr sz="2400" b="0">
-                <a:solidFill>
-                  <a:srgbClr val="284632"/>
-                </a:solidFill>
-                <a:latin typeface="Microsoft YaHei"/>
-              </a:rPr>
-              <a:t>完成「古籍与课文」比较表</a:t>
-            </a:r>
-          </a:p>
-        </p:txBody>
-      </p:sp>
-      <p:sp>
-        <p:nvSpPr>
-          <p:cNvPr id="11" name="Oval 10"/>
+          <p:cNvPr id="10" name="Rounded Rectangle 9"/>
           <p:cNvSpPr/>
           <p:nvPr/>
         </p:nvSpPr>
         <p:spPr>
           <a:xfrm>
-            <a:off x="1371600" y="2962656"/>
-            <a:ext cx="411480" cy="411480"/>
-          </a:xfrm>
-          <a:prstGeom prst="ellipse">
+            <a:off x="1295704" y="1737360"/>
+            <a:ext cx="9601200" cy="2112264"/>
+          </a:xfrm>
+          <a:prstGeom prst="roundRect">
             <a:avLst/>
           </a:prstGeom>
           <a:solidFill>
-            <a:srgbClr val="50825A"/>
+            <a:srgbClr val="F8FCF5"/>
           </a:solidFill>
-          <a:ln>
-            <a:noFill/>
+          <a:ln w="19050">
+            <a:solidFill>
+              <a:srgbClr val="A0C896"/>
+            </a:solidFill>
           </a:ln>
         </p:spPr>
         <p:style>
@@ -6419,14 +6354,57 @@
       </p:sp>
       <p:sp>
         <p:nvSpPr>
+          <p:cNvPr id="11" name="Oval 10"/>
+          <p:cNvSpPr/>
+          <p:nvPr/>
+        </p:nvSpPr>
+        <p:spPr>
+          <a:xfrm>
+            <a:off x="2621584" y="1920240"/>
+            <a:ext cx="347472" cy="347472"/>
+          </a:xfrm>
+          <a:prstGeom prst="ellipse">
+            <a:avLst/>
+          </a:prstGeom>
+          <a:solidFill>
+            <a:srgbClr val="468250"/>
+          </a:solidFill>
+          <a:ln>
+            <a:noFill/>
+          </a:ln>
+        </p:spPr>
+        <p:style>
+          <a:lnRef idx="1">
+            <a:schemeClr val="accent1"/>
+          </a:lnRef>
+          <a:fillRef idx="3">
+            <a:schemeClr val="accent1"/>
+          </a:fillRef>
+          <a:effectRef idx="2">
+            <a:schemeClr val="accent1"/>
+          </a:effectRef>
+          <a:fontRef idx="minor">
+            <a:schemeClr val="lt1"/>
+          </a:fontRef>
+        </p:style>
+        <p:txBody>
+          <a:bodyPr rtlCol="0" anchor="ctr"/>
+          <a:lstStyle/>
+          <a:p>
+            <a:pPr algn="ctr"/>
+          </a:p>
+        </p:txBody>
+      </p:sp>
+      <p:sp>
+        <p:nvSpPr>
           <p:cNvPr id="12" name="TextBox 11"/>
           <p:cNvSpPr txBox="1"/>
           <p:nvPr/>
         </p:nvSpPr>
         <p:spPr>
           <a:xfrm>
-            <a:off x="1371600" y="2990088"/>
-            <a:ext cx="411480" cy="384048"/>
+            <a:off x="2621584" y="1938528"/>
+            <a:ext cx="347472" cy="329184"/>
           </a:xfrm>
           <a:prstGeom prst="rect">
             <a:avLst/>
@@ -6441,11 +6419,253 @@
           <a:p>
             <a:pPr algn="ctr">
               <a:spcAft>
-                <a:spcPts val="800"/>
+                <a:spcPts val="1000"/>
               </a:spcAft>
             </a:pPr>
             <a:r>
-              <a:rPr sz="1600" b="1">
+              <a:rPr sz="1400" b="1">
+                <a:solidFill>
+                  <a:srgbClr val="FFFFFF"/>
+                </a:solidFill>
+                <a:latin typeface="Microsoft YaHei"/>
+              </a:rPr>
+              <a:t>1</a:t>
+            </a:r>
+          </a:p>
+        </p:txBody>
+      </p:sp>
+      <p:sp>
+        <p:nvSpPr>
+          <p:cNvPr id="13" name="TextBox 12"/>
+          <p:cNvSpPr txBox="1"/>
+          <p:nvPr/>
+        </p:nvSpPr>
+        <p:spPr>
+          <a:xfrm>
+            <a:off x="3078784" y="1901952"/>
+            <a:ext cx="7863840" cy="457200"/>
+          </a:xfrm>
+          <a:prstGeom prst="rect">
+            <a:avLst/>
+          </a:prstGeom>
+          <a:noFill/>
+        </p:spPr>
+        <p:txBody>
+          <a:bodyPr wrap="none">
+            <a:spAutoFit/>
+          </a:bodyPr>
+          <a:lstStyle/>
+          <a:p>
+            <a:pPr algn="l">
+              <a:spcAft>
+                <a:spcPts val="1000"/>
+              </a:spcAft>
+            </a:pPr>
+            <a:r>
+              <a:rPr sz="2400" b="0">
+                <a:solidFill>
+                  <a:srgbClr val="28462D"/>
+                </a:solidFill>
+                <a:latin typeface="Microsoft YaHei"/>
+              </a:rPr>
+              <a:t>给女娲行动排序，比较两种造人方法</a:t>
+            </a:r>
+          </a:p>
+        </p:txBody>
+      </p:sp>
+      <p:sp>
+        <p:nvSpPr>
+          <p:cNvPr id="14" name="Oval 13"/>
+          <p:cNvSpPr/>
+          <p:nvPr/>
+        </p:nvSpPr>
+        <p:spPr>
+          <a:xfrm>
+            <a:off x="2621584" y="2487168"/>
+            <a:ext cx="347472" cy="347472"/>
+          </a:xfrm>
+          <a:prstGeom prst="ellipse">
+            <a:avLst/>
+          </a:prstGeom>
+          <a:solidFill>
+            <a:srgbClr val="468250"/>
+          </a:solidFill>
+          <a:ln>
+            <a:noFill/>
+          </a:ln>
+        </p:spPr>
+        <p:style>
+          <a:lnRef idx="1">
+            <a:schemeClr val="accent1"/>
+          </a:lnRef>
+          <a:fillRef idx="3">
+            <a:schemeClr val="accent1"/>
+          </a:fillRef>
+          <a:effectRef idx="2">
+            <a:schemeClr val="accent1"/>
+          </a:effectRef>
+          <a:fontRef idx="minor">
+            <a:schemeClr val="lt1"/>
+          </a:fontRef>
+        </p:style>
+        <p:txBody>
+          <a:bodyPr rtlCol="0" anchor="ctr"/>
+          <a:lstStyle/>
+          <a:p>
+            <a:pPr algn="ctr"/>
+          </a:p>
+        </p:txBody>
+      </p:sp>
+      <p:sp>
+        <p:nvSpPr>
+          <p:cNvPr id="15" name="TextBox 14"/>
+          <p:cNvSpPr txBox="1"/>
+          <p:nvPr/>
+        </p:nvSpPr>
+        <p:spPr>
+          <a:xfrm>
+            <a:off x="2621584" y="2505456"/>
+            <a:ext cx="347472" cy="329184"/>
+          </a:xfrm>
+          <a:prstGeom prst="rect">
+            <a:avLst/>
+          </a:prstGeom>
+          <a:noFill/>
+        </p:spPr>
+        <p:txBody>
+          <a:bodyPr wrap="none">
+            <a:spAutoFit/>
+          </a:bodyPr>
+          <a:lstStyle/>
+          <a:p>
+            <a:pPr algn="ctr">
+              <a:spcAft>
+                <a:spcPts val="1000"/>
+              </a:spcAft>
+            </a:pPr>
+            <a:r>
+              <a:rPr sz="1400" b="1">
+                <a:solidFill>
+                  <a:srgbClr val="FFFFFF"/>
+                </a:solidFill>
+                <a:latin typeface="Microsoft YaHei"/>
+              </a:rPr>
+              <a:t>2</a:t>
+            </a:r>
+          </a:p>
+        </p:txBody>
+      </p:sp>
+      <p:sp>
+        <p:nvSpPr>
+          <p:cNvPr id="16" name="TextBox 15"/>
+          <p:cNvSpPr txBox="1"/>
+          <p:nvPr/>
+        </p:nvSpPr>
+        <p:spPr>
+          <a:xfrm>
+            <a:off x="3078784" y="2468880"/>
+            <a:ext cx="7863840" cy="457200"/>
+          </a:xfrm>
+          <a:prstGeom prst="rect">
+            <a:avLst/>
+          </a:prstGeom>
+          <a:noFill/>
+        </p:spPr>
+        <p:txBody>
+          <a:bodyPr wrap="none">
+            <a:spAutoFit/>
+          </a:bodyPr>
+          <a:lstStyle/>
+          <a:p>
+            <a:pPr algn="l">
+              <a:spcAft>
+                <a:spcPts val="1000"/>
+              </a:spcAft>
+            </a:pPr>
+            <a:r>
+              <a:rPr sz="2400" b="0">
+                <a:solidFill>
+                  <a:srgbClr val="28462D"/>
+                </a:solidFill>
+                <a:latin typeface="Microsoft YaHei"/>
+              </a:rPr>
+              <a:t>完成「古籍与课文」比较表</a:t>
+            </a:r>
+          </a:p>
+        </p:txBody>
+      </p:sp>
+      <p:sp>
+        <p:nvSpPr>
+          <p:cNvPr id="17" name="Oval 16"/>
+          <p:cNvSpPr/>
+          <p:nvPr/>
+        </p:nvSpPr>
+        <p:spPr>
+          <a:xfrm>
+            <a:off x="2621584" y="3054096"/>
+            <a:ext cx="347472" cy="347472"/>
+          </a:xfrm>
+          <a:prstGeom prst="ellipse">
+            <a:avLst/>
+          </a:prstGeom>
+          <a:solidFill>
+            <a:srgbClr val="468250"/>
+          </a:solidFill>
+          <a:ln>
+            <a:noFill/>
+          </a:ln>
+        </p:spPr>
+        <p:style>
+          <a:lnRef idx="1">
+            <a:schemeClr val="accent1"/>
+          </a:lnRef>
+          <a:fillRef idx="3">
+            <a:schemeClr val="accent1"/>
+          </a:fillRef>
+          <a:effectRef idx="2">
+            <a:schemeClr val="accent1"/>
+          </a:effectRef>
+          <a:fontRef idx="minor">
+            <a:schemeClr val="lt1"/>
+          </a:fontRef>
+        </p:style>
+        <p:txBody>
+          <a:bodyPr rtlCol="0" anchor="ctr"/>
+          <a:lstStyle/>
+          <a:p>
+            <a:pPr algn="ctr"/>
+          </a:p>
+        </p:txBody>
+      </p:sp>
+      <p:sp>
+        <p:nvSpPr>
+          <p:cNvPr id="18" name="TextBox 17"/>
+          <p:cNvSpPr txBox="1"/>
+          <p:nvPr/>
+        </p:nvSpPr>
+        <p:spPr>
+          <a:xfrm>
+            <a:off x="2621584" y="3072384"/>
+            <a:ext cx="347472" cy="329184"/>
+          </a:xfrm>
+          <a:prstGeom prst="rect">
+            <a:avLst/>
+          </a:prstGeom>
+          <a:noFill/>
+        </p:spPr>
+        <p:txBody>
+          <a:bodyPr wrap="none">
+            <a:spAutoFit/>
+          </a:bodyPr>
+          <a:lstStyle/>
+          <a:p>
+            <a:pPr algn="ctr">
+              <a:spcAft>
+                <a:spcPts val="1000"/>
+              </a:spcAft>
+            </a:pPr>
+            <a:r>
+              <a:rPr sz="1400" b="1">
                 <a:solidFill>
                   <a:srgbClr val="FFFFFF"/>
                 </a:solidFill>
@@ -6458,14 +6678,14 @@
       </p:sp>
       <p:sp>
         <p:nvSpPr>
-          <p:cNvPr id="13" name="TextBox 12"/>
+          <p:cNvPr id="19" name="TextBox 18"/>
           <p:cNvSpPr txBox="1"/>
           <p:nvPr/>
         </p:nvSpPr>
         <p:spPr>
           <a:xfrm>
-            <a:off x="2011680" y="2944368"/>
-            <a:ext cx="9144000" cy="594360"/>
+            <a:off x="3078784" y="3035808"/>
+            <a:ext cx="7863840" cy="457200"/>
           </a:xfrm>
           <a:prstGeom prst="rect">
             <a:avLst/>
@@ -6480,17 +6700,1306 @@
           <a:p>
             <a:pPr algn="l">
               <a:spcAft>
-                <a:spcPts val="800"/>
+                <a:spcPts val="1000"/>
               </a:spcAft>
             </a:pPr>
             <a:r>
               <a:rPr sz="2400" b="0">
                 <a:solidFill>
-                  <a:srgbClr val="284632"/>
+                  <a:srgbClr val="28462D"/>
                 </a:solidFill>
                 <a:latin typeface="Microsoft YaHei"/>
               </a:rPr>
               <a:t>以「我看见女娲……」写100字画面描述</a:t>
+            </a:r>
+          </a:p>
+        </p:txBody>
+      </p:sp>
+    </p:spTree>
+  </p:cSld>
+  <p:clrMapOvr>
+    <a:masterClrMapping/>
+  </p:clrMapOvr>
+</p:sld>
+</file>
+
+<file path=ppt/slides/slide7.xml><?xml version="1.0" encoding="utf-8"?>
+<p:sld xmlns:a="http://schemas.openxmlformats.org/drawingml/2006/main" xmlns:p="http://schemas.openxmlformats.org/presentationml/2006/main" xmlns:r="http://schemas.openxmlformats.org/officeDocument/2006/relationships">
+  <p:cSld>
+    <p:spTree>
+      <p:nvGrpSpPr>
+        <p:cNvPr id="1" name=""/>
+        <p:cNvGrpSpPr/>
+        <p:nvPr/>
+      </p:nvGrpSpPr>
+      <p:grpSpPr/>
+      <p:pic>
+        <p:nvPicPr>
+          <p:cNvPr id="2" name="Picture 1" descr="bg_nuwa.png"/>
+          <p:cNvPicPr>
+            <a:picLocks noChangeAspect="1"/>
+          </p:cNvPicPr>
+          <p:nvPr/>
+        </p:nvPicPr>
+        <p:blipFill>
+          <a:blip r:embed="rId2"/>
+          <a:stretch>
+            <a:fillRect/>
+          </a:stretch>
+        </p:blipFill>
+        <p:spPr>
+          <a:xfrm>
+            <a:off x="0" y="0"/>
+            <a:ext cx="12191695" cy="6858000"/>
+          </a:xfrm>
+          <a:prstGeom prst="rect">
+            <a:avLst/>
+          </a:prstGeom>
+        </p:spPr>
+      </p:pic>
+      <p:sp>
+        <p:nvSpPr>
+          <p:cNvPr id="3" name="Rectangle 2"/>
+          <p:cNvSpPr/>
+          <p:nvPr/>
+        </p:nvSpPr>
+        <p:spPr>
+          <a:xfrm>
+            <a:off x="292608" y="274320"/>
+            <a:ext cx="11594592" cy="6300216"/>
+          </a:xfrm>
+          <a:prstGeom prst="rect">
+            <a:avLst/>
+          </a:prstGeom>
+          <a:noFill/>
+          <a:ln w="31750">
+            <a:solidFill>
+              <a:srgbClr val="5A8C5A"/>
+            </a:solidFill>
+          </a:ln>
+        </p:spPr>
+        <p:style>
+          <a:lnRef idx="1">
+            <a:schemeClr val="accent1"/>
+          </a:lnRef>
+          <a:fillRef idx="3">
+            <a:schemeClr val="accent1"/>
+          </a:fillRef>
+          <a:effectRef idx="2">
+            <a:schemeClr val="accent1"/>
+          </a:effectRef>
+          <a:fontRef idx="minor">
+            <a:schemeClr val="lt1"/>
+          </a:fontRef>
+        </p:style>
+        <p:txBody>
+          <a:bodyPr rtlCol="0" anchor="ctr"/>
+          <a:lstStyle/>
+          <a:p>
+            <a:pPr algn="ctr"/>
+          </a:p>
+        </p:txBody>
+      </p:sp>
+      <p:pic>
+        <p:nvPicPr>
+          <p:cNvPr id="4" name="Picture 3" descr="corner_nuwa_tl.png"/>
+          <p:cNvPicPr>
+            <a:picLocks noChangeAspect="1"/>
+          </p:cNvPicPr>
+          <p:nvPr/>
+        </p:nvPicPr>
+        <p:blipFill>
+          <a:blip r:embed="rId3"/>
+          <a:stretch>
+            <a:fillRect/>
+          </a:stretch>
+        </p:blipFill>
+        <p:spPr>
+          <a:xfrm>
+            <a:off x="-45720" y="-45720"/>
+            <a:ext cx="2011680" cy="2011680"/>
+          </a:xfrm>
+          <a:prstGeom prst="rect">
+            <a:avLst/>
+          </a:prstGeom>
+        </p:spPr>
+      </p:pic>
+      <p:pic>
+        <p:nvPicPr>
+          <p:cNvPr id="5" name="Picture 4" descr="corner_nuwa_tr.png"/>
+          <p:cNvPicPr>
+            <a:picLocks noChangeAspect="1"/>
+          </p:cNvPicPr>
+          <p:nvPr/>
+        </p:nvPicPr>
+        <p:blipFill>
+          <a:blip r:embed="rId4"/>
+          <a:stretch>
+            <a:fillRect/>
+          </a:stretch>
+        </p:blipFill>
+        <p:spPr>
+          <a:xfrm>
+            <a:off x="9875520" y="-45720"/>
+            <a:ext cx="2011680" cy="2011680"/>
+          </a:xfrm>
+          <a:prstGeom prst="rect">
+            <a:avLst/>
+          </a:prstGeom>
+        </p:spPr>
+      </p:pic>
+      <p:sp>
+        <p:nvSpPr>
+          <p:cNvPr id="6" name="Rounded Rectangle 5"/>
+          <p:cNvSpPr/>
+          <p:nvPr/>
+        </p:nvSpPr>
+        <p:spPr>
+          <a:xfrm>
+            <a:off x="4953304" y="502920"/>
+            <a:ext cx="2286000" cy="411480"/>
+          </a:xfrm>
+          <a:prstGeom prst="roundRect">
+            <a:avLst/>
+          </a:prstGeom>
+          <a:solidFill>
+            <a:srgbClr val="A0C896"/>
+          </a:solidFill>
+          <a:ln>
+            <a:noFill/>
+          </a:ln>
+        </p:spPr>
+        <p:style>
+          <a:lnRef idx="1">
+            <a:schemeClr val="accent1"/>
+          </a:lnRef>
+          <a:fillRef idx="3">
+            <a:schemeClr val="accent1"/>
+          </a:fillRef>
+          <a:effectRef idx="2">
+            <a:schemeClr val="accent1"/>
+          </a:effectRef>
+          <a:fontRef idx="minor">
+            <a:schemeClr val="lt1"/>
+          </a:fontRef>
+        </p:style>
+        <p:txBody>
+          <a:bodyPr rtlCol="0" anchor="ctr"/>
+          <a:lstStyle/>
+          <a:p>
+            <a:pPr algn="ctr"/>
+          </a:p>
+        </p:txBody>
+      </p:sp>
+      <p:sp>
+        <p:nvSpPr>
+          <p:cNvPr id="7" name="TextBox 6"/>
+          <p:cNvSpPr txBox="1"/>
+          <p:nvPr/>
+        </p:nvSpPr>
+        <p:spPr>
+          <a:xfrm>
+            <a:off x="4953304" y="521208"/>
+            <a:ext cx="2286000" cy="384048"/>
+          </a:xfrm>
+          <a:prstGeom prst="rect">
+            <a:avLst/>
+          </a:prstGeom>
+          <a:noFill/>
+        </p:spPr>
+        <p:txBody>
+          <a:bodyPr wrap="none">
+            <a:spAutoFit/>
+          </a:bodyPr>
+          <a:lstStyle/>
+          <a:p>
+            <a:pPr algn="ctr">
+              <a:spcAft>
+                <a:spcPts val="1000"/>
+              </a:spcAft>
+            </a:pPr>
+            <a:r>
+              <a:rPr sz="1800" b="1">
+                <a:solidFill>
+                  <a:srgbClr val="28462D"/>
+                </a:solidFill>
+                <a:latin typeface="Microsoft YaHei"/>
+              </a:rPr>
+              <a:t>回顾收获</a:t>
+            </a:r>
+          </a:p>
+        </p:txBody>
+      </p:sp>
+      <p:sp>
+        <p:nvSpPr>
+          <p:cNvPr id="8" name="TextBox 7"/>
+          <p:cNvSpPr txBox="1"/>
+          <p:nvPr/>
+        </p:nvSpPr>
+        <p:spPr>
+          <a:xfrm>
+            <a:off x="1371600" y="1051560"/>
+            <a:ext cx="9418320" cy="822960"/>
+          </a:xfrm>
+          <a:prstGeom prst="rect">
+            <a:avLst/>
+          </a:prstGeom>
+          <a:noFill/>
+        </p:spPr>
+        <p:txBody>
+          <a:bodyPr wrap="square">
+            <a:spAutoFit/>
+          </a:bodyPr>
+          <a:lstStyle/>
+          <a:p>
+            <a:pPr algn="ctr">
+              <a:spcAft>
+                <a:spcPts val="1000"/>
+              </a:spcAft>
+            </a:pPr>
+            <a:r>
+              <a:rPr sz="3600" b="1">
+                <a:solidFill>
+                  <a:srgbClr val="468250"/>
+                </a:solidFill>
+                <a:latin typeface="Microsoft YaHei"/>
+              </a:rPr>
+              <a:t>课堂小结</a:t>
+            </a:r>
+          </a:p>
+        </p:txBody>
+      </p:sp>
+      <p:sp>
+        <p:nvSpPr>
+          <p:cNvPr id="9" name="Rectangle 8"/>
+          <p:cNvSpPr/>
+          <p:nvPr/>
+        </p:nvSpPr>
+        <p:spPr>
+          <a:xfrm>
+            <a:off x="3200400" y="1691640"/>
+            <a:ext cx="5760720" cy="27432"/>
+          </a:xfrm>
+          <a:prstGeom prst="rect">
+            <a:avLst/>
+          </a:prstGeom>
+          <a:solidFill>
+            <a:srgbClr val="A0C896"/>
+          </a:solidFill>
+          <a:ln>
+            <a:noFill/>
+          </a:ln>
+        </p:spPr>
+        <p:style>
+          <a:lnRef idx="1">
+            <a:schemeClr val="accent1"/>
+          </a:lnRef>
+          <a:fillRef idx="3">
+            <a:schemeClr val="accent1"/>
+          </a:fillRef>
+          <a:effectRef idx="2">
+            <a:schemeClr val="accent1"/>
+          </a:effectRef>
+          <a:fontRef idx="minor">
+            <a:schemeClr val="lt1"/>
+          </a:fontRef>
+        </p:style>
+        <p:txBody>
+          <a:bodyPr rtlCol="0" anchor="ctr"/>
+          <a:lstStyle/>
+          <a:p>
+            <a:pPr algn="ctr"/>
+          </a:p>
+        </p:txBody>
+      </p:sp>
+      <p:sp>
+        <p:nvSpPr>
+          <p:cNvPr id="10" name="Rounded Rectangle 9"/>
+          <p:cNvSpPr/>
+          <p:nvPr/>
+        </p:nvSpPr>
+        <p:spPr>
+          <a:xfrm>
+            <a:off x="1295704" y="1737360"/>
+            <a:ext cx="9601200" cy="1837944"/>
+          </a:xfrm>
+          <a:prstGeom prst="roundRect">
+            <a:avLst/>
+          </a:prstGeom>
+          <a:solidFill>
+            <a:srgbClr val="F8FCF5"/>
+          </a:solidFill>
+          <a:ln w="19050">
+            <a:solidFill>
+              <a:srgbClr val="A0C896"/>
+            </a:solidFill>
+          </a:ln>
+        </p:spPr>
+        <p:style>
+          <a:lnRef idx="1">
+            <a:schemeClr val="accent1"/>
+          </a:lnRef>
+          <a:fillRef idx="3">
+            <a:schemeClr val="accent1"/>
+          </a:fillRef>
+          <a:effectRef idx="2">
+            <a:schemeClr val="accent1"/>
+          </a:effectRef>
+          <a:fontRef idx="minor">
+            <a:schemeClr val="lt1"/>
+          </a:fontRef>
+        </p:style>
+        <p:txBody>
+          <a:bodyPr rtlCol="0" anchor="ctr"/>
+          <a:lstStyle/>
+          <a:p>
+            <a:pPr algn="ctr"/>
+          </a:p>
+        </p:txBody>
+      </p:sp>
+      <p:sp>
+        <p:nvSpPr>
+          <p:cNvPr id="11" name="Oval 10"/>
+          <p:cNvSpPr/>
+          <p:nvPr/>
+        </p:nvSpPr>
+        <p:spPr>
+          <a:xfrm>
+            <a:off x="2621584" y="1920240"/>
+            <a:ext cx="347472" cy="347472"/>
+          </a:xfrm>
+          <a:prstGeom prst="ellipse">
+            <a:avLst/>
+          </a:prstGeom>
+          <a:solidFill>
+            <a:srgbClr val="468250"/>
+          </a:solidFill>
+          <a:ln>
+            <a:noFill/>
+          </a:ln>
+        </p:spPr>
+        <p:style>
+          <a:lnRef idx="1">
+            <a:schemeClr val="accent1"/>
+          </a:lnRef>
+          <a:fillRef idx="3">
+            <a:schemeClr val="accent1"/>
+          </a:fillRef>
+          <a:effectRef idx="2">
+            <a:schemeClr val="accent1"/>
+          </a:effectRef>
+          <a:fontRef idx="minor">
+            <a:schemeClr val="lt1"/>
+          </a:fontRef>
+        </p:style>
+        <p:txBody>
+          <a:bodyPr rtlCol="0" anchor="ctr"/>
+          <a:lstStyle/>
+          <a:p>
+            <a:pPr algn="ctr"/>
+          </a:p>
+        </p:txBody>
+      </p:sp>
+      <p:sp>
+        <p:nvSpPr>
+          <p:cNvPr id="12" name="TextBox 11"/>
+          <p:cNvSpPr txBox="1"/>
+          <p:nvPr/>
+        </p:nvSpPr>
+        <p:spPr>
+          <a:xfrm>
+            <a:off x="2621584" y="1938528"/>
+            <a:ext cx="347472" cy="329184"/>
+          </a:xfrm>
+          <a:prstGeom prst="rect">
+            <a:avLst/>
+          </a:prstGeom>
+          <a:noFill/>
+        </p:spPr>
+        <p:txBody>
+          <a:bodyPr wrap="none">
+            <a:spAutoFit/>
+          </a:bodyPr>
+          <a:lstStyle/>
+          <a:p>
+            <a:pPr algn="ctr">
+              <a:spcAft>
+                <a:spcPts val="1000"/>
+              </a:spcAft>
+            </a:pPr>
+            <a:r>
+              <a:rPr sz="1400" b="1">
+                <a:solidFill>
+                  <a:srgbClr val="FFFFFF"/>
+                </a:solidFill>
+                <a:latin typeface="Microsoft YaHei"/>
+              </a:rPr>
+              <a:t>1</a:t>
+            </a:r>
+          </a:p>
+        </p:txBody>
+      </p:sp>
+      <p:sp>
+        <p:nvSpPr>
+          <p:cNvPr id="13" name="TextBox 12"/>
+          <p:cNvSpPr txBox="1"/>
+          <p:nvPr/>
+        </p:nvSpPr>
+        <p:spPr>
+          <a:xfrm>
+            <a:off x="3078784" y="1901952"/>
+            <a:ext cx="7863840" cy="457200"/>
+          </a:xfrm>
+          <a:prstGeom prst="rect">
+            <a:avLst/>
+          </a:prstGeom>
+          <a:noFill/>
+        </p:spPr>
+        <p:txBody>
+          <a:bodyPr wrap="none">
+            <a:spAutoFit/>
+          </a:bodyPr>
+          <a:lstStyle/>
+          <a:p>
+            <a:pPr algn="l">
+              <a:spcAft>
+                <a:spcPts val="1000"/>
+              </a:spcAft>
+            </a:pPr>
+            <a:r>
+              <a:rPr sz="2200" b="0">
+                <a:solidFill>
+                  <a:srgbClr val="28462D"/>
+                </a:solidFill>
+                <a:latin typeface="Microsoft YaHei"/>
+              </a:rPr>
+              <a:t>神话想象：基于古籍，超越古籍，有温度</a:t>
+            </a:r>
+          </a:p>
+        </p:txBody>
+      </p:sp>
+      <p:sp>
+        <p:nvSpPr>
+          <p:cNvPr id="14" name="Oval 13"/>
+          <p:cNvSpPr/>
+          <p:nvPr/>
+        </p:nvSpPr>
+        <p:spPr>
+          <a:xfrm>
+            <a:off x="2621584" y="2395728"/>
+            <a:ext cx="347472" cy="347472"/>
+          </a:xfrm>
+          <a:prstGeom prst="ellipse">
+            <a:avLst/>
+          </a:prstGeom>
+          <a:solidFill>
+            <a:srgbClr val="468250"/>
+          </a:solidFill>
+          <a:ln>
+            <a:noFill/>
+          </a:ln>
+        </p:spPr>
+        <p:style>
+          <a:lnRef idx="1">
+            <a:schemeClr val="accent1"/>
+          </a:lnRef>
+          <a:fillRef idx="3">
+            <a:schemeClr val="accent1"/>
+          </a:fillRef>
+          <a:effectRef idx="2">
+            <a:schemeClr val="accent1"/>
+          </a:effectRef>
+          <a:fontRef idx="minor">
+            <a:schemeClr val="lt1"/>
+          </a:fontRef>
+        </p:style>
+        <p:txBody>
+          <a:bodyPr rtlCol="0" anchor="ctr"/>
+          <a:lstStyle/>
+          <a:p>
+            <a:pPr algn="ctr"/>
+          </a:p>
+        </p:txBody>
+      </p:sp>
+      <p:sp>
+        <p:nvSpPr>
+          <p:cNvPr id="15" name="TextBox 14"/>
+          <p:cNvSpPr txBox="1"/>
+          <p:nvPr/>
+        </p:nvSpPr>
+        <p:spPr>
+          <a:xfrm>
+            <a:off x="2621584" y="2414016"/>
+            <a:ext cx="347472" cy="329184"/>
+          </a:xfrm>
+          <a:prstGeom prst="rect">
+            <a:avLst/>
+          </a:prstGeom>
+          <a:noFill/>
+        </p:spPr>
+        <p:txBody>
+          <a:bodyPr wrap="none">
+            <a:spAutoFit/>
+          </a:bodyPr>
+          <a:lstStyle/>
+          <a:p>
+            <a:pPr algn="ctr">
+              <a:spcAft>
+                <a:spcPts val="1000"/>
+              </a:spcAft>
+            </a:pPr>
+            <a:r>
+              <a:rPr sz="1400" b="1">
+                <a:solidFill>
+                  <a:srgbClr val="FFFFFF"/>
+                </a:solidFill>
+                <a:latin typeface="Microsoft YaHei"/>
+              </a:rPr>
+              <a:t>2</a:t>
+            </a:r>
+          </a:p>
+        </p:txBody>
+      </p:sp>
+      <p:sp>
+        <p:nvSpPr>
+          <p:cNvPr id="16" name="TextBox 15"/>
+          <p:cNvSpPr txBox="1"/>
+          <p:nvPr/>
+        </p:nvSpPr>
+        <p:spPr>
+          <a:xfrm>
+            <a:off x="3078784" y="2377440"/>
+            <a:ext cx="7863840" cy="457200"/>
+          </a:xfrm>
+          <a:prstGeom prst="rect">
+            <a:avLst/>
+          </a:prstGeom>
+          <a:noFill/>
+        </p:spPr>
+        <p:txBody>
+          <a:bodyPr wrap="none">
+            <a:spAutoFit/>
+          </a:bodyPr>
+          <a:lstStyle/>
+          <a:p>
+            <a:pPr algn="l">
+              <a:spcAft>
+                <a:spcPts val="1000"/>
+              </a:spcAft>
+            </a:pPr>
+            <a:r>
+              <a:rPr sz="2200" b="0">
+                <a:solidFill>
+                  <a:srgbClr val="28462D"/>
+                </a:solidFill>
+                <a:latin typeface="Microsoft YaHei"/>
+              </a:rPr>
+              <a:t>女娲：神性与人性并存——孤独、疲倦、喜悦</a:t>
+            </a:r>
+          </a:p>
+        </p:txBody>
+      </p:sp>
+      <p:sp>
+        <p:nvSpPr>
+          <p:cNvPr id="17" name="Oval 16"/>
+          <p:cNvSpPr/>
+          <p:nvPr/>
+        </p:nvSpPr>
+        <p:spPr>
+          <a:xfrm>
+            <a:off x="2621584" y="2871216"/>
+            <a:ext cx="347472" cy="347472"/>
+          </a:xfrm>
+          <a:prstGeom prst="ellipse">
+            <a:avLst/>
+          </a:prstGeom>
+          <a:solidFill>
+            <a:srgbClr val="468250"/>
+          </a:solidFill>
+          <a:ln>
+            <a:noFill/>
+          </a:ln>
+        </p:spPr>
+        <p:style>
+          <a:lnRef idx="1">
+            <a:schemeClr val="accent1"/>
+          </a:lnRef>
+          <a:fillRef idx="3">
+            <a:schemeClr val="accent1"/>
+          </a:fillRef>
+          <a:effectRef idx="2">
+            <a:schemeClr val="accent1"/>
+          </a:effectRef>
+          <a:fontRef idx="minor">
+            <a:schemeClr val="lt1"/>
+          </a:fontRef>
+        </p:style>
+        <p:txBody>
+          <a:bodyPr rtlCol="0" anchor="ctr"/>
+          <a:lstStyle/>
+          <a:p>
+            <a:pPr algn="ctr"/>
+          </a:p>
+        </p:txBody>
+      </p:sp>
+      <p:sp>
+        <p:nvSpPr>
+          <p:cNvPr id="18" name="TextBox 17"/>
+          <p:cNvSpPr txBox="1"/>
+          <p:nvPr/>
+        </p:nvSpPr>
+        <p:spPr>
+          <a:xfrm>
+            <a:off x="2621584" y="2889504"/>
+            <a:ext cx="347472" cy="329184"/>
+          </a:xfrm>
+          <a:prstGeom prst="rect">
+            <a:avLst/>
+          </a:prstGeom>
+          <a:noFill/>
+        </p:spPr>
+        <p:txBody>
+          <a:bodyPr wrap="none">
+            <a:spAutoFit/>
+          </a:bodyPr>
+          <a:lstStyle/>
+          <a:p>
+            <a:pPr algn="ctr">
+              <a:spcAft>
+                <a:spcPts val="1000"/>
+              </a:spcAft>
+            </a:pPr>
+            <a:r>
+              <a:rPr sz="1400" b="1">
+                <a:solidFill>
+                  <a:srgbClr val="FFFFFF"/>
+                </a:solidFill>
+                <a:latin typeface="Microsoft YaHei"/>
+              </a:rPr>
+              <a:t>3</a:t>
+            </a:r>
+          </a:p>
+        </p:txBody>
+      </p:sp>
+      <p:sp>
+        <p:nvSpPr>
+          <p:cNvPr id="19" name="TextBox 18"/>
+          <p:cNvSpPr txBox="1"/>
+          <p:nvPr/>
+        </p:nvSpPr>
+        <p:spPr>
+          <a:xfrm>
+            <a:off x="3078784" y="2852928"/>
+            <a:ext cx="7863840" cy="457200"/>
+          </a:xfrm>
+          <a:prstGeom prst="rect">
+            <a:avLst/>
+          </a:prstGeom>
+          <a:noFill/>
+        </p:spPr>
+        <p:txBody>
+          <a:bodyPr wrap="none">
+            <a:spAutoFit/>
+          </a:bodyPr>
+          <a:lstStyle/>
+          <a:p>
+            <a:pPr algn="l">
+              <a:spcAft>
+                <a:spcPts val="1000"/>
+              </a:spcAft>
+            </a:pPr>
+            <a:r>
+              <a:rPr sz="2200" b="0">
+                <a:solidFill>
+                  <a:srgbClr val="28462D"/>
+                </a:solidFill>
+                <a:latin typeface="Microsoft YaHei"/>
+              </a:rPr>
+              <a:t>策展主题三：创造与生命</a:t>
+            </a:r>
+          </a:p>
+        </p:txBody>
+      </p:sp>
+    </p:spTree>
+  </p:cSld>
+  <p:clrMapOvr>
+    <a:masterClrMapping/>
+  </p:clrMapOvr>
+</p:sld>
+</file>
+
+<file path=ppt/slides/slide8.xml><?xml version="1.0" encoding="utf-8"?>
+<p:sld xmlns:a="http://schemas.openxmlformats.org/drawingml/2006/main" xmlns:p="http://schemas.openxmlformats.org/presentationml/2006/main" xmlns:r="http://schemas.openxmlformats.org/officeDocument/2006/relationships">
+  <p:cSld>
+    <p:spTree>
+      <p:nvGrpSpPr>
+        <p:cNvPr id="1" name=""/>
+        <p:cNvGrpSpPr/>
+        <p:nvPr/>
+      </p:nvGrpSpPr>
+      <p:grpSpPr/>
+      <p:pic>
+        <p:nvPicPr>
+          <p:cNvPr id="2" name="Picture 1" descr="bg_nuwa.png"/>
+          <p:cNvPicPr>
+            <a:picLocks noChangeAspect="1"/>
+          </p:cNvPicPr>
+          <p:nvPr/>
+        </p:nvPicPr>
+        <p:blipFill>
+          <a:blip r:embed="rId2"/>
+          <a:stretch>
+            <a:fillRect/>
+          </a:stretch>
+        </p:blipFill>
+        <p:spPr>
+          <a:xfrm>
+            <a:off x="0" y="0"/>
+            <a:ext cx="12191695" cy="6858000"/>
+          </a:xfrm>
+          <a:prstGeom prst="rect">
+            <a:avLst/>
+          </a:prstGeom>
+        </p:spPr>
+      </p:pic>
+      <p:sp>
+        <p:nvSpPr>
+          <p:cNvPr id="3" name="Rectangle 2"/>
+          <p:cNvSpPr/>
+          <p:nvPr/>
+        </p:nvSpPr>
+        <p:spPr>
+          <a:xfrm>
+            <a:off x="292608" y="274320"/>
+            <a:ext cx="11594592" cy="6300216"/>
+          </a:xfrm>
+          <a:prstGeom prst="rect">
+            <a:avLst/>
+          </a:prstGeom>
+          <a:noFill/>
+          <a:ln w="31750">
+            <a:solidFill>
+              <a:srgbClr val="5A8C5A"/>
+            </a:solidFill>
+          </a:ln>
+        </p:spPr>
+        <p:style>
+          <a:lnRef idx="1">
+            <a:schemeClr val="accent1"/>
+          </a:lnRef>
+          <a:fillRef idx="3">
+            <a:schemeClr val="accent1"/>
+          </a:fillRef>
+          <a:effectRef idx="2">
+            <a:schemeClr val="accent1"/>
+          </a:effectRef>
+          <a:fontRef idx="minor">
+            <a:schemeClr val="lt1"/>
+          </a:fontRef>
+        </p:style>
+        <p:txBody>
+          <a:bodyPr rtlCol="0" anchor="ctr"/>
+          <a:lstStyle/>
+          <a:p>
+            <a:pPr algn="ctr"/>
+          </a:p>
+        </p:txBody>
+      </p:sp>
+      <p:pic>
+        <p:nvPicPr>
+          <p:cNvPr id="4" name="Picture 3" descr="corner_nuwa_tl.png"/>
+          <p:cNvPicPr>
+            <a:picLocks noChangeAspect="1"/>
+          </p:cNvPicPr>
+          <p:nvPr/>
+        </p:nvPicPr>
+        <p:blipFill>
+          <a:blip r:embed="rId3"/>
+          <a:stretch>
+            <a:fillRect/>
+          </a:stretch>
+        </p:blipFill>
+        <p:spPr>
+          <a:xfrm>
+            <a:off x="-45720" y="-45720"/>
+            <a:ext cx="2011680" cy="2011680"/>
+          </a:xfrm>
+          <a:prstGeom prst="rect">
+            <a:avLst/>
+          </a:prstGeom>
+        </p:spPr>
+      </p:pic>
+      <p:pic>
+        <p:nvPicPr>
+          <p:cNvPr id="5" name="Picture 4" descr="corner_nuwa_tr.png"/>
+          <p:cNvPicPr>
+            <a:picLocks noChangeAspect="1"/>
+          </p:cNvPicPr>
+          <p:nvPr/>
+        </p:nvPicPr>
+        <p:blipFill>
+          <a:blip r:embed="rId4"/>
+          <a:stretch>
+            <a:fillRect/>
+          </a:stretch>
+        </p:blipFill>
+        <p:spPr>
+          <a:xfrm>
+            <a:off x="9875520" y="-45720"/>
+            <a:ext cx="2011680" cy="2011680"/>
+          </a:xfrm>
+          <a:prstGeom prst="rect">
+            <a:avLst/>
+          </a:prstGeom>
+        </p:spPr>
+      </p:pic>
+      <p:sp>
+        <p:nvSpPr>
+          <p:cNvPr id="6" name="Rounded Rectangle 5"/>
+          <p:cNvSpPr/>
+          <p:nvPr/>
+        </p:nvSpPr>
+        <p:spPr>
+          <a:xfrm>
+            <a:off x="4953304" y="502920"/>
+            <a:ext cx="2286000" cy="411480"/>
+          </a:xfrm>
+          <a:prstGeom prst="roundRect">
+            <a:avLst/>
+          </a:prstGeom>
+          <a:solidFill>
+            <a:srgbClr val="A0C896"/>
+          </a:solidFill>
+          <a:ln>
+            <a:noFill/>
+          </a:ln>
+        </p:spPr>
+        <p:style>
+          <a:lnRef idx="1">
+            <a:schemeClr val="accent1"/>
+          </a:lnRef>
+          <a:fillRef idx="3">
+            <a:schemeClr val="accent1"/>
+          </a:fillRef>
+          <a:effectRef idx="2">
+            <a:schemeClr val="accent1"/>
+          </a:effectRef>
+          <a:fontRef idx="minor">
+            <a:schemeClr val="lt1"/>
+          </a:fontRef>
+        </p:style>
+        <p:txBody>
+          <a:bodyPr rtlCol="0" anchor="ctr"/>
+          <a:lstStyle/>
+          <a:p>
+            <a:pPr algn="ctr"/>
+          </a:p>
+        </p:txBody>
+      </p:sp>
+      <p:sp>
+        <p:nvSpPr>
+          <p:cNvPr id="7" name="TextBox 6"/>
+          <p:cNvSpPr txBox="1"/>
+          <p:nvPr/>
+        </p:nvSpPr>
+        <p:spPr>
+          <a:xfrm>
+            <a:off x="4953304" y="521208"/>
+            <a:ext cx="2286000" cy="384048"/>
+          </a:xfrm>
+          <a:prstGeom prst="rect">
+            <a:avLst/>
+          </a:prstGeom>
+          <a:noFill/>
+        </p:spPr>
+        <p:txBody>
+          <a:bodyPr wrap="none">
+            <a:spAutoFit/>
+          </a:bodyPr>
+          <a:lstStyle/>
+          <a:p>
+            <a:pPr algn="ctr">
+              <a:spcAft>
+                <a:spcPts val="1000"/>
+              </a:spcAft>
+            </a:pPr>
+            <a:r>
+              <a:rPr sz="1800" b="1">
+                <a:solidFill>
+                  <a:srgbClr val="28462D"/>
+                </a:solidFill>
+                <a:latin typeface="Microsoft YaHei"/>
+              </a:rPr>
+              <a:t>课后延伸</a:t>
+            </a:r>
+          </a:p>
+        </p:txBody>
+      </p:sp>
+      <p:sp>
+        <p:nvSpPr>
+          <p:cNvPr id="8" name="TextBox 7"/>
+          <p:cNvSpPr txBox="1"/>
+          <p:nvPr/>
+        </p:nvSpPr>
+        <p:spPr>
+          <a:xfrm>
+            <a:off x="1371600" y="1051560"/>
+            <a:ext cx="9418320" cy="822960"/>
+          </a:xfrm>
+          <a:prstGeom prst="rect">
+            <a:avLst/>
+          </a:prstGeom>
+          <a:noFill/>
+        </p:spPr>
+        <p:txBody>
+          <a:bodyPr wrap="square">
+            <a:spAutoFit/>
+          </a:bodyPr>
+          <a:lstStyle/>
+          <a:p>
+            <a:pPr algn="ctr">
+              <a:spcAft>
+                <a:spcPts val="1000"/>
+              </a:spcAft>
+            </a:pPr>
+            <a:r>
+              <a:rPr sz="3600" b="1">
+                <a:solidFill>
+                  <a:srgbClr val="468250"/>
+                </a:solidFill>
+                <a:latin typeface="Microsoft YaHei"/>
+              </a:rPr>
+              <a:t>课后作业</a:t>
+            </a:r>
+          </a:p>
+        </p:txBody>
+      </p:sp>
+      <p:sp>
+        <p:nvSpPr>
+          <p:cNvPr id="9" name="Rectangle 8"/>
+          <p:cNvSpPr/>
+          <p:nvPr/>
+        </p:nvSpPr>
+        <p:spPr>
+          <a:xfrm>
+            <a:off x="3200400" y="1691640"/>
+            <a:ext cx="5760720" cy="27432"/>
+          </a:xfrm>
+          <a:prstGeom prst="rect">
+            <a:avLst/>
+          </a:prstGeom>
+          <a:solidFill>
+            <a:srgbClr val="A0C896"/>
+          </a:solidFill>
+          <a:ln>
+            <a:noFill/>
+          </a:ln>
+        </p:spPr>
+        <p:style>
+          <a:lnRef idx="1">
+            <a:schemeClr val="accent1"/>
+          </a:lnRef>
+          <a:fillRef idx="3">
+            <a:schemeClr val="accent1"/>
+          </a:fillRef>
+          <a:effectRef idx="2">
+            <a:schemeClr val="accent1"/>
+          </a:effectRef>
+          <a:fontRef idx="minor">
+            <a:schemeClr val="lt1"/>
+          </a:fontRef>
+        </p:style>
+        <p:txBody>
+          <a:bodyPr rtlCol="0" anchor="ctr"/>
+          <a:lstStyle/>
+          <a:p>
+            <a:pPr algn="ctr"/>
+          </a:p>
+        </p:txBody>
+      </p:sp>
+      <p:sp>
+        <p:nvSpPr>
+          <p:cNvPr id="10" name="Rounded Rectangle 9"/>
+          <p:cNvSpPr/>
+          <p:nvPr/>
+        </p:nvSpPr>
+        <p:spPr>
+          <a:xfrm>
+            <a:off x="1295704" y="1737360"/>
+            <a:ext cx="9601200" cy="1545336"/>
+          </a:xfrm>
+          <a:prstGeom prst="roundRect">
+            <a:avLst/>
+          </a:prstGeom>
+          <a:solidFill>
+            <a:srgbClr val="F8FCF5"/>
+          </a:solidFill>
+          <a:ln w="19050">
+            <a:solidFill>
+              <a:srgbClr val="A0C896"/>
+            </a:solidFill>
+          </a:ln>
+        </p:spPr>
+        <p:style>
+          <a:lnRef idx="1">
+            <a:schemeClr val="accent1"/>
+          </a:lnRef>
+          <a:fillRef idx="3">
+            <a:schemeClr val="accent1"/>
+          </a:fillRef>
+          <a:effectRef idx="2">
+            <a:schemeClr val="accent1"/>
+          </a:effectRef>
+          <a:fontRef idx="minor">
+            <a:schemeClr val="lt1"/>
+          </a:fontRef>
+        </p:style>
+        <p:txBody>
+          <a:bodyPr rtlCol="0" anchor="ctr"/>
+          <a:lstStyle/>
+          <a:p>
+            <a:pPr algn="ctr"/>
+          </a:p>
+        </p:txBody>
+      </p:sp>
+      <p:sp>
+        <p:nvSpPr>
+          <p:cNvPr id="11" name="Oval 10"/>
+          <p:cNvSpPr/>
+          <p:nvPr/>
+        </p:nvSpPr>
+        <p:spPr>
+          <a:xfrm>
+            <a:off x="2621584" y="1920240"/>
+            <a:ext cx="347472" cy="347472"/>
+          </a:xfrm>
+          <a:prstGeom prst="ellipse">
+            <a:avLst/>
+          </a:prstGeom>
+          <a:solidFill>
+            <a:srgbClr val="468250"/>
+          </a:solidFill>
+          <a:ln>
+            <a:noFill/>
+          </a:ln>
+        </p:spPr>
+        <p:style>
+          <a:lnRef idx="1">
+            <a:schemeClr val="accent1"/>
+          </a:lnRef>
+          <a:fillRef idx="3">
+            <a:schemeClr val="accent1"/>
+          </a:fillRef>
+          <a:effectRef idx="2">
+            <a:schemeClr val="accent1"/>
+          </a:effectRef>
+          <a:fontRef idx="minor">
+            <a:schemeClr val="lt1"/>
+          </a:fontRef>
+        </p:style>
+        <p:txBody>
+          <a:bodyPr rtlCol="0" anchor="ctr"/>
+          <a:lstStyle/>
+          <a:p>
+            <a:pPr algn="ctr"/>
+          </a:p>
+        </p:txBody>
+      </p:sp>
+      <p:sp>
+        <p:nvSpPr>
+          <p:cNvPr id="12" name="TextBox 11"/>
+          <p:cNvSpPr txBox="1"/>
+          <p:nvPr/>
+        </p:nvSpPr>
+        <p:spPr>
+          <a:xfrm>
+            <a:off x="2621584" y="1938528"/>
+            <a:ext cx="347472" cy="329184"/>
+          </a:xfrm>
+          <a:prstGeom prst="rect">
+            <a:avLst/>
+          </a:prstGeom>
+          <a:noFill/>
+        </p:spPr>
+        <p:txBody>
+          <a:bodyPr wrap="none">
+            <a:spAutoFit/>
+          </a:bodyPr>
+          <a:lstStyle/>
+          <a:p>
+            <a:pPr algn="ctr">
+              <a:spcAft>
+                <a:spcPts val="1000"/>
+              </a:spcAft>
+            </a:pPr>
+            <a:r>
+              <a:rPr sz="1400" b="1">
+                <a:solidFill>
+                  <a:srgbClr val="FFFFFF"/>
+                </a:solidFill>
+                <a:latin typeface="Microsoft YaHei"/>
+              </a:rPr>
+              <a:t>1</a:t>
+            </a:r>
+          </a:p>
+        </p:txBody>
+      </p:sp>
+      <p:sp>
+        <p:nvSpPr>
+          <p:cNvPr id="13" name="TextBox 12"/>
+          <p:cNvSpPr txBox="1"/>
+          <p:nvPr/>
+        </p:nvSpPr>
+        <p:spPr>
+          <a:xfrm>
+            <a:off x="3078784" y="1901952"/>
+            <a:ext cx="7863840" cy="457200"/>
+          </a:xfrm>
+          <a:prstGeom prst="rect">
+            <a:avLst/>
+          </a:prstGeom>
+          <a:noFill/>
+        </p:spPr>
+        <p:txBody>
+          <a:bodyPr wrap="none">
+            <a:spAutoFit/>
+          </a:bodyPr>
+          <a:lstStyle/>
+          <a:p>
+            <a:pPr algn="l">
+              <a:spcAft>
+                <a:spcPts val="1000"/>
+              </a:spcAft>
+            </a:pPr>
+            <a:r>
+              <a:rPr sz="2400" b="0">
+                <a:solidFill>
+                  <a:srgbClr val="28462D"/>
+                </a:solidFill>
+                <a:latin typeface="Microsoft YaHei"/>
+              </a:rPr>
+              <a:t>必做：以「我看见女娲……」写100字画面</a:t>
+            </a:r>
+          </a:p>
+        </p:txBody>
+      </p:sp>
+      <p:sp>
+        <p:nvSpPr>
+          <p:cNvPr id="14" name="Oval 13"/>
+          <p:cNvSpPr/>
+          <p:nvPr/>
+        </p:nvSpPr>
+        <p:spPr>
+          <a:xfrm>
+            <a:off x="2621584" y="2487168"/>
+            <a:ext cx="347472" cy="347472"/>
+          </a:xfrm>
+          <a:prstGeom prst="ellipse">
+            <a:avLst/>
+          </a:prstGeom>
+          <a:solidFill>
+            <a:srgbClr val="468250"/>
+          </a:solidFill>
+          <a:ln>
+            <a:noFill/>
+          </a:ln>
+        </p:spPr>
+        <p:style>
+          <a:lnRef idx="1">
+            <a:schemeClr val="accent1"/>
+          </a:lnRef>
+          <a:fillRef idx="3">
+            <a:schemeClr val="accent1"/>
+          </a:fillRef>
+          <a:effectRef idx="2">
+            <a:schemeClr val="accent1"/>
+          </a:effectRef>
+          <a:fontRef idx="minor">
+            <a:schemeClr val="lt1"/>
+          </a:fontRef>
+        </p:style>
+        <p:txBody>
+          <a:bodyPr rtlCol="0" anchor="ctr"/>
+          <a:lstStyle/>
+          <a:p>
+            <a:pPr algn="ctr"/>
+          </a:p>
+        </p:txBody>
+      </p:sp>
+      <p:sp>
+        <p:nvSpPr>
+          <p:cNvPr id="15" name="TextBox 14"/>
+          <p:cNvSpPr txBox="1"/>
+          <p:nvPr/>
+        </p:nvSpPr>
+        <p:spPr>
+          <a:xfrm>
+            <a:off x="2621584" y="2505456"/>
+            <a:ext cx="347472" cy="329184"/>
+          </a:xfrm>
+          <a:prstGeom prst="rect">
+            <a:avLst/>
+          </a:prstGeom>
+          <a:noFill/>
+        </p:spPr>
+        <p:txBody>
+          <a:bodyPr wrap="none">
+            <a:spAutoFit/>
+          </a:bodyPr>
+          <a:lstStyle/>
+          <a:p>
+            <a:pPr algn="ctr">
+              <a:spcAft>
+                <a:spcPts val="1000"/>
+              </a:spcAft>
+            </a:pPr>
+            <a:r>
+              <a:rPr sz="1400" b="1">
+                <a:solidFill>
+                  <a:srgbClr val="FFFFFF"/>
+                </a:solidFill>
+                <a:latin typeface="Microsoft YaHei"/>
+              </a:rPr>
+              <a:t>2</a:t>
+            </a:r>
+          </a:p>
+        </p:txBody>
+      </p:sp>
+      <p:sp>
+        <p:nvSpPr>
+          <p:cNvPr id="16" name="TextBox 15"/>
+          <p:cNvSpPr txBox="1"/>
+          <p:nvPr/>
+        </p:nvSpPr>
+        <p:spPr>
+          <a:xfrm>
+            <a:off x="3078784" y="2468880"/>
+            <a:ext cx="7863840" cy="457200"/>
+          </a:xfrm>
+          <a:prstGeom prst="rect">
+            <a:avLst/>
+          </a:prstGeom>
+          <a:noFill/>
+        </p:spPr>
+        <p:txBody>
+          <a:bodyPr wrap="none">
+            <a:spAutoFit/>
+          </a:bodyPr>
+          <a:lstStyle/>
+          <a:p>
+            <a:pPr algn="l">
+              <a:spcAft>
+                <a:spcPts val="1000"/>
+              </a:spcAft>
+            </a:pPr>
+            <a:r>
+              <a:rPr sz="2400" b="0">
+                <a:solidFill>
+                  <a:srgbClr val="28462D"/>
+                </a:solidFill>
+                <a:latin typeface="Microsoft YaHei"/>
+              </a:rPr>
+              <a:t>选做：查找一个中国创世神话，与本文比较</a:t>
             </a:r>
           </a:p>
         </p:txBody>

--- a/unit6-lesson23-nuwa.pptx
+++ b/unit6-lesson23-nuwa.pptx
@@ -3304,8 +3304,8 @@
         </p:nvSpPr>
         <p:spPr>
           <a:xfrm>
-            <a:off x="1371600" y="1828800"/>
-            <a:ext cx="9418320" cy="1828800"/>
+            <a:off x="1371600" y="2011680"/>
+            <a:ext cx="9418320" cy="1645920"/>
           </a:xfrm>
           <a:prstGeom prst="rect">
             <a:avLst/>
@@ -3604,7 +3604,7 @@
                 </a:solidFill>
                 <a:latin typeface="Microsoft YaHei"/>
               </a:rPr>
-              <a:t>课堂笔记</a:t>
+              <a:t>课时目标</a:t>
             </a:r>
           </a:p>
         </p:txBody>
@@ -3617,7 +3617,7 @@
         </p:nvSpPr>
         <p:spPr>
           <a:xfrm>
-            <a:off x="1371600" y="1051560"/>
+            <a:off x="1371600" y="960120"/>
             <a:ext cx="9418320" cy="822960"/>
           </a:xfrm>
           <a:prstGeom prst="rect">
@@ -3643,7 +3643,7 @@
                 </a:solidFill>
                 <a:latin typeface="Microsoft YaHei"/>
               </a:rPr>
-              <a:t>文学常识</a:t>
+              <a:t>本课目标</a:t>
             </a:r>
           </a:p>
         </p:txBody>
@@ -3656,7 +3656,7 @@
         </p:nvSpPr>
         <p:spPr>
           <a:xfrm>
-            <a:off x="3200400" y="1691640"/>
+            <a:off x="3200400" y="1600200"/>
             <a:ext cx="5760720" cy="27432"/>
           </a:xfrm>
           <a:prstGeom prst="rect">
@@ -3699,8 +3699,8 @@
         </p:nvSpPr>
         <p:spPr>
           <a:xfrm>
-            <a:off x="1249984" y="1810512"/>
-            <a:ext cx="9692640" cy="3319272"/>
+            <a:off x="1295704" y="1645920"/>
+            <a:ext cx="9601200" cy="2240280"/>
           </a:xfrm>
           <a:prstGeom prst="roundRect">
             <a:avLst/>
@@ -3738,14 +3738,57 @@
       </p:sp>
       <p:sp>
         <p:nvSpPr>
-          <p:cNvPr id="11" name="TextBox 10"/>
+          <p:cNvPr id="11" name="Oval 10"/>
+          <p:cNvSpPr/>
+          <p:nvPr/>
+        </p:nvSpPr>
+        <p:spPr>
+          <a:xfrm>
+            <a:off x="2255824" y="1828800"/>
+            <a:ext cx="384048" cy="384048"/>
+          </a:xfrm>
+          <a:prstGeom prst="ellipse">
+            <a:avLst/>
+          </a:prstGeom>
+          <a:solidFill>
+            <a:srgbClr val="468250"/>
+          </a:solidFill>
+          <a:ln>
+            <a:noFill/>
+          </a:ln>
+        </p:spPr>
+        <p:style>
+          <a:lnRef idx="1">
+            <a:schemeClr val="accent1"/>
+          </a:lnRef>
+          <a:fillRef idx="3">
+            <a:schemeClr val="accent1"/>
+          </a:fillRef>
+          <a:effectRef idx="2">
+            <a:schemeClr val="accent1"/>
+          </a:effectRef>
+          <a:fontRef idx="minor">
+            <a:schemeClr val="lt1"/>
+          </a:fontRef>
+        </p:style>
+        <p:txBody>
+          <a:bodyPr rtlCol="0" anchor="ctr"/>
+          <a:lstStyle/>
+          <a:p>
+            <a:pPr algn="ctr"/>
+          </a:p>
+        </p:txBody>
+      </p:sp>
+      <p:sp>
+        <p:nvSpPr>
+          <p:cNvPr id="12" name="TextBox 11"/>
           <p:cNvSpPr txBox="1"/>
           <p:nvPr/>
         </p:nvSpPr>
         <p:spPr>
           <a:xfrm>
-            <a:off x="1463040" y="1920240"/>
-            <a:ext cx="2103120" cy="502920"/>
+            <a:off x="2255824" y="1847088"/>
+            <a:ext cx="384048" cy="365760"/>
           </a:xfrm>
           <a:prstGeom prst="rect">
             <a:avLst/>
@@ -3758,33 +3801,33 @@
           </a:bodyPr>
           <a:lstStyle/>
           <a:p>
-            <a:pPr algn="r">
+            <a:pPr algn="ctr">
               <a:spcAft>
                 <a:spcPts val="1000"/>
               </a:spcAft>
             </a:pPr>
             <a:r>
-              <a:rPr sz="2200" b="1">
+              <a:rPr sz="1600" b="1">
                 <a:solidFill>
-                  <a:srgbClr val="468250"/>
+                  <a:srgbClr val="FFFFFF"/>
                 </a:solidFill>
                 <a:latin typeface="Microsoft YaHei"/>
               </a:rPr>
-              <a:t>作者</a:t>
-            </a:r>
-          </a:p>
-        </p:txBody>
-      </p:sp>
-      <p:sp>
-        <p:nvSpPr>
-          <p:cNvPr id="12" name="TextBox 11"/>
+              <a:t>1</a:t>
+            </a:r>
+          </a:p>
+        </p:txBody>
+      </p:sp>
+      <p:sp>
+        <p:nvSpPr>
+          <p:cNvPr id="13" name="TextBox 12"/>
           <p:cNvSpPr txBox="1"/>
           <p:nvPr/>
         </p:nvSpPr>
         <p:spPr>
           <a:xfrm>
-            <a:off x="3749039" y="1920240"/>
-            <a:ext cx="7132320" cy="685800"/>
+            <a:off x="2758744" y="1810512"/>
+            <a:ext cx="7772400" cy="502920"/>
           </a:xfrm>
           <a:prstGeom prst="rect">
             <a:avLst/>
@@ -3803,27 +3846,70 @@
               </a:spcAft>
             </a:pPr>
             <a:r>
-              <a:rPr sz="2200" b="0">
+              <a:rPr sz="2400" b="0">
                 <a:solidFill>
                   <a:srgbClr val="28462D"/>
                 </a:solidFill>
                 <a:latin typeface="Microsoft YaHei"/>
               </a:rPr>
-              <a:t>袁珂（现代作家，神话研究专家）</a:t>
-            </a:r>
-          </a:p>
-        </p:txBody>
-      </p:sp>
-      <p:sp>
-        <p:nvSpPr>
-          <p:cNvPr id="13" name="TextBox 12"/>
+              <a:t>概括女娲造人过程，梳理文章写作思路</a:t>
+            </a:r>
+          </a:p>
+        </p:txBody>
+      </p:sp>
+      <p:sp>
+        <p:nvSpPr>
+          <p:cNvPr id="14" name="Oval 13"/>
+          <p:cNvSpPr/>
+          <p:nvPr/>
+        </p:nvSpPr>
+        <p:spPr>
+          <a:xfrm>
+            <a:off x="2255824" y="2395728"/>
+            <a:ext cx="384048" cy="384048"/>
+          </a:xfrm>
+          <a:prstGeom prst="ellipse">
+            <a:avLst/>
+          </a:prstGeom>
+          <a:solidFill>
+            <a:srgbClr val="468250"/>
+          </a:solidFill>
+          <a:ln>
+            <a:noFill/>
+          </a:ln>
+        </p:spPr>
+        <p:style>
+          <a:lnRef idx="1">
+            <a:schemeClr val="accent1"/>
+          </a:lnRef>
+          <a:fillRef idx="3">
+            <a:schemeClr val="accent1"/>
+          </a:fillRef>
+          <a:effectRef idx="2">
+            <a:schemeClr val="accent1"/>
+          </a:effectRef>
+          <a:fontRef idx="minor">
+            <a:schemeClr val="lt1"/>
+          </a:fontRef>
+        </p:style>
+        <p:txBody>
+          <a:bodyPr rtlCol="0" anchor="ctr"/>
+          <a:lstStyle/>
+          <a:p>
+            <a:pPr algn="ctr"/>
+          </a:p>
+        </p:txBody>
+      </p:sp>
+      <p:sp>
+        <p:nvSpPr>
+          <p:cNvPr id="15" name="TextBox 14"/>
           <p:cNvSpPr txBox="1"/>
           <p:nvPr/>
         </p:nvSpPr>
         <p:spPr>
           <a:xfrm>
-            <a:off x="1463040" y="2670048"/>
-            <a:ext cx="2103120" cy="502920"/>
+            <a:off x="2255824" y="2414016"/>
+            <a:ext cx="384048" cy="365760"/>
           </a:xfrm>
           <a:prstGeom prst="rect">
             <a:avLst/>
@@ -3836,33 +3922,33 @@
           </a:bodyPr>
           <a:lstStyle/>
           <a:p>
-            <a:pPr algn="r">
+            <a:pPr algn="ctr">
               <a:spcAft>
                 <a:spcPts val="1000"/>
               </a:spcAft>
             </a:pPr>
             <a:r>
-              <a:rPr sz="2200" b="1">
+              <a:rPr sz="1600" b="1">
                 <a:solidFill>
-                  <a:srgbClr val="468250"/>
+                  <a:srgbClr val="FFFFFF"/>
                 </a:solidFill>
                 <a:latin typeface="Microsoft YaHei"/>
               </a:rPr>
-              <a:t>文体</a:t>
-            </a:r>
-          </a:p>
-        </p:txBody>
-      </p:sp>
-      <p:sp>
-        <p:nvSpPr>
-          <p:cNvPr id="14" name="TextBox 13"/>
+              <a:t>2</a:t>
+            </a:r>
+          </a:p>
+        </p:txBody>
+      </p:sp>
+      <p:sp>
+        <p:nvSpPr>
+          <p:cNvPr id="16" name="TextBox 15"/>
           <p:cNvSpPr txBox="1"/>
           <p:nvPr/>
         </p:nvSpPr>
         <p:spPr>
           <a:xfrm>
-            <a:off x="3749039" y="2670048"/>
-            <a:ext cx="7132320" cy="685800"/>
+            <a:off x="2758744" y="2377440"/>
+            <a:ext cx="7772400" cy="502920"/>
           </a:xfrm>
           <a:prstGeom prst="rect">
             <a:avLst/>
@@ -3881,27 +3967,70 @@
               </a:spcAft>
             </a:pPr>
             <a:r>
-              <a:rPr sz="2200" b="0">
+              <a:rPr sz="2400" b="0">
                 <a:solidFill>
                   <a:srgbClr val="28462D"/>
                 </a:solidFill>
                 <a:latin typeface="Microsoft YaHei"/>
               </a:rPr>
-              <a:t>神话——用想象解释自然与人类起源</a:t>
-            </a:r>
-          </a:p>
-        </p:txBody>
-      </p:sp>
-      <p:sp>
-        <p:nvSpPr>
-          <p:cNvPr id="15" name="TextBox 14"/>
+              <a:t>比较古籍与课文，体会作者的想象与创造</a:t>
+            </a:r>
+          </a:p>
+        </p:txBody>
+      </p:sp>
+      <p:sp>
+        <p:nvSpPr>
+          <p:cNvPr id="17" name="Oval 16"/>
+          <p:cNvSpPr/>
+          <p:nvPr/>
+        </p:nvSpPr>
+        <p:spPr>
+          <a:xfrm>
+            <a:off x="2255824" y="2962656"/>
+            <a:ext cx="384048" cy="384048"/>
+          </a:xfrm>
+          <a:prstGeom prst="ellipse">
+            <a:avLst/>
+          </a:prstGeom>
+          <a:solidFill>
+            <a:srgbClr val="468250"/>
+          </a:solidFill>
+          <a:ln>
+            <a:noFill/>
+          </a:ln>
+        </p:spPr>
+        <p:style>
+          <a:lnRef idx="1">
+            <a:schemeClr val="accent1"/>
+          </a:lnRef>
+          <a:fillRef idx="3">
+            <a:schemeClr val="accent1"/>
+          </a:fillRef>
+          <a:effectRef idx="2">
+            <a:schemeClr val="accent1"/>
+          </a:effectRef>
+          <a:fontRef idx="minor">
+            <a:schemeClr val="lt1"/>
+          </a:fontRef>
+        </p:style>
+        <p:txBody>
+          <a:bodyPr rtlCol="0" anchor="ctr"/>
+          <a:lstStyle/>
+          <a:p>
+            <a:pPr algn="ctr"/>
+          </a:p>
+        </p:txBody>
+      </p:sp>
+      <p:sp>
+        <p:nvSpPr>
+          <p:cNvPr id="18" name="TextBox 17"/>
           <p:cNvSpPr txBox="1"/>
           <p:nvPr/>
         </p:nvSpPr>
         <p:spPr>
           <a:xfrm>
-            <a:off x="1463040" y="3419856"/>
-            <a:ext cx="2103120" cy="502920"/>
+            <a:off x="2255824" y="2980944"/>
+            <a:ext cx="384048" cy="365760"/>
           </a:xfrm>
           <a:prstGeom prst="rect">
             <a:avLst/>
@@ -3914,33 +4043,33 @@
           </a:bodyPr>
           <a:lstStyle/>
           <a:p>
-            <a:pPr algn="r">
+            <a:pPr algn="ctr">
               <a:spcAft>
                 <a:spcPts val="1000"/>
               </a:spcAft>
             </a:pPr>
             <a:r>
-              <a:rPr sz="2200" b="1">
+              <a:rPr sz="1600" b="1">
                 <a:solidFill>
-                  <a:srgbClr val="468250"/>
+                  <a:srgbClr val="FFFFFF"/>
                 </a:solidFill>
                 <a:latin typeface="Microsoft YaHei"/>
               </a:rPr>
-              <a:t>改写特点</a:t>
-            </a:r>
-          </a:p>
-        </p:txBody>
-      </p:sp>
-      <p:sp>
-        <p:nvSpPr>
-          <p:cNvPr id="16" name="TextBox 15"/>
+              <a:t>3</a:t>
+            </a:r>
+          </a:p>
+        </p:txBody>
+      </p:sp>
+      <p:sp>
+        <p:nvSpPr>
+          <p:cNvPr id="19" name="TextBox 18"/>
           <p:cNvSpPr txBox="1"/>
           <p:nvPr/>
         </p:nvSpPr>
         <p:spPr>
           <a:xfrm>
-            <a:off x="3749039" y="3419856"/>
-            <a:ext cx="7132320" cy="685800"/>
+            <a:off x="2758744" y="2944368"/>
+            <a:ext cx="7772400" cy="502920"/>
           </a:xfrm>
           <a:prstGeom prst="rect">
             <a:avLst/>
@@ -3959,91 +4088,13 @@
               </a:spcAft>
             </a:pPr>
             <a:r>
-              <a:rPr sz="2200" b="0">
+              <a:rPr sz="2400" b="0">
                 <a:solidFill>
                   <a:srgbClr val="28462D"/>
                 </a:solidFill>
                 <a:latin typeface="Microsoft YaHei"/>
               </a:rPr>
-              <a:t>在古籍记载基础上增删改写，赋予现代意识</a:t>
-            </a:r>
-          </a:p>
-        </p:txBody>
-      </p:sp>
-      <p:sp>
-        <p:nvSpPr>
-          <p:cNvPr id="17" name="TextBox 16"/>
-          <p:cNvSpPr txBox="1"/>
-          <p:nvPr/>
-        </p:nvSpPr>
-        <p:spPr>
-          <a:xfrm>
-            <a:off x="1463040" y="4169664"/>
-            <a:ext cx="2103120" cy="502920"/>
-          </a:xfrm>
-          <a:prstGeom prst="rect">
-            <a:avLst/>
-          </a:prstGeom>
-          <a:noFill/>
-        </p:spPr>
-        <p:txBody>
-          <a:bodyPr wrap="none">
-            <a:spAutoFit/>
-          </a:bodyPr>
-          <a:lstStyle/>
-          <a:p>
-            <a:pPr algn="r">
-              <a:spcAft>
-                <a:spcPts val="1000"/>
-              </a:spcAft>
-            </a:pPr>
-            <a:r>
-              <a:rPr sz="2200" b="1">
-                <a:solidFill>
-                  <a:srgbClr val="468250"/>
-                </a:solidFill>
-                <a:latin typeface="Microsoft YaHei"/>
-              </a:rPr>
-              <a:t>对比材料</a:t>
-            </a:r>
-          </a:p>
-        </p:txBody>
-      </p:sp>
-      <p:sp>
-        <p:nvSpPr>
-          <p:cNvPr id="18" name="TextBox 17"/>
-          <p:cNvSpPr txBox="1"/>
-          <p:nvPr/>
-        </p:nvSpPr>
-        <p:spPr>
-          <a:xfrm>
-            <a:off x="3749039" y="4169664"/>
-            <a:ext cx="7132320" cy="685800"/>
-          </a:xfrm>
-          <a:prstGeom prst="rect">
-            <a:avLst/>
-          </a:prstGeom>
-          <a:noFill/>
-        </p:spPr>
-        <p:txBody>
-          <a:bodyPr wrap="none">
-            <a:spAutoFit/>
-          </a:bodyPr>
-          <a:lstStyle/>
-          <a:p>
-            <a:pPr algn="l">
-              <a:spcAft>
-                <a:spcPts val="1000"/>
-              </a:spcAft>
-            </a:pPr>
-            <a:r>
-              <a:rPr sz="2200" b="0">
-                <a:solidFill>
-                  <a:srgbClr val="28462D"/>
-                </a:solidFill>
-                <a:latin typeface="Microsoft YaHei"/>
-              </a:rPr>
-              <a:t>教材「阅读提示」中的《风俗通》记载</a:t>
+              <a:t>感悟神话中蕴含的对生命与创造的礼赞</a:t>
             </a:r>
           </a:p>
         </p:txBody>
@@ -4189,7 +4240,7 @@
         </p:nvSpPr>
         <p:spPr>
           <a:xfrm>
-            <a:off x="4953304" y="502920"/>
+            <a:off x="4953304" y="1005840"/>
             <a:ext cx="2286000" cy="411480"/>
           </a:xfrm>
           <a:prstGeom prst="roundRect">
@@ -4232,7 +4283,7 @@
         </p:nvSpPr>
         <p:spPr>
           <a:xfrm>
-            <a:off x="4953304" y="521208"/>
+            <a:off x="4953304" y="1024128"/>
             <a:ext cx="2286000" cy="384048"/>
           </a:xfrm>
           <a:prstGeom prst="rect">
@@ -4258,7 +4309,7 @@
                 </a:solidFill>
                 <a:latin typeface="Microsoft YaHei"/>
               </a:rPr>
-              <a:t>情节笔记</a:t>
+              <a:t>想一想</a:t>
             </a:r>
           </a:p>
         </p:txBody>
@@ -4271,7 +4322,7 @@
         </p:nvSpPr>
         <p:spPr>
           <a:xfrm>
-            <a:off x="1371600" y="1051560"/>
+            <a:off x="1371600" y="1600200"/>
             <a:ext cx="9418320" cy="822960"/>
           </a:xfrm>
           <a:prstGeom prst="rect">
@@ -4291,13 +4342,13 @@
               </a:spcAft>
             </a:pPr>
             <a:r>
-              <a:rPr sz="3600" b="1">
+              <a:rPr sz="3200" b="1">
                 <a:solidFill>
                   <a:srgbClr val="468250"/>
                 </a:solidFill>
                 <a:latin typeface="Microsoft YaHei"/>
               </a:rPr>
-              <a:t>造人过程</a:t>
+              <a:t>为什么古人要想象一位女神来创造人类？</a:t>
             </a:r>
           </a:p>
         </p:txBody>
@@ -4310,7 +4361,7 @@
         </p:nvSpPr>
         <p:spPr>
           <a:xfrm>
-            <a:off x="3200400" y="1691640"/>
+            <a:off x="3200400" y="4389120"/>
             <a:ext cx="5760720" cy="27432"/>
           </a:xfrm>
           <a:prstGeom prst="rect">
@@ -4347,59 +4398,14 @@
       </p:sp>
       <p:sp>
         <p:nvSpPr>
-          <p:cNvPr id="10" name="Rounded Rectangle 9"/>
-          <p:cNvSpPr/>
-          <p:nvPr/>
-        </p:nvSpPr>
-        <p:spPr>
-          <a:xfrm>
-            <a:off x="1249984" y="1810512"/>
-            <a:ext cx="9692640" cy="3319272"/>
-          </a:xfrm>
-          <a:prstGeom prst="roundRect">
-            <a:avLst/>
-          </a:prstGeom>
-          <a:solidFill>
-            <a:srgbClr val="F8FCF5"/>
-          </a:solidFill>
-          <a:ln w="19050">
-            <a:solidFill>
-              <a:srgbClr val="A0C896"/>
-            </a:solidFill>
-          </a:ln>
-        </p:spPr>
-        <p:style>
-          <a:lnRef idx="1">
-            <a:schemeClr val="accent1"/>
-          </a:lnRef>
-          <a:fillRef idx="3">
-            <a:schemeClr val="accent1"/>
-          </a:fillRef>
-          <a:effectRef idx="2">
-            <a:schemeClr val="accent1"/>
-          </a:effectRef>
-          <a:fontRef idx="minor">
-            <a:schemeClr val="lt1"/>
-          </a:fontRef>
-        </p:style>
-        <p:txBody>
-          <a:bodyPr rtlCol="0" anchor="ctr"/>
-          <a:lstStyle/>
-          <a:p>
-            <a:pPr algn="ctr"/>
-          </a:p>
-        </p:txBody>
-      </p:sp>
-      <p:sp>
-        <p:nvSpPr>
-          <p:cNvPr id="11" name="TextBox 10"/>
+          <p:cNvPr id="10" name="TextBox 9"/>
           <p:cNvSpPr txBox="1"/>
           <p:nvPr/>
         </p:nvSpPr>
         <p:spPr>
           <a:xfrm>
-            <a:off x="1463040" y="1920240"/>
-            <a:ext cx="2103120" cy="502920"/>
+            <a:off x="1828800" y="4663440"/>
+            <a:ext cx="8503920" cy="914400"/>
           </a:xfrm>
           <a:prstGeom prst="rect">
             <a:avLst/>
@@ -4412,292 +4418,19 @@
           </a:bodyPr>
           <a:lstStyle/>
           <a:p>
-            <a:pPr algn="r">
+            <a:pPr algn="ctr">
               <a:spcAft>
                 <a:spcPts val="1000"/>
               </a:spcAft>
             </a:pPr>
             <a:r>
-              <a:rPr sz="2200" b="1">
+              <a:rPr sz="2200" b="0">
                 <a:solidFill>
                   <a:srgbClr val="468250"/>
                 </a:solidFill>
                 <a:latin typeface="Microsoft YaHei"/>
               </a:rPr>
-              <a:t>起因</a:t>
-            </a:r>
-          </a:p>
-        </p:txBody>
-      </p:sp>
-      <p:sp>
-        <p:nvSpPr>
-          <p:cNvPr id="12" name="TextBox 11"/>
-          <p:cNvSpPr txBox="1"/>
-          <p:nvPr/>
-        </p:nvSpPr>
-        <p:spPr>
-          <a:xfrm>
-            <a:off x="3749039" y="1920240"/>
-            <a:ext cx="7132320" cy="685800"/>
-          </a:xfrm>
-          <a:prstGeom prst="rect">
-            <a:avLst/>
-          </a:prstGeom>
-          <a:noFill/>
-        </p:spPr>
-        <p:txBody>
-          <a:bodyPr wrap="none">
-            <a:spAutoFit/>
-          </a:bodyPr>
-          <a:lstStyle/>
-          <a:p>
-            <a:pPr algn="l">
-              <a:spcAft>
-                <a:spcPts val="1000"/>
-              </a:spcAft>
-            </a:pPr>
-            <a:r>
-              <a:rPr sz="2200" b="0">
-                <a:solidFill>
-                  <a:srgbClr val="28462D"/>
-                </a:solidFill>
-                <a:latin typeface="Microsoft YaHei"/>
-              </a:rPr>
-              <a:t>女娲行走世间，感到孤独寂寞</a:t>
-            </a:r>
-          </a:p>
-        </p:txBody>
-      </p:sp>
-      <p:sp>
-        <p:nvSpPr>
-          <p:cNvPr id="13" name="TextBox 12"/>
-          <p:cNvSpPr txBox="1"/>
-          <p:nvPr/>
-        </p:nvSpPr>
-        <p:spPr>
-          <a:xfrm>
-            <a:off x="1463040" y="2670048"/>
-            <a:ext cx="2103120" cy="502920"/>
-          </a:xfrm>
-          <a:prstGeom prst="rect">
-            <a:avLst/>
-          </a:prstGeom>
-          <a:noFill/>
-        </p:spPr>
-        <p:txBody>
-          <a:bodyPr wrap="none">
-            <a:spAutoFit/>
-          </a:bodyPr>
-          <a:lstStyle/>
-          <a:p>
-            <a:pPr algn="r">
-              <a:spcAft>
-                <a:spcPts val="1000"/>
-              </a:spcAft>
-            </a:pPr>
-            <a:r>
-              <a:rPr sz="2200" b="1">
-                <a:solidFill>
-                  <a:srgbClr val="468250"/>
-                </a:solidFill>
-                <a:latin typeface="Microsoft YaHei"/>
-              </a:rPr>
-              <a:t>方法一</a:t>
-            </a:r>
-          </a:p>
-        </p:txBody>
-      </p:sp>
-      <p:sp>
-        <p:nvSpPr>
-          <p:cNvPr id="14" name="TextBox 13"/>
-          <p:cNvSpPr txBox="1"/>
-          <p:nvPr/>
-        </p:nvSpPr>
-        <p:spPr>
-          <a:xfrm>
-            <a:off x="3749039" y="2670048"/>
-            <a:ext cx="7132320" cy="685800"/>
-          </a:xfrm>
-          <a:prstGeom prst="rect">
-            <a:avLst/>
-          </a:prstGeom>
-          <a:noFill/>
-        </p:spPr>
-        <p:txBody>
-          <a:bodyPr wrap="none">
-            <a:spAutoFit/>
-          </a:bodyPr>
-          <a:lstStyle/>
-          <a:p>
-            <a:pPr algn="l">
-              <a:spcAft>
-                <a:spcPts val="1000"/>
-              </a:spcAft>
-            </a:pPr>
-            <a:r>
-              <a:rPr sz="2200" b="0">
-                <a:solidFill>
-                  <a:srgbClr val="28462D"/>
-                </a:solidFill>
-                <a:latin typeface="Microsoft YaHei"/>
-              </a:rPr>
-              <a:t>黄泥和水，揉成小泥人，泥人落地即活</a:t>
-            </a:r>
-          </a:p>
-        </p:txBody>
-      </p:sp>
-      <p:sp>
-        <p:nvSpPr>
-          <p:cNvPr id="15" name="TextBox 14"/>
-          <p:cNvSpPr txBox="1"/>
-          <p:nvPr/>
-        </p:nvSpPr>
-        <p:spPr>
-          <a:xfrm>
-            <a:off x="1463040" y="3419856"/>
-            <a:ext cx="2103120" cy="502920"/>
-          </a:xfrm>
-          <a:prstGeom prst="rect">
-            <a:avLst/>
-          </a:prstGeom>
-          <a:noFill/>
-        </p:spPr>
-        <p:txBody>
-          <a:bodyPr wrap="none">
-            <a:spAutoFit/>
-          </a:bodyPr>
-          <a:lstStyle/>
-          <a:p>
-            <a:pPr algn="r">
-              <a:spcAft>
-                <a:spcPts val="1000"/>
-              </a:spcAft>
-            </a:pPr>
-            <a:r>
-              <a:rPr sz="2200" b="1">
-                <a:solidFill>
-                  <a:srgbClr val="468250"/>
-                </a:solidFill>
-                <a:latin typeface="Microsoft YaHei"/>
-              </a:rPr>
-              <a:t>方法二</a:t>
-            </a:r>
-          </a:p>
-        </p:txBody>
-      </p:sp>
-      <p:sp>
-        <p:nvSpPr>
-          <p:cNvPr id="16" name="TextBox 15"/>
-          <p:cNvSpPr txBox="1"/>
-          <p:nvPr/>
-        </p:nvSpPr>
-        <p:spPr>
-          <a:xfrm>
-            <a:off x="3749039" y="3419856"/>
-            <a:ext cx="7132320" cy="685800"/>
-          </a:xfrm>
-          <a:prstGeom prst="rect">
-            <a:avLst/>
-          </a:prstGeom>
-          <a:noFill/>
-        </p:spPr>
-        <p:txBody>
-          <a:bodyPr wrap="none">
-            <a:spAutoFit/>
-          </a:bodyPr>
-          <a:lstStyle/>
-          <a:p>
-            <a:pPr algn="l">
-              <a:spcAft>
-                <a:spcPts val="1000"/>
-              </a:spcAft>
-            </a:pPr>
-            <a:r>
-              <a:rPr sz="2200" b="0">
-                <a:solidFill>
-                  <a:srgbClr val="28462D"/>
-                </a:solidFill>
-                <a:latin typeface="Microsoft YaHei"/>
-              </a:rPr>
-              <a:t>藤条蘸泥浆挥洒，溅落的泥点也变成人</a:t>
-            </a:r>
-          </a:p>
-        </p:txBody>
-      </p:sp>
-      <p:sp>
-        <p:nvSpPr>
-          <p:cNvPr id="17" name="TextBox 16"/>
-          <p:cNvSpPr txBox="1"/>
-          <p:nvPr/>
-        </p:nvSpPr>
-        <p:spPr>
-          <a:xfrm>
-            <a:off x="1463040" y="4169664"/>
-            <a:ext cx="2103120" cy="502920"/>
-          </a:xfrm>
-          <a:prstGeom prst="rect">
-            <a:avLst/>
-          </a:prstGeom>
-          <a:noFill/>
-        </p:spPr>
-        <p:txBody>
-          <a:bodyPr wrap="none">
-            <a:spAutoFit/>
-          </a:bodyPr>
-          <a:lstStyle/>
-          <a:p>
-            <a:pPr algn="r">
-              <a:spcAft>
-                <a:spcPts val="1000"/>
-              </a:spcAft>
-            </a:pPr>
-            <a:r>
-              <a:rPr sz="2200" b="1">
-                <a:solidFill>
-                  <a:srgbClr val="468250"/>
-                </a:solidFill>
-                <a:latin typeface="Microsoft YaHei"/>
-              </a:rPr>
-              <a:t>结果</a:t>
-            </a:r>
-          </a:p>
-        </p:txBody>
-      </p:sp>
-      <p:sp>
-        <p:nvSpPr>
-          <p:cNvPr id="18" name="TextBox 17"/>
-          <p:cNvSpPr txBox="1"/>
-          <p:nvPr/>
-        </p:nvSpPr>
-        <p:spPr>
-          <a:xfrm>
-            <a:off x="3749039" y="4169664"/>
-            <a:ext cx="7132320" cy="685800"/>
-          </a:xfrm>
-          <a:prstGeom prst="rect">
-            <a:avLst/>
-          </a:prstGeom>
-          <a:noFill/>
-        </p:spPr>
-        <p:txBody>
-          <a:bodyPr wrap="none">
-            <a:spAutoFit/>
-          </a:bodyPr>
-          <a:lstStyle/>
-          <a:p>
-            <a:pPr algn="l">
-              <a:spcAft>
-                <a:spcPts val="1000"/>
-              </a:spcAft>
-            </a:pPr>
-            <a:r>
-              <a:rPr sz="2200" b="0">
-                <a:solidFill>
-                  <a:srgbClr val="28462D"/>
-                </a:solidFill>
-                <a:latin typeface="Microsoft YaHei"/>
-              </a:rPr>
-              <a:t>建立婚姻制度，让人类繁衍生息</a:t>
+              <a:t>这是对「人从哪里来、为何需要同伴」的诗意追问</a:t>
             </a:r>
           </a:p>
         </p:txBody>
@@ -4912,7 +4645,7 @@
                 </a:solidFill>
                 <a:latin typeface="Microsoft YaHei"/>
               </a:rPr>
-              <a:t>写法笔记</a:t>
+              <a:t>追踪创造</a:t>
             </a:r>
           </a:p>
         </p:txBody>
@@ -4925,7 +4658,7 @@
         </p:nvSpPr>
         <p:spPr>
           <a:xfrm>
-            <a:off x="1371600" y="1051560"/>
+            <a:off x="1371600" y="960120"/>
             <a:ext cx="9418320" cy="822960"/>
           </a:xfrm>
           <a:prstGeom prst="rect">
@@ -4951,7 +4684,7 @@
                 </a:solidFill>
                 <a:latin typeface="Microsoft YaHei"/>
               </a:rPr>
-              <a:t>想象特点</a:t>
+              <a:t>学习任务一</a:t>
             </a:r>
           </a:p>
         </p:txBody>
@@ -4964,7 +4697,7 @@
         </p:nvSpPr>
         <p:spPr>
           <a:xfrm>
-            <a:off x="3200400" y="1691640"/>
+            <a:off x="3200400" y="1600200"/>
             <a:ext cx="5760720" cy="27432"/>
           </a:xfrm>
           <a:prstGeom prst="rect">
@@ -5007,8 +4740,8 @@
         </p:nvSpPr>
         <p:spPr>
           <a:xfrm>
-            <a:off x="1249984" y="1810512"/>
-            <a:ext cx="9692640" cy="3319272"/>
+            <a:off x="1295704" y="1645920"/>
+            <a:ext cx="9601200" cy="2240280"/>
           </a:xfrm>
           <a:prstGeom prst="roundRect">
             <a:avLst/>
@@ -5046,14 +4779,57 @@
       </p:sp>
       <p:sp>
         <p:nvSpPr>
-          <p:cNvPr id="11" name="TextBox 10"/>
+          <p:cNvPr id="11" name="Oval 10"/>
+          <p:cNvSpPr/>
+          <p:nvPr/>
+        </p:nvSpPr>
+        <p:spPr>
+          <a:xfrm>
+            <a:off x="2255824" y="1828800"/>
+            <a:ext cx="384048" cy="384048"/>
+          </a:xfrm>
+          <a:prstGeom prst="ellipse">
+            <a:avLst/>
+          </a:prstGeom>
+          <a:solidFill>
+            <a:srgbClr val="468250"/>
+          </a:solidFill>
+          <a:ln>
+            <a:noFill/>
+          </a:ln>
+        </p:spPr>
+        <p:style>
+          <a:lnRef idx="1">
+            <a:schemeClr val="accent1"/>
+          </a:lnRef>
+          <a:fillRef idx="3">
+            <a:schemeClr val="accent1"/>
+          </a:fillRef>
+          <a:effectRef idx="2">
+            <a:schemeClr val="accent1"/>
+          </a:effectRef>
+          <a:fontRef idx="minor">
+            <a:schemeClr val="lt1"/>
+          </a:fontRef>
+        </p:style>
+        <p:txBody>
+          <a:bodyPr rtlCol="0" anchor="ctr"/>
+          <a:lstStyle/>
+          <a:p>
+            <a:pPr algn="ctr"/>
+          </a:p>
+        </p:txBody>
+      </p:sp>
+      <p:sp>
+        <p:nvSpPr>
+          <p:cNvPr id="12" name="TextBox 11"/>
           <p:cNvSpPr txBox="1"/>
           <p:nvPr/>
         </p:nvSpPr>
         <p:spPr>
           <a:xfrm>
-            <a:off x="1463040" y="1920240"/>
-            <a:ext cx="2103120" cy="502920"/>
+            <a:off x="2255824" y="1847088"/>
+            <a:ext cx="384048" cy="365760"/>
           </a:xfrm>
           <a:prstGeom prst="rect">
             <a:avLst/>
@@ -5066,33 +4842,33 @@
           </a:bodyPr>
           <a:lstStyle/>
           <a:p>
-            <a:pPr algn="r">
+            <a:pPr algn="ctr">
               <a:spcAft>
                 <a:spcPts val="1000"/>
               </a:spcAft>
             </a:pPr>
             <a:r>
-              <a:rPr sz="2200" b="1">
+              <a:rPr sz="1600" b="1">
                 <a:solidFill>
-                  <a:srgbClr val="468250"/>
+                  <a:srgbClr val="FFFFFF"/>
                 </a:solidFill>
                 <a:latin typeface="Microsoft YaHei"/>
               </a:rPr>
-              <a:t>具体</a:t>
-            </a:r>
-          </a:p>
-        </p:txBody>
-      </p:sp>
-      <p:sp>
-        <p:nvSpPr>
-          <p:cNvPr id="12" name="TextBox 11"/>
+              <a:t>1</a:t>
+            </a:r>
+          </a:p>
+        </p:txBody>
+      </p:sp>
+      <p:sp>
+        <p:nvSpPr>
+          <p:cNvPr id="13" name="TextBox 12"/>
           <p:cNvSpPr txBox="1"/>
           <p:nvPr/>
         </p:nvSpPr>
         <p:spPr>
           <a:xfrm>
-            <a:off x="3749039" y="1920240"/>
-            <a:ext cx="7132320" cy="685800"/>
+            <a:off x="2758744" y="1810512"/>
+            <a:ext cx="7772400" cy="502920"/>
           </a:xfrm>
           <a:prstGeom prst="rect">
             <a:avLst/>
@@ -5111,27 +4887,70 @@
               </a:spcAft>
             </a:pPr>
             <a:r>
-              <a:rPr sz="2200" b="0">
+              <a:rPr sz="2400" b="0">
                 <a:solidFill>
                   <a:srgbClr val="28462D"/>
                 </a:solidFill>
                 <a:latin typeface="Microsoft YaHei"/>
               </a:rPr>
-              <a:t>池水照影见自己面容→想到造同类</a:t>
-            </a:r>
-          </a:p>
-        </p:txBody>
-      </p:sp>
-      <p:sp>
-        <p:nvSpPr>
-          <p:cNvPr id="13" name="TextBox 12"/>
+              <a:t>给女娲行动排序：孤独→揉泥→挥洒→繁衍</a:t>
+            </a:r>
+          </a:p>
+        </p:txBody>
+      </p:sp>
+      <p:sp>
+        <p:nvSpPr>
+          <p:cNvPr id="14" name="Oval 13"/>
+          <p:cNvSpPr/>
+          <p:nvPr/>
+        </p:nvSpPr>
+        <p:spPr>
+          <a:xfrm>
+            <a:off x="2255824" y="2395728"/>
+            <a:ext cx="384048" cy="384048"/>
+          </a:xfrm>
+          <a:prstGeom prst="ellipse">
+            <a:avLst/>
+          </a:prstGeom>
+          <a:solidFill>
+            <a:srgbClr val="468250"/>
+          </a:solidFill>
+          <a:ln>
+            <a:noFill/>
+          </a:ln>
+        </p:spPr>
+        <p:style>
+          <a:lnRef idx="1">
+            <a:schemeClr val="accent1"/>
+          </a:lnRef>
+          <a:fillRef idx="3">
+            <a:schemeClr val="accent1"/>
+          </a:fillRef>
+          <a:effectRef idx="2">
+            <a:schemeClr val="accent1"/>
+          </a:effectRef>
+          <a:fontRef idx="minor">
+            <a:schemeClr val="lt1"/>
+          </a:fontRef>
+        </p:style>
+        <p:txBody>
+          <a:bodyPr rtlCol="0" anchor="ctr"/>
+          <a:lstStyle/>
+          <a:p>
+            <a:pPr algn="ctr"/>
+          </a:p>
+        </p:txBody>
+      </p:sp>
+      <p:sp>
+        <p:nvSpPr>
+          <p:cNvPr id="15" name="TextBox 14"/>
           <p:cNvSpPr txBox="1"/>
           <p:nvPr/>
         </p:nvSpPr>
         <p:spPr>
           <a:xfrm>
-            <a:off x="1463040" y="2670048"/>
-            <a:ext cx="2103120" cy="502920"/>
+            <a:off x="2255824" y="2414016"/>
+            <a:ext cx="384048" cy="365760"/>
           </a:xfrm>
           <a:prstGeom prst="rect">
             <a:avLst/>
@@ -5144,33 +4963,33 @@
           </a:bodyPr>
           <a:lstStyle/>
           <a:p>
-            <a:pPr algn="r">
+            <a:pPr algn="ctr">
               <a:spcAft>
                 <a:spcPts val="1000"/>
               </a:spcAft>
             </a:pPr>
             <a:r>
-              <a:rPr sz="2200" b="1">
+              <a:rPr sz="1600" b="1">
                 <a:solidFill>
-                  <a:srgbClr val="468250"/>
+                  <a:srgbClr val="FFFFFF"/>
                 </a:solidFill>
                 <a:latin typeface="Microsoft YaHei"/>
               </a:rPr>
-              <a:t>生动</a:t>
-            </a:r>
-          </a:p>
-        </p:txBody>
-      </p:sp>
-      <p:sp>
-        <p:nvSpPr>
-          <p:cNvPr id="14" name="TextBox 13"/>
+              <a:t>2</a:t>
+            </a:r>
+          </a:p>
+        </p:txBody>
+      </p:sp>
+      <p:sp>
+        <p:nvSpPr>
+          <p:cNvPr id="16" name="TextBox 15"/>
           <p:cNvSpPr txBox="1"/>
           <p:nvPr/>
         </p:nvSpPr>
         <p:spPr>
           <a:xfrm>
-            <a:off x="3749039" y="2670048"/>
-            <a:ext cx="7132320" cy="685800"/>
+            <a:off x="2758744" y="2377440"/>
+            <a:ext cx="7772400" cy="502920"/>
           </a:xfrm>
           <a:prstGeom prst="rect">
             <a:avLst/>
@@ -5189,27 +5008,70 @@
               </a:spcAft>
             </a:pPr>
             <a:r>
-              <a:rPr sz="2200" b="0">
+              <a:rPr sz="2400" b="0">
                 <a:solidFill>
                   <a:srgbClr val="28462D"/>
                 </a:solidFill>
                 <a:latin typeface="Microsoft YaHei"/>
               </a:rPr>
-              <a:t>「藤条一挥，满天泥浆洒落」画面感强</a:t>
-            </a:r>
-          </a:p>
-        </p:txBody>
-      </p:sp>
-      <p:sp>
-        <p:nvSpPr>
-          <p:cNvPr id="15" name="TextBox 14"/>
+              <a:t>比较两种造人方法的不同</a:t>
+            </a:r>
+          </a:p>
+        </p:txBody>
+      </p:sp>
+      <p:sp>
+        <p:nvSpPr>
+          <p:cNvPr id="17" name="Oval 16"/>
+          <p:cNvSpPr/>
+          <p:nvPr/>
+        </p:nvSpPr>
+        <p:spPr>
+          <a:xfrm>
+            <a:off x="2255824" y="2962656"/>
+            <a:ext cx="384048" cy="384048"/>
+          </a:xfrm>
+          <a:prstGeom prst="ellipse">
+            <a:avLst/>
+          </a:prstGeom>
+          <a:solidFill>
+            <a:srgbClr val="468250"/>
+          </a:solidFill>
+          <a:ln>
+            <a:noFill/>
+          </a:ln>
+        </p:spPr>
+        <p:style>
+          <a:lnRef idx="1">
+            <a:schemeClr val="accent1"/>
+          </a:lnRef>
+          <a:fillRef idx="3">
+            <a:schemeClr val="accent1"/>
+          </a:fillRef>
+          <a:effectRef idx="2">
+            <a:schemeClr val="accent1"/>
+          </a:effectRef>
+          <a:fontRef idx="minor">
+            <a:schemeClr val="lt1"/>
+          </a:fontRef>
+        </p:style>
+        <p:txBody>
+          <a:bodyPr rtlCol="0" anchor="ctr"/>
+          <a:lstStyle/>
+          <a:p>
+            <a:pPr algn="ctr"/>
+          </a:p>
+        </p:txBody>
+      </p:sp>
+      <p:sp>
+        <p:nvSpPr>
+          <p:cNvPr id="18" name="TextBox 17"/>
           <p:cNvSpPr txBox="1"/>
           <p:nvPr/>
         </p:nvSpPr>
         <p:spPr>
           <a:xfrm>
-            <a:off x="1463040" y="3419856"/>
-            <a:ext cx="2103120" cy="502920"/>
+            <a:off x="2255824" y="2980944"/>
+            <a:ext cx="384048" cy="365760"/>
           </a:xfrm>
           <a:prstGeom prst="rect">
             <a:avLst/>
@@ -5222,33 +5084,33 @@
           </a:bodyPr>
           <a:lstStyle/>
           <a:p>
-            <a:pPr algn="r">
+            <a:pPr algn="ctr">
               <a:spcAft>
                 <a:spcPts val="1000"/>
               </a:spcAft>
             </a:pPr>
             <a:r>
-              <a:rPr sz="2200" b="1">
+              <a:rPr sz="1600" b="1">
                 <a:solidFill>
-                  <a:srgbClr val="468250"/>
+                  <a:srgbClr val="FFFFFF"/>
                 </a:solidFill>
                 <a:latin typeface="Microsoft YaHei"/>
               </a:rPr>
-              <a:t>温暖</a:t>
-            </a:r>
-          </a:p>
-        </p:txBody>
-      </p:sp>
-      <p:sp>
-        <p:nvSpPr>
-          <p:cNvPr id="16" name="TextBox 15"/>
+              <a:t>3</a:t>
+            </a:r>
+          </a:p>
+        </p:txBody>
+      </p:sp>
+      <p:sp>
+        <p:nvSpPr>
+          <p:cNvPr id="19" name="TextBox 18"/>
           <p:cNvSpPr txBox="1"/>
           <p:nvPr/>
         </p:nvSpPr>
         <p:spPr>
           <a:xfrm>
-            <a:off x="3749039" y="3419856"/>
-            <a:ext cx="7132320" cy="685800"/>
+            <a:off x="2758744" y="2944368"/>
+            <a:ext cx="7772400" cy="502920"/>
           </a:xfrm>
           <a:prstGeom prst="rect">
             <a:avLst/>
@@ -5267,91 +5129,13 @@
               </a:spcAft>
             </a:pPr>
             <a:r>
-              <a:rPr sz="2200" b="0">
+              <a:rPr sz="2400" b="0">
                 <a:solidFill>
                   <a:srgbClr val="28462D"/>
                 </a:solidFill>
                 <a:latin typeface="Microsoft YaHei"/>
               </a:rPr>
-              <a:t>造人后的疲倦、喜悦，赋予神以人的情感</a:t>
-            </a:r>
-          </a:p>
-        </p:txBody>
-      </p:sp>
-      <p:sp>
-        <p:nvSpPr>
-          <p:cNvPr id="17" name="TextBox 16"/>
-          <p:cNvSpPr txBox="1"/>
-          <p:nvPr/>
-        </p:nvSpPr>
-        <p:spPr>
-          <a:xfrm>
-            <a:off x="1463040" y="4169664"/>
-            <a:ext cx="2103120" cy="502920"/>
-          </a:xfrm>
-          <a:prstGeom prst="rect">
-            <a:avLst/>
-          </a:prstGeom>
-          <a:noFill/>
-        </p:spPr>
-        <p:txBody>
-          <a:bodyPr wrap="none">
-            <a:spAutoFit/>
-          </a:bodyPr>
-          <a:lstStyle/>
-          <a:p>
-            <a:pPr algn="r">
-              <a:spcAft>
-                <a:spcPts val="1000"/>
-              </a:spcAft>
-            </a:pPr>
-            <a:r>
-              <a:rPr sz="2200" b="1">
-                <a:solidFill>
-                  <a:srgbClr val="468250"/>
-                </a:solidFill>
-                <a:latin typeface="Microsoft YaHei"/>
-              </a:rPr>
-              <a:t>规律</a:t>
-            </a:r>
-          </a:p>
-        </p:txBody>
-      </p:sp>
-      <p:sp>
-        <p:nvSpPr>
-          <p:cNvPr id="18" name="TextBox 17"/>
-          <p:cNvSpPr txBox="1"/>
-          <p:nvPr/>
-        </p:nvSpPr>
-        <p:spPr>
-          <a:xfrm>
-            <a:off x="3749039" y="4169664"/>
-            <a:ext cx="7132320" cy="685800"/>
-          </a:xfrm>
-          <a:prstGeom prst="rect">
-            <a:avLst/>
-          </a:prstGeom>
-          <a:noFill/>
-        </p:spPr>
-        <p:txBody>
-          <a:bodyPr wrap="none">
-            <a:spAutoFit/>
-          </a:bodyPr>
-          <a:lstStyle/>
-          <a:p>
-            <a:pPr algn="l">
-              <a:spcAft>
-                <a:spcPts val="1000"/>
-              </a:spcAft>
-            </a:pPr>
-            <a:r>
-              <a:rPr sz="2200" b="0">
-                <a:solidFill>
-                  <a:srgbClr val="28462D"/>
-                </a:solidFill>
-                <a:latin typeface="Microsoft YaHei"/>
-              </a:rPr>
-              <a:t>想象基于生活经验（和泥、洒水），又超越现实</a:t>
+              <a:t>复述：从孤独到热闹的过程</a:t>
             </a:r>
           </a:p>
         </p:txBody>
@@ -5566,7 +5350,7 @@
                 </a:solidFill>
                 <a:latin typeface="Microsoft YaHei"/>
               </a:rPr>
-              <a:t>主题笔记</a:t>
+              <a:t>比较阅读</a:t>
             </a:r>
           </a:p>
         </p:txBody>
@@ -5579,7 +5363,7 @@
         </p:nvSpPr>
         <p:spPr>
           <a:xfrm>
-            <a:off x="1371600" y="1051560"/>
+            <a:off x="1371600" y="960120"/>
             <a:ext cx="9418320" cy="822960"/>
           </a:xfrm>
           <a:prstGeom prst="rect">
@@ -5605,7 +5389,7 @@
                 </a:solidFill>
                 <a:latin typeface="Microsoft YaHei"/>
               </a:rPr>
-              <a:t>比较阅读</a:t>
+              <a:t>学习任务二</a:t>
             </a:r>
           </a:p>
         </p:txBody>
@@ -5618,7 +5402,7 @@
         </p:nvSpPr>
         <p:spPr>
           <a:xfrm>
-            <a:off x="3200400" y="1691640"/>
+            <a:off x="3200400" y="1600200"/>
             <a:ext cx="5760720" cy="27432"/>
           </a:xfrm>
           <a:prstGeom prst="rect">
@@ -5661,8 +5445,8 @@
         </p:nvSpPr>
         <p:spPr>
           <a:xfrm>
-            <a:off x="1249984" y="1810512"/>
-            <a:ext cx="9692640" cy="3319272"/>
+            <a:off x="1295704" y="1645920"/>
+            <a:ext cx="9601200" cy="2240280"/>
           </a:xfrm>
           <a:prstGeom prst="roundRect">
             <a:avLst/>
@@ -5700,14 +5484,57 @@
       </p:sp>
       <p:sp>
         <p:nvSpPr>
-          <p:cNvPr id="11" name="TextBox 10"/>
+          <p:cNvPr id="11" name="Oval 10"/>
+          <p:cNvSpPr/>
+          <p:nvPr/>
+        </p:nvSpPr>
+        <p:spPr>
+          <a:xfrm>
+            <a:off x="2255824" y="1828800"/>
+            <a:ext cx="384048" cy="384048"/>
+          </a:xfrm>
+          <a:prstGeom prst="ellipse">
+            <a:avLst/>
+          </a:prstGeom>
+          <a:solidFill>
+            <a:srgbClr val="468250"/>
+          </a:solidFill>
+          <a:ln>
+            <a:noFill/>
+          </a:ln>
+        </p:spPr>
+        <p:style>
+          <a:lnRef idx="1">
+            <a:schemeClr val="accent1"/>
+          </a:lnRef>
+          <a:fillRef idx="3">
+            <a:schemeClr val="accent1"/>
+          </a:fillRef>
+          <a:effectRef idx="2">
+            <a:schemeClr val="accent1"/>
+          </a:effectRef>
+          <a:fontRef idx="minor">
+            <a:schemeClr val="lt1"/>
+          </a:fontRef>
+        </p:style>
+        <p:txBody>
+          <a:bodyPr rtlCol="0" anchor="ctr"/>
+          <a:lstStyle/>
+          <a:p>
+            <a:pPr algn="ctr"/>
+          </a:p>
+        </p:txBody>
+      </p:sp>
+      <p:sp>
+        <p:nvSpPr>
+          <p:cNvPr id="12" name="TextBox 11"/>
           <p:cNvSpPr txBox="1"/>
           <p:nvPr/>
         </p:nvSpPr>
         <p:spPr>
           <a:xfrm>
-            <a:off x="1463040" y="1920240"/>
-            <a:ext cx="2103120" cy="502920"/>
+            <a:off x="2255824" y="1847088"/>
+            <a:ext cx="384048" cy="365760"/>
           </a:xfrm>
           <a:prstGeom prst="rect">
             <a:avLst/>
@@ -5720,33 +5547,33 @@
           </a:bodyPr>
           <a:lstStyle/>
           <a:p>
-            <a:pPr algn="r">
+            <a:pPr algn="ctr">
               <a:spcAft>
                 <a:spcPts val="1000"/>
               </a:spcAft>
             </a:pPr>
             <a:r>
-              <a:rPr sz="2200" b="1">
+              <a:rPr sz="1600" b="1">
                 <a:solidFill>
-                  <a:srgbClr val="468250"/>
+                  <a:srgbClr val="FFFFFF"/>
                 </a:solidFill>
                 <a:latin typeface="Microsoft YaHei"/>
               </a:rPr>
-              <a:t>《风俗通》</a:t>
-            </a:r>
-          </a:p>
-        </p:txBody>
-      </p:sp>
-      <p:sp>
-        <p:nvSpPr>
-          <p:cNvPr id="12" name="TextBox 11"/>
+              <a:t>1</a:t>
+            </a:r>
+          </a:p>
+        </p:txBody>
+      </p:sp>
+      <p:sp>
+        <p:nvSpPr>
+          <p:cNvPr id="13" name="TextBox 12"/>
           <p:cNvSpPr txBox="1"/>
           <p:nvPr/>
         </p:nvSpPr>
         <p:spPr>
           <a:xfrm>
-            <a:off x="3749039" y="1920240"/>
-            <a:ext cx="7132320" cy="685800"/>
+            <a:off x="2758744" y="1810512"/>
+            <a:ext cx="7772400" cy="502920"/>
           </a:xfrm>
           <a:prstGeom prst="rect">
             <a:avLst/>
@@ -5765,27 +5592,70 @@
               </a:spcAft>
             </a:pPr>
             <a:r>
-              <a:rPr sz="2200" b="0">
+              <a:rPr sz="2400" b="0">
                 <a:solidFill>
                   <a:srgbClr val="28462D"/>
                 </a:solidFill>
                 <a:latin typeface="Microsoft YaHei"/>
               </a:rPr>
-              <a:t>记载简洁，重在说明造人方法</a:t>
-            </a:r>
-          </a:p>
-        </p:txBody>
-      </p:sp>
-      <p:sp>
-        <p:nvSpPr>
-          <p:cNvPr id="13" name="TextBox 12"/>
+              <a:t>阅读《风俗通》记载，完成「古籍与课文」比较表</a:t>
+            </a:r>
+          </a:p>
+        </p:txBody>
+      </p:sp>
+      <p:sp>
+        <p:nvSpPr>
+          <p:cNvPr id="14" name="Oval 13"/>
+          <p:cNvSpPr/>
+          <p:nvPr/>
+        </p:nvSpPr>
+        <p:spPr>
+          <a:xfrm>
+            <a:off x="2255824" y="2395728"/>
+            <a:ext cx="384048" cy="384048"/>
+          </a:xfrm>
+          <a:prstGeom prst="ellipse">
+            <a:avLst/>
+          </a:prstGeom>
+          <a:solidFill>
+            <a:srgbClr val="468250"/>
+          </a:solidFill>
+          <a:ln>
+            <a:noFill/>
+          </a:ln>
+        </p:spPr>
+        <p:style>
+          <a:lnRef idx="1">
+            <a:schemeClr val="accent1"/>
+          </a:lnRef>
+          <a:fillRef idx="3">
+            <a:schemeClr val="accent1"/>
+          </a:fillRef>
+          <a:effectRef idx="2">
+            <a:schemeClr val="accent1"/>
+          </a:effectRef>
+          <a:fontRef idx="minor">
+            <a:schemeClr val="lt1"/>
+          </a:fontRef>
+        </p:style>
+        <p:txBody>
+          <a:bodyPr rtlCol="0" anchor="ctr"/>
+          <a:lstStyle/>
+          <a:p>
+            <a:pPr algn="ctr"/>
+          </a:p>
+        </p:txBody>
+      </p:sp>
+      <p:sp>
+        <p:nvSpPr>
+          <p:cNvPr id="15" name="TextBox 14"/>
           <p:cNvSpPr txBox="1"/>
           <p:nvPr/>
         </p:nvSpPr>
         <p:spPr>
           <a:xfrm>
-            <a:off x="1463040" y="2670048"/>
-            <a:ext cx="2103120" cy="502920"/>
+            <a:off x="2255824" y="2414016"/>
+            <a:ext cx="384048" cy="365760"/>
           </a:xfrm>
           <a:prstGeom prst="rect">
             <a:avLst/>
@@ -5798,33 +5668,33 @@
           </a:bodyPr>
           <a:lstStyle/>
           <a:p>
-            <a:pPr algn="r">
+            <a:pPr algn="ctr">
               <a:spcAft>
                 <a:spcPts val="1000"/>
               </a:spcAft>
             </a:pPr>
             <a:r>
-              <a:rPr sz="2200" b="1">
+              <a:rPr sz="1600" b="1">
                 <a:solidFill>
-                  <a:srgbClr val="468250"/>
+                  <a:srgbClr val="FFFFFF"/>
                 </a:solidFill>
                 <a:latin typeface="Microsoft YaHei"/>
               </a:rPr>
-              <a:t>课文</a:t>
-            </a:r>
-          </a:p>
-        </p:txBody>
-      </p:sp>
-      <p:sp>
-        <p:nvSpPr>
-          <p:cNvPr id="14" name="TextBox 13"/>
+              <a:t>2</a:t>
+            </a:r>
+          </a:p>
+        </p:txBody>
+      </p:sp>
+      <p:sp>
+        <p:nvSpPr>
+          <p:cNvPr id="16" name="TextBox 15"/>
           <p:cNvSpPr txBox="1"/>
           <p:nvPr/>
         </p:nvSpPr>
         <p:spPr>
           <a:xfrm>
-            <a:off x="3749039" y="2670048"/>
-            <a:ext cx="7132320" cy="685800"/>
+            <a:off x="2758744" y="2377440"/>
+            <a:ext cx="7772400" cy="502920"/>
           </a:xfrm>
           <a:prstGeom prst="rect">
             <a:avLst/>
@@ -5843,27 +5713,70 @@
               </a:spcAft>
             </a:pPr>
             <a:r>
-              <a:rPr sz="2200" b="0">
+              <a:rPr sz="2400" b="0">
                 <a:solidFill>
                   <a:srgbClr val="28462D"/>
                 </a:solidFill>
                 <a:latin typeface="Microsoft YaHei"/>
               </a:rPr>
-              <a:t>增加孤独心理、造人细节、情感描写</a:t>
-            </a:r>
-          </a:p>
-        </p:txBody>
-      </p:sp>
-      <p:sp>
-        <p:nvSpPr>
-          <p:cNvPr id="15" name="TextBox 14"/>
+              <a:t>细读池水照影、黄泥捏人、藤条挥洒等画面</a:t>
+            </a:r>
+          </a:p>
+        </p:txBody>
+      </p:sp>
+      <p:sp>
+        <p:nvSpPr>
+          <p:cNvPr id="17" name="Oval 16"/>
+          <p:cNvSpPr/>
+          <p:nvPr/>
+        </p:nvSpPr>
+        <p:spPr>
+          <a:xfrm>
+            <a:off x="2255824" y="2962656"/>
+            <a:ext cx="384048" cy="384048"/>
+          </a:xfrm>
+          <a:prstGeom prst="ellipse">
+            <a:avLst/>
+          </a:prstGeom>
+          <a:solidFill>
+            <a:srgbClr val="468250"/>
+          </a:solidFill>
+          <a:ln>
+            <a:noFill/>
+          </a:ln>
+        </p:spPr>
+        <p:style>
+          <a:lnRef idx="1">
+            <a:schemeClr val="accent1"/>
+          </a:lnRef>
+          <a:fillRef idx="3">
+            <a:schemeClr val="accent1"/>
+          </a:fillRef>
+          <a:effectRef idx="2">
+            <a:schemeClr val="accent1"/>
+          </a:effectRef>
+          <a:fontRef idx="minor">
+            <a:schemeClr val="lt1"/>
+          </a:fontRef>
+        </p:style>
+        <p:txBody>
+          <a:bodyPr rtlCol="0" anchor="ctr"/>
+          <a:lstStyle/>
+          <a:p>
+            <a:pPr algn="ctr"/>
+          </a:p>
+        </p:txBody>
+      </p:sp>
+      <p:sp>
+        <p:nvSpPr>
+          <p:cNvPr id="18" name="TextBox 17"/>
           <p:cNvSpPr txBox="1"/>
           <p:nvPr/>
         </p:nvSpPr>
         <p:spPr>
           <a:xfrm>
-            <a:off x="1463040" y="3419856"/>
-            <a:ext cx="2103120" cy="502920"/>
+            <a:off x="2255824" y="2980944"/>
+            <a:ext cx="384048" cy="365760"/>
           </a:xfrm>
           <a:prstGeom prst="rect">
             <a:avLst/>
@@ -5876,33 +5789,33 @@
           </a:bodyPr>
           <a:lstStyle/>
           <a:p>
-            <a:pPr algn="r">
+            <a:pPr algn="ctr">
               <a:spcAft>
                 <a:spcPts val="1000"/>
               </a:spcAft>
             </a:pPr>
             <a:r>
-              <a:rPr sz="2200" b="1">
+              <a:rPr sz="1600" b="1">
                 <a:solidFill>
-                  <a:srgbClr val="468250"/>
+                  <a:srgbClr val="FFFFFF"/>
                 </a:solidFill>
                 <a:latin typeface="Microsoft YaHei"/>
               </a:rPr>
-              <a:t>改写意图</a:t>
-            </a:r>
-          </a:p>
-        </p:txBody>
-      </p:sp>
-      <p:sp>
-        <p:nvSpPr>
-          <p:cNvPr id="16" name="TextBox 15"/>
+              <a:t>3</a:t>
+            </a:r>
+          </a:p>
+        </p:txBody>
+      </p:sp>
+      <p:sp>
+        <p:nvSpPr>
+          <p:cNvPr id="19" name="TextBox 18"/>
           <p:cNvSpPr txBox="1"/>
           <p:nvPr/>
         </p:nvSpPr>
         <p:spPr>
           <a:xfrm>
-            <a:off x="3749039" y="3419856"/>
-            <a:ext cx="7132320" cy="685800"/>
+            <a:off x="2758744" y="2944368"/>
+            <a:ext cx="7772400" cy="502920"/>
           </a:xfrm>
           <a:prstGeom prst="rect">
             <a:avLst/>
@@ -5921,91 +5834,13 @@
               </a:spcAft>
             </a:pPr>
             <a:r>
-              <a:rPr sz="2200" b="0">
+              <a:rPr sz="2400" b="0">
                 <a:solidFill>
                   <a:srgbClr val="28462D"/>
                 </a:solidFill>
                 <a:latin typeface="Microsoft YaHei"/>
               </a:rPr>
-              <a:t>让神话更生动，表达对生命与创造的礼赞</a:t>
-            </a:r>
-          </a:p>
-        </p:txBody>
-      </p:sp>
-      <p:sp>
-        <p:nvSpPr>
-          <p:cNvPr id="17" name="TextBox 16"/>
-          <p:cNvSpPr txBox="1"/>
-          <p:nvPr/>
-        </p:nvSpPr>
-        <p:spPr>
-          <a:xfrm>
-            <a:off x="1463040" y="4169664"/>
-            <a:ext cx="2103120" cy="502920"/>
-          </a:xfrm>
-          <a:prstGeom prst="rect">
-            <a:avLst/>
-          </a:prstGeom>
-          <a:noFill/>
-        </p:spPr>
-        <p:txBody>
-          <a:bodyPr wrap="none">
-            <a:spAutoFit/>
-          </a:bodyPr>
-          <a:lstStyle/>
-          <a:p>
-            <a:pPr algn="r">
-              <a:spcAft>
-                <a:spcPts val="1000"/>
-              </a:spcAft>
-            </a:pPr>
-            <a:r>
-              <a:rPr sz="2200" b="1">
-                <a:solidFill>
-                  <a:srgbClr val="468250"/>
-                </a:solidFill>
-                <a:latin typeface="Microsoft YaHei"/>
-              </a:rPr>
-              <a:t>策展主题</a:t>
-            </a:r>
-          </a:p>
-        </p:txBody>
-      </p:sp>
-      <p:sp>
-        <p:nvSpPr>
-          <p:cNvPr id="18" name="TextBox 17"/>
-          <p:cNvSpPr txBox="1"/>
-          <p:nvPr/>
-        </p:nvSpPr>
-        <p:spPr>
-          <a:xfrm>
-            <a:off x="3749039" y="4169664"/>
-            <a:ext cx="7132320" cy="685800"/>
-          </a:xfrm>
-          <a:prstGeom prst="rect">
-            <a:avLst/>
-          </a:prstGeom>
-          <a:noFill/>
-        </p:spPr>
-        <p:txBody>
-          <a:bodyPr wrap="none">
-            <a:spAutoFit/>
-          </a:bodyPr>
-          <a:lstStyle/>
-          <a:p>
-            <a:pPr algn="l">
-              <a:spcAft>
-                <a:spcPts val="1000"/>
-              </a:spcAft>
-            </a:pPr>
-            <a:r>
-              <a:rPr sz="2200" b="0">
-                <a:solidFill>
-                  <a:srgbClr val="28462D"/>
-                </a:solidFill>
-                <a:latin typeface="Microsoft YaHei"/>
-              </a:rPr>
-              <a:t>生命来之不易，创造值得珍视（创造与生命）</a:t>
+              <a:t>说说想象如何具体、生动、温暖</a:t>
             </a:r>
           </a:p>
         </p:txBody>
@@ -6220,7 +6055,7 @@
                 </a:solidFill>
                 <a:latin typeface="Microsoft YaHei"/>
               </a:rPr>
-              <a:t>课堂活动</a:t>
+              <a:t>主题探究</a:t>
             </a:r>
           </a:p>
         </p:txBody>
@@ -6233,7 +6068,7 @@
         </p:nvSpPr>
         <p:spPr>
           <a:xfrm>
-            <a:off x="1371600" y="1051560"/>
+            <a:off x="1371600" y="960120"/>
             <a:ext cx="9418320" cy="822960"/>
           </a:xfrm>
           <a:prstGeom prst="rect">
@@ -6259,7 +6094,7 @@
                 </a:solidFill>
                 <a:latin typeface="Microsoft YaHei"/>
               </a:rPr>
-              <a:t>学习任务</a:t>
+              <a:t>学习任务三</a:t>
             </a:r>
           </a:p>
         </p:txBody>
@@ -6272,7 +6107,7 @@
         </p:nvSpPr>
         <p:spPr>
           <a:xfrm>
-            <a:off x="3200400" y="1691640"/>
+            <a:off x="3200400" y="1600200"/>
             <a:ext cx="5760720" cy="27432"/>
           </a:xfrm>
           <a:prstGeom prst="rect">
@@ -6315,8 +6150,8 @@
         </p:nvSpPr>
         <p:spPr>
           <a:xfrm>
-            <a:off x="1295704" y="1737360"/>
-            <a:ext cx="9601200" cy="2112264"/>
+            <a:off x="1295704" y="1645920"/>
+            <a:ext cx="9601200" cy="2240280"/>
           </a:xfrm>
           <a:prstGeom prst="roundRect">
             <a:avLst/>
@@ -6360,8 +6195,8 @@
         </p:nvSpPr>
         <p:spPr>
           <a:xfrm>
-            <a:off x="2621584" y="1920240"/>
-            <a:ext cx="347472" cy="347472"/>
+            <a:off x="2255824" y="1828800"/>
+            <a:ext cx="384048" cy="384048"/>
           </a:xfrm>
           <a:prstGeom prst="ellipse">
             <a:avLst/>
@@ -6403,8 +6238,8 @@
         </p:nvSpPr>
         <p:spPr>
           <a:xfrm>
-            <a:off x="2621584" y="1938528"/>
-            <a:ext cx="347472" cy="329184"/>
+            <a:off x="2255824" y="1847088"/>
+            <a:ext cx="384048" cy="365760"/>
           </a:xfrm>
           <a:prstGeom prst="rect">
             <a:avLst/>
@@ -6423,7 +6258,7 @@
               </a:spcAft>
             </a:pPr>
             <a:r>
-              <a:rPr sz="1400" b="1">
+              <a:rPr sz="1600" b="1">
                 <a:solidFill>
                   <a:srgbClr val="FFFFFF"/>
                 </a:solidFill>
@@ -6442,8 +6277,8 @@
         </p:nvSpPr>
         <p:spPr>
           <a:xfrm>
-            <a:off x="3078784" y="1901952"/>
-            <a:ext cx="7863840" cy="457200"/>
+            <a:off x="2758744" y="1810512"/>
+            <a:ext cx="7772400" cy="502920"/>
           </a:xfrm>
           <a:prstGeom prst="rect">
             <a:avLst/>
@@ -6468,7 +6303,7 @@
                 </a:solidFill>
                 <a:latin typeface="Microsoft YaHei"/>
               </a:rPr>
-              <a:t>给女娲行动排序，比较两种造人方法</a:t>
+              <a:t>讨论：神话用想象解释人的来处</a:t>
             </a:r>
           </a:p>
         </p:txBody>
@@ -6481,8 +6316,8 @@
         </p:nvSpPr>
         <p:spPr>
           <a:xfrm>
-            <a:off x="2621584" y="2487168"/>
-            <a:ext cx="347472" cy="347472"/>
+            <a:off x="2255824" y="2395728"/>
+            <a:ext cx="384048" cy="384048"/>
           </a:xfrm>
           <a:prstGeom prst="ellipse">
             <a:avLst/>
@@ -6524,8 +6359,8 @@
         </p:nvSpPr>
         <p:spPr>
           <a:xfrm>
-            <a:off x="2621584" y="2505456"/>
-            <a:ext cx="347472" cy="329184"/>
+            <a:off x="2255824" y="2414016"/>
+            <a:ext cx="384048" cy="365760"/>
           </a:xfrm>
           <a:prstGeom prst="rect">
             <a:avLst/>
@@ -6544,7 +6379,7 @@
               </a:spcAft>
             </a:pPr>
             <a:r>
-              <a:rPr sz="1400" b="1">
+              <a:rPr sz="1600" b="1">
                 <a:solidFill>
                   <a:srgbClr val="FFFFFF"/>
                 </a:solidFill>
@@ -6563,8 +6398,8 @@
         </p:nvSpPr>
         <p:spPr>
           <a:xfrm>
-            <a:off x="3078784" y="2468880"/>
-            <a:ext cx="7863840" cy="457200"/>
+            <a:off x="2758744" y="2377440"/>
+            <a:ext cx="7772400" cy="502920"/>
           </a:xfrm>
           <a:prstGeom prst="rect">
             <a:avLst/>
@@ -6589,7 +6424,7 @@
                 </a:solidFill>
                 <a:latin typeface="Microsoft YaHei"/>
               </a:rPr>
-              <a:t>完成「古籍与课文」比较表</a:t>
+              <a:t>女娲既有神性，也有人的孤独、疲倦和喜悦</a:t>
             </a:r>
           </a:p>
         </p:txBody>
@@ -6602,8 +6437,8 @@
         </p:nvSpPr>
         <p:spPr>
           <a:xfrm>
-            <a:off x="2621584" y="3054096"/>
-            <a:ext cx="347472" cy="347472"/>
+            <a:off x="2255824" y="2962656"/>
+            <a:ext cx="384048" cy="384048"/>
           </a:xfrm>
           <a:prstGeom prst="ellipse">
             <a:avLst/>
@@ -6645,8 +6480,8 @@
         </p:nvSpPr>
         <p:spPr>
           <a:xfrm>
-            <a:off x="2621584" y="3072384"/>
-            <a:ext cx="347472" cy="329184"/>
+            <a:off x="2255824" y="2980944"/>
+            <a:ext cx="384048" cy="365760"/>
           </a:xfrm>
           <a:prstGeom prst="rect">
             <a:avLst/>
@@ -6665,7 +6500,7 @@
               </a:spcAft>
             </a:pPr>
             <a:r>
-              <a:rPr sz="1400" b="1">
+              <a:rPr sz="1600" b="1">
                 <a:solidFill>
                   <a:srgbClr val="FFFFFF"/>
                 </a:solidFill>
@@ -6684,8 +6519,8 @@
         </p:nvSpPr>
         <p:spPr>
           <a:xfrm>
-            <a:off x="3078784" y="3035808"/>
-            <a:ext cx="7863840" cy="457200"/>
+            <a:off x="2758744" y="2944368"/>
+            <a:ext cx="7772400" cy="502920"/>
           </a:xfrm>
           <a:prstGeom prst="rect">
             <a:avLst/>
@@ -6710,7 +6545,7 @@
                 </a:solidFill>
                 <a:latin typeface="Microsoft YaHei"/>
               </a:rPr>
-              <a:t>以「我看见女娲……」写100字画面描述</a:t>
+              <a:t>策展主题三：生命来之不易，创造值得礼赞</a:t>
             </a:r>
           </a:p>
         </p:txBody>
@@ -6938,7 +6773,7 @@
         </p:nvSpPr>
         <p:spPr>
           <a:xfrm>
-            <a:off x="1371600" y="1051560"/>
+            <a:off x="1371600" y="960120"/>
             <a:ext cx="9418320" cy="822960"/>
           </a:xfrm>
           <a:prstGeom prst="rect">
@@ -6977,7 +6812,7 @@
         </p:nvSpPr>
         <p:spPr>
           <a:xfrm>
-            <a:off x="3200400" y="1691640"/>
+            <a:off x="3200400" y="1600200"/>
             <a:ext cx="5760720" cy="27432"/>
           </a:xfrm>
           <a:prstGeom prst="rect">
@@ -7020,8 +6855,8 @@
         </p:nvSpPr>
         <p:spPr>
           <a:xfrm>
-            <a:off x="1295704" y="1737360"/>
-            <a:ext cx="9601200" cy="1837944"/>
+            <a:off x="1295704" y="1645920"/>
+            <a:ext cx="9601200" cy="2240280"/>
           </a:xfrm>
           <a:prstGeom prst="roundRect">
             <a:avLst/>
@@ -7065,8 +6900,8 @@
         </p:nvSpPr>
         <p:spPr>
           <a:xfrm>
-            <a:off x="2621584" y="1920240"/>
-            <a:ext cx="347472" cy="347472"/>
+            <a:off x="2255824" y="1828800"/>
+            <a:ext cx="384048" cy="384048"/>
           </a:xfrm>
           <a:prstGeom prst="ellipse">
             <a:avLst/>
@@ -7108,8 +6943,8 @@
         </p:nvSpPr>
         <p:spPr>
           <a:xfrm>
-            <a:off x="2621584" y="1938528"/>
-            <a:ext cx="347472" cy="329184"/>
+            <a:off x="2255824" y="1847088"/>
+            <a:ext cx="384048" cy="365760"/>
           </a:xfrm>
           <a:prstGeom prst="rect">
             <a:avLst/>
@@ -7128,7 +6963,7 @@
               </a:spcAft>
             </a:pPr>
             <a:r>
-              <a:rPr sz="1400" b="1">
+              <a:rPr sz="1600" b="1">
                 <a:solidFill>
                   <a:srgbClr val="FFFFFF"/>
                 </a:solidFill>
@@ -7147,8 +6982,8 @@
         </p:nvSpPr>
         <p:spPr>
           <a:xfrm>
-            <a:off x="3078784" y="1901952"/>
-            <a:ext cx="7863840" cy="457200"/>
+            <a:off x="2758744" y="1810512"/>
+            <a:ext cx="7772400" cy="502920"/>
           </a:xfrm>
           <a:prstGeom prst="rect">
             <a:avLst/>
@@ -7167,13 +7002,13 @@
               </a:spcAft>
             </a:pPr>
             <a:r>
-              <a:rPr sz="2200" b="0">
+              <a:rPr sz="2400" b="0">
                 <a:solidFill>
                   <a:srgbClr val="28462D"/>
                 </a:solidFill>
                 <a:latin typeface="Microsoft YaHei"/>
               </a:rPr>
-              <a:t>神话想象：基于古籍，超越古籍，有温度</a:t>
+              <a:t>神话改写基于古籍又超越古籍</a:t>
             </a:r>
           </a:p>
         </p:txBody>
@@ -7186,8 +7021,8 @@
         </p:nvSpPr>
         <p:spPr>
           <a:xfrm>
-            <a:off x="2621584" y="2395728"/>
-            <a:ext cx="347472" cy="347472"/>
+            <a:off x="2255824" y="2395728"/>
+            <a:ext cx="384048" cy="384048"/>
           </a:xfrm>
           <a:prstGeom prst="ellipse">
             <a:avLst/>
@@ -7229,8 +7064,8 @@
         </p:nvSpPr>
         <p:spPr>
           <a:xfrm>
-            <a:off x="2621584" y="2414016"/>
-            <a:ext cx="347472" cy="329184"/>
+            <a:off x="2255824" y="2414016"/>
+            <a:ext cx="384048" cy="365760"/>
           </a:xfrm>
           <a:prstGeom prst="rect">
             <a:avLst/>
@@ -7249,7 +7084,7 @@
               </a:spcAft>
             </a:pPr>
             <a:r>
-              <a:rPr sz="1400" b="1">
+              <a:rPr sz="1600" b="1">
                 <a:solidFill>
                   <a:srgbClr val="FFFFFF"/>
                 </a:solidFill>
@@ -7268,8 +7103,8 @@
         </p:nvSpPr>
         <p:spPr>
           <a:xfrm>
-            <a:off x="3078784" y="2377440"/>
-            <a:ext cx="7863840" cy="457200"/>
+            <a:off x="2758744" y="2377440"/>
+            <a:ext cx="7772400" cy="502920"/>
           </a:xfrm>
           <a:prstGeom prst="rect">
             <a:avLst/>
@@ -7288,13 +7123,13 @@
               </a:spcAft>
             </a:pPr>
             <a:r>
-              <a:rPr sz="2200" b="0">
+              <a:rPr sz="2400" b="0">
                 <a:solidFill>
                   <a:srgbClr val="28462D"/>
                 </a:solidFill>
                 <a:latin typeface="Microsoft YaHei"/>
               </a:rPr>
-              <a:t>女娲：神性与人性并存——孤独、疲倦、喜悦</a:t>
+              <a:t>赋予创世故事现代意识与生命温度</a:t>
             </a:r>
           </a:p>
         </p:txBody>
@@ -7307,8 +7142,8 @@
         </p:nvSpPr>
         <p:spPr>
           <a:xfrm>
-            <a:off x="2621584" y="2871216"/>
-            <a:ext cx="347472" cy="347472"/>
+            <a:off x="2255824" y="2962656"/>
+            <a:ext cx="384048" cy="384048"/>
           </a:xfrm>
           <a:prstGeom prst="ellipse">
             <a:avLst/>
@@ -7350,8 +7185,8 @@
         </p:nvSpPr>
         <p:spPr>
           <a:xfrm>
-            <a:off x="2621584" y="2889504"/>
-            <a:ext cx="347472" cy="329184"/>
+            <a:off x="2255824" y="2980944"/>
+            <a:ext cx="384048" cy="365760"/>
           </a:xfrm>
           <a:prstGeom prst="rect">
             <a:avLst/>
@@ -7370,7 +7205,7 @@
               </a:spcAft>
             </a:pPr>
             <a:r>
-              <a:rPr sz="1400" b="1">
+              <a:rPr sz="1600" b="1">
                 <a:solidFill>
                   <a:srgbClr val="FFFFFF"/>
                 </a:solidFill>
@@ -7389,8 +7224,8 @@
         </p:nvSpPr>
         <p:spPr>
           <a:xfrm>
-            <a:off x="3078784" y="2852928"/>
-            <a:ext cx="7863840" cy="457200"/>
+            <a:off x="2758744" y="2944368"/>
+            <a:ext cx="7772400" cy="502920"/>
           </a:xfrm>
           <a:prstGeom prst="rect">
             <a:avLst/>
@@ -7409,13 +7244,13 @@
               </a:spcAft>
             </a:pPr>
             <a:r>
-              <a:rPr sz="2200" b="0">
+              <a:rPr sz="2400" b="0">
                 <a:solidFill>
                   <a:srgbClr val="28462D"/>
                 </a:solidFill>
                 <a:latin typeface="Microsoft YaHei"/>
               </a:rPr>
-              <a:t>策展主题三：创造与生命</a:t>
+              <a:t>策展主题：创造与生命</a:t>
             </a:r>
           </a:p>
         </p:txBody>
@@ -7643,7 +7478,7 @@
         </p:nvSpPr>
         <p:spPr>
           <a:xfrm>
-            <a:off x="1371600" y="1051560"/>
+            <a:off x="1371600" y="960120"/>
             <a:ext cx="9418320" cy="822960"/>
           </a:xfrm>
           <a:prstGeom prst="rect">
@@ -7682,7 +7517,7 @@
         </p:nvSpPr>
         <p:spPr>
           <a:xfrm>
-            <a:off x="3200400" y="1691640"/>
+            <a:off x="3200400" y="1600200"/>
             <a:ext cx="5760720" cy="27432"/>
           </a:xfrm>
           <a:prstGeom prst="rect">
@@ -7725,8 +7560,8 @@
         </p:nvSpPr>
         <p:spPr>
           <a:xfrm>
-            <a:off x="1295704" y="1737360"/>
-            <a:ext cx="9601200" cy="1545336"/>
+            <a:off x="1295704" y="1645920"/>
+            <a:ext cx="9601200" cy="1645920"/>
           </a:xfrm>
           <a:prstGeom prst="roundRect">
             <a:avLst/>
@@ -7770,8 +7605,8 @@
         </p:nvSpPr>
         <p:spPr>
           <a:xfrm>
-            <a:off x="2621584" y="1920240"/>
-            <a:ext cx="347472" cy="347472"/>
+            <a:off x="2255824" y="1828800"/>
+            <a:ext cx="384048" cy="384048"/>
           </a:xfrm>
           <a:prstGeom prst="ellipse">
             <a:avLst/>
@@ -7813,8 +7648,8 @@
         </p:nvSpPr>
         <p:spPr>
           <a:xfrm>
-            <a:off x="2621584" y="1938528"/>
-            <a:ext cx="347472" cy="329184"/>
+            <a:off x="2255824" y="1847088"/>
+            <a:ext cx="384048" cy="365760"/>
           </a:xfrm>
           <a:prstGeom prst="rect">
             <a:avLst/>
@@ -7833,7 +7668,7 @@
               </a:spcAft>
             </a:pPr>
             <a:r>
-              <a:rPr sz="1400" b="1">
+              <a:rPr sz="1600" b="1">
                 <a:solidFill>
                   <a:srgbClr val="FFFFFF"/>
                 </a:solidFill>
@@ -7852,8 +7687,8 @@
         </p:nvSpPr>
         <p:spPr>
           <a:xfrm>
-            <a:off x="3078784" y="1901952"/>
-            <a:ext cx="7863840" cy="457200"/>
+            <a:off x="2758744" y="1810512"/>
+            <a:ext cx="7772400" cy="502920"/>
           </a:xfrm>
           <a:prstGeom prst="rect">
             <a:avLst/>
@@ -7878,7 +7713,7 @@
                 </a:solidFill>
                 <a:latin typeface="Microsoft YaHei"/>
               </a:rPr>
-              <a:t>必做：以「我看见女娲……」写100字画面</a:t>
+              <a:t>必做：以「我看见女娲……」开头，写100字画面描述</a:t>
             </a:r>
           </a:p>
         </p:txBody>
@@ -7891,8 +7726,8 @@
         </p:nvSpPr>
         <p:spPr>
           <a:xfrm>
-            <a:off x="2621584" y="2487168"/>
-            <a:ext cx="347472" cy="347472"/>
+            <a:off x="2255824" y="2395728"/>
+            <a:ext cx="384048" cy="384048"/>
           </a:xfrm>
           <a:prstGeom prst="ellipse">
             <a:avLst/>
@@ -7934,8 +7769,8 @@
         </p:nvSpPr>
         <p:spPr>
           <a:xfrm>
-            <a:off x="2621584" y="2505456"/>
-            <a:ext cx="347472" cy="329184"/>
+            <a:off x="2255824" y="2414016"/>
+            <a:ext cx="384048" cy="365760"/>
           </a:xfrm>
           <a:prstGeom prst="rect">
             <a:avLst/>
@@ -7954,7 +7789,7 @@
               </a:spcAft>
             </a:pPr>
             <a:r>
-              <a:rPr sz="1400" b="1">
+              <a:rPr sz="1600" b="1">
                 <a:solidFill>
                   <a:srgbClr val="FFFFFF"/>
                 </a:solidFill>
@@ -7973,8 +7808,8 @@
         </p:nvSpPr>
         <p:spPr>
           <a:xfrm>
-            <a:off x="3078784" y="2468880"/>
-            <a:ext cx="7863840" cy="457200"/>
+            <a:off x="2758744" y="2377440"/>
+            <a:ext cx="7772400" cy="502920"/>
           </a:xfrm>
           <a:prstGeom prst="rect">
             <a:avLst/>

--- a/unit6-lesson23-nuwa.pptx
+++ b/unit6-lesson23-nuwa.pptx
@@ -3304,8 +3304,8 @@
         </p:nvSpPr>
         <p:spPr>
           <a:xfrm>
-            <a:off x="1371600" y="2011680"/>
-            <a:ext cx="9418320" cy="1645920"/>
+            <a:off x="1371600" y="1828800"/>
+            <a:ext cx="9418320" cy="1828800"/>
           </a:xfrm>
           <a:prstGeom prst="rect">
             <a:avLst/>
@@ -3347,6 +3347,22 @@
                 <a:latin typeface="Microsoft YaHei"/>
               </a:rPr>
               <a:t>第23课 · 第六、七课时 · 创造与生命</a:t>
+            </a:r>
+          </a:p>
+          <a:p>
+            <a:pPr algn="ctr">
+              <a:spcAft>
+                <a:spcPts val="1000"/>
+              </a:spcAft>
+            </a:pPr>
+            <a:r>
+              <a:rPr sz="2000" b="1">
+                <a:solidFill>
+                  <a:srgbClr val="A0C896"/>
+                </a:solidFill>
+                <a:latin typeface="Microsoft YaHei"/>
+              </a:rPr>
+              <a:t>含课堂笔记 · 2026版</a:t>
             </a:r>
           </a:p>
         </p:txBody>
@@ -3535,8 +3551,342 @@
         </p:nvSpPr>
         <p:spPr>
           <a:xfrm>
-            <a:off x="4953304" y="502920"/>
-            <a:ext cx="2286000" cy="411480"/>
+            <a:off x="502920" y="384048"/>
+            <a:ext cx="2011680" cy="384048"/>
+          </a:xfrm>
+          <a:prstGeom prst="roundRect">
+            <a:avLst/>
+          </a:prstGeom>
+          <a:solidFill>
+            <a:srgbClr val="468250"/>
+          </a:solidFill>
+          <a:ln>
+            <a:noFill/>
+          </a:ln>
+        </p:spPr>
+        <p:style>
+          <a:lnRef idx="1">
+            <a:schemeClr val="accent1"/>
+          </a:lnRef>
+          <a:fillRef idx="3">
+            <a:schemeClr val="accent1"/>
+          </a:fillRef>
+          <a:effectRef idx="2">
+            <a:schemeClr val="accent1"/>
+          </a:effectRef>
+          <a:fontRef idx="minor">
+            <a:schemeClr val="lt1"/>
+          </a:fontRef>
+        </p:style>
+        <p:txBody>
+          <a:bodyPr rtlCol="0" anchor="ctr"/>
+          <a:lstStyle/>
+          <a:p>
+            <a:pPr algn="ctr"/>
+          </a:p>
+        </p:txBody>
+      </p:sp>
+      <p:sp>
+        <p:nvSpPr>
+          <p:cNvPr id="7" name="TextBox 6"/>
+          <p:cNvSpPr txBox="1"/>
+          <p:nvPr/>
+        </p:nvSpPr>
+        <p:spPr>
+          <a:xfrm>
+            <a:off x="502920" y="402336"/>
+            <a:ext cx="2011680" cy="347472"/>
+          </a:xfrm>
+          <a:prstGeom prst="rect">
+            <a:avLst/>
+          </a:prstGeom>
+          <a:noFill/>
+        </p:spPr>
+        <p:txBody>
+          <a:bodyPr wrap="none">
+            <a:spAutoFit/>
+          </a:bodyPr>
+          <a:lstStyle/>
+          <a:p>
+            <a:pPr algn="ctr">
+              <a:spcAft>
+                <a:spcPts val="1000"/>
+              </a:spcAft>
+            </a:pPr>
+            <a:r>
+              <a:rPr sz="1600" b="1">
+                <a:solidFill>
+                  <a:srgbClr val="FFFFFF"/>
+                </a:solidFill>
+                <a:latin typeface="Microsoft YaHei"/>
+              </a:rPr>
+              <a:t>知识要点</a:t>
+            </a:r>
+          </a:p>
+        </p:txBody>
+      </p:sp>
+      <p:sp>
+        <p:nvSpPr>
+          <p:cNvPr id="8" name="TextBox 7"/>
+          <p:cNvSpPr txBox="1"/>
+          <p:nvPr/>
+        </p:nvSpPr>
+        <p:spPr>
+          <a:xfrm>
+            <a:off x="1371600" y="384048"/>
+            <a:ext cx="9418320" cy="822960"/>
+          </a:xfrm>
+          <a:prstGeom prst="rect">
+            <a:avLst/>
+          </a:prstGeom>
+          <a:noFill/>
+        </p:spPr>
+        <p:txBody>
+          <a:bodyPr wrap="square">
+            <a:spAutoFit/>
+          </a:bodyPr>
+          <a:lstStyle/>
+          <a:p>
+            <a:pPr algn="ctr">
+              <a:spcAft>
+                <a:spcPts val="1000"/>
+              </a:spcAft>
+            </a:pPr>
+            <a:r>
+              <a:rPr sz="3400" b="1">
+                <a:solidFill>
+                  <a:srgbClr val="468250"/>
+                </a:solidFill>
+                <a:latin typeface="Microsoft YaHei"/>
+              </a:rPr>
+              <a:t>文学常识</a:t>
+            </a:r>
+          </a:p>
+        </p:txBody>
+      </p:sp>
+      <p:sp>
+        <p:nvSpPr>
+          <p:cNvPr id="9" name="Rounded Rectangle 8"/>
+          <p:cNvSpPr/>
+          <p:nvPr/>
+        </p:nvSpPr>
+        <p:spPr>
+          <a:xfrm>
+            <a:off x="1067104" y="1143000"/>
+            <a:ext cx="10058400" cy="3721608"/>
+          </a:xfrm>
+          <a:prstGeom prst="roundRect">
+            <a:avLst/>
+          </a:prstGeom>
+          <a:solidFill>
+            <a:srgbClr val="FFFCEB"/>
+          </a:solidFill>
+          <a:ln w="25400">
+            <a:solidFill>
+              <a:srgbClr val="5A8C5A"/>
+            </a:solidFill>
+          </a:ln>
+        </p:spPr>
+        <p:style>
+          <a:lnRef idx="1">
+            <a:schemeClr val="accent1"/>
+          </a:lnRef>
+          <a:fillRef idx="3">
+            <a:schemeClr val="accent1"/>
+          </a:fillRef>
+          <a:effectRef idx="2">
+            <a:schemeClr val="accent1"/>
+          </a:effectRef>
+          <a:fontRef idx="minor">
+            <a:schemeClr val="lt1"/>
+          </a:fontRef>
+        </p:style>
+        <p:txBody>
+          <a:bodyPr rtlCol="0" anchor="ctr"/>
+          <a:lstStyle/>
+          <a:p>
+            <a:pPr algn="ctr"/>
+          </a:p>
+        </p:txBody>
+      </p:sp>
+      <p:sp>
+        <p:nvSpPr>
+          <p:cNvPr id="10" name="Rectangle 9"/>
+          <p:cNvSpPr/>
+          <p:nvPr/>
+        </p:nvSpPr>
+        <p:spPr>
+          <a:xfrm>
+            <a:off x="1067104" y="1143000"/>
+            <a:ext cx="10058400" cy="384048"/>
+          </a:xfrm>
+          <a:prstGeom prst="rect">
+            <a:avLst/>
+          </a:prstGeom>
+          <a:solidFill>
+            <a:srgbClr val="468250"/>
+          </a:solidFill>
+          <a:ln>
+            <a:noFill/>
+          </a:ln>
+        </p:spPr>
+        <p:style>
+          <a:lnRef idx="1">
+            <a:schemeClr val="accent1"/>
+          </a:lnRef>
+          <a:fillRef idx="3">
+            <a:schemeClr val="accent1"/>
+          </a:fillRef>
+          <a:effectRef idx="2">
+            <a:schemeClr val="accent1"/>
+          </a:effectRef>
+          <a:fontRef idx="minor">
+            <a:schemeClr val="lt1"/>
+          </a:fontRef>
+        </p:style>
+        <p:txBody>
+          <a:bodyPr rtlCol="0" anchor="ctr"/>
+          <a:lstStyle/>
+          <a:p>
+            <a:pPr algn="ctr"/>
+          </a:p>
+        </p:txBody>
+      </p:sp>
+      <p:sp>
+        <p:nvSpPr>
+          <p:cNvPr id="11" name="TextBox 10"/>
+          <p:cNvSpPr txBox="1"/>
+          <p:nvPr/>
+        </p:nvSpPr>
+        <p:spPr>
+          <a:xfrm>
+            <a:off x="1067104" y="1179576"/>
+            <a:ext cx="10058400" cy="347472"/>
+          </a:xfrm>
+          <a:prstGeom prst="rect">
+            <a:avLst/>
+          </a:prstGeom>
+          <a:noFill/>
+        </p:spPr>
+        <p:txBody>
+          <a:bodyPr wrap="none">
+            <a:spAutoFit/>
+          </a:bodyPr>
+          <a:lstStyle/>
+          <a:p>
+            <a:pPr algn="ctr">
+              <a:spcAft>
+                <a:spcPts val="1000"/>
+              </a:spcAft>
+            </a:pPr>
+            <a:r>
+              <a:rPr sz="1800" b="1">
+                <a:solidFill>
+                  <a:srgbClr val="FFFFFF"/>
+                </a:solidFill>
+                <a:latin typeface="Microsoft YaHei"/>
+              </a:rPr>
+              <a:t>📝  课堂笔记  —  请摘抄要点</a:t>
+            </a:r>
+          </a:p>
+        </p:txBody>
+      </p:sp>
+      <p:sp>
+        <p:nvSpPr>
+          <p:cNvPr id="12" name="Rectangle 11"/>
+          <p:cNvSpPr/>
+          <p:nvPr/>
+        </p:nvSpPr>
+        <p:spPr>
+          <a:xfrm>
+            <a:off x="1570024" y="1527048"/>
+            <a:ext cx="27432" cy="3337560"/>
+          </a:xfrm>
+          <a:prstGeom prst="rect">
+            <a:avLst/>
+          </a:prstGeom>
+          <a:solidFill>
+            <a:srgbClr val="DC5050"/>
+          </a:solidFill>
+          <a:ln>
+            <a:noFill/>
+          </a:ln>
+        </p:spPr>
+        <p:style>
+          <a:lnRef idx="1">
+            <a:schemeClr val="accent1"/>
+          </a:lnRef>
+          <a:fillRef idx="3">
+            <a:schemeClr val="accent1"/>
+          </a:fillRef>
+          <a:effectRef idx="2">
+            <a:schemeClr val="accent1"/>
+          </a:effectRef>
+          <a:fontRef idx="minor">
+            <a:schemeClr val="lt1"/>
+          </a:fontRef>
+        </p:style>
+        <p:txBody>
+          <a:bodyPr rtlCol="0" anchor="ctr"/>
+          <a:lstStyle/>
+          <a:p>
+            <a:pPr algn="ctr"/>
+          </a:p>
+        </p:txBody>
+      </p:sp>
+      <p:sp>
+        <p:nvSpPr>
+          <p:cNvPr id="13" name="Rectangle 12"/>
+          <p:cNvSpPr/>
+          <p:nvPr/>
+        </p:nvSpPr>
+        <p:spPr>
+          <a:xfrm>
+            <a:off x="1417320" y="2276856"/>
+            <a:ext cx="9601200" cy="13716"/>
+          </a:xfrm>
+          <a:prstGeom prst="rect">
+            <a:avLst/>
+          </a:prstGeom>
+          <a:solidFill>
+            <a:srgbClr val="D2C8AF"/>
+          </a:solidFill>
+          <a:ln>
+            <a:noFill/>
+          </a:ln>
+        </p:spPr>
+        <p:style>
+          <a:lnRef idx="1">
+            <a:schemeClr val="accent1"/>
+          </a:lnRef>
+          <a:fillRef idx="3">
+            <a:schemeClr val="accent1"/>
+          </a:fillRef>
+          <a:effectRef idx="2">
+            <a:schemeClr val="accent1"/>
+          </a:effectRef>
+          <a:fontRef idx="minor">
+            <a:schemeClr val="lt1"/>
+          </a:fontRef>
+        </p:style>
+        <p:txBody>
+          <a:bodyPr rtlCol="0" anchor="ctr"/>
+          <a:lstStyle/>
+          <a:p>
+            <a:pPr algn="ctr"/>
+          </a:p>
+        </p:txBody>
+      </p:sp>
+      <p:sp>
+        <p:nvSpPr>
+          <p:cNvPr id="14" name="Rounded Rectangle 13"/>
+          <p:cNvSpPr/>
+          <p:nvPr/>
+        </p:nvSpPr>
+        <p:spPr>
+          <a:xfrm>
+            <a:off x="1600200" y="1627632"/>
+            <a:ext cx="1280160" cy="347472"/>
           </a:xfrm>
           <a:prstGeom prst="roundRect">
             <a:avLst/>
@@ -3572,14 +3922,14 @@
       </p:sp>
       <p:sp>
         <p:nvSpPr>
-          <p:cNvPr id="7" name="TextBox 6"/>
+          <p:cNvPr id="15" name="TextBox 14"/>
           <p:cNvSpPr txBox="1"/>
           <p:nvPr/>
         </p:nvSpPr>
         <p:spPr>
           <a:xfrm>
-            <a:off x="4953304" y="521208"/>
-            <a:ext cx="2286000" cy="384048"/>
+            <a:off x="1600200" y="1645920"/>
+            <a:ext cx="1280160" cy="310896"/>
           </a:xfrm>
           <a:prstGeom prst="rect">
             <a:avLst/>
@@ -3604,21 +3954,21 @@
                 </a:solidFill>
                 <a:latin typeface="Microsoft YaHei"/>
               </a:rPr>
-              <a:t>课时目标</a:t>
-            </a:r>
-          </a:p>
-        </p:txBody>
-      </p:sp>
-      <p:sp>
-        <p:nvSpPr>
-          <p:cNvPr id="8" name="TextBox 7"/>
+              <a:t>作者</a:t>
+            </a:r>
+          </a:p>
+        </p:txBody>
+      </p:sp>
+      <p:sp>
+        <p:nvSpPr>
+          <p:cNvPr id="16" name="TextBox 15"/>
           <p:cNvSpPr txBox="1"/>
           <p:nvPr/>
         </p:nvSpPr>
         <p:spPr>
           <a:xfrm>
-            <a:off x="1371600" y="960120"/>
-            <a:ext cx="9418320" cy="822960"/>
+            <a:off x="3017520" y="1627632"/>
+            <a:ext cx="7498079" cy="658368"/>
           </a:xfrm>
           <a:prstGeom prst="rect">
             <a:avLst/>
@@ -3626,40 +3976,83 @@
           <a:noFill/>
         </p:spPr>
         <p:txBody>
-          <a:bodyPr wrap="square">
+          <a:bodyPr wrap="none">
             <a:spAutoFit/>
           </a:bodyPr>
           <a:lstStyle/>
           <a:p>
-            <a:pPr algn="ctr">
+            <a:pPr algn="l">
               <a:spcAft>
                 <a:spcPts val="1000"/>
               </a:spcAft>
             </a:pPr>
             <a:r>
-              <a:rPr sz="3600" b="1">
+              <a:rPr sz="2100" b="0">
                 <a:solidFill>
-                  <a:srgbClr val="468250"/>
+                  <a:srgbClr val="28462D"/>
                 </a:solidFill>
                 <a:latin typeface="Microsoft YaHei"/>
               </a:rPr>
-              <a:t>本课目标</a:t>
-            </a:r>
-          </a:p>
-        </p:txBody>
-      </p:sp>
-      <p:sp>
-        <p:nvSpPr>
-          <p:cNvPr id="9" name="Rectangle 8"/>
+              <a:t>袁珂（现代作家，神话研究专家）</a:t>
+            </a:r>
+          </a:p>
+        </p:txBody>
+      </p:sp>
+      <p:sp>
+        <p:nvSpPr>
+          <p:cNvPr id="17" name="Rectangle 16"/>
           <p:cNvSpPr/>
           <p:nvPr/>
         </p:nvSpPr>
         <p:spPr>
           <a:xfrm>
-            <a:off x="3200400" y="1600200"/>
-            <a:ext cx="5760720" cy="27432"/>
-          </a:xfrm>
-          <a:prstGeom prst="rect">
+            <a:off x="1417320" y="3081527"/>
+            <a:ext cx="9601200" cy="13716"/>
+          </a:xfrm>
+          <a:prstGeom prst="rect">
+            <a:avLst/>
+          </a:prstGeom>
+          <a:solidFill>
+            <a:srgbClr val="D2C8AF"/>
+          </a:solidFill>
+          <a:ln>
+            <a:noFill/>
+          </a:ln>
+        </p:spPr>
+        <p:style>
+          <a:lnRef idx="1">
+            <a:schemeClr val="accent1"/>
+          </a:lnRef>
+          <a:fillRef idx="3">
+            <a:schemeClr val="accent1"/>
+          </a:fillRef>
+          <a:effectRef idx="2">
+            <a:schemeClr val="accent1"/>
+          </a:effectRef>
+          <a:fontRef idx="minor">
+            <a:schemeClr val="lt1"/>
+          </a:fontRef>
+        </p:style>
+        <p:txBody>
+          <a:bodyPr rtlCol="0" anchor="ctr"/>
+          <a:lstStyle/>
+          <a:p>
+            <a:pPr algn="ctr"/>
+          </a:p>
+        </p:txBody>
+      </p:sp>
+      <p:sp>
+        <p:nvSpPr>
+          <p:cNvPr id="18" name="Rounded Rectangle 17"/>
+          <p:cNvSpPr/>
+          <p:nvPr/>
+        </p:nvSpPr>
+        <p:spPr>
+          <a:xfrm>
+            <a:off x="1600200" y="2432303"/>
+            <a:ext cx="1280160" cy="347472"/>
+          </a:xfrm>
+          <a:prstGeom prst="roundRect">
             <a:avLst/>
           </a:prstGeom>
           <a:solidFill>
@@ -3693,25 +4086,101 @@
       </p:sp>
       <p:sp>
         <p:nvSpPr>
-          <p:cNvPr id="10" name="Rounded Rectangle 9"/>
+          <p:cNvPr id="19" name="TextBox 18"/>
+          <p:cNvSpPr txBox="1"/>
+          <p:nvPr/>
+        </p:nvSpPr>
+        <p:spPr>
+          <a:xfrm>
+            <a:off x="1600200" y="2450591"/>
+            <a:ext cx="1280160" cy="310896"/>
+          </a:xfrm>
+          <a:prstGeom prst="rect">
+            <a:avLst/>
+          </a:prstGeom>
+          <a:noFill/>
+        </p:spPr>
+        <p:txBody>
+          <a:bodyPr wrap="none">
+            <a:spAutoFit/>
+          </a:bodyPr>
+          <a:lstStyle/>
+          <a:p>
+            <a:pPr algn="ctr">
+              <a:spcAft>
+                <a:spcPts val="1000"/>
+              </a:spcAft>
+            </a:pPr>
+            <a:r>
+              <a:rPr sz="1800" b="1">
+                <a:solidFill>
+                  <a:srgbClr val="28462D"/>
+                </a:solidFill>
+                <a:latin typeface="Microsoft YaHei"/>
+              </a:rPr>
+              <a:t>文体</a:t>
+            </a:r>
+          </a:p>
+        </p:txBody>
+      </p:sp>
+      <p:sp>
+        <p:nvSpPr>
+          <p:cNvPr id="20" name="TextBox 19"/>
+          <p:cNvSpPr txBox="1"/>
+          <p:nvPr/>
+        </p:nvSpPr>
+        <p:spPr>
+          <a:xfrm>
+            <a:off x="3017520" y="2432303"/>
+            <a:ext cx="7498079" cy="658368"/>
+          </a:xfrm>
+          <a:prstGeom prst="rect">
+            <a:avLst/>
+          </a:prstGeom>
+          <a:noFill/>
+        </p:spPr>
+        <p:txBody>
+          <a:bodyPr wrap="none">
+            <a:spAutoFit/>
+          </a:bodyPr>
+          <a:lstStyle/>
+          <a:p>
+            <a:pPr algn="l">
+              <a:spcAft>
+                <a:spcPts val="1000"/>
+              </a:spcAft>
+            </a:pPr>
+            <a:r>
+              <a:rPr sz="2100" b="0">
+                <a:solidFill>
+                  <a:srgbClr val="28462D"/>
+                </a:solidFill>
+                <a:latin typeface="Microsoft YaHei"/>
+              </a:rPr>
+              <a:t>神话——用想象解释自然与人类起源</a:t>
+            </a:r>
+          </a:p>
+        </p:txBody>
+      </p:sp>
+      <p:sp>
+        <p:nvSpPr>
+          <p:cNvPr id="21" name="Rectangle 20"/>
           <p:cNvSpPr/>
           <p:nvPr/>
         </p:nvSpPr>
         <p:spPr>
           <a:xfrm>
-            <a:off x="1295704" y="1645920"/>
-            <a:ext cx="9601200" cy="2240280"/>
-          </a:xfrm>
-          <a:prstGeom prst="roundRect">
+            <a:off x="1417320" y="3886200"/>
+            <a:ext cx="9601200" cy="13716"/>
+          </a:xfrm>
+          <a:prstGeom prst="rect">
             <a:avLst/>
           </a:prstGeom>
           <a:solidFill>
-            <a:srgbClr val="F8FCF5"/>
+            <a:srgbClr val="D2C8AF"/>
           </a:solidFill>
-          <a:ln w="19050">
-            <a:solidFill>
-              <a:srgbClr val="A0C896"/>
-            </a:solidFill>
+          <a:ln>
+            <a:noFill/>
           </a:ln>
         </p:spPr>
         <p:style>
@@ -3738,20 +4207,20 @@
       </p:sp>
       <p:sp>
         <p:nvSpPr>
-          <p:cNvPr id="11" name="Oval 10"/>
+          <p:cNvPr id="22" name="Rounded Rectangle 21"/>
           <p:cNvSpPr/>
           <p:nvPr/>
         </p:nvSpPr>
         <p:spPr>
           <a:xfrm>
-            <a:off x="2255824" y="1828800"/>
-            <a:ext cx="384048" cy="384048"/>
-          </a:xfrm>
-          <a:prstGeom prst="ellipse">
+            <a:off x="1600200" y="3236976"/>
+            <a:ext cx="1444752" cy="347472"/>
+          </a:xfrm>
+          <a:prstGeom prst="roundRect">
             <a:avLst/>
           </a:prstGeom>
           <a:solidFill>
-            <a:srgbClr val="468250"/>
+            <a:srgbClr val="A0C896"/>
           </a:solidFill>
           <a:ln>
             <a:noFill/>
@@ -3781,14 +4250,14 @@
       </p:sp>
       <p:sp>
         <p:nvSpPr>
-          <p:cNvPr id="12" name="TextBox 11"/>
+          <p:cNvPr id="23" name="TextBox 22"/>
           <p:cNvSpPr txBox="1"/>
           <p:nvPr/>
         </p:nvSpPr>
         <p:spPr>
           <a:xfrm>
-            <a:off x="2255824" y="1847088"/>
-            <a:ext cx="384048" cy="365760"/>
+            <a:off x="1600200" y="3255264"/>
+            <a:ext cx="1444752" cy="310896"/>
           </a:xfrm>
           <a:prstGeom prst="rect">
             <a:avLst/>
@@ -3807,27 +4276,27 @@
               </a:spcAft>
             </a:pPr>
             <a:r>
-              <a:rPr sz="1600" b="1">
+              <a:rPr sz="1800" b="1">
                 <a:solidFill>
-                  <a:srgbClr val="FFFFFF"/>
+                  <a:srgbClr val="28462D"/>
                 </a:solidFill>
                 <a:latin typeface="Microsoft YaHei"/>
               </a:rPr>
-              <a:t>1</a:t>
-            </a:r>
-          </a:p>
-        </p:txBody>
-      </p:sp>
-      <p:sp>
-        <p:nvSpPr>
-          <p:cNvPr id="13" name="TextBox 12"/>
+              <a:t>改写特点</a:t>
+            </a:r>
+          </a:p>
+        </p:txBody>
+      </p:sp>
+      <p:sp>
+        <p:nvSpPr>
+          <p:cNvPr id="24" name="TextBox 23"/>
           <p:cNvSpPr txBox="1"/>
           <p:nvPr/>
         </p:nvSpPr>
         <p:spPr>
           <a:xfrm>
-            <a:off x="2758744" y="1810512"/>
-            <a:ext cx="7772400" cy="502920"/>
+            <a:off x="3182112" y="3236976"/>
+            <a:ext cx="7333488" cy="658368"/>
           </a:xfrm>
           <a:prstGeom prst="rect">
             <a:avLst/>
@@ -3846,33 +4315,33 @@
               </a:spcAft>
             </a:pPr>
             <a:r>
-              <a:rPr sz="2400" b="0">
+              <a:rPr sz="2100" b="0">
                 <a:solidFill>
                   <a:srgbClr val="28462D"/>
                 </a:solidFill>
                 <a:latin typeface="Microsoft YaHei"/>
               </a:rPr>
-              <a:t>概括女娲造人过程，梳理文章写作思路</a:t>
-            </a:r>
-          </a:p>
-        </p:txBody>
-      </p:sp>
-      <p:sp>
-        <p:nvSpPr>
-          <p:cNvPr id="14" name="Oval 13"/>
+              <a:t>在古籍记载基础上增删改写，赋予现代意识</a:t>
+            </a:r>
+          </a:p>
+        </p:txBody>
+      </p:sp>
+      <p:sp>
+        <p:nvSpPr>
+          <p:cNvPr id="25" name="Rectangle 24"/>
           <p:cNvSpPr/>
           <p:nvPr/>
         </p:nvSpPr>
         <p:spPr>
           <a:xfrm>
-            <a:off x="2255824" y="2395728"/>
-            <a:ext cx="384048" cy="384048"/>
-          </a:xfrm>
-          <a:prstGeom prst="ellipse">
+            <a:off x="1417320" y="4690872"/>
+            <a:ext cx="9601200" cy="13716"/>
+          </a:xfrm>
+          <a:prstGeom prst="rect">
             <a:avLst/>
           </a:prstGeom>
           <a:solidFill>
-            <a:srgbClr val="468250"/>
+            <a:srgbClr val="D2C8AF"/>
           </a:solidFill>
           <a:ln>
             <a:noFill/>
@@ -3902,14 +4371,57 @@
       </p:sp>
       <p:sp>
         <p:nvSpPr>
-          <p:cNvPr id="15" name="TextBox 14"/>
+          <p:cNvPr id="26" name="Rounded Rectangle 25"/>
+          <p:cNvSpPr/>
+          <p:nvPr/>
+        </p:nvSpPr>
+        <p:spPr>
+          <a:xfrm>
+            <a:off x="1600200" y="4041648"/>
+            <a:ext cx="1444752" cy="347472"/>
+          </a:xfrm>
+          <a:prstGeom prst="roundRect">
+            <a:avLst/>
+          </a:prstGeom>
+          <a:solidFill>
+            <a:srgbClr val="A0C896"/>
+          </a:solidFill>
+          <a:ln>
+            <a:noFill/>
+          </a:ln>
+        </p:spPr>
+        <p:style>
+          <a:lnRef idx="1">
+            <a:schemeClr val="accent1"/>
+          </a:lnRef>
+          <a:fillRef idx="3">
+            <a:schemeClr val="accent1"/>
+          </a:fillRef>
+          <a:effectRef idx="2">
+            <a:schemeClr val="accent1"/>
+          </a:effectRef>
+          <a:fontRef idx="minor">
+            <a:schemeClr val="lt1"/>
+          </a:fontRef>
+        </p:style>
+        <p:txBody>
+          <a:bodyPr rtlCol="0" anchor="ctr"/>
+          <a:lstStyle/>
+          <a:p>
+            <a:pPr algn="ctr"/>
+          </a:p>
+        </p:txBody>
+      </p:sp>
+      <p:sp>
+        <p:nvSpPr>
+          <p:cNvPr id="27" name="TextBox 26"/>
           <p:cNvSpPr txBox="1"/>
           <p:nvPr/>
         </p:nvSpPr>
         <p:spPr>
           <a:xfrm>
-            <a:off x="2255824" y="2414016"/>
-            <a:ext cx="384048" cy="365760"/>
+            <a:off x="1600200" y="4059936"/>
+            <a:ext cx="1444752" cy="310896"/>
           </a:xfrm>
           <a:prstGeom prst="rect">
             <a:avLst/>
@@ -3928,27 +4440,27 @@
               </a:spcAft>
             </a:pPr>
             <a:r>
-              <a:rPr sz="1600" b="1">
+              <a:rPr sz="1800" b="1">
                 <a:solidFill>
-                  <a:srgbClr val="FFFFFF"/>
+                  <a:srgbClr val="28462D"/>
                 </a:solidFill>
                 <a:latin typeface="Microsoft YaHei"/>
               </a:rPr>
-              <a:t>2</a:t>
-            </a:r>
-          </a:p>
-        </p:txBody>
-      </p:sp>
-      <p:sp>
-        <p:nvSpPr>
-          <p:cNvPr id="16" name="TextBox 15"/>
+              <a:t>对比材料</a:t>
+            </a:r>
+          </a:p>
+        </p:txBody>
+      </p:sp>
+      <p:sp>
+        <p:nvSpPr>
+          <p:cNvPr id="28" name="TextBox 27"/>
           <p:cNvSpPr txBox="1"/>
           <p:nvPr/>
         </p:nvSpPr>
         <p:spPr>
           <a:xfrm>
-            <a:off x="2758744" y="2377440"/>
-            <a:ext cx="7772400" cy="502920"/>
+            <a:off x="3182112" y="4041648"/>
+            <a:ext cx="7333488" cy="658368"/>
           </a:xfrm>
           <a:prstGeom prst="rect">
             <a:avLst/>
@@ -3967,134 +4479,13 @@
               </a:spcAft>
             </a:pPr>
             <a:r>
-              <a:rPr sz="2400" b="0">
+              <a:rPr sz="2100" b="0">
                 <a:solidFill>
                   <a:srgbClr val="28462D"/>
                 </a:solidFill>
                 <a:latin typeface="Microsoft YaHei"/>
               </a:rPr>
-              <a:t>比较古籍与课文，体会作者的想象与创造</a:t>
-            </a:r>
-          </a:p>
-        </p:txBody>
-      </p:sp>
-      <p:sp>
-        <p:nvSpPr>
-          <p:cNvPr id="17" name="Oval 16"/>
-          <p:cNvSpPr/>
-          <p:nvPr/>
-        </p:nvSpPr>
-        <p:spPr>
-          <a:xfrm>
-            <a:off x="2255824" y="2962656"/>
-            <a:ext cx="384048" cy="384048"/>
-          </a:xfrm>
-          <a:prstGeom prst="ellipse">
-            <a:avLst/>
-          </a:prstGeom>
-          <a:solidFill>
-            <a:srgbClr val="468250"/>
-          </a:solidFill>
-          <a:ln>
-            <a:noFill/>
-          </a:ln>
-        </p:spPr>
-        <p:style>
-          <a:lnRef idx="1">
-            <a:schemeClr val="accent1"/>
-          </a:lnRef>
-          <a:fillRef idx="3">
-            <a:schemeClr val="accent1"/>
-          </a:fillRef>
-          <a:effectRef idx="2">
-            <a:schemeClr val="accent1"/>
-          </a:effectRef>
-          <a:fontRef idx="minor">
-            <a:schemeClr val="lt1"/>
-          </a:fontRef>
-        </p:style>
-        <p:txBody>
-          <a:bodyPr rtlCol="0" anchor="ctr"/>
-          <a:lstStyle/>
-          <a:p>
-            <a:pPr algn="ctr"/>
-          </a:p>
-        </p:txBody>
-      </p:sp>
-      <p:sp>
-        <p:nvSpPr>
-          <p:cNvPr id="18" name="TextBox 17"/>
-          <p:cNvSpPr txBox="1"/>
-          <p:nvPr/>
-        </p:nvSpPr>
-        <p:spPr>
-          <a:xfrm>
-            <a:off x="2255824" y="2980944"/>
-            <a:ext cx="384048" cy="365760"/>
-          </a:xfrm>
-          <a:prstGeom prst="rect">
-            <a:avLst/>
-          </a:prstGeom>
-          <a:noFill/>
-        </p:spPr>
-        <p:txBody>
-          <a:bodyPr wrap="none">
-            <a:spAutoFit/>
-          </a:bodyPr>
-          <a:lstStyle/>
-          <a:p>
-            <a:pPr algn="ctr">
-              <a:spcAft>
-                <a:spcPts val="1000"/>
-              </a:spcAft>
-            </a:pPr>
-            <a:r>
-              <a:rPr sz="1600" b="1">
-                <a:solidFill>
-                  <a:srgbClr val="FFFFFF"/>
-                </a:solidFill>
-                <a:latin typeface="Microsoft YaHei"/>
-              </a:rPr>
-              <a:t>3</a:t>
-            </a:r>
-          </a:p>
-        </p:txBody>
-      </p:sp>
-      <p:sp>
-        <p:nvSpPr>
-          <p:cNvPr id="19" name="TextBox 18"/>
-          <p:cNvSpPr txBox="1"/>
-          <p:nvPr/>
-        </p:nvSpPr>
-        <p:spPr>
-          <a:xfrm>
-            <a:off x="2758744" y="2944368"/>
-            <a:ext cx="7772400" cy="502920"/>
-          </a:xfrm>
-          <a:prstGeom prst="rect">
-            <a:avLst/>
-          </a:prstGeom>
-          <a:noFill/>
-        </p:spPr>
-        <p:txBody>
-          <a:bodyPr wrap="none">
-            <a:spAutoFit/>
-          </a:bodyPr>
-          <a:lstStyle/>
-          <a:p>
-            <a:pPr algn="l">
-              <a:spcAft>
-                <a:spcPts val="1000"/>
-              </a:spcAft>
-            </a:pPr>
-            <a:r>
-              <a:rPr sz="2400" b="0">
-                <a:solidFill>
-                  <a:srgbClr val="28462D"/>
-                </a:solidFill>
-                <a:latin typeface="Microsoft YaHei"/>
-              </a:rPr>
-              <a:t>感悟神话中蕴含的对生命与创造的礼赞</a:t>
+              <a:t>教材「阅读提示」中的《风俗通》记载</a:t>
             </a:r>
           </a:p>
         </p:txBody>
@@ -4240,8 +4631,342 @@
         </p:nvSpPr>
         <p:spPr>
           <a:xfrm>
-            <a:off x="4953304" y="1005840"/>
-            <a:ext cx="2286000" cy="411480"/>
+            <a:off x="502920" y="384048"/>
+            <a:ext cx="2011680" cy="384048"/>
+          </a:xfrm>
+          <a:prstGeom prst="roundRect">
+            <a:avLst/>
+          </a:prstGeom>
+          <a:solidFill>
+            <a:srgbClr val="468250"/>
+          </a:solidFill>
+          <a:ln>
+            <a:noFill/>
+          </a:ln>
+        </p:spPr>
+        <p:style>
+          <a:lnRef idx="1">
+            <a:schemeClr val="accent1"/>
+          </a:lnRef>
+          <a:fillRef idx="3">
+            <a:schemeClr val="accent1"/>
+          </a:fillRef>
+          <a:effectRef idx="2">
+            <a:schemeClr val="accent1"/>
+          </a:effectRef>
+          <a:fontRef idx="minor">
+            <a:schemeClr val="lt1"/>
+          </a:fontRef>
+        </p:style>
+        <p:txBody>
+          <a:bodyPr rtlCol="0" anchor="ctr"/>
+          <a:lstStyle/>
+          <a:p>
+            <a:pPr algn="ctr"/>
+          </a:p>
+        </p:txBody>
+      </p:sp>
+      <p:sp>
+        <p:nvSpPr>
+          <p:cNvPr id="7" name="TextBox 6"/>
+          <p:cNvSpPr txBox="1"/>
+          <p:nvPr/>
+        </p:nvSpPr>
+        <p:spPr>
+          <a:xfrm>
+            <a:off x="502920" y="402336"/>
+            <a:ext cx="2011680" cy="347472"/>
+          </a:xfrm>
+          <a:prstGeom prst="rect">
+            <a:avLst/>
+          </a:prstGeom>
+          <a:noFill/>
+        </p:spPr>
+        <p:txBody>
+          <a:bodyPr wrap="none">
+            <a:spAutoFit/>
+          </a:bodyPr>
+          <a:lstStyle/>
+          <a:p>
+            <a:pPr algn="ctr">
+              <a:spcAft>
+                <a:spcPts val="1000"/>
+              </a:spcAft>
+            </a:pPr>
+            <a:r>
+              <a:rPr sz="1600" b="1">
+                <a:solidFill>
+                  <a:srgbClr val="FFFFFF"/>
+                </a:solidFill>
+                <a:latin typeface="Microsoft YaHei"/>
+              </a:rPr>
+              <a:t>情节笔记</a:t>
+            </a:r>
+          </a:p>
+        </p:txBody>
+      </p:sp>
+      <p:sp>
+        <p:nvSpPr>
+          <p:cNvPr id="8" name="TextBox 7"/>
+          <p:cNvSpPr txBox="1"/>
+          <p:nvPr/>
+        </p:nvSpPr>
+        <p:spPr>
+          <a:xfrm>
+            <a:off x="1371600" y="384048"/>
+            <a:ext cx="9418320" cy="822960"/>
+          </a:xfrm>
+          <a:prstGeom prst="rect">
+            <a:avLst/>
+          </a:prstGeom>
+          <a:noFill/>
+        </p:spPr>
+        <p:txBody>
+          <a:bodyPr wrap="square">
+            <a:spAutoFit/>
+          </a:bodyPr>
+          <a:lstStyle/>
+          <a:p>
+            <a:pPr algn="ctr">
+              <a:spcAft>
+                <a:spcPts val="1000"/>
+              </a:spcAft>
+            </a:pPr>
+            <a:r>
+              <a:rPr sz="3400" b="1">
+                <a:solidFill>
+                  <a:srgbClr val="468250"/>
+                </a:solidFill>
+                <a:latin typeface="Microsoft YaHei"/>
+              </a:rPr>
+              <a:t>造人过程</a:t>
+            </a:r>
+          </a:p>
+        </p:txBody>
+      </p:sp>
+      <p:sp>
+        <p:nvSpPr>
+          <p:cNvPr id="9" name="Rounded Rectangle 8"/>
+          <p:cNvSpPr/>
+          <p:nvPr/>
+        </p:nvSpPr>
+        <p:spPr>
+          <a:xfrm>
+            <a:off x="1067104" y="1143000"/>
+            <a:ext cx="10058400" cy="3721608"/>
+          </a:xfrm>
+          <a:prstGeom prst="roundRect">
+            <a:avLst/>
+          </a:prstGeom>
+          <a:solidFill>
+            <a:srgbClr val="FFFCEB"/>
+          </a:solidFill>
+          <a:ln w="25400">
+            <a:solidFill>
+              <a:srgbClr val="5A8C5A"/>
+            </a:solidFill>
+          </a:ln>
+        </p:spPr>
+        <p:style>
+          <a:lnRef idx="1">
+            <a:schemeClr val="accent1"/>
+          </a:lnRef>
+          <a:fillRef idx="3">
+            <a:schemeClr val="accent1"/>
+          </a:fillRef>
+          <a:effectRef idx="2">
+            <a:schemeClr val="accent1"/>
+          </a:effectRef>
+          <a:fontRef idx="minor">
+            <a:schemeClr val="lt1"/>
+          </a:fontRef>
+        </p:style>
+        <p:txBody>
+          <a:bodyPr rtlCol="0" anchor="ctr"/>
+          <a:lstStyle/>
+          <a:p>
+            <a:pPr algn="ctr"/>
+          </a:p>
+        </p:txBody>
+      </p:sp>
+      <p:sp>
+        <p:nvSpPr>
+          <p:cNvPr id="10" name="Rectangle 9"/>
+          <p:cNvSpPr/>
+          <p:nvPr/>
+        </p:nvSpPr>
+        <p:spPr>
+          <a:xfrm>
+            <a:off x="1067104" y="1143000"/>
+            <a:ext cx="10058400" cy="384048"/>
+          </a:xfrm>
+          <a:prstGeom prst="rect">
+            <a:avLst/>
+          </a:prstGeom>
+          <a:solidFill>
+            <a:srgbClr val="468250"/>
+          </a:solidFill>
+          <a:ln>
+            <a:noFill/>
+          </a:ln>
+        </p:spPr>
+        <p:style>
+          <a:lnRef idx="1">
+            <a:schemeClr val="accent1"/>
+          </a:lnRef>
+          <a:fillRef idx="3">
+            <a:schemeClr val="accent1"/>
+          </a:fillRef>
+          <a:effectRef idx="2">
+            <a:schemeClr val="accent1"/>
+          </a:effectRef>
+          <a:fontRef idx="minor">
+            <a:schemeClr val="lt1"/>
+          </a:fontRef>
+        </p:style>
+        <p:txBody>
+          <a:bodyPr rtlCol="0" anchor="ctr"/>
+          <a:lstStyle/>
+          <a:p>
+            <a:pPr algn="ctr"/>
+          </a:p>
+        </p:txBody>
+      </p:sp>
+      <p:sp>
+        <p:nvSpPr>
+          <p:cNvPr id="11" name="TextBox 10"/>
+          <p:cNvSpPr txBox="1"/>
+          <p:nvPr/>
+        </p:nvSpPr>
+        <p:spPr>
+          <a:xfrm>
+            <a:off x="1067104" y="1179576"/>
+            <a:ext cx="10058400" cy="347472"/>
+          </a:xfrm>
+          <a:prstGeom prst="rect">
+            <a:avLst/>
+          </a:prstGeom>
+          <a:noFill/>
+        </p:spPr>
+        <p:txBody>
+          <a:bodyPr wrap="none">
+            <a:spAutoFit/>
+          </a:bodyPr>
+          <a:lstStyle/>
+          <a:p>
+            <a:pPr algn="ctr">
+              <a:spcAft>
+                <a:spcPts val="1000"/>
+              </a:spcAft>
+            </a:pPr>
+            <a:r>
+              <a:rPr sz="1800" b="1">
+                <a:solidFill>
+                  <a:srgbClr val="FFFFFF"/>
+                </a:solidFill>
+                <a:latin typeface="Microsoft YaHei"/>
+              </a:rPr>
+              <a:t>📝  课堂笔记  —  请摘抄要点</a:t>
+            </a:r>
+          </a:p>
+        </p:txBody>
+      </p:sp>
+      <p:sp>
+        <p:nvSpPr>
+          <p:cNvPr id="12" name="Rectangle 11"/>
+          <p:cNvSpPr/>
+          <p:nvPr/>
+        </p:nvSpPr>
+        <p:spPr>
+          <a:xfrm>
+            <a:off x="1570024" y="1527048"/>
+            <a:ext cx="27432" cy="3337560"/>
+          </a:xfrm>
+          <a:prstGeom prst="rect">
+            <a:avLst/>
+          </a:prstGeom>
+          <a:solidFill>
+            <a:srgbClr val="DC5050"/>
+          </a:solidFill>
+          <a:ln>
+            <a:noFill/>
+          </a:ln>
+        </p:spPr>
+        <p:style>
+          <a:lnRef idx="1">
+            <a:schemeClr val="accent1"/>
+          </a:lnRef>
+          <a:fillRef idx="3">
+            <a:schemeClr val="accent1"/>
+          </a:fillRef>
+          <a:effectRef idx="2">
+            <a:schemeClr val="accent1"/>
+          </a:effectRef>
+          <a:fontRef idx="minor">
+            <a:schemeClr val="lt1"/>
+          </a:fontRef>
+        </p:style>
+        <p:txBody>
+          <a:bodyPr rtlCol="0" anchor="ctr"/>
+          <a:lstStyle/>
+          <a:p>
+            <a:pPr algn="ctr"/>
+          </a:p>
+        </p:txBody>
+      </p:sp>
+      <p:sp>
+        <p:nvSpPr>
+          <p:cNvPr id="13" name="Rectangle 12"/>
+          <p:cNvSpPr/>
+          <p:nvPr/>
+        </p:nvSpPr>
+        <p:spPr>
+          <a:xfrm>
+            <a:off x="1417320" y="2276856"/>
+            <a:ext cx="9601200" cy="13716"/>
+          </a:xfrm>
+          <a:prstGeom prst="rect">
+            <a:avLst/>
+          </a:prstGeom>
+          <a:solidFill>
+            <a:srgbClr val="D2C8AF"/>
+          </a:solidFill>
+          <a:ln>
+            <a:noFill/>
+          </a:ln>
+        </p:spPr>
+        <p:style>
+          <a:lnRef idx="1">
+            <a:schemeClr val="accent1"/>
+          </a:lnRef>
+          <a:fillRef idx="3">
+            <a:schemeClr val="accent1"/>
+          </a:fillRef>
+          <a:effectRef idx="2">
+            <a:schemeClr val="accent1"/>
+          </a:effectRef>
+          <a:fontRef idx="minor">
+            <a:schemeClr val="lt1"/>
+          </a:fontRef>
+        </p:style>
+        <p:txBody>
+          <a:bodyPr rtlCol="0" anchor="ctr"/>
+          <a:lstStyle/>
+          <a:p>
+            <a:pPr algn="ctr"/>
+          </a:p>
+        </p:txBody>
+      </p:sp>
+      <p:sp>
+        <p:nvSpPr>
+          <p:cNvPr id="14" name="Rounded Rectangle 13"/>
+          <p:cNvSpPr/>
+          <p:nvPr/>
+        </p:nvSpPr>
+        <p:spPr>
+          <a:xfrm>
+            <a:off x="1600200" y="1627632"/>
+            <a:ext cx="1280160" cy="347472"/>
           </a:xfrm>
           <a:prstGeom prst="roundRect">
             <a:avLst/>
@@ -4277,14 +5002,14 @@
       </p:sp>
       <p:sp>
         <p:nvSpPr>
-          <p:cNvPr id="7" name="TextBox 6"/>
+          <p:cNvPr id="15" name="TextBox 14"/>
           <p:cNvSpPr txBox="1"/>
           <p:nvPr/>
         </p:nvSpPr>
         <p:spPr>
           <a:xfrm>
-            <a:off x="4953304" y="1024128"/>
-            <a:ext cx="2286000" cy="384048"/>
+            <a:off x="1600200" y="1645920"/>
+            <a:ext cx="1280160" cy="310896"/>
           </a:xfrm>
           <a:prstGeom prst="rect">
             <a:avLst/>
@@ -4309,21 +5034,21 @@
                 </a:solidFill>
                 <a:latin typeface="Microsoft YaHei"/>
               </a:rPr>
-              <a:t>想一想</a:t>
-            </a:r>
-          </a:p>
-        </p:txBody>
-      </p:sp>
-      <p:sp>
-        <p:nvSpPr>
-          <p:cNvPr id="8" name="TextBox 7"/>
+              <a:t>起因</a:t>
+            </a:r>
+          </a:p>
+        </p:txBody>
+      </p:sp>
+      <p:sp>
+        <p:nvSpPr>
+          <p:cNvPr id="16" name="TextBox 15"/>
           <p:cNvSpPr txBox="1"/>
           <p:nvPr/>
         </p:nvSpPr>
         <p:spPr>
           <a:xfrm>
-            <a:off x="1371600" y="1600200"/>
-            <a:ext cx="9418320" cy="822960"/>
+            <a:off x="3017520" y="1627632"/>
+            <a:ext cx="7498079" cy="658368"/>
           </a:xfrm>
           <a:prstGeom prst="rect">
             <a:avLst/>
@@ -4331,40 +5056,83 @@
           <a:noFill/>
         </p:spPr>
         <p:txBody>
-          <a:bodyPr wrap="square">
+          <a:bodyPr wrap="none">
             <a:spAutoFit/>
           </a:bodyPr>
           <a:lstStyle/>
           <a:p>
-            <a:pPr algn="ctr">
+            <a:pPr algn="l">
               <a:spcAft>
                 <a:spcPts val="1000"/>
               </a:spcAft>
             </a:pPr>
             <a:r>
-              <a:rPr sz="3200" b="1">
+              <a:rPr sz="2100" b="0">
                 <a:solidFill>
-                  <a:srgbClr val="468250"/>
+                  <a:srgbClr val="28462D"/>
                 </a:solidFill>
                 <a:latin typeface="Microsoft YaHei"/>
               </a:rPr>
-              <a:t>为什么古人要想象一位女神来创造人类？</a:t>
-            </a:r>
-          </a:p>
-        </p:txBody>
-      </p:sp>
-      <p:sp>
-        <p:nvSpPr>
-          <p:cNvPr id="9" name="Rectangle 8"/>
+              <a:t>女娲行走世间，感到孤独寂寞</a:t>
+            </a:r>
+          </a:p>
+        </p:txBody>
+      </p:sp>
+      <p:sp>
+        <p:nvSpPr>
+          <p:cNvPr id="17" name="Rectangle 16"/>
           <p:cNvSpPr/>
           <p:nvPr/>
         </p:nvSpPr>
         <p:spPr>
           <a:xfrm>
-            <a:off x="3200400" y="4389120"/>
-            <a:ext cx="5760720" cy="27432"/>
-          </a:xfrm>
-          <a:prstGeom prst="rect">
+            <a:off x="1417320" y="3081527"/>
+            <a:ext cx="9601200" cy="13716"/>
+          </a:xfrm>
+          <a:prstGeom prst="rect">
+            <a:avLst/>
+          </a:prstGeom>
+          <a:solidFill>
+            <a:srgbClr val="D2C8AF"/>
+          </a:solidFill>
+          <a:ln>
+            <a:noFill/>
+          </a:ln>
+        </p:spPr>
+        <p:style>
+          <a:lnRef idx="1">
+            <a:schemeClr val="accent1"/>
+          </a:lnRef>
+          <a:fillRef idx="3">
+            <a:schemeClr val="accent1"/>
+          </a:fillRef>
+          <a:effectRef idx="2">
+            <a:schemeClr val="accent1"/>
+          </a:effectRef>
+          <a:fontRef idx="minor">
+            <a:schemeClr val="lt1"/>
+          </a:fontRef>
+        </p:style>
+        <p:txBody>
+          <a:bodyPr rtlCol="0" anchor="ctr"/>
+          <a:lstStyle/>
+          <a:p>
+            <a:pPr algn="ctr"/>
+          </a:p>
+        </p:txBody>
+      </p:sp>
+      <p:sp>
+        <p:nvSpPr>
+          <p:cNvPr id="18" name="Rounded Rectangle 17"/>
+          <p:cNvSpPr/>
+          <p:nvPr/>
+        </p:nvSpPr>
+        <p:spPr>
+          <a:xfrm>
+            <a:off x="1600200" y="2432303"/>
+            <a:ext cx="1280160" cy="347472"/>
+          </a:xfrm>
+          <a:prstGeom prst="roundRect">
             <a:avLst/>
           </a:prstGeom>
           <a:solidFill>
@@ -4398,14 +5166,14 @@
       </p:sp>
       <p:sp>
         <p:nvSpPr>
-          <p:cNvPr id="10" name="TextBox 9"/>
+          <p:cNvPr id="19" name="TextBox 18"/>
           <p:cNvSpPr txBox="1"/>
           <p:nvPr/>
         </p:nvSpPr>
         <p:spPr>
           <a:xfrm>
-            <a:off x="1828800" y="4663440"/>
-            <a:ext cx="8503920" cy="914400"/>
+            <a:off x="1600200" y="2450591"/>
+            <a:ext cx="1280160" cy="310896"/>
           </a:xfrm>
           <a:prstGeom prst="rect">
             <a:avLst/>
@@ -4424,13 +5192,380 @@
               </a:spcAft>
             </a:pPr>
             <a:r>
-              <a:rPr sz="2200" b="0">
+              <a:rPr sz="1800" b="1">
                 <a:solidFill>
-                  <a:srgbClr val="468250"/>
+                  <a:srgbClr val="28462D"/>
                 </a:solidFill>
                 <a:latin typeface="Microsoft YaHei"/>
               </a:rPr>
-              <a:t>这是对「人从哪里来、为何需要同伴」的诗意追问</a:t>
+              <a:t>方法一</a:t>
+            </a:r>
+          </a:p>
+        </p:txBody>
+      </p:sp>
+      <p:sp>
+        <p:nvSpPr>
+          <p:cNvPr id="20" name="TextBox 19"/>
+          <p:cNvSpPr txBox="1"/>
+          <p:nvPr/>
+        </p:nvSpPr>
+        <p:spPr>
+          <a:xfrm>
+            <a:off x="3017520" y="2432303"/>
+            <a:ext cx="7498079" cy="658368"/>
+          </a:xfrm>
+          <a:prstGeom prst="rect">
+            <a:avLst/>
+          </a:prstGeom>
+          <a:noFill/>
+        </p:spPr>
+        <p:txBody>
+          <a:bodyPr wrap="none">
+            <a:spAutoFit/>
+          </a:bodyPr>
+          <a:lstStyle/>
+          <a:p>
+            <a:pPr algn="l">
+              <a:spcAft>
+                <a:spcPts val="1000"/>
+              </a:spcAft>
+            </a:pPr>
+            <a:r>
+              <a:rPr sz="2100" b="0">
+                <a:solidFill>
+                  <a:srgbClr val="28462D"/>
+                </a:solidFill>
+                <a:latin typeface="Microsoft YaHei"/>
+              </a:rPr>
+              <a:t>黄泥和水，揉成小泥人，泥人落地即活</a:t>
+            </a:r>
+          </a:p>
+        </p:txBody>
+      </p:sp>
+      <p:sp>
+        <p:nvSpPr>
+          <p:cNvPr id="21" name="Rectangle 20"/>
+          <p:cNvSpPr/>
+          <p:nvPr/>
+        </p:nvSpPr>
+        <p:spPr>
+          <a:xfrm>
+            <a:off x="1417320" y="3886200"/>
+            <a:ext cx="9601200" cy="13716"/>
+          </a:xfrm>
+          <a:prstGeom prst="rect">
+            <a:avLst/>
+          </a:prstGeom>
+          <a:solidFill>
+            <a:srgbClr val="D2C8AF"/>
+          </a:solidFill>
+          <a:ln>
+            <a:noFill/>
+          </a:ln>
+        </p:spPr>
+        <p:style>
+          <a:lnRef idx="1">
+            <a:schemeClr val="accent1"/>
+          </a:lnRef>
+          <a:fillRef idx="3">
+            <a:schemeClr val="accent1"/>
+          </a:fillRef>
+          <a:effectRef idx="2">
+            <a:schemeClr val="accent1"/>
+          </a:effectRef>
+          <a:fontRef idx="minor">
+            <a:schemeClr val="lt1"/>
+          </a:fontRef>
+        </p:style>
+        <p:txBody>
+          <a:bodyPr rtlCol="0" anchor="ctr"/>
+          <a:lstStyle/>
+          <a:p>
+            <a:pPr algn="ctr"/>
+          </a:p>
+        </p:txBody>
+      </p:sp>
+      <p:sp>
+        <p:nvSpPr>
+          <p:cNvPr id="22" name="Rounded Rectangle 21"/>
+          <p:cNvSpPr/>
+          <p:nvPr/>
+        </p:nvSpPr>
+        <p:spPr>
+          <a:xfrm>
+            <a:off x="1600200" y="3236976"/>
+            <a:ext cx="1280160" cy="347472"/>
+          </a:xfrm>
+          <a:prstGeom prst="roundRect">
+            <a:avLst/>
+          </a:prstGeom>
+          <a:solidFill>
+            <a:srgbClr val="A0C896"/>
+          </a:solidFill>
+          <a:ln>
+            <a:noFill/>
+          </a:ln>
+        </p:spPr>
+        <p:style>
+          <a:lnRef idx="1">
+            <a:schemeClr val="accent1"/>
+          </a:lnRef>
+          <a:fillRef idx="3">
+            <a:schemeClr val="accent1"/>
+          </a:fillRef>
+          <a:effectRef idx="2">
+            <a:schemeClr val="accent1"/>
+          </a:effectRef>
+          <a:fontRef idx="minor">
+            <a:schemeClr val="lt1"/>
+          </a:fontRef>
+        </p:style>
+        <p:txBody>
+          <a:bodyPr rtlCol="0" anchor="ctr"/>
+          <a:lstStyle/>
+          <a:p>
+            <a:pPr algn="ctr"/>
+          </a:p>
+        </p:txBody>
+      </p:sp>
+      <p:sp>
+        <p:nvSpPr>
+          <p:cNvPr id="23" name="TextBox 22"/>
+          <p:cNvSpPr txBox="1"/>
+          <p:nvPr/>
+        </p:nvSpPr>
+        <p:spPr>
+          <a:xfrm>
+            <a:off x="1600200" y="3255264"/>
+            <a:ext cx="1280160" cy="310896"/>
+          </a:xfrm>
+          <a:prstGeom prst="rect">
+            <a:avLst/>
+          </a:prstGeom>
+          <a:noFill/>
+        </p:spPr>
+        <p:txBody>
+          <a:bodyPr wrap="none">
+            <a:spAutoFit/>
+          </a:bodyPr>
+          <a:lstStyle/>
+          <a:p>
+            <a:pPr algn="ctr">
+              <a:spcAft>
+                <a:spcPts val="1000"/>
+              </a:spcAft>
+            </a:pPr>
+            <a:r>
+              <a:rPr sz="1800" b="1">
+                <a:solidFill>
+                  <a:srgbClr val="28462D"/>
+                </a:solidFill>
+                <a:latin typeface="Microsoft YaHei"/>
+              </a:rPr>
+              <a:t>方法二</a:t>
+            </a:r>
+          </a:p>
+        </p:txBody>
+      </p:sp>
+      <p:sp>
+        <p:nvSpPr>
+          <p:cNvPr id="24" name="TextBox 23"/>
+          <p:cNvSpPr txBox="1"/>
+          <p:nvPr/>
+        </p:nvSpPr>
+        <p:spPr>
+          <a:xfrm>
+            <a:off x="3017520" y="3236976"/>
+            <a:ext cx="7498079" cy="658368"/>
+          </a:xfrm>
+          <a:prstGeom prst="rect">
+            <a:avLst/>
+          </a:prstGeom>
+          <a:noFill/>
+        </p:spPr>
+        <p:txBody>
+          <a:bodyPr wrap="none">
+            <a:spAutoFit/>
+          </a:bodyPr>
+          <a:lstStyle/>
+          <a:p>
+            <a:pPr algn="l">
+              <a:spcAft>
+                <a:spcPts val="1000"/>
+              </a:spcAft>
+            </a:pPr>
+            <a:r>
+              <a:rPr sz="2100" b="0">
+                <a:solidFill>
+                  <a:srgbClr val="28462D"/>
+                </a:solidFill>
+                <a:latin typeface="Microsoft YaHei"/>
+              </a:rPr>
+              <a:t>藤条蘸泥浆挥洒，溅落的泥点也变成人</a:t>
+            </a:r>
+          </a:p>
+        </p:txBody>
+      </p:sp>
+      <p:sp>
+        <p:nvSpPr>
+          <p:cNvPr id="25" name="Rectangle 24"/>
+          <p:cNvSpPr/>
+          <p:nvPr/>
+        </p:nvSpPr>
+        <p:spPr>
+          <a:xfrm>
+            <a:off x="1417320" y="4690872"/>
+            <a:ext cx="9601200" cy="13716"/>
+          </a:xfrm>
+          <a:prstGeom prst="rect">
+            <a:avLst/>
+          </a:prstGeom>
+          <a:solidFill>
+            <a:srgbClr val="D2C8AF"/>
+          </a:solidFill>
+          <a:ln>
+            <a:noFill/>
+          </a:ln>
+        </p:spPr>
+        <p:style>
+          <a:lnRef idx="1">
+            <a:schemeClr val="accent1"/>
+          </a:lnRef>
+          <a:fillRef idx="3">
+            <a:schemeClr val="accent1"/>
+          </a:fillRef>
+          <a:effectRef idx="2">
+            <a:schemeClr val="accent1"/>
+          </a:effectRef>
+          <a:fontRef idx="minor">
+            <a:schemeClr val="lt1"/>
+          </a:fontRef>
+        </p:style>
+        <p:txBody>
+          <a:bodyPr rtlCol="0" anchor="ctr"/>
+          <a:lstStyle/>
+          <a:p>
+            <a:pPr algn="ctr"/>
+          </a:p>
+        </p:txBody>
+      </p:sp>
+      <p:sp>
+        <p:nvSpPr>
+          <p:cNvPr id="26" name="Rounded Rectangle 25"/>
+          <p:cNvSpPr/>
+          <p:nvPr/>
+        </p:nvSpPr>
+        <p:spPr>
+          <a:xfrm>
+            <a:off x="1600200" y="4041648"/>
+            <a:ext cx="1280160" cy="347472"/>
+          </a:xfrm>
+          <a:prstGeom prst="roundRect">
+            <a:avLst/>
+          </a:prstGeom>
+          <a:solidFill>
+            <a:srgbClr val="A0C896"/>
+          </a:solidFill>
+          <a:ln>
+            <a:noFill/>
+          </a:ln>
+        </p:spPr>
+        <p:style>
+          <a:lnRef idx="1">
+            <a:schemeClr val="accent1"/>
+          </a:lnRef>
+          <a:fillRef idx="3">
+            <a:schemeClr val="accent1"/>
+          </a:fillRef>
+          <a:effectRef idx="2">
+            <a:schemeClr val="accent1"/>
+          </a:effectRef>
+          <a:fontRef idx="minor">
+            <a:schemeClr val="lt1"/>
+          </a:fontRef>
+        </p:style>
+        <p:txBody>
+          <a:bodyPr rtlCol="0" anchor="ctr"/>
+          <a:lstStyle/>
+          <a:p>
+            <a:pPr algn="ctr"/>
+          </a:p>
+        </p:txBody>
+      </p:sp>
+      <p:sp>
+        <p:nvSpPr>
+          <p:cNvPr id="27" name="TextBox 26"/>
+          <p:cNvSpPr txBox="1"/>
+          <p:nvPr/>
+        </p:nvSpPr>
+        <p:spPr>
+          <a:xfrm>
+            <a:off x="1600200" y="4059936"/>
+            <a:ext cx="1280160" cy="310896"/>
+          </a:xfrm>
+          <a:prstGeom prst="rect">
+            <a:avLst/>
+          </a:prstGeom>
+          <a:noFill/>
+        </p:spPr>
+        <p:txBody>
+          <a:bodyPr wrap="none">
+            <a:spAutoFit/>
+          </a:bodyPr>
+          <a:lstStyle/>
+          <a:p>
+            <a:pPr algn="ctr">
+              <a:spcAft>
+                <a:spcPts val="1000"/>
+              </a:spcAft>
+            </a:pPr>
+            <a:r>
+              <a:rPr sz="1800" b="1">
+                <a:solidFill>
+                  <a:srgbClr val="28462D"/>
+                </a:solidFill>
+                <a:latin typeface="Microsoft YaHei"/>
+              </a:rPr>
+              <a:t>结果</a:t>
+            </a:r>
+          </a:p>
+        </p:txBody>
+      </p:sp>
+      <p:sp>
+        <p:nvSpPr>
+          <p:cNvPr id="28" name="TextBox 27"/>
+          <p:cNvSpPr txBox="1"/>
+          <p:nvPr/>
+        </p:nvSpPr>
+        <p:spPr>
+          <a:xfrm>
+            <a:off x="3017520" y="4041648"/>
+            <a:ext cx="7498079" cy="658368"/>
+          </a:xfrm>
+          <a:prstGeom prst="rect">
+            <a:avLst/>
+          </a:prstGeom>
+          <a:noFill/>
+        </p:spPr>
+        <p:txBody>
+          <a:bodyPr wrap="none">
+            <a:spAutoFit/>
+          </a:bodyPr>
+          <a:lstStyle/>
+          <a:p>
+            <a:pPr algn="l">
+              <a:spcAft>
+                <a:spcPts val="1000"/>
+              </a:spcAft>
+            </a:pPr>
+            <a:r>
+              <a:rPr sz="2100" b="0">
+                <a:solidFill>
+                  <a:srgbClr val="28462D"/>
+                </a:solidFill>
+                <a:latin typeface="Microsoft YaHei"/>
+              </a:rPr>
+              <a:t>建立婚姻制度，让人类繁衍生息</a:t>
             </a:r>
           </a:p>
         </p:txBody>
@@ -4576,8 +5711,342 @@
         </p:nvSpPr>
         <p:spPr>
           <a:xfrm>
-            <a:off x="4953304" y="502920"/>
-            <a:ext cx="2286000" cy="411480"/>
+            <a:off x="502920" y="384048"/>
+            <a:ext cx="2011680" cy="384048"/>
+          </a:xfrm>
+          <a:prstGeom prst="roundRect">
+            <a:avLst/>
+          </a:prstGeom>
+          <a:solidFill>
+            <a:srgbClr val="468250"/>
+          </a:solidFill>
+          <a:ln>
+            <a:noFill/>
+          </a:ln>
+        </p:spPr>
+        <p:style>
+          <a:lnRef idx="1">
+            <a:schemeClr val="accent1"/>
+          </a:lnRef>
+          <a:fillRef idx="3">
+            <a:schemeClr val="accent1"/>
+          </a:fillRef>
+          <a:effectRef idx="2">
+            <a:schemeClr val="accent1"/>
+          </a:effectRef>
+          <a:fontRef idx="minor">
+            <a:schemeClr val="lt1"/>
+          </a:fontRef>
+        </p:style>
+        <p:txBody>
+          <a:bodyPr rtlCol="0" anchor="ctr"/>
+          <a:lstStyle/>
+          <a:p>
+            <a:pPr algn="ctr"/>
+          </a:p>
+        </p:txBody>
+      </p:sp>
+      <p:sp>
+        <p:nvSpPr>
+          <p:cNvPr id="7" name="TextBox 6"/>
+          <p:cNvSpPr txBox="1"/>
+          <p:nvPr/>
+        </p:nvSpPr>
+        <p:spPr>
+          <a:xfrm>
+            <a:off x="502920" y="402336"/>
+            <a:ext cx="2011680" cy="347472"/>
+          </a:xfrm>
+          <a:prstGeom prst="rect">
+            <a:avLst/>
+          </a:prstGeom>
+          <a:noFill/>
+        </p:spPr>
+        <p:txBody>
+          <a:bodyPr wrap="none">
+            <a:spAutoFit/>
+          </a:bodyPr>
+          <a:lstStyle/>
+          <a:p>
+            <a:pPr algn="ctr">
+              <a:spcAft>
+                <a:spcPts val="1000"/>
+              </a:spcAft>
+            </a:pPr>
+            <a:r>
+              <a:rPr sz="1600" b="1">
+                <a:solidFill>
+                  <a:srgbClr val="FFFFFF"/>
+                </a:solidFill>
+                <a:latin typeface="Microsoft YaHei"/>
+              </a:rPr>
+              <a:t>写法笔记</a:t>
+            </a:r>
+          </a:p>
+        </p:txBody>
+      </p:sp>
+      <p:sp>
+        <p:nvSpPr>
+          <p:cNvPr id="8" name="TextBox 7"/>
+          <p:cNvSpPr txBox="1"/>
+          <p:nvPr/>
+        </p:nvSpPr>
+        <p:spPr>
+          <a:xfrm>
+            <a:off x="1371600" y="384048"/>
+            <a:ext cx="9418320" cy="822960"/>
+          </a:xfrm>
+          <a:prstGeom prst="rect">
+            <a:avLst/>
+          </a:prstGeom>
+          <a:noFill/>
+        </p:spPr>
+        <p:txBody>
+          <a:bodyPr wrap="square">
+            <a:spAutoFit/>
+          </a:bodyPr>
+          <a:lstStyle/>
+          <a:p>
+            <a:pPr algn="ctr">
+              <a:spcAft>
+                <a:spcPts val="1000"/>
+              </a:spcAft>
+            </a:pPr>
+            <a:r>
+              <a:rPr sz="3400" b="1">
+                <a:solidFill>
+                  <a:srgbClr val="468250"/>
+                </a:solidFill>
+                <a:latin typeface="Microsoft YaHei"/>
+              </a:rPr>
+              <a:t>想象特点</a:t>
+            </a:r>
+          </a:p>
+        </p:txBody>
+      </p:sp>
+      <p:sp>
+        <p:nvSpPr>
+          <p:cNvPr id="9" name="Rounded Rectangle 8"/>
+          <p:cNvSpPr/>
+          <p:nvPr/>
+        </p:nvSpPr>
+        <p:spPr>
+          <a:xfrm>
+            <a:off x="1067104" y="1143000"/>
+            <a:ext cx="10058400" cy="3721608"/>
+          </a:xfrm>
+          <a:prstGeom prst="roundRect">
+            <a:avLst/>
+          </a:prstGeom>
+          <a:solidFill>
+            <a:srgbClr val="FFFCEB"/>
+          </a:solidFill>
+          <a:ln w="25400">
+            <a:solidFill>
+              <a:srgbClr val="5A8C5A"/>
+            </a:solidFill>
+          </a:ln>
+        </p:spPr>
+        <p:style>
+          <a:lnRef idx="1">
+            <a:schemeClr val="accent1"/>
+          </a:lnRef>
+          <a:fillRef idx="3">
+            <a:schemeClr val="accent1"/>
+          </a:fillRef>
+          <a:effectRef idx="2">
+            <a:schemeClr val="accent1"/>
+          </a:effectRef>
+          <a:fontRef idx="minor">
+            <a:schemeClr val="lt1"/>
+          </a:fontRef>
+        </p:style>
+        <p:txBody>
+          <a:bodyPr rtlCol="0" anchor="ctr"/>
+          <a:lstStyle/>
+          <a:p>
+            <a:pPr algn="ctr"/>
+          </a:p>
+        </p:txBody>
+      </p:sp>
+      <p:sp>
+        <p:nvSpPr>
+          <p:cNvPr id="10" name="Rectangle 9"/>
+          <p:cNvSpPr/>
+          <p:nvPr/>
+        </p:nvSpPr>
+        <p:spPr>
+          <a:xfrm>
+            <a:off x="1067104" y="1143000"/>
+            <a:ext cx="10058400" cy="384048"/>
+          </a:xfrm>
+          <a:prstGeom prst="rect">
+            <a:avLst/>
+          </a:prstGeom>
+          <a:solidFill>
+            <a:srgbClr val="468250"/>
+          </a:solidFill>
+          <a:ln>
+            <a:noFill/>
+          </a:ln>
+        </p:spPr>
+        <p:style>
+          <a:lnRef idx="1">
+            <a:schemeClr val="accent1"/>
+          </a:lnRef>
+          <a:fillRef idx="3">
+            <a:schemeClr val="accent1"/>
+          </a:fillRef>
+          <a:effectRef idx="2">
+            <a:schemeClr val="accent1"/>
+          </a:effectRef>
+          <a:fontRef idx="minor">
+            <a:schemeClr val="lt1"/>
+          </a:fontRef>
+        </p:style>
+        <p:txBody>
+          <a:bodyPr rtlCol="0" anchor="ctr"/>
+          <a:lstStyle/>
+          <a:p>
+            <a:pPr algn="ctr"/>
+          </a:p>
+        </p:txBody>
+      </p:sp>
+      <p:sp>
+        <p:nvSpPr>
+          <p:cNvPr id="11" name="TextBox 10"/>
+          <p:cNvSpPr txBox="1"/>
+          <p:nvPr/>
+        </p:nvSpPr>
+        <p:spPr>
+          <a:xfrm>
+            <a:off x="1067104" y="1179576"/>
+            <a:ext cx="10058400" cy="347472"/>
+          </a:xfrm>
+          <a:prstGeom prst="rect">
+            <a:avLst/>
+          </a:prstGeom>
+          <a:noFill/>
+        </p:spPr>
+        <p:txBody>
+          <a:bodyPr wrap="none">
+            <a:spAutoFit/>
+          </a:bodyPr>
+          <a:lstStyle/>
+          <a:p>
+            <a:pPr algn="ctr">
+              <a:spcAft>
+                <a:spcPts val="1000"/>
+              </a:spcAft>
+            </a:pPr>
+            <a:r>
+              <a:rPr sz="1800" b="1">
+                <a:solidFill>
+                  <a:srgbClr val="FFFFFF"/>
+                </a:solidFill>
+                <a:latin typeface="Microsoft YaHei"/>
+              </a:rPr>
+              <a:t>📝  课堂笔记  —  请摘抄要点</a:t>
+            </a:r>
+          </a:p>
+        </p:txBody>
+      </p:sp>
+      <p:sp>
+        <p:nvSpPr>
+          <p:cNvPr id="12" name="Rectangle 11"/>
+          <p:cNvSpPr/>
+          <p:nvPr/>
+        </p:nvSpPr>
+        <p:spPr>
+          <a:xfrm>
+            <a:off x="1570024" y="1527048"/>
+            <a:ext cx="27432" cy="3337560"/>
+          </a:xfrm>
+          <a:prstGeom prst="rect">
+            <a:avLst/>
+          </a:prstGeom>
+          <a:solidFill>
+            <a:srgbClr val="DC5050"/>
+          </a:solidFill>
+          <a:ln>
+            <a:noFill/>
+          </a:ln>
+        </p:spPr>
+        <p:style>
+          <a:lnRef idx="1">
+            <a:schemeClr val="accent1"/>
+          </a:lnRef>
+          <a:fillRef idx="3">
+            <a:schemeClr val="accent1"/>
+          </a:fillRef>
+          <a:effectRef idx="2">
+            <a:schemeClr val="accent1"/>
+          </a:effectRef>
+          <a:fontRef idx="minor">
+            <a:schemeClr val="lt1"/>
+          </a:fontRef>
+        </p:style>
+        <p:txBody>
+          <a:bodyPr rtlCol="0" anchor="ctr"/>
+          <a:lstStyle/>
+          <a:p>
+            <a:pPr algn="ctr"/>
+          </a:p>
+        </p:txBody>
+      </p:sp>
+      <p:sp>
+        <p:nvSpPr>
+          <p:cNvPr id="13" name="Rectangle 12"/>
+          <p:cNvSpPr/>
+          <p:nvPr/>
+        </p:nvSpPr>
+        <p:spPr>
+          <a:xfrm>
+            <a:off x="1417320" y="2276856"/>
+            <a:ext cx="9601200" cy="13716"/>
+          </a:xfrm>
+          <a:prstGeom prst="rect">
+            <a:avLst/>
+          </a:prstGeom>
+          <a:solidFill>
+            <a:srgbClr val="D2C8AF"/>
+          </a:solidFill>
+          <a:ln>
+            <a:noFill/>
+          </a:ln>
+        </p:spPr>
+        <p:style>
+          <a:lnRef idx="1">
+            <a:schemeClr val="accent1"/>
+          </a:lnRef>
+          <a:fillRef idx="3">
+            <a:schemeClr val="accent1"/>
+          </a:fillRef>
+          <a:effectRef idx="2">
+            <a:schemeClr val="accent1"/>
+          </a:effectRef>
+          <a:fontRef idx="minor">
+            <a:schemeClr val="lt1"/>
+          </a:fontRef>
+        </p:style>
+        <p:txBody>
+          <a:bodyPr rtlCol="0" anchor="ctr"/>
+          <a:lstStyle/>
+          <a:p>
+            <a:pPr algn="ctr"/>
+          </a:p>
+        </p:txBody>
+      </p:sp>
+      <p:sp>
+        <p:nvSpPr>
+          <p:cNvPr id="14" name="Rounded Rectangle 13"/>
+          <p:cNvSpPr/>
+          <p:nvPr/>
+        </p:nvSpPr>
+        <p:spPr>
+          <a:xfrm>
+            <a:off x="1600200" y="1627632"/>
+            <a:ext cx="1280160" cy="347472"/>
           </a:xfrm>
           <a:prstGeom prst="roundRect">
             <a:avLst/>
@@ -4613,14 +6082,14 @@
       </p:sp>
       <p:sp>
         <p:nvSpPr>
-          <p:cNvPr id="7" name="TextBox 6"/>
+          <p:cNvPr id="15" name="TextBox 14"/>
           <p:cNvSpPr txBox="1"/>
           <p:nvPr/>
         </p:nvSpPr>
         <p:spPr>
           <a:xfrm>
-            <a:off x="4953304" y="521208"/>
-            <a:ext cx="2286000" cy="384048"/>
+            <a:off x="1600200" y="1645920"/>
+            <a:ext cx="1280160" cy="310896"/>
           </a:xfrm>
           <a:prstGeom prst="rect">
             <a:avLst/>
@@ -4645,21 +6114,21 @@
                 </a:solidFill>
                 <a:latin typeface="Microsoft YaHei"/>
               </a:rPr>
-              <a:t>追踪创造</a:t>
-            </a:r>
-          </a:p>
-        </p:txBody>
-      </p:sp>
-      <p:sp>
-        <p:nvSpPr>
-          <p:cNvPr id="8" name="TextBox 7"/>
+              <a:t>具体</a:t>
+            </a:r>
+          </a:p>
+        </p:txBody>
+      </p:sp>
+      <p:sp>
+        <p:nvSpPr>
+          <p:cNvPr id="16" name="TextBox 15"/>
           <p:cNvSpPr txBox="1"/>
           <p:nvPr/>
         </p:nvSpPr>
         <p:spPr>
           <a:xfrm>
-            <a:off x="1371600" y="960120"/>
-            <a:ext cx="9418320" cy="822960"/>
+            <a:off x="3017520" y="1627632"/>
+            <a:ext cx="7498079" cy="658368"/>
           </a:xfrm>
           <a:prstGeom prst="rect">
             <a:avLst/>
@@ -4667,40 +6136,83 @@
           <a:noFill/>
         </p:spPr>
         <p:txBody>
-          <a:bodyPr wrap="square">
+          <a:bodyPr wrap="none">
             <a:spAutoFit/>
           </a:bodyPr>
           <a:lstStyle/>
           <a:p>
-            <a:pPr algn="ctr">
+            <a:pPr algn="l">
               <a:spcAft>
                 <a:spcPts val="1000"/>
               </a:spcAft>
             </a:pPr>
             <a:r>
-              <a:rPr sz="3600" b="1">
+              <a:rPr sz="2100" b="0">
                 <a:solidFill>
-                  <a:srgbClr val="468250"/>
+                  <a:srgbClr val="28462D"/>
                 </a:solidFill>
                 <a:latin typeface="Microsoft YaHei"/>
               </a:rPr>
-              <a:t>学习任务一</a:t>
-            </a:r>
-          </a:p>
-        </p:txBody>
-      </p:sp>
-      <p:sp>
-        <p:nvSpPr>
-          <p:cNvPr id="9" name="Rectangle 8"/>
+              <a:t>池水照影见自己面容→想到造同类</a:t>
+            </a:r>
+          </a:p>
+        </p:txBody>
+      </p:sp>
+      <p:sp>
+        <p:nvSpPr>
+          <p:cNvPr id="17" name="Rectangle 16"/>
           <p:cNvSpPr/>
           <p:nvPr/>
         </p:nvSpPr>
         <p:spPr>
           <a:xfrm>
-            <a:off x="3200400" y="1600200"/>
-            <a:ext cx="5760720" cy="27432"/>
-          </a:xfrm>
-          <a:prstGeom prst="rect">
+            <a:off x="1417320" y="3081527"/>
+            <a:ext cx="9601200" cy="13716"/>
+          </a:xfrm>
+          <a:prstGeom prst="rect">
+            <a:avLst/>
+          </a:prstGeom>
+          <a:solidFill>
+            <a:srgbClr val="D2C8AF"/>
+          </a:solidFill>
+          <a:ln>
+            <a:noFill/>
+          </a:ln>
+        </p:spPr>
+        <p:style>
+          <a:lnRef idx="1">
+            <a:schemeClr val="accent1"/>
+          </a:lnRef>
+          <a:fillRef idx="3">
+            <a:schemeClr val="accent1"/>
+          </a:fillRef>
+          <a:effectRef idx="2">
+            <a:schemeClr val="accent1"/>
+          </a:effectRef>
+          <a:fontRef idx="minor">
+            <a:schemeClr val="lt1"/>
+          </a:fontRef>
+        </p:style>
+        <p:txBody>
+          <a:bodyPr rtlCol="0" anchor="ctr"/>
+          <a:lstStyle/>
+          <a:p>
+            <a:pPr algn="ctr"/>
+          </a:p>
+        </p:txBody>
+      </p:sp>
+      <p:sp>
+        <p:nvSpPr>
+          <p:cNvPr id="18" name="Rounded Rectangle 17"/>
+          <p:cNvSpPr/>
+          <p:nvPr/>
+        </p:nvSpPr>
+        <p:spPr>
+          <a:xfrm>
+            <a:off x="1600200" y="2432303"/>
+            <a:ext cx="1280160" cy="347472"/>
+          </a:xfrm>
+          <a:prstGeom prst="roundRect">
             <a:avLst/>
           </a:prstGeom>
           <a:solidFill>
@@ -4734,25 +6246,101 @@
       </p:sp>
       <p:sp>
         <p:nvSpPr>
-          <p:cNvPr id="10" name="Rounded Rectangle 9"/>
+          <p:cNvPr id="19" name="TextBox 18"/>
+          <p:cNvSpPr txBox="1"/>
+          <p:nvPr/>
+        </p:nvSpPr>
+        <p:spPr>
+          <a:xfrm>
+            <a:off x="1600200" y="2450591"/>
+            <a:ext cx="1280160" cy="310896"/>
+          </a:xfrm>
+          <a:prstGeom prst="rect">
+            <a:avLst/>
+          </a:prstGeom>
+          <a:noFill/>
+        </p:spPr>
+        <p:txBody>
+          <a:bodyPr wrap="none">
+            <a:spAutoFit/>
+          </a:bodyPr>
+          <a:lstStyle/>
+          <a:p>
+            <a:pPr algn="ctr">
+              <a:spcAft>
+                <a:spcPts val="1000"/>
+              </a:spcAft>
+            </a:pPr>
+            <a:r>
+              <a:rPr sz="1800" b="1">
+                <a:solidFill>
+                  <a:srgbClr val="28462D"/>
+                </a:solidFill>
+                <a:latin typeface="Microsoft YaHei"/>
+              </a:rPr>
+              <a:t>生动</a:t>
+            </a:r>
+          </a:p>
+        </p:txBody>
+      </p:sp>
+      <p:sp>
+        <p:nvSpPr>
+          <p:cNvPr id="20" name="TextBox 19"/>
+          <p:cNvSpPr txBox="1"/>
+          <p:nvPr/>
+        </p:nvSpPr>
+        <p:spPr>
+          <a:xfrm>
+            <a:off x="3017520" y="2432303"/>
+            <a:ext cx="7498079" cy="658368"/>
+          </a:xfrm>
+          <a:prstGeom prst="rect">
+            <a:avLst/>
+          </a:prstGeom>
+          <a:noFill/>
+        </p:spPr>
+        <p:txBody>
+          <a:bodyPr wrap="none">
+            <a:spAutoFit/>
+          </a:bodyPr>
+          <a:lstStyle/>
+          <a:p>
+            <a:pPr algn="l">
+              <a:spcAft>
+                <a:spcPts val="1000"/>
+              </a:spcAft>
+            </a:pPr>
+            <a:r>
+              <a:rPr sz="2100" b="0">
+                <a:solidFill>
+                  <a:srgbClr val="28462D"/>
+                </a:solidFill>
+                <a:latin typeface="Microsoft YaHei"/>
+              </a:rPr>
+              <a:t>「藤条一挥，满天泥浆洒落」画面感强</a:t>
+            </a:r>
+          </a:p>
+        </p:txBody>
+      </p:sp>
+      <p:sp>
+        <p:nvSpPr>
+          <p:cNvPr id="21" name="Rectangle 20"/>
           <p:cNvSpPr/>
           <p:nvPr/>
         </p:nvSpPr>
         <p:spPr>
           <a:xfrm>
-            <a:off x="1295704" y="1645920"/>
-            <a:ext cx="9601200" cy="2240280"/>
-          </a:xfrm>
-          <a:prstGeom prst="roundRect">
+            <a:off x="1417320" y="3886200"/>
+            <a:ext cx="9601200" cy="13716"/>
+          </a:xfrm>
+          <a:prstGeom prst="rect">
             <a:avLst/>
           </a:prstGeom>
           <a:solidFill>
-            <a:srgbClr val="F8FCF5"/>
+            <a:srgbClr val="D2C8AF"/>
           </a:solidFill>
-          <a:ln w="19050">
-            <a:solidFill>
-              <a:srgbClr val="A0C896"/>
-            </a:solidFill>
+          <a:ln>
+            <a:noFill/>
           </a:ln>
         </p:spPr>
         <p:style>
@@ -4779,20 +6367,20 @@
       </p:sp>
       <p:sp>
         <p:nvSpPr>
-          <p:cNvPr id="11" name="Oval 10"/>
+          <p:cNvPr id="22" name="Rounded Rectangle 21"/>
           <p:cNvSpPr/>
           <p:nvPr/>
         </p:nvSpPr>
         <p:spPr>
           <a:xfrm>
-            <a:off x="2255824" y="1828800"/>
-            <a:ext cx="384048" cy="384048"/>
-          </a:xfrm>
-          <a:prstGeom prst="ellipse">
+            <a:off x="1600200" y="3236976"/>
+            <a:ext cx="1280160" cy="347472"/>
+          </a:xfrm>
+          <a:prstGeom prst="roundRect">
             <a:avLst/>
           </a:prstGeom>
           <a:solidFill>
-            <a:srgbClr val="468250"/>
+            <a:srgbClr val="A0C896"/>
           </a:solidFill>
           <a:ln>
             <a:noFill/>
@@ -4822,14 +6410,14 @@
       </p:sp>
       <p:sp>
         <p:nvSpPr>
-          <p:cNvPr id="12" name="TextBox 11"/>
+          <p:cNvPr id="23" name="TextBox 22"/>
           <p:cNvSpPr txBox="1"/>
           <p:nvPr/>
         </p:nvSpPr>
         <p:spPr>
           <a:xfrm>
-            <a:off x="2255824" y="1847088"/>
-            <a:ext cx="384048" cy="365760"/>
+            <a:off x="1600200" y="3255264"/>
+            <a:ext cx="1280160" cy="310896"/>
           </a:xfrm>
           <a:prstGeom prst="rect">
             <a:avLst/>
@@ -4848,27 +6436,27 @@
               </a:spcAft>
             </a:pPr>
             <a:r>
-              <a:rPr sz="1600" b="1">
+              <a:rPr sz="1800" b="1">
                 <a:solidFill>
-                  <a:srgbClr val="FFFFFF"/>
+                  <a:srgbClr val="28462D"/>
                 </a:solidFill>
                 <a:latin typeface="Microsoft YaHei"/>
               </a:rPr>
-              <a:t>1</a:t>
-            </a:r>
-          </a:p>
-        </p:txBody>
-      </p:sp>
-      <p:sp>
-        <p:nvSpPr>
-          <p:cNvPr id="13" name="TextBox 12"/>
+              <a:t>温暖</a:t>
+            </a:r>
+          </a:p>
+        </p:txBody>
+      </p:sp>
+      <p:sp>
+        <p:nvSpPr>
+          <p:cNvPr id="24" name="TextBox 23"/>
           <p:cNvSpPr txBox="1"/>
           <p:nvPr/>
         </p:nvSpPr>
         <p:spPr>
           <a:xfrm>
-            <a:off x="2758744" y="1810512"/>
-            <a:ext cx="7772400" cy="502920"/>
+            <a:off x="3017520" y="3236976"/>
+            <a:ext cx="7498079" cy="658368"/>
           </a:xfrm>
           <a:prstGeom prst="rect">
             <a:avLst/>
@@ -4887,33 +6475,33 @@
               </a:spcAft>
             </a:pPr>
             <a:r>
-              <a:rPr sz="2400" b="0">
+              <a:rPr sz="2100" b="0">
                 <a:solidFill>
                   <a:srgbClr val="28462D"/>
                 </a:solidFill>
                 <a:latin typeface="Microsoft YaHei"/>
               </a:rPr>
-              <a:t>给女娲行动排序：孤独→揉泥→挥洒→繁衍</a:t>
-            </a:r>
-          </a:p>
-        </p:txBody>
-      </p:sp>
-      <p:sp>
-        <p:nvSpPr>
-          <p:cNvPr id="14" name="Oval 13"/>
+              <a:t>造人后的疲倦、喜悦，赋予神以人的情感</a:t>
+            </a:r>
+          </a:p>
+        </p:txBody>
+      </p:sp>
+      <p:sp>
+        <p:nvSpPr>
+          <p:cNvPr id="25" name="Rectangle 24"/>
           <p:cNvSpPr/>
           <p:nvPr/>
         </p:nvSpPr>
         <p:spPr>
           <a:xfrm>
-            <a:off x="2255824" y="2395728"/>
-            <a:ext cx="384048" cy="384048"/>
-          </a:xfrm>
-          <a:prstGeom prst="ellipse">
+            <a:off x="1417320" y="4690872"/>
+            <a:ext cx="9601200" cy="13716"/>
+          </a:xfrm>
+          <a:prstGeom prst="rect">
             <a:avLst/>
           </a:prstGeom>
           <a:solidFill>
-            <a:srgbClr val="468250"/>
+            <a:srgbClr val="D2C8AF"/>
           </a:solidFill>
           <a:ln>
             <a:noFill/>
@@ -4943,14 +6531,57 @@
       </p:sp>
       <p:sp>
         <p:nvSpPr>
-          <p:cNvPr id="15" name="TextBox 14"/>
+          <p:cNvPr id="26" name="Rounded Rectangle 25"/>
+          <p:cNvSpPr/>
+          <p:nvPr/>
+        </p:nvSpPr>
+        <p:spPr>
+          <a:xfrm>
+            <a:off x="1600200" y="4041648"/>
+            <a:ext cx="1280160" cy="347472"/>
+          </a:xfrm>
+          <a:prstGeom prst="roundRect">
+            <a:avLst/>
+          </a:prstGeom>
+          <a:solidFill>
+            <a:srgbClr val="A0C896"/>
+          </a:solidFill>
+          <a:ln>
+            <a:noFill/>
+          </a:ln>
+        </p:spPr>
+        <p:style>
+          <a:lnRef idx="1">
+            <a:schemeClr val="accent1"/>
+          </a:lnRef>
+          <a:fillRef idx="3">
+            <a:schemeClr val="accent1"/>
+          </a:fillRef>
+          <a:effectRef idx="2">
+            <a:schemeClr val="accent1"/>
+          </a:effectRef>
+          <a:fontRef idx="minor">
+            <a:schemeClr val="lt1"/>
+          </a:fontRef>
+        </p:style>
+        <p:txBody>
+          <a:bodyPr rtlCol="0" anchor="ctr"/>
+          <a:lstStyle/>
+          <a:p>
+            <a:pPr algn="ctr"/>
+          </a:p>
+        </p:txBody>
+      </p:sp>
+      <p:sp>
+        <p:nvSpPr>
+          <p:cNvPr id="27" name="TextBox 26"/>
           <p:cNvSpPr txBox="1"/>
           <p:nvPr/>
         </p:nvSpPr>
         <p:spPr>
           <a:xfrm>
-            <a:off x="2255824" y="2414016"/>
-            <a:ext cx="384048" cy="365760"/>
+            <a:off x="1600200" y="4059936"/>
+            <a:ext cx="1280160" cy="310896"/>
           </a:xfrm>
           <a:prstGeom prst="rect">
             <a:avLst/>
@@ -4969,27 +6600,27 @@
               </a:spcAft>
             </a:pPr>
             <a:r>
-              <a:rPr sz="1600" b="1">
+              <a:rPr sz="1800" b="1">
                 <a:solidFill>
-                  <a:srgbClr val="FFFFFF"/>
+                  <a:srgbClr val="28462D"/>
                 </a:solidFill>
                 <a:latin typeface="Microsoft YaHei"/>
               </a:rPr>
-              <a:t>2</a:t>
-            </a:r>
-          </a:p>
-        </p:txBody>
-      </p:sp>
-      <p:sp>
-        <p:nvSpPr>
-          <p:cNvPr id="16" name="TextBox 15"/>
+              <a:t>规律</a:t>
+            </a:r>
+          </a:p>
+        </p:txBody>
+      </p:sp>
+      <p:sp>
+        <p:nvSpPr>
+          <p:cNvPr id="28" name="TextBox 27"/>
           <p:cNvSpPr txBox="1"/>
           <p:nvPr/>
         </p:nvSpPr>
         <p:spPr>
           <a:xfrm>
-            <a:off x="2758744" y="2377440"/>
-            <a:ext cx="7772400" cy="502920"/>
+            <a:off x="3017520" y="4041648"/>
+            <a:ext cx="7498079" cy="658368"/>
           </a:xfrm>
           <a:prstGeom prst="rect">
             <a:avLst/>
@@ -5008,134 +6639,13 @@
               </a:spcAft>
             </a:pPr>
             <a:r>
-              <a:rPr sz="2400" b="0">
+              <a:rPr sz="2100" b="0">
                 <a:solidFill>
                   <a:srgbClr val="28462D"/>
                 </a:solidFill>
                 <a:latin typeface="Microsoft YaHei"/>
               </a:rPr>
-              <a:t>比较两种造人方法的不同</a:t>
-            </a:r>
-          </a:p>
-        </p:txBody>
-      </p:sp>
-      <p:sp>
-        <p:nvSpPr>
-          <p:cNvPr id="17" name="Oval 16"/>
-          <p:cNvSpPr/>
-          <p:nvPr/>
-        </p:nvSpPr>
-        <p:spPr>
-          <a:xfrm>
-            <a:off x="2255824" y="2962656"/>
-            <a:ext cx="384048" cy="384048"/>
-          </a:xfrm>
-          <a:prstGeom prst="ellipse">
-            <a:avLst/>
-          </a:prstGeom>
-          <a:solidFill>
-            <a:srgbClr val="468250"/>
-          </a:solidFill>
-          <a:ln>
-            <a:noFill/>
-          </a:ln>
-        </p:spPr>
-        <p:style>
-          <a:lnRef idx="1">
-            <a:schemeClr val="accent1"/>
-          </a:lnRef>
-          <a:fillRef idx="3">
-            <a:schemeClr val="accent1"/>
-          </a:fillRef>
-          <a:effectRef idx="2">
-            <a:schemeClr val="accent1"/>
-          </a:effectRef>
-          <a:fontRef idx="minor">
-            <a:schemeClr val="lt1"/>
-          </a:fontRef>
-        </p:style>
-        <p:txBody>
-          <a:bodyPr rtlCol="0" anchor="ctr"/>
-          <a:lstStyle/>
-          <a:p>
-            <a:pPr algn="ctr"/>
-          </a:p>
-        </p:txBody>
-      </p:sp>
-      <p:sp>
-        <p:nvSpPr>
-          <p:cNvPr id="18" name="TextBox 17"/>
-          <p:cNvSpPr txBox="1"/>
-          <p:nvPr/>
-        </p:nvSpPr>
-        <p:spPr>
-          <a:xfrm>
-            <a:off x="2255824" y="2980944"/>
-            <a:ext cx="384048" cy="365760"/>
-          </a:xfrm>
-          <a:prstGeom prst="rect">
-            <a:avLst/>
-          </a:prstGeom>
-          <a:noFill/>
-        </p:spPr>
-        <p:txBody>
-          <a:bodyPr wrap="none">
-            <a:spAutoFit/>
-          </a:bodyPr>
-          <a:lstStyle/>
-          <a:p>
-            <a:pPr algn="ctr">
-              <a:spcAft>
-                <a:spcPts val="1000"/>
-              </a:spcAft>
-            </a:pPr>
-            <a:r>
-              <a:rPr sz="1600" b="1">
-                <a:solidFill>
-                  <a:srgbClr val="FFFFFF"/>
-                </a:solidFill>
-                <a:latin typeface="Microsoft YaHei"/>
-              </a:rPr>
-              <a:t>3</a:t>
-            </a:r>
-          </a:p>
-        </p:txBody>
-      </p:sp>
-      <p:sp>
-        <p:nvSpPr>
-          <p:cNvPr id="19" name="TextBox 18"/>
-          <p:cNvSpPr txBox="1"/>
-          <p:nvPr/>
-        </p:nvSpPr>
-        <p:spPr>
-          <a:xfrm>
-            <a:off x="2758744" y="2944368"/>
-            <a:ext cx="7772400" cy="502920"/>
-          </a:xfrm>
-          <a:prstGeom prst="rect">
-            <a:avLst/>
-          </a:prstGeom>
-          <a:noFill/>
-        </p:spPr>
-        <p:txBody>
-          <a:bodyPr wrap="none">
-            <a:spAutoFit/>
-          </a:bodyPr>
-          <a:lstStyle/>
-          <a:p>
-            <a:pPr algn="l">
-              <a:spcAft>
-                <a:spcPts val="1000"/>
-              </a:spcAft>
-            </a:pPr>
-            <a:r>
-              <a:rPr sz="2400" b="0">
-                <a:solidFill>
-                  <a:srgbClr val="28462D"/>
-                </a:solidFill>
-                <a:latin typeface="Microsoft YaHei"/>
-              </a:rPr>
-              <a:t>复述：从孤独到热闹的过程</a:t>
+              <a:t>想象基于生活经验（和泥、洒水），又超越现实</a:t>
             </a:r>
           </a:p>
         </p:txBody>
@@ -5281,8 +6791,342 @@
         </p:nvSpPr>
         <p:spPr>
           <a:xfrm>
-            <a:off x="4953304" y="502920"/>
-            <a:ext cx="2286000" cy="411480"/>
+            <a:off x="502920" y="384048"/>
+            <a:ext cx="2011680" cy="384048"/>
+          </a:xfrm>
+          <a:prstGeom prst="roundRect">
+            <a:avLst/>
+          </a:prstGeom>
+          <a:solidFill>
+            <a:srgbClr val="468250"/>
+          </a:solidFill>
+          <a:ln>
+            <a:noFill/>
+          </a:ln>
+        </p:spPr>
+        <p:style>
+          <a:lnRef idx="1">
+            <a:schemeClr val="accent1"/>
+          </a:lnRef>
+          <a:fillRef idx="3">
+            <a:schemeClr val="accent1"/>
+          </a:fillRef>
+          <a:effectRef idx="2">
+            <a:schemeClr val="accent1"/>
+          </a:effectRef>
+          <a:fontRef idx="minor">
+            <a:schemeClr val="lt1"/>
+          </a:fontRef>
+        </p:style>
+        <p:txBody>
+          <a:bodyPr rtlCol="0" anchor="ctr"/>
+          <a:lstStyle/>
+          <a:p>
+            <a:pPr algn="ctr"/>
+          </a:p>
+        </p:txBody>
+      </p:sp>
+      <p:sp>
+        <p:nvSpPr>
+          <p:cNvPr id="7" name="TextBox 6"/>
+          <p:cNvSpPr txBox="1"/>
+          <p:nvPr/>
+        </p:nvSpPr>
+        <p:spPr>
+          <a:xfrm>
+            <a:off x="502920" y="402336"/>
+            <a:ext cx="2011680" cy="347472"/>
+          </a:xfrm>
+          <a:prstGeom prst="rect">
+            <a:avLst/>
+          </a:prstGeom>
+          <a:noFill/>
+        </p:spPr>
+        <p:txBody>
+          <a:bodyPr wrap="none">
+            <a:spAutoFit/>
+          </a:bodyPr>
+          <a:lstStyle/>
+          <a:p>
+            <a:pPr algn="ctr">
+              <a:spcAft>
+                <a:spcPts val="1000"/>
+              </a:spcAft>
+            </a:pPr>
+            <a:r>
+              <a:rPr sz="1600" b="1">
+                <a:solidFill>
+                  <a:srgbClr val="FFFFFF"/>
+                </a:solidFill>
+                <a:latin typeface="Microsoft YaHei"/>
+              </a:rPr>
+              <a:t>主题笔记</a:t>
+            </a:r>
+          </a:p>
+        </p:txBody>
+      </p:sp>
+      <p:sp>
+        <p:nvSpPr>
+          <p:cNvPr id="8" name="TextBox 7"/>
+          <p:cNvSpPr txBox="1"/>
+          <p:nvPr/>
+        </p:nvSpPr>
+        <p:spPr>
+          <a:xfrm>
+            <a:off x="1371600" y="384048"/>
+            <a:ext cx="9418320" cy="822960"/>
+          </a:xfrm>
+          <a:prstGeom prst="rect">
+            <a:avLst/>
+          </a:prstGeom>
+          <a:noFill/>
+        </p:spPr>
+        <p:txBody>
+          <a:bodyPr wrap="square">
+            <a:spAutoFit/>
+          </a:bodyPr>
+          <a:lstStyle/>
+          <a:p>
+            <a:pPr algn="ctr">
+              <a:spcAft>
+                <a:spcPts val="1000"/>
+              </a:spcAft>
+            </a:pPr>
+            <a:r>
+              <a:rPr sz="3400" b="1">
+                <a:solidFill>
+                  <a:srgbClr val="468250"/>
+                </a:solidFill>
+                <a:latin typeface="Microsoft YaHei"/>
+              </a:rPr>
+              <a:t>比较阅读</a:t>
+            </a:r>
+          </a:p>
+        </p:txBody>
+      </p:sp>
+      <p:sp>
+        <p:nvSpPr>
+          <p:cNvPr id="9" name="Rounded Rectangle 8"/>
+          <p:cNvSpPr/>
+          <p:nvPr/>
+        </p:nvSpPr>
+        <p:spPr>
+          <a:xfrm>
+            <a:off x="1067104" y="1143000"/>
+            <a:ext cx="10058400" cy="3721608"/>
+          </a:xfrm>
+          <a:prstGeom prst="roundRect">
+            <a:avLst/>
+          </a:prstGeom>
+          <a:solidFill>
+            <a:srgbClr val="FFFCEB"/>
+          </a:solidFill>
+          <a:ln w="25400">
+            <a:solidFill>
+              <a:srgbClr val="5A8C5A"/>
+            </a:solidFill>
+          </a:ln>
+        </p:spPr>
+        <p:style>
+          <a:lnRef idx="1">
+            <a:schemeClr val="accent1"/>
+          </a:lnRef>
+          <a:fillRef idx="3">
+            <a:schemeClr val="accent1"/>
+          </a:fillRef>
+          <a:effectRef idx="2">
+            <a:schemeClr val="accent1"/>
+          </a:effectRef>
+          <a:fontRef idx="minor">
+            <a:schemeClr val="lt1"/>
+          </a:fontRef>
+        </p:style>
+        <p:txBody>
+          <a:bodyPr rtlCol="0" anchor="ctr"/>
+          <a:lstStyle/>
+          <a:p>
+            <a:pPr algn="ctr"/>
+          </a:p>
+        </p:txBody>
+      </p:sp>
+      <p:sp>
+        <p:nvSpPr>
+          <p:cNvPr id="10" name="Rectangle 9"/>
+          <p:cNvSpPr/>
+          <p:nvPr/>
+        </p:nvSpPr>
+        <p:spPr>
+          <a:xfrm>
+            <a:off x="1067104" y="1143000"/>
+            <a:ext cx="10058400" cy="384048"/>
+          </a:xfrm>
+          <a:prstGeom prst="rect">
+            <a:avLst/>
+          </a:prstGeom>
+          <a:solidFill>
+            <a:srgbClr val="468250"/>
+          </a:solidFill>
+          <a:ln>
+            <a:noFill/>
+          </a:ln>
+        </p:spPr>
+        <p:style>
+          <a:lnRef idx="1">
+            <a:schemeClr val="accent1"/>
+          </a:lnRef>
+          <a:fillRef idx="3">
+            <a:schemeClr val="accent1"/>
+          </a:fillRef>
+          <a:effectRef idx="2">
+            <a:schemeClr val="accent1"/>
+          </a:effectRef>
+          <a:fontRef idx="minor">
+            <a:schemeClr val="lt1"/>
+          </a:fontRef>
+        </p:style>
+        <p:txBody>
+          <a:bodyPr rtlCol="0" anchor="ctr"/>
+          <a:lstStyle/>
+          <a:p>
+            <a:pPr algn="ctr"/>
+          </a:p>
+        </p:txBody>
+      </p:sp>
+      <p:sp>
+        <p:nvSpPr>
+          <p:cNvPr id="11" name="TextBox 10"/>
+          <p:cNvSpPr txBox="1"/>
+          <p:nvPr/>
+        </p:nvSpPr>
+        <p:spPr>
+          <a:xfrm>
+            <a:off x="1067104" y="1179576"/>
+            <a:ext cx="10058400" cy="347472"/>
+          </a:xfrm>
+          <a:prstGeom prst="rect">
+            <a:avLst/>
+          </a:prstGeom>
+          <a:noFill/>
+        </p:spPr>
+        <p:txBody>
+          <a:bodyPr wrap="none">
+            <a:spAutoFit/>
+          </a:bodyPr>
+          <a:lstStyle/>
+          <a:p>
+            <a:pPr algn="ctr">
+              <a:spcAft>
+                <a:spcPts val="1000"/>
+              </a:spcAft>
+            </a:pPr>
+            <a:r>
+              <a:rPr sz="1800" b="1">
+                <a:solidFill>
+                  <a:srgbClr val="FFFFFF"/>
+                </a:solidFill>
+                <a:latin typeface="Microsoft YaHei"/>
+              </a:rPr>
+              <a:t>📝  课堂笔记  —  请摘抄要点</a:t>
+            </a:r>
+          </a:p>
+        </p:txBody>
+      </p:sp>
+      <p:sp>
+        <p:nvSpPr>
+          <p:cNvPr id="12" name="Rectangle 11"/>
+          <p:cNvSpPr/>
+          <p:nvPr/>
+        </p:nvSpPr>
+        <p:spPr>
+          <a:xfrm>
+            <a:off x="1570024" y="1527048"/>
+            <a:ext cx="27432" cy="3337560"/>
+          </a:xfrm>
+          <a:prstGeom prst="rect">
+            <a:avLst/>
+          </a:prstGeom>
+          <a:solidFill>
+            <a:srgbClr val="DC5050"/>
+          </a:solidFill>
+          <a:ln>
+            <a:noFill/>
+          </a:ln>
+        </p:spPr>
+        <p:style>
+          <a:lnRef idx="1">
+            <a:schemeClr val="accent1"/>
+          </a:lnRef>
+          <a:fillRef idx="3">
+            <a:schemeClr val="accent1"/>
+          </a:fillRef>
+          <a:effectRef idx="2">
+            <a:schemeClr val="accent1"/>
+          </a:effectRef>
+          <a:fontRef idx="minor">
+            <a:schemeClr val="lt1"/>
+          </a:fontRef>
+        </p:style>
+        <p:txBody>
+          <a:bodyPr rtlCol="0" anchor="ctr"/>
+          <a:lstStyle/>
+          <a:p>
+            <a:pPr algn="ctr"/>
+          </a:p>
+        </p:txBody>
+      </p:sp>
+      <p:sp>
+        <p:nvSpPr>
+          <p:cNvPr id="13" name="Rectangle 12"/>
+          <p:cNvSpPr/>
+          <p:nvPr/>
+        </p:nvSpPr>
+        <p:spPr>
+          <a:xfrm>
+            <a:off x="1417320" y="2276856"/>
+            <a:ext cx="9601200" cy="13716"/>
+          </a:xfrm>
+          <a:prstGeom prst="rect">
+            <a:avLst/>
+          </a:prstGeom>
+          <a:solidFill>
+            <a:srgbClr val="D2C8AF"/>
+          </a:solidFill>
+          <a:ln>
+            <a:noFill/>
+          </a:ln>
+        </p:spPr>
+        <p:style>
+          <a:lnRef idx="1">
+            <a:schemeClr val="accent1"/>
+          </a:lnRef>
+          <a:fillRef idx="3">
+            <a:schemeClr val="accent1"/>
+          </a:fillRef>
+          <a:effectRef idx="2">
+            <a:schemeClr val="accent1"/>
+          </a:effectRef>
+          <a:fontRef idx="minor">
+            <a:schemeClr val="lt1"/>
+          </a:fontRef>
+        </p:style>
+        <p:txBody>
+          <a:bodyPr rtlCol="0" anchor="ctr"/>
+          <a:lstStyle/>
+          <a:p>
+            <a:pPr algn="ctr"/>
+          </a:p>
+        </p:txBody>
+      </p:sp>
+      <p:sp>
+        <p:nvSpPr>
+          <p:cNvPr id="14" name="Rounded Rectangle 13"/>
+          <p:cNvSpPr/>
+          <p:nvPr/>
+        </p:nvSpPr>
+        <p:spPr>
+          <a:xfrm>
+            <a:off x="1600200" y="1627632"/>
+            <a:ext cx="1737360" cy="347472"/>
           </a:xfrm>
           <a:prstGeom prst="roundRect">
             <a:avLst/>
@@ -5318,14 +7162,14 @@
       </p:sp>
       <p:sp>
         <p:nvSpPr>
-          <p:cNvPr id="7" name="TextBox 6"/>
+          <p:cNvPr id="15" name="TextBox 14"/>
           <p:cNvSpPr txBox="1"/>
           <p:nvPr/>
         </p:nvSpPr>
         <p:spPr>
           <a:xfrm>
-            <a:off x="4953304" y="521208"/>
-            <a:ext cx="2286000" cy="384048"/>
+            <a:off x="1600200" y="1645920"/>
+            <a:ext cx="1737360" cy="310896"/>
           </a:xfrm>
           <a:prstGeom prst="rect">
             <a:avLst/>
@@ -5350,21 +7194,21 @@
                 </a:solidFill>
                 <a:latin typeface="Microsoft YaHei"/>
               </a:rPr>
-              <a:t>比较阅读</a:t>
-            </a:r>
-          </a:p>
-        </p:txBody>
-      </p:sp>
-      <p:sp>
-        <p:nvSpPr>
-          <p:cNvPr id="8" name="TextBox 7"/>
+              <a:t>《风俗通》</a:t>
+            </a:r>
+          </a:p>
+        </p:txBody>
+      </p:sp>
+      <p:sp>
+        <p:nvSpPr>
+          <p:cNvPr id="16" name="TextBox 15"/>
           <p:cNvSpPr txBox="1"/>
           <p:nvPr/>
         </p:nvSpPr>
         <p:spPr>
           <a:xfrm>
-            <a:off x="1371600" y="960120"/>
-            <a:ext cx="9418320" cy="822960"/>
+            <a:off x="3474720" y="1627632"/>
+            <a:ext cx="7040879" cy="658368"/>
           </a:xfrm>
           <a:prstGeom prst="rect">
             <a:avLst/>
@@ -5372,40 +7216,83 @@
           <a:noFill/>
         </p:spPr>
         <p:txBody>
-          <a:bodyPr wrap="square">
+          <a:bodyPr wrap="none">
             <a:spAutoFit/>
           </a:bodyPr>
           <a:lstStyle/>
           <a:p>
-            <a:pPr algn="ctr">
+            <a:pPr algn="l">
               <a:spcAft>
                 <a:spcPts val="1000"/>
               </a:spcAft>
             </a:pPr>
             <a:r>
-              <a:rPr sz="3600" b="1">
+              <a:rPr sz="2100" b="0">
                 <a:solidFill>
-                  <a:srgbClr val="468250"/>
+                  <a:srgbClr val="28462D"/>
                 </a:solidFill>
                 <a:latin typeface="Microsoft YaHei"/>
               </a:rPr>
-              <a:t>学习任务二</a:t>
-            </a:r>
-          </a:p>
-        </p:txBody>
-      </p:sp>
-      <p:sp>
-        <p:nvSpPr>
-          <p:cNvPr id="9" name="Rectangle 8"/>
+              <a:t>记载简洁，重在说明造人方法</a:t>
+            </a:r>
+          </a:p>
+        </p:txBody>
+      </p:sp>
+      <p:sp>
+        <p:nvSpPr>
+          <p:cNvPr id="17" name="Rectangle 16"/>
           <p:cNvSpPr/>
           <p:nvPr/>
         </p:nvSpPr>
         <p:spPr>
           <a:xfrm>
-            <a:off x="3200400" y="1600200"/>
-            <a:ext cx="5760720" cy="27432"/>
-          </a:xfrm>
-          <a:prstGeom prst="rect">
+            <a:off x="1417320" y="3081527"/>
+            <a:ext cx="9601200" cy="13716"/>
+          </a:xfrm>
+          <a:prstGeom prst="rect">
+            <a:avLst/>
+          </a:prstGeom>
+          <a:solidFill>
+            <a:srgbClr val="D2C8AF"/>
+          </a:solidFill>
+          <a:ln>
+            <a:noFill/>
+          </a:ln>
+        </p:spPr>
+        <p:style>
+          <a:lnRef idx="1">
+            <a:schemeClr val="accent1"/>
+          </a:lnRef>
+          <a:fillRef idx="3">
+            <a:schemeClr val="accent1"/>
+          </a:fillRef>
+          <a:effectRef idx="2">
+            <a:schemeClr val="accent1"/>
+          </a:effectRef>
+          <a:fontRef idx="minor">
+            <a:schemeClr val="lt1"/>
+          </a:fontRef>
+        </p:style>
+        <p:txBody>
+          <a:bodyPr rtlCol="0" anchor="ctr"/>
+          <a:lstStyle/>
+          <a:p>
+            <a:pPr algn="ctr"/>
+          </a:p>
+        </p:txBody>
+      </p:sp>
+      <p:sp>
+        <p:nvSpPr>
+          <p:cNvPr id="18" name="Rounded Rectangle 17"/>
+          <p:cNvSpPr/>
+          <p:nvPr/>
+        </p:nvSpPr>
+        <p:spPr>
+          <a:xfrm>
+            <a:off x="1600200" y="2432303"/>
+            <a:ext cx="1280160" cy="347472"/>
+          </a:xfrm>
+          <a:prstGeom prst="roundRect">
             <a:avLst/>
           </a:prstGeom>
           <a:solidFill>
@@ -5439,25 +7326,101 @@
       </p:sp>
       <p:sp>
         <p:nvSpPr>
-          <p:cNvPr id="10" name="Rounded Rectangle 9"/>
+          <p:cNvPr id="19" name="TextBox 18"/>
+          <p:cNvSpPr txBox="1"/>
+          <p:nvPr/>
+        </p:nvSpPr>
+        <p:spPr>
+          <a:xfrm>
+            <a:off x="1600200" y="2450591"/>
+            <a:ext cx="1280160" cy="310896"/>
+          </a:xfrm>
+          <a:prstGeom prst="rect">
+            <a:avLst/>
+          </a:prstGeom>
+          <a:noFill/>
+        </p:spPr>
+        <p:txBody>
+          <a:bodyPr wrap="none">
+            <a:spAutoFit/>
+          </a:bodyPr>
+          <a:lstStyle/>
+          <a:p>
+            <a:pPr algn="ctr">
+              <a:spcAft>
+                <a:spcPts val="1000"/>
+              </a:spcAft>
+            </a:pPr>
+            <a:r>
+              <a:rPr sz="1800" b="1">
+                <a:solidFill>
+                  <a:srgbClr val="28462D"/>
+                </a:solidFill>
+                <a:latin typeface="Microsoft YaHei"/>
+              </a:rPr>
+              <a:t>课文</a:t>
+            </a:r>
+          </a:p>
+        </p:txBody>
+      </p:sp>
+      <p:sp>
+        <p:nvSpPr>
+          <p:cNvPr id="20" name="TextBox 19"/>
+          <p:cNvSpPr txBox="1"/>
+          <p:nvPr/>
+        </p:nvSpPr>
+        <p:spPr>
+          <a:xfrm>
+            <a:off x="3017520" y="2432303"/>
+            <a:ext cx="7498079" cy="658368"/>
+          </a:xfrm>
+          <a:prstGeom prst="rect">
+            <a:avLst/>
+          </a:prstGeom>
+          <a:noFill/>
+        </p:spPr>
+        <p:txBody>
+          <a:bodyPr wrap="none">
+            <a:spAutoFit/>
+          </a:bodyPr>
+          <a:lstStyle/>
+          <a:p>
+            <a:pPr algn="l">
+              <a:spcAft>
+                <a:spcPts val="1000"/>
+              </a:spcAft>
+            </a:pPr>
+            <a:r>
+              <a:rPr sz="2100" b="0">
+                <a:solidFill>
+                  <a:srgbClr val="28462D"/>
+                </a:solidFill>
+                <a:latin typeface="Microsoft YaHei"/>
+              </a:rPr>
+              <a:t>增加孤独心理、造人细节、情感描写</a:t>
+            </a:r>
+          </a:p>
+        </p:txBody>
+      </p:sp>
+      <p:sp>
+        <p:nvSpPr>
+          <p:cNvPr id="21" name="Rectangle 20"/>
           <p:cNvSpPr/>
           <p:nvPr/>
         </p:nvSpPr>
         <p:spPr>
           <a:xfrm>
-            <a:off x="1295704" y="1645920"/>
-            <a:ext cx="9601200" cy="2240280"/>
-          </a:xfrm>
-          <a:prstGeom prst="roundRect">
+            <a:off x="1417320" y="3886200"/>
+            <a:ext cx="9601200" cy="13716"/>
+          </a:xfrm>
+          <a:prstGeom prst="rect">
             <a:avLst/>
           </a:prstGeom>
           <a:solidFill>
-            <a:srgbClr val="F8FCF5"/>
+            <a:srgbClr val="D2C8AF"/>
           </a:solidFill>
-          <a:ln w="19050">
-            <a:solidFill>
-              <a:srgbClr val="A0C896"/>
-            </a:solidFill>
+          <a:ln>
+            <a:noFill/>
           </a:ln>
         </p:spPr>
         <p:style>
@@ -5484,20 +7447,20 @@
       </p:sp>
       <p:sp>
         <p:nvSpPr>
-          <p:cNvPr id="11" name="Oval 10"/>
+          <p:cNvPr id="22" name="Rounded Rectangle 21"/>
           <p:cNvSpPr/>
           <p:nvPr/>
         </p:nvSpPr>
         <p:spPr>
           <a:xfrm>
-            <a:off x="2255824" y="1828800"/>
-            <a:ext cx="384048" cy="384048"/>
-          </a:xfrm>
-          <a:prstGeom prst="ellipse">
+            <a:off x="1600200" y="3236976"/>
+            <a:ext cx="1444752" cy="347472"/>
+          </a:xfrm>
+          <a:prstGeom prst="roundRect">
             <a:avLst/>
           </a:prstGeom>
           <a:solidFill>
-            <a:srgbClr val="468250"/>
+            <a:srgbClr val="A0C896"/>
           </a:solidFill>
           <a:ln>
             <a:noFill/>
@@ -5527,14 +7490,14 @@
       </p:sp>
       <p:sp>
         <p:nvSpPr>
-          <p:cNvPr id="12" name="TextBox 11"/>
+          <p:cNvPr id="23" name="TextBox 22"/>
           <p:cNvSpPr txBox="1"/>
           <p:nvPr/>
         </p:nvSpPr>
         <p:spPr>
           <a:xfrm>
-            <a:off x="2255824" y="1847088"/>
-            <a:ext cx="384048" cy="365760"/>
+            <a:off x="1600200" y="3255264"/>
+            <a:ext cx="1444752" cy="310896"/>
           </a:xfrm>
           <a:prstGeom prst="rect">
             <a:avLst/>
@@ -5553,27 +7516,27 @@
               </a:spcAft>
             </a:pPr>
             <a:r>
-              <a:rPr sz="1600" b="1">
+              <a:rPr sz="1800" b="1">
                 <a:solidFill>
-                  <a:srgbClr val="FFFFFF"/>
+                  <a:srgbClr val="28462D"/>
                 </a:solidFill>
                 <a:latin typeface="Microsoft YaHei"/>
               </a:rPr>
-              <a:t>1</a:t>
-            </a:r>
-          </a:p>
-        </p:txBody>
-      </p:sp>
-      <p:sp>
-        <p:nvSpPr>
-          <p:cNvPr id="13" name="TextBox 12"/>
+              <a:t>改写意图</a:t>
+            </a:r>
+          </a:p>
+        </p:txBody>
+      </p:sp>
+      <p:sp>
+        <p:nvSpPr>
+          <p:cNvPr id="24" name="TextBox 23"/>
           <p:cNvSpPr txBox="1"/>
           <p:nvPr/>
         </p:nvSpPr>
         <p:spPr>
           <a:xfrm>
-            <a:off x="2758744" y="1810512"/>
-            <a:ext cx="7772400" cy="502920"/>
+            <a:off x="3182112" y="3236976"/>
+            <a:ext cx="7333488" cy="658368"/>
           </a:xfrm>
           <a:prstGeom prst="rect">
             <a:avLst/>
@@ -5592,33 +7555,33 @@
               </a:spcAft>
             </a:pPr>
             <a:r>
-              <a:rPr sz="2400" b="0">
+              <a:rPr sz="2100" b="0">
                 <a:solidFill>
                   <a:srgbClr val="28462D"/>
                 </a:solidFill>
                 <a:latin typeface="Microsoft YaHei"/>
               </a:rPr>
-              <a:t>阅读《风俗通》记载，完成「古籍与课文」比较表</a:t>
-            </a:r>
-          </a:p>
-        </p:txBody>
-      </p:sp>
-      <p:sp>
-        <p:nvSpPr>
-          <p:cNvPr id="14" name="Oval 13"/>
+              <a:t>让神话更生动，表达对生命与创造的礼赞</a:t>
+            </a:r>
+          </a:p>
+        </p:txBody>
+      </p:sp>
+      <p:sp>
+        <p:nvSpPr>
+          <p:cNvPr id="25" name="Rectangle 24"/>
           <p:cNvSpPr/>
           <p:nvPr/>
         </p:nvSpPr>
         <p:spPr>
           <a:xfrm>
-            <a:off x="2255824" y="2395728"/>
-            <a:ext cx="384048" cy="384048"/>
-          </a:xfrm>
-          <a:prstGeom prst="ellipse">
+            <a:off x="1417320" y="4690872"/>
+            <a:ext cx="9601200" cy="13716"/>
+          </a:xfrm>
+          <a:prstGeom prst="rect">
             <a:avLst/>
           </a:prstGeom>
           <a:solidFill>
-            <a:srgbClr val="468250"/>
+            <a:srgbClr val="D2C8AF"/>
           </a:solidFill>
           <a:ln>
             <a:noFill/>
@@ -5648,14 +7611,57 @@
       </p:sp>
       <p:sp>
         <p:nvSpPr>
-          <p:cNvPr id="15" name="TextBox 14"/>
+          <p:cNvPr id="26" name="Rounded Rectangle 25"/>
+          <p:cNvSpPr/>
+          <p:nvPr/>
+        </p:nvSpPr>
+        <p:spPr>
+          <a:xfrm>
+            <a:off x="1600200" y="4041648"/>
+            <a:ext cx="1444752" cy="347472"/>
+          </a:xfrm>
+          <a:prstGeom prst="roundRect">
+            <a:avLst/>
+          </a:prstGeom>
+          <a:solidFill>
+            <a:srgbClr val="A0C896"/>
+          </a:solidFill>
+          <a:ln>
+            <a:noFill/>
+          </a:ln>
+        </p:spPr>
+        <p:style>
+          <a:lnRef idx="1">
+            <a:schemeClr val="accent1"/>
+          </a:lnRef>
+          <a:fillRef idx="3">
+            <a:schemeClr val="accent1"/>
+          </a:fillRef>
+          <a:effectRef idx="2">
+            <a:schemeClr val="accent1"/>
+          </a:effectRef>
+          <a:fontRef idx="minor">
+            <a:schemeClr val="lt1"/>
+          </a:fontRef>
+        </p:style>
+        <p:txBody>
+          <a:bodyPr rtlCol="0" anchor="ctr"/>
+          <a:lstStyle/>
+          <a:p>
+            <a:pPr algn="ctr"/>
+          </a:p>
+        </p:txBody>
+      </p:sp>
+      <p:sp>
+        <p:nvSpPr>
+          <p:cNvPr id="27" name="TextBox 26"/>
           <p:cNvSpPr txBox="1"/>
           <p:nvPr/>
         </p:nvSpPr>
         <p:spPr>
           <a:xfrm>
-            <a:off x="2255824" y="2414016"/>
-            <a:ext cx="384048" cy="365760"/>
+            <a:off x="1600200" y="4059936"/>
+            <a:ext cx="1444752" cy="310896"/>
           </a:xfrm>
           <a:prstGeom prst="rect">
             <a:avLst/>
@@ -5674,27 +7680,27 @@
               </a:spcAft>
             </a:pPr>
             <a:r>
-              <a:rPr sz="1600" b="1">
+              <a:rPr sz="1800" b="1">
                 <a:solidFill>
-                  <a:srgbClr val="FFFFFF"/>
+                  <a:srgbClr val="28462D"/>
                 </a:solidFill>
                 <a:latin typeface="Microsoft YaHei"/>
               </a:rPr>
-              <a:t>2</a:t>
-            </a:r>
-          </a:p>
-        </p:txBody>
-      </p:sp>
-      <p:sp>
-        <p:nvSpPr>
-          <p:cNvPr id="16" name="TextBox 15"/>
+              <a:t>策展主题</a:t>
+            </a:r>
+          </a:p>
+        </p:txBody>
+      </p:sp>
+      <p:sp>
+        <p:nvSpPr>
+          <p:cNvPr id="28" name="TextBox 27"/>
           <p:cNvSpPr txBox="1"/>
           <p:nvPr/>
         </p:nvSpPr>
         <p:spPr>
           <a:xfrm>
-            <a:off x="2758744" y="2377440"/>
-            <a:ext cx="7772400" cy="502920"/>
+            <a:off x="3182112" y="4041648"/>
+            <a:ext cx="7333488" cy="658368"/>
           </a:xfrm>
           <a:prstGeom prst="rect">
             <a:avLst/>
@@ -5713,134 +7719,13 @@
               </a:spcAft>
             </a:pPr>
             <a:r>
-              <a:rPr sz="2400" b="0">
+              <a:rPr sz="2100" b="0">
                 <a:solidFill>
                   <a:srgbClr val="28462D"/>
                 </a:solidFill>
                 <a:latin typeface="Microsoft YaHei"/>
               </a:rPr>
-              <a:t>细读池水照影、黄泥捏人、藤条挥洒等画面</a:t>
-            </a:r>
-          </a:p>
-        </p:txBody>
-      </p:sp>
-      <p:sp>
-        <p:nvSpPr>
-          <p:cNvPr id="17" name="Oval 16"/>
-          <p:cNvSpPr/>
-          <p:nvPr/>
-        </p:nvSpPr>
-        <p:spPr>
-          <a:xfrm>
-            <a:off x="2255824" y="2962656"/>
-            <a:ext cx="384048" cy="384048"/>
-          </a:xfrm>
-          <a:prstGeom prst="ellipse">
-            <a:avLst/>
-          </a:prstGeom>
-          <a:solidFill>
-            <a:srgbClr val="468250"/>
-          </a:solidFill>
-          <a:ln>
-            <a:noFill/>
-          </a:ln>
-        </p:spPr>
-        <p:style>
-          <a:lnRef idx="1">
-            <a:schemeClr val="accent1"/>
-          </a:lnRef>
-          <a:fillRef idx="3">
-            <a:schemeClr val="accent1"/>
-          </a:fillRef>
-          <a:effectRef idx="2">
-            <a:schemeClr val="accent1"/>
-          </a:effectRef>
-          <a:fontRef idx="minor">
-            <a:schemeClr val="lt1"/>
-          </a:fontRef>
-        </p:style>
-        <p:txBody>
-          <a:bodyPr rtlCol="0" anchor="ctr"/>
-          <a:lstStyle/>
-          <a:p>
-            <a:pPr algn="ctr"/>
-          </a:p>
-        </p:txBody>
-      </p:sp>
-      <p:sp>
-        <p:nvSpPr>
-          <p:cNvPr id="18" name="TextBox 17"/>
-          <p:cNvSpPr txBox="1"/>
-          <p:nvPr/>
-        </p:nvSpPr>
-        <p:spPr>
-          <a:xfrm>
-            <a:off x="2255824" y="2980944"/>
-            <a:ext cx="384048" cy="365760"/>
-          </a:xfrm>
-          <a:prstGeom prst="rect">
-            <a:avLst/>
-          </a:prstGeom>
-          <a:noFill/>
-        </p:spPr>
-        <p:txBody>
-          <a:bodyPr wrap="none">
-            <a:spAutoFit/>
-          </a:bodyPr>
-          <a:lstStyle/>
-          <a:p>
-            <a:pPr algn="ctr">
-              <a:spcAft>
-                <a:spcPts val="1000"/>
-              </a:spcAft>
-            </a:pPr>
-            <a:r>
-              <a:rPr sz="1600" b="1">
-                <a:solidFill>
-                  <a:srgbClr val="FFFFFF"/>
-                </a:solidFill>
-                <a:latin typeface="Microsoft YaHei"/>
-              </a:rPr>
-              <a:t>3</a:t>
-            </a:r>
-          </a:p>
-        </p:txBody>
-      </p:sp>
-      <p:sp>
-        <p:nvSpPr>
-          <p:cNvPr id="19" name="TextBox 18"/>
-          <p:cNvSpPr txBox="1"/>
-          <p:nvPr/>
-        </p:nvSpPr>
-        <p:spPr>
-          <a:xfrm>
-            <a:off x="2758744" y="2944368"/>
-            <a:ext cx="7772400" cy="502920"/>
-          </a:xfrm>
-          <a:prstGeom prst="rect">
-            <a:avLst/>
-          </a:prstGeom>
-          <a:noFill/>
-        </p:spPr>
-        <p:txBody>
-          <a:bodyPr wrap="none">
-            <a:spAutoFit/>
-          </a:bodyPr>
-          <a:lstStyle/>
-          <a:p>
-            <a:pPr algn="l">
-              <a:spcAft>
-                <a:spcPts val="1000"/>
-              </a:spcAft>
-            </a:pPr>
-            <a:r>
-              <a:rPr sz="2400" b="0">
-                <a:solidFill>
-                  <a:srgbClr val="28462D"/>
-                </a:solidFill>
-                <a:latin typeface="Microsoft YaHei"/>
-              </a:rPr>
-              <a:t>说说想象如何具体、生动、温暖</a:t>
+              <a:t>生命来之不易，创造值得珍视（创造与生命）</a:t>
             </a:r>
           </a:p>
         </p:txBody>
@@ -5986,6 +7871,88 @@
         </p:nvSpPr>
         <p:spPr>
           <a:xfrm>
+            <a:off x="502920" y="384048"/>
+            <a:ext cx="2011680" cy="384048"/>
+          </a:xfrm>
+          <a:prstGeom prst="roundRect">
+            <a:avLst/>
+          </a:prstGeom>
+          <a:solidFill>
+            <a:srgbClr val="3C9664"/>
+          </a:solidFill>
+          <a:ln>
+            <a:noFill/>
+          </a:ln>
+        </p:spPr>
+        <p:style>
+          <a:lnRef idx="1">
+            <a:schemeClr val="accent1"/>
+          </a:lnRef>
+          <a:fillRef idx="3">
+            <a:schemeClr val="accent1"/>
+          </a:fillRef>
+          <a:effectRef idx="2">
+            <a:schemeClr val="accent1"/>
+          </a:effectRef>
+          <a:fontRef idx="minor">
+            <a:schemeClr val="lt1"/>
+          </a:fontRef>
+        </p:style>
+        <p:txBody>
+          <a:bodyPr rtlCol="0" anchor="ctr"/>
+          <a:lstStyle/>
+          <a:p>
+            <a:pPr algn="ctr"/>
+          </a:p>
+        </p:txBody>
+      </p:sp>
+      <p:sp>
+        <p:nvSpPr>
+          <p:cNvPr id="7" name="TextBox 6"/>
+          <p:cNvSpPr txBox="1"/>
+          <p:nvPr/>
+        </p:nvSpPr>
+        <p:spPr>
+          <a:xfrm>
+            <a:off x="502920" y="402336"/>
+            <a:ext cx="2011680" cy="347472"/>
+          </a:xfrm>
+          <a:prstGeom prst="rect">
+            <a:avLst/>
+          </a:prstGeom>
+          <a:noFill/>
+        </p:spPr>
+        <p:txBody>
+          <a:bodyPr wrap="none">
+            <a:spAutoFit/>
+          </a:bodyPr>
+          <a:lstStyle/>
+          <a:p>
+            <a:pPr algn="ctr">
+              <a:spcAft>
+                <a:spcPts val="1000"/>
+              </a:spcAft>
+            </a:pPr>
+            <a:r>
+              <a:rPr sz="1600" b="1">
+                <a:solidFill>
+                  <a:srgbClr val="FFFFFF"/>
+                </a:solidFill>
+                <a:latin typeface="Microsoft YaHei"/>
+              </a:rPr>
+              <a:t>课堂活动</a:t>
+            </a:r>
+          </a:p>
+        </p:txBody>
+      </p:sp>
+      <p:sp>
+        <p:nvSpPr>
+          <p:cNvPr id="8" name="Rounded Rectangle 7"/>
+          <p:cNvSpPr/>
+          <p:nvPr/>
+        </p:nvSpPr>
+        <p:spPr>
+          <a:xfrm>
             <a:off x="4953304" y="502920"/>
             <a:ext cx="2286000" cy="411480"/>
           </a:xfrm>
@@ -6023,7 +7990,7 @@
       </p:sp>
       <p:sp>
         <p:nvSpPr>
-          <p:cNvPr id="7" name="TextBox 6"/>
+          <p:cNvPr id="9" name="TextBox 8"/>
           <p:cNvSpPr txBox="1"/>
           <p:nvPr/>
         </p:nvSpPr>
@@ -6055,14 +8022,14 @@
                 </a:solidFill>
                 <a:latin typeface="Microsoft YaHei"/>
               </a:rPr>
-              <a:t>主题探究</a:t>
-            </a:r>
-          </a:p>
-        </p:txBody>
-      </p:sp>
-      <p:sp>
-        <p:nvSpPr>
-          <p:cNvPr id="8" name="TextBox 7"/>
+              <a:t>课堂活动</a:t>
+            </a:r>
+          </a:p>
+        </p:txBody>
+      </p:sp>
+      <p:sp>
+        <p:nvSpPr>
+          <p:cNvPr id="10" name="TextBox 9"/>
           <p:cNvSpPr txBox="1"/>
           <p:nvPr/>
         </p:nvSpPr>
@@ -6094,14 +8061,14 @@
                 </a:solidFill>
                 <a:latin typeface="Microsoft YaHei"/>
               </a:rPr>
-              <a:t>学习任务三</a:t>
-            </a:r>
-          </a:p>
-        </p:txBody>
-      </p:sp>
-      <p:sp>
-        <p:nvSpPr>
-          <p:cNvPr id="9" name="Rectangle 8"/>
+              <a:t>学习任务</a:t>
+            </a:r>
+          </a:p>
+        </p:txBody>
+      </p:sp>
+      <p:sp>
+        <p:nvSpPr>
+          <p:cNvPr id="11" name="Rectangle 10"/>
           <p:cNvSpPr/>
           <p:nvPr/>
         </p:nvSpPr>
@@ -6144,14 +8111,14 @@
       </p:sp>
       <p:sp>
         <p:nvSpPr>
-          <p:cNvPr id="10" name="Rounded Rectangle 9"/>
+          <p:cNvPr id="12" name="Rounded Rectangle 11"/>
           <p:cNvSpPr/>
           <p:nvPr/>
         </p:nvSpPr>
         <p:spPr>
           <a:xfrm>
             <a:off x="1295704" y="1645920"/>
-            <a:ext cx="9601200" cy="2240280"/>
+            <a:ext cx="9601200" cy="2112264"/>
           </a:xfrm>
           <a:prstGeom prst="roundRect">
             <a:avLst/>
@@ -6189,14 +8156,14 @@
       </p:sp>
       <p:sp>
         <p:nvSpPr>
-          <p:cNvPr id="11" name="Oval 10"/>
+          <p:cNvPr id="13" name="Oval 12"/>
           <p:cNvSpPr/>
           <p:nvPr/>
         </p:nvSpPr>
         <p:spPr>
           <a:xfrm>
             <a:off x="2255824" y="1828800"/>
-            <a:ext cx="384048" cy="384048"/>
+            <a:ext cx="347472" cy="347472"/>
           </a:xfrm>
           <a:prstGeom prst="ellipse">
             <a:avLst/>
@@ -6232,14 +8199,14 @@
       </p:sp>
       <p:sp>
         <p:nvSpPr>
-          <p:cNvPr id="12" name="TextBox 11"/>
+          <p:cNvPr id="14" name="TextBox 13"/>
           <p:cNvSpPr txBox="1"/>
           <p:nvPr/>
         </p:nvSpPr>
         <p:spPr>
           <a:xfrm>
             <a:off x="2255824" y="1847088"/>
-            <a:ext cx="384048" cy="365760"/>
+            <a:ext cx="347472" cy="329184"/>
           </a:xfrm>
           <a:prstGeom prst="rect">
             <a:avLst/>
@@ -6258,7 +8225,7 @@
               </a:spcAft>
             </a:pPr>
             <a:r>
-              <a:rPr sz="1600" b="1">
+              <a:rPr sz="1400" b="1">
                 <a:solidFill>
                   <a:srgbClr val="FFFFFF"/>
                 </a:solidFill>
@@ -6271,14 +8238,14 @@
       </p:sp>
       <p:sp>
         <p:nvSpPr>
-          <p:cNvPr id="13" name="TextBox 12"/>
+          <p:cNvPr id="15" name="TextBox 14"/>
           <p:cNvSpPr txBox="1"/>
           <p:nvPr/>
         </p:nvSpPr>
         <p:spPr>
           <a:xfrm>
-            <a:off x="2758744" y="1810512"/>
-            <a:ext cx="7772400" cy="502920"/>
+            <a:off x="2713024" y="1810512"/>
+            <a:ext cx="7863840" cy="457200"/>
           </a:xfrm>
           <a:prstGeom prst="rect">
             <a:avLst/>
@@ -6303,21 +8270,21 @@
                 </a:solidFill>
                 <a:latin typeface="Microsoft YaHei"/>
               </a:rPr>
-              <a:t>讨论：神话用想象解释人的来处</a:t>
-            </a:r>
-          </a:p>
-        </p:txBody>
-      </p:sp>
-      <p:sp>
-        <p:nvSpPr>
-          <p:cNvPr id="14" name="Oval 13"/>
+              <a:t>给女娲行动排序，比较两种造人方法</a:t>
+            </a:r>
+          </a:p>
+        </p:txBody>
+      </p:sp>
+      <p:sp>
+        <p:nvSpPr>
+          <p:cNvPr id="16" name="Oval 15"/>
           <p:cNvSpPr/>
           <p:nvPr/>
         </p:nvSpPr>
         <p:spPr>
           <a:xfrm>
             <a:off x="2255824" y="2395728"/>
-            <a:ext cx="384048" cy="384048"/>
+            <a:ext cx="347472" cy="347472"/>
           </a:xfrm>
           <a:prstGeom prst="ellipse">
             <a:avLst/>
@@ -6353,14 +8320,14 @@
       </p:sp>
       <p:sp>
         <p:nvSpPr>
-          <p:cNvPr id="15" name="TextBox 14"/>
+          <p:cNvPr id="17" name="TextBox 16"/>
           <p:cNvSpPr txBox="1"/>
           <p:nvPr/>
         </p:nvSpPr>
         <p:spPr>
           <a:xfrm>
             <a:off x="2255824" y="2414016"/>
-            <a:ext cx="384048" cy="365760"/>
+            <a:ext cx="347472" cy="329184"/>
           </a:xfrm>
           <a:prstGeom prst="rect">
             <a:avLst/>
@@ -6379,7 +8346,7 @@
               </a:spcAft>
             </a:pPr>
             <a:r>
-              <a:rPr sz="1600" b="1">
+              <a:rPr sz="1400" b="1">
                 <a:solidFill>
                   <a:srgbClr val="FFFFFF"/>
                 </a:solidFill>
@@ -6392,14 +8359,14 @@
       </p:sp>
       <p:sp>
         <p:nvSpPr>
-          <p:cNvPr id="16" name="TextBox 15"/>
+          <p:cNvPr id="18" name="TextBox 17"/>
           <p:cNvSpPr txBox="1"/>
           <p:nvPr/>
         </p:nvSpPr>
         <p:spPr>
           <a:xfrm>
-            <a:off x="2758744" y="2377440"/>
-            <a:ext cx="7772400" cy="502920"/>
+            <a:off x="2713024" y="2377440"/>
+            <a:ext cx="7863840" cy="457200"/>
           </a:xfrm>
           <a:prstGeom prst="rect">
             <a:avLst/>
@@ -6424,21 +8391,21 @@
                 </a:solidFill>
                 <a:latin typeface="Microsoft YaHei"/>
               </a:rPr>
-              <a:t>女娲既有神性，也有人的孤独、疲倦和喜悦</a:t>
-            </a:r>
-          </a:p>
-        </p:txBody>
-      </p:sp>
-      <p:sp>
-        <p:nvSpPr>
-          <p:cNvPr id="17" name="Oval 16"/>
+              <a:t>完成「古籍与课文」比较表</a:t>
+            </a:r>
+          </a:p>
+        </p:txBody>
+      </p:sp>
+      <p:sp>
+        <p:nvSpPr>
+          <p:cNvPr id="19" name="Oval 18"/>
           <p:cNvSpPr/>
           <p:nvPr/>
         </p:nvSpPr>
         <p:spPr>
           <a:xfrm>
             <a:off x="2255824" y="2962656"/>
-            <a:ext cx="384048" cy="384048"/>
+            <a:ext cx="347472" cy="347472"/>
           </a:xfrm>
           <a:prstGeom prst="ellipse">
             <a:avLst/>
@@ -6474,14 +8441,14 @@
       </p:sp>
       <p:sp>
         <p:nvSpPr>
-          <p:cNvPr id="18" name="TextBox 17"/>
+          <p:cNvPr id="20" name="TextBox 19"/>
           <p:cNvSpPr txBox="1"/>
           <p:nvPr/>
         </p:nvSpPr>
         <p:spPr>
           <a:xfrm>
             <a:off x="2255824" y="2980944"/>
-            <a:ext cx="384048" cy="365760"/>
+            <a:ext cx="347472" cy="329184"/>
           </a:xfrm>
           <a:prstGeom prst="rect">
             <a:avLst/>
@@ -6500,7 +8467,7 @@
               </a:spcAft>
             </a:pPr>
             <a:r>
-              <a:rPr sz="1600" b="1">
+              <a:rPr sz="1400" b="1">
                 <a:solidFill>
                   <a:srgbClr val="FFFFFF"/>
                 </a:solidFill>
@@ -6513,14 +8480,14 @@
       </p:sp>
       <p:sp>
         <p:nvSpPr>
-          <p:cNvPr id="19" name="TextBox 18"/>
+          <p:cNvPr id="21" name="TextBox 20"/>
           <p:cNvSpPr txBox="1"/>
           <p:nvPr/>
         </p:nvSpPr>
         <p:spPr>
           <a:xfrm>
-            <a:off x="2758744" y="2944368"/>
-            <a:ext cx="7772400" cy="502920"/>
+            <a:off x="2713024" y="2944368"/>
+            <a:ext cx="7863840" cy="457200"/>
           </a:xfrm>
           <a:prstGeom prst="rect">
             <a:avLst/>
@@ -6545,7 +8512,7 @@
                 </a:solidFill>
                 <a:latin typeface="Microsoft YaHei"/>
               </a:rPr>
-              <a:t>策展主题三：生命来之不易，创造值得礼赞</a:t>
+              <a:t>以「我看见女娲……」写100字画面描述</a:t>
             </a:r>
           </a:p>
         </p:txBody>
@@ -6691,6 +8658,88 @@
         </p:nvSpPr>
         <p:spPr>
           <a:xfrm>
+            <a:off x="502920" y="384048"/>
+            <a:ext cx="2011680" cy="384048"/>
+          </a:xfrm>
+          <a:prstGeom prst="roundRect">
+            <a:avLst/>
+          </a:prstGeom>
+          <a:solidFill>
+            <a:srgbClr val="3C9664"/>
+          </a:solidFill>
+          <a:ln>
+            <a:noFill/>
+          </a:ln>
+        </p:spPr>
+        <p:style>
+          <a:lnRef idx="1">
+            <a:schemeClr val="accent1"/>
+          </a:lnRef>
+          <a:fillRef idx="3">
+            <a:schemeClr val="accent1"/>
+          </a:fillRef>
+          <a:effectRef idx="2">
+            <a:schemeClr val="accent1"/>
+          </a:effectRef>
+          <a:fontRef idx="minor">
+            <a:schemeClr val="lt1"/>
+          </a:fontRef>
+        </p:style>
+        <p:txBody>
+          <a:bodyPr rtlCol="0" anchor="ctr"/>
+          <a:lstStyle/>
+          <a:p>
+            <a:pPr algn="ctr"/>
+          </a:p>
+        </p:txBody>
+      </p:sp>
+      <p:sp>
+        <p:nvSpPr>
+          <p:cNvPr id="7" name="TextBox 6"/>
+          <p:cNvSpPr txBox="1"/>
+          <p:nvPr/>
+        </p:nvSpPr>
+        <p:spPr>
+          <a:xfrm>
+            <a:off x="502920" y="402336"/>
+            <a:ext cx="2011680" cy="347472"/>
+          </a:xfrm>
+          <a:prstGeom prst="rect">
+            <a:avLst/>
+          </a:prstGeom>
+          <a:noFill/>
+        </p:spPr>
+        <p:txBody>
+          <a:bodyPr wrap="none">
+            <a:spAutoFit/>
+          </a:bodyPr>
+          <a:lstStyle/>
+          <a:p>
+            <a:pPr algn="ctr">
+              <a:spcAft>
+                <a:spcPts val="1000"/>
+              </a:spcAft>
+            </a:pPr>
+            <a:r>
+              <a:rPr sz="1600" b="1">
+                <a:solidFill>
+                  <a:srgbClr val="FFFFFF"/>
+                </a:solidFill>
+                <a:latin typeface="Microsoft YaHei"/>
+              </a:rPr>
+              <a:t>课堂活动</a:t>
+            </a:r>
+          </a:p>
+        </p:txBody>
+      </p:sp>
+      <p:sp>
+        <p:nvSpPr>
+          <p:cNvPr id="8" name="Rounded Rectangle 7"/>
+          <p:cNvSpPr/>
+          <p:nvPr/>
+        </p:nvSpPr>
+        <p:spPr>
+          <a:xfrm>
             <a:off x="4953304" y="502920"/>
             <a:ext cx="2286000" cy="411480"/>
           </a:xfrm>
@@ -6728,7 +8777,7 @@
       </p:sp>
       <p:sp>
         <p:nvSpPr>
-          <p:cNvPr id="7" name="TextBox 6"/>
+          <p:cNvPr id="9" name="TextBox 8"/>
           <p:cNvSpPr txBox="1"/>
           <p:nvPr/>
         </p:nvSpPr>
@@ -6767,7 +8816,7 @@
       </p:sp>
       <p:sp>
         <p:nvSpPr>
-          <p:cNvPr id="8" name="TextBox 7"/>
+          <p:cNvPr id="10" name="TextBox 9"/>
           <p:cNvSpPr txBox="1"/>
           <p:nvPr/>
         </p:nvSpPr>
@@ -6806,7 +8855,7 @@
       </p:sp>
       <p:sp>
         <p:nvSpPr>
-          <p:cNvPr id="9" name="Rectangle 8"/>
+          <p:cNvPr id="11" name="Rectangle 10"/>
           <p:cNvSpPr/>
           <p:nvPr/>
         </p:nvSpPr>
@@ -6849,14 +8898,14 @@
       </p:sp>
       <p:sp>
         <p:nvSpPr>
-          <p:cNvPr id="10" name="Rounded Rectangle 9"/>
+          <p:cNvPr id="12" name="Rounded Rectangle 11"/>
           <p:cNvSpPr/>
           <p:nvPr/>
         </p:nvSpPr>
         <p:spPr>
           <a:xfrm>
             <a:off x="1295704" y="1645920"/>
-            <a:ext cx="9601200" cy="2240280"/>
+            <a:ext cx="9601200" cy="1837944"/>
           </a:xfrm>
           <a:prstGeom prst="roundRect">
             <a:avLst/>
@@ -6894,14 +8943,14 @@
       </p:sp>
       <p:sp>
         <p:nvSpPr>
-          <p:cNvPr id="11" name="Oval 10"/>
+          <p:cNvPr id="13" name="Oval 12"/>
           <p:cNvSpPr/>
           <p:nvPr/>
         </p:nvSpPr>
         <p:spPr>
           <a:xfrm>
             <a:off x="2255824" y="1828800"/>
-            <a:ext cx="384048" cy="384048"/>
+            <a:ext cx="347472" cy="347472"/>
           </a:xfrm>
           <a:prstGeom prst="ellipse">
             <a:avLst/>
@@ -6937,14 +8986,14 @@
       </p:sp>
       <p:sp>
         <p:nvSpPr>
-          <p:cNvPr id="12" name="TextBox 11"/>
+          <p:cNvPr id="14" name="TextBox 13"/>
           <p:cNvSpPr txBox="1"/>
           <p:nvPr/>
         </p:nvSpPr>
         <p:spPr>
           <a:xfrm>
             <a:off x="2255824" y="1847088"/>
-            <a:ext cx="384048" cy="365760"/>
+            <a:ext cx="347472" cy="329184"/>
           </a:xfrm>
           <a:prstGeom prst="rect">
             <a:avLst/>
@@ -6963,7 +9012,7 @@
               </a:spcAft>
             </a:pPr>
             <a:r>
-              <a:rPr sz="1600" b="1">
+              <a:rPr sz="1400" b="1">
                 <a:solidFill>
                   <a:srgbClr val="FFFFFF"/>
                 </a:solidFill>
@@ -6976,14 +9025,14 @@
       </p:sp>
       <p:sp>
         <p:nvSpPr>
-          <p:cNvPr id="13" name="TextBox 12"/>
+          <p:cNvPr id="15" name="TextBox 14"/>
           <p:cNvSpPr txBox="1"/>
           <p:nvPr/>
         </p:nvSpPr>
         <p:spPr>
           <a:xfrm>
-            <a:off x="2758744" y="1810512"/>
-            <a:ext cx="7772400" cy="502920"/>
+            <a:off x="2713024" y="1810512"/>
+            <a:ext cx="7863840" cy="457200"/>
           </a:xfrm>
           <a:prstGeom prst="rect">
             <a:avLst/>
@@ -7002,27 +9051,27 @@
               </a:spcAft>
             </a:pPr>
             <a:r>
-              <a:rPr sz="2400" b="0">
+              <a:rPr sz="2200" b="0">
                 <a:solidFill>
                   <a:srgbClr val="28462D"/>
                 </a:solidFill>
                 <a:latin typeface="Microsoft YaHei"/>
               </a:rPr>
-              <a:t>神话改写基于古籍又超越古籍</a:t>
-            </a:r>
-          </a:p>
-        </p:txBody>
-      </p:sp>
-      <p:sp>
-        <p:nvSpPr>
-          <p:cNvPr id="14" name="Oval 13"/>
+              <a:t>神话想象：基于古籍，超越古籍，有温度</a:t>
+            </a:r>
+          </a:p>
+        </p:txBody>
+      </p:sp>
+      <p:sp>
+        <p:nvSpPr>
+          <p:cNvPr id="16" name="Oval 15"/>
           <p:cNvSpPr/>
           <p:nvPr/>
         </p:nvSpPr>
         <p:spPr>
           <a:xfrm>
-            <a:off x="2255824" y="2395728"/>
-            <a:ext cx="384048" cy="384048"/>
+            <a:off x="2255824" y="2304288"/>
+            <a:ext cx="347472" cy="347472"/>
           </a:xfrm>
           <a:prstGeom prst="ellipse">
             <a:avLst/>
@@ -7058,14 +9107,14 @@
       </p:sp>
       <p:sp>
         <p:nvSpPr>
-          <p:cNvPr id="15" name="TextBox 14"/>
+          <p:cNvPr id="17" name="TextBox 16"/>
           <p:cNvSpPr txBox="1"/>
           <p:nvPr/>
         </p:nvSpPr>
         <p:spPr>
           <a:xfrm>
-            <a:off x="2255824" y="2414016"/>
-            <a:ext cx="384048" cy="365760"/>
+            <a:off x="2255824" y="2322576"/>
+            <a:ext cx="347472" cy="329184"/>
           </a:xfrm>
           <a:prstGeom prst="rect">
             <a:avLst/>
@@ -7084,7 +9133,7 @@
               </a:spcAft>
             </a:pPr>
             <a:r>
-              <a:rPr sz="1600" b="1">
+              <a:rPr sz="1400" b="1">
                 <a:solidFill>
                   <a:srgbClr val="FFFFFF"/>
                 </a:solidFill>
@@ -7097,14 +9146,14 @@
       </p:sp>
       <p:sp>
         <p:nvSpPr>
-          <p:cNvPr id="16" name="TextBox 15"/>
+          <p:cNvPr id="18" name="TextBox 17"/>
           <p:cNvSpPr txBox="1"/>
           <p:nvPr/>
         </p:nvSpPr>
         <p:spPr>
           <a:xfrm>
-            <a:off x="2758744" y="2377440"/>
-            <a:ext cx="7772400" cy="502920"/>
+            <a:off x="2713024" y="2286000"/>
+            <a:ext cx="7863840" cy="457200"/>
           </a:xfrm>
           <a:prstGeom prst="rect">
             <a:avLst/>
@@ -7123,27 +9172,27 @@
               </a:spcAft>
             </a:pPr>
             <a:r>
-              <a:rPr sz="2400" b="0">
+              <a:rPr sz="2200" b="0">
                 <a:solidFill>
                   <a:srgbClr val="28462D"/>
                 </a:solidFill>
                 <a:latin typeface="Microsoft YaHei"/>
               </a:rPr>
-              <a:t>赋予创世故事现代意识与生命温度</a:t>
-            </a:r>
-          </a:p>
-        </p:txBody>
-      </p:sp>
-      <p:sp>
-        <p:nvSpPr>
-          <p:cNvPr id="17" name="Oval 16"/>
+              <a:t>女娲：神性与人性并存——孤独、疲倦、喜悦</a:t>
+            </a:r>
+          </a:p>
+        </p:txBody>
+      </p:sp>
+      <p:sp>
+        <p:nvSpPr>
+          <p:cNvPr id="19" name="Oval 18"/>
           <p:cNvSpPr/>
           <p:nvPr/>
         </p:nvSpPr>
         <p:spPr>
           <a:xfrm>
-            <a:off x="2255824" y="2962656"/>
-            <a:ext cx="384048" cy="384048"/>
+            <a:off x="2255824" y="2779776"/>
+            <a:ext cx="347472" cy="347472"/>
           </a:xfrm>
           <a:prstGeom prst="ellipse">
             <a:avLst/>
@@ -7179,14 +9228,14 @@
       </p:sp>
       <p:sp>
         <p:nvSpPr>
-          <p:cNvPr id="18" name="TextBox 17"/>
+          <p:cNvPr id="20" name="TextBox 19"/>
           <p:cNvSpPr txBox="1"/>
           <p:nvPr/>
         </p:nvSpPr>
         <p:spPr>
           <a:xfrm>
-            <a:off x="2255824" y="2980944"/>
-            <a:ext cx="384048" cy="365760"/>
+            <a:off x="2255824" y="2798064"/>
+            <a:ext cx="347472" cy="329184"/>
           </a:xfrm>
           <a:prstGeom prst="rect">
             <a:avLst/>
@@ -7205,7 +9254,7 @@
               </a:spcAft>
             </a:pPr>
             <a:r>
-              <a:rPr sz="1600" b="1">
+              <a:rPr sz="1400" b="1">
                 <a:solidFill>
                   <a:srgbClr val="FFFFFF"/>
                 </a:solidFill>
@@ -7218,14 +9267,14 @@
       </p:sp>
       <p:sp>
         <p:nvSpPr>
-          <p:cNvPr id="19" name="TextBox 18"/>
+          <p:cNvPr id="21" name="TextBox 20"/>
           <p:cNvSpPr txBox="1"/>
           <p:nvPr/>
         </p:nvSpPr>
         <p:spPr>
           <a:xfrm>
-            <a:off x="2758744" y="2944368"/>
-            <a:ext cx="7772400" cy="502920"/>
+            <a:off x="2713024" y="2761488"/>
+            <a:ext cx="7863840" cy="457200"/>
           </a:xfrm>
           <a:prstGeom prst="rect">
             <a:avLst/>
@@ -7244,13 +9293,13 @@
               </a:spcAft>
             </a:pPr>
             <a:r>
-              <a:rPr sz="2400" b="0">
+              <a:rPr sz="2200" b="0">
                 <a:solidFill>
                   <a:srgbClr val="28462D"/>
                 </a:solidFill>
                 <a:latin typeface="Microsoft YaHei"/>
               </a:rPr>
-              <a:t>策展主题：创造与生命</a:t>
+              <a:t>策展主题三：创造与生命</a:t>
             </a:r>
           </a:p>
         </p:txBody>
@@ -7396,6 +9445,88 @@
         </p:nvSpPr>
         <p:spPr>
           <a:xfrm>
+            <a:off x="502920" y="384048"/>
+            <a:ext cx="2011680" cy="384048"/>
+          </a:xfrm>
+          <a:prstGeom prst="roundRect">
+            <a:avLst/>
+          </a:prstGeom>
+          <a:solidFill>
+            <a:srgbClr val="3C9664"/>
+          </a:solidFill>
+          <a:ln>
+            <a:noFill/>
+          </a:ln>
+        </p:spPr>
+        <p:style>
+          <a:lnRef idx="1">
+            <a:schemeClr val="accent1"/>
+          </a:lnRef>
+          <a:fillRef idx="3">
+            <a:schemeClr val="accent1"/>
+          </a:fillRef>
+          <a:effectRef idx="2">
+            <a:schemeClr val="accent1"/>
+          </a:effectRef>
+          <a:fontRef idx="minor">
+            <a:schemeClr val="lt1"/>
+          </a:fontRef>
+        </p:style>
+        <p:txBody>
+          <a:bodyPr rtlCol="0" anchor="ctr"/>
+          <a:lstStyle/>
+          <a:p>
+            <a:pPr algn="ctr"/>
+          </a:p>
+        </p:txBody>
+      </p:sp>
+      <p:sp>
+        <p:nvSpPr>
+          <p:cNvPr id="7" name="TextBox 6"/>
+          <p:cNvSpPr txBox="1"/>
+          <p:nvPr/>
+        </p:nvSpPr>
+        <p:spPr>
+          <a:xfrm>
+            <a:off x="502920" y="402336"/>
+            <a:ext cx="2011680" cy="347472"/>
+          </a:xfrm>
+          <a:prstGeom prst="rect">
+            <a:avLst/>
+          </a:prstGeom>
+          <a:noFill/>
+        </p:spPr>
+        <p:txBody>
+          <a:bodyPr wrap="none">
+            <a:spAutoFit/>
+          </a:bodyPr>
+          <a:lstStyle/>
+          <a:p>
+            <a:pPr algn="ctr">
+              <a:spcAft>
+                <a:spcPts val="1000"/>
+              </a:spcAft>
+            </a:pPr>
+            <a:r>
+              <a:rPr sz="1600" b="1">
+                <a:solidFill>
+                  <a:srgbClr val="FFFFFF"/>
+                </a:solidFill>
+                <a:latin typeface="Microsoft YaHei"/>
+              </a:rPr>
+              <a:t>课堂活动</a:t>
+            </a:r>
+          </a:p>
+        </p:txBody>
+      </p:sp>
+      <p:sp>
+        <p:nvSpPr>
+          <p:cNvPr id="8" name="Rounded Rectangle 7"/>
+          <p:cNvSpPr/>
+          <p:nvPr/>
+        </p:nvSpPr>
+        <p:spPr>
+          <a:xfrm>
             <a:off x="4953304" y="502920"/>
             <a:ext cx="2286000" cy="411480"/>
           </a:xfrm>
@@ -7433,7 +9564,7 @@
       </p:sp>
       <p:sp>
         <p:nvSpPr>
-          <p:cNvPr id="7" name="TextBox 6"/>
+          <p:cNvPr id="9" name="TextBox 8"/>
           <p:cNvSpPr txBox="1"/>
           <p:nvPr/>
         </p:nvSpPr>
@@ -7472,7 +9603,7 @@
       </p:sp>
       <p:sp>
         <p:nvSpPr>
-          <p:cNvPr id="8" name="TextBox 7"/>
+          <p:cNvPr id="10" name="TextBox 9"/>
           <p:cNvSpPr txBox="1"/>
           <p:nvPr/>
         </p:nvSpPr>
@@ -7511,7 +9642,7 @@
       </p:sp>
       <p:sp>
         <p:nvSpPr>
-          <p:cNvPr id="9" name="Rectangle 8"/>
+          <p:cNvPr id="11" name="Rectangle 10"/>
           <p:cNvSpPr/>
           <p:nvPr/>
         </p:nvSpPr>
@@ -7554,14 +9685,14 @@
       </p:sp>
       <p:sp>
         <p:nvSpPr>
-          <p:cNvPr id="10" name="Rounded Rectangle 9"/>
+          <p:cNvPr id="12" name="Rounded Rectangle 11"/>
           <p:cNvSpPr/>
           <p:nvPr/>
         </p:nvSpPr>
         <p:spPr>
           <a:xfrm>
             <a:off x="1295704" y="1645920"/>
-            <a:ext cx="9601200" cy="1645920"/>
+            <a:ext cx="9601200" cy="1545336"/>
           </a:xfrm>
           <a:prstGeom prst="roundRect">
             <a:avLst/>
@@ -7599,14 +9730,14 @@
       </p:sp>
       <p:sp>
         <p:nvSpPr>
-          <p:cNvPr id="11" name="Oval 10"/>
+          <p:cNvPr id="13" name="Oval 12"/>
           <p:cNvSpPr/>
           <p:nvPr/>
         </p:nvSpPr>
         <p:spPr>
           <a:xfrm>
             <a:off x="2255824" y="1828800"/>
-            <a:ext cx="384048" cy="384048"/>
+            <a:ext cx="347472" cy="347472"/>
           </a:xfrm>
           <a:prstGeom prst="ellipse">
             <a:avLst/>
@@ -7642,14 +9773,14 @@
       </p:sp>
       <p:sp>
         <p:nvSpPr>
-          <p:cNvPr id="12" name="TextBox 11"/>
+          <p:cNvPr id="14" name="TextBox 13"/>
           <p:cNvSpPr txBox="1"/>
           <p:nvPr/>
         </p:nvSpPr>
         <p:spPr>
           <a:xfrm>
             <a:off x="2255824" y="1847088"/>
-            <a:ext cx="384048" cy="365760"/>
+            <a:ext cx="347472" cy="329184"/>
           </a:xfrm>
           <a:prstGeom prst="rect">
             <a:avLst/>
@@ -7668,7 +9799,7 @@
               </a:spcAft>
             </a:pPr>
             <a:r>
-              <a:rPr sz="1600" b="1">
+              <a:rPr sz="1400" b="1">
                 <a:solidFill>
                   <a:srgbClr val="FFFFFF"/>
                 </a:solidFill>
@@ -7681,14 +9812,14 @@
       </p:sp>
       <p:sp>
         <p:nvSpPr>
-          <p:cNvPr id="13" name="TextBox 12"/>
+          <p:cNvPr id="15" name="TextBox 14"/>
           <p:cNvSpPr txBox="1"/>
           <p:nvPr/>
         </p:nvSpPr>
         <p:spPr>
           <a:xfrm>
-            <a:off x="2758744" y="1810512"/>
-            <a:ext cx="7772400" cy="502920"/>
+            <a:off x="2713024" y="1810512"/>
+            <a:ext cx="7863840" cy="457200"/>
           </a:xfrm>
           <a:prstGeom prst="rect">
             <a:avLst/>
@@ -7713,21 +9844,21 @@
                 </a:solidFill>
                 <a:latin typeface="Microsoft YaHei"/>
               </a:rPr>
-              <a:t>必做：以「我看见女娲……」开头，写100字画面描述</a:t>
-            </a:r>
-          </a:p>
-        </p:txBody>
-      </p:sp>
-      <p:sp>
-        <p:nvSpPr>
-          <p:cNvPr id="14" name="Oval 13"/>
+              <a:t>必做：以「我看见女娲……」写100字画面</a:t>
+            </a:r>
+          </a:p>
+        </p:txBody>
+      </p:sp>
+      <p:sp>
+        <p:nvSpPr>
+          <p:cNvPr id="16" name="Oval 15"/>
           <p:cNvSpPr/>
           <p:nvPr/>
         </p:nvSpPr>
         <p:spPr>
           <a:xfrm>
             <a:off x="2255824" y="2395728"/>
-            <a:ext cx="384048" cy="384048"/>
+            <a:ext cx="347472" cy="347472"/>
           </a:xfrm>
           <a:prstGeom prst="ellipse">
             <a:avLst/>
@@ -7763,14 +9894,14 @@
       </p:sp>
       <p:sp>
         <p:nvSpPr>
-          <p:cNvPr id="15" name="TextBox 14"/>
+          <p:cNvPr id="17" name="TextBox 16"/>
           <p:cNvSpPr txBox="1"/>
           <p:nvPr/>
         </p:nvSpPr>
         <p:spPr>
           <a:xfrm>
             <a:off x="2255824" y="2414016"/>
-            <a:ext cx="384048" cy="365760"/>
+            <a:ext cx="347472" cy="329184"/>
           </a:xfrm>
           <a:prstGeom prst="rect">
             <a:avLst/>
@@ -7789,7 +9920,7 @@
               </a:spcAft>
             </a:pPr>
             <a:r>
-              <a:rPr sz="1600" b="1">
+              <a:rPr sz="1400" b="1">
                 <a:solidFill>
                   <a:srgbClr val="FFFFFF"/>
                 </a:solidFill>
@@ -7802,14 +9933,14 @@
       </p:sp>
       <p:sp>
         <p:nvSpPr>
-          <p:cNvPr id="16" name="TextBox 15"/>
+          <p:cNvPr id="18" name="TextBox 17"/>
           <p:cNvSpPr txBox="1"/>
           <p:nvPr/>
         </p:nvSpPr>
         <p:spPr>
           <a:xfrm>
-            <a:off x="2758744" y="2377440"/>
-            <a:ext cx="7772400" cy="502920"/>
+            <a:off x="2713024" y="2377440"/>
+            <a:ext cx="7863840" cy="457200"/>
           </a:xfrm>
           <a:prstGeom prst="rect">
             <a:avLst/>

--- a/unit6-lesson23-nuwa.pptx
+++ b/unit6-lesson23-nuwa.pptx
@@ -12,7 +12,6 @@
     <p:sldId id="260" r:id="rId11"/>
     <p:sldId id="261" r:id="rId12"/>
     <p:sldId id="262" r:id="rId13"/>
-    <p:sldId id="263" r:id="rId14"/>
   </p:sldIdLst>
   <p:sldSz cx="12191695" cy="6858000" type="screen4x3"/>
   <p:notesSz cx="6858000" cy="9144000"/>
@@ -3095,20 +3094,12 @@
         <p:nvPr/>
       </p:nvGrpSpPr>
       <p:grpSpPr/>
-      <p:pic>
-        <p:nvPicPr>
-          <p:cNvPr id="2" name="Picture 1" descr="bg_nuwa.png"/>
-          <p:cNvPicPr>
-            <a:picLocks noChangeAspect="1"/>
-          </p:cNvPicPr>
-          <p:nvPr/>
-        </p:nvPicPr>
-        <p:blipFill>
-          <a:blip r:embed="rId2"/>
-          <a:stretch>
-            <a:fillRect/>
-          </a:stretch>
-        </p:blipFill>
+      <p:sp>
+        <p:nvSpPr>
+          <p:cNvPr id="2" name="Rectangle 1"/>
+          <p:cNvSpPr/>
+          <p:nvPr/>
+        </p:nvSpPr>
         <p:spPr>
           <a:xfrm>
             <a:off x="0" y="0"/>
@@ -3117,27 +3108,11 @@
           <a:prstGeom prst="rect">
             <a:avLst/>
           </a:prstGeom>
-        </p:spPr>
-      </p:pic>
-      <p:sp>
-        <p:nvSpPr>
-          <p:cNvPr id="3" name="Rectangle 2"/>
-          <p:cNvSpPr/>
-          <p:nvPr/>
-        </p:nvSpPr>
-        <p:spPr>
-          <a:xfrm>
-            <a:off x="292608" y="274320"/>
-            <a:ext cx="11594592" cy="6300216"/>
-          </a:xfrm>
-          <a:prstGeom prst="rect">
-            <a:avLst/>
-          </a:prstGeom>
-          <a:noFill/>
-          <a:ln w="31750">
-            <a:solidFill>
-              <a:srgbClr val="5A8C5A"/>
-            </a:solidFill>
+          <a:solidFill>
+            <a:srgbClr val="F4F1EA"/>
+          </a:solidFill>
+          <a:ln>
+            <a:noFill/>
           </a:ln>
         </p:spPr>
         <p:style>
@@ -3162,73 +3137,25 @@
           </a:p>
         </p:txBody>
       </p:sp>
-      <p:pic>
-        <p:nvPicPr>
-          <p:cNvPr id="4" name="Picture 3" descr="corner_nuwa_tl.png"/>
-          <p:cNvPicPr>
-            <a:picLocks noChangeAspect="1"/>
-          </p:cNvPicPr>
-          <p:nvPr/>
-        </p:nvPicPr>
-        <p:blipFill>
-          <a:blip r:embed="rId3"/>
-          <a:stretch>
-            <a:fillRect/>
-          </a:stretch>
-        </p:blipFill>
-        <p:spPr>
-          <a:xfrm>
-            <a:off x="-45720" y="-45720"/>
-            <a:ext cx="2011680" cy="2011680"/>
-          </a:xfrm>
-          <a:prstGeom prst="rect">
-            <a:avLst/>
-          </a:prstGeom>
-        </p:spPr>
-      </p:pic>
-      <p:pic>
-        <p:nvPicPr>
-          <p:cNvPr id="5" name="Picture 4" descr="corner_nuwa_tr.png"/>
-          <p:cNvPicPr>
-            <a:picLocks noChangeAspect="1"/>
-          </p:cNvPicPr>
-          <p:nvPr/>
-        </p:nvPicPr>
-        <p:blipFill>
-          <a:blip r:embed="rId4"/>
-          <a:stretch>
-            <a:fillRect/>
-          </a:stretch>
-        </p:blipFill>
-        <p:spPr>
-          <a:xfrm>
-            <a:off x="9875520" y="-45720"/>
-            <a:ext cx="2011680" cy="2011680"/>
-          </a:xfrm>
-          <a:prstGeom prst="rect">
-            <a:avLst/>
-          </a:prstGeom>
-        </p:spPr>
-      </p:pic>
-      <p:sp>
-        <p:nvSpPr>
-          <p:cNvPr id="6" name="Rectangle 5"/>
+      <p:sp>
+        <p:nvSpPr>
+          <p:cNvPr id="3" name="Rectangle 2"/>
           <p:cNvSpPr/>
           <p:nvPr/>
         </p:nvSpPr>
         <p:spPr>
           <a:xfrm>
-            <a:off x="292608" y="274320"/>
-            <a:ext cx="11594592" cy="6300216"/>
-          </a:xfrm>
-          <a:prstGeom prst="rect">
-            <a:avLst/>
-          </a:prstGeom>
-          <a:noFill/>
-          <a:ln w="31750">
-            <a:solidFill>
-              <a:srgbClr val="5A8C5A"/>
-            </a:solidFill>
+            <a:off x="6858000" y="457200"/>
+            <a:ext cx="5029200" cy="2926080"/>
+          </a:xfrm>
+          <a:prstGeom prst="rect">
+            <a:avLst/>
+          </a:prstGeom>
+          <a:solidFill>
+            <a:srgbClr val="D8E6DF"/>
+          </a:solidFill>
+          <a:ln>
+            <a:noFill/>
           </a:ln>
         </p:spPr>
         <p:style>
@@ -3255,23 +3182,23 @@
       </p:sp>
       <p:sp>
         <p:nvSpPr>
-          <p:cNvPr id="7" name="Rectangle 6"/>
+          <p:cNvPr id="4" name="Rectangle 3"/>
           <p:cNvSpPr/>
           <p:nvPr/>
         </p:nvSpPr>
         <p:spPr>
           <a:xfrm>
-            <a:off x="347472" y="329184"/>
-            <a:ext cx="11484864" cy="6190488"/>
-          </a:xfrm>
-          <a:prstGeom prst="rect">
-            <a:avLst/>
-          </a:prstGeom>
-          <a:noFill/>
-          <a:ln w="12700">
-            <a:solidFill>
-              <a:srgbClr val="A0C896"/>
-            </a:solidFill>
+            <a:off x="8046720" y="2560320"/>
+            <a:ext cx="3657600" cy="2286000"/>
+          </a:xfrm>
+          <a:prstGeom prst="rect">
+            <a:avLst/>
+          </a:prstGeom>
+          <a:solidFill>
+            <a:srgbClr val="E4EDE8"/>
+          </a:solidFill>
+          <a:ln>
+            <a:noFill/>
           </a:ln>
         </p:spPr>
         <p:style>
@@ -3298,91 +3225,20 @@
       </p:sp>
       <p:sp>
         <p:nvSpPr>
-          <p:cNvPr id="8" name="TextBox 7"/>
-          <p:cNvSpPr txBox="1"/>
-          <p:nvPr/>
-        </p:nvSpPr>
-        <p:spPr>
-          <a:xfrm>
-            <a:off x="1371600" y="1828800"/>
-            <a:ext cx="9418320" cy="1828800"/>
-          </a:xfrm>
-          <a:prstGeom prst="rect">
-            <a:avLst/>
-          </a:prstGeom>
-          <a:noFill/>
-        </p:spPr>
-        <p:txBody>
-          <a:bodyPr wrap="none">
-            <a:spAutoFit/>
-          </a:bodyPr>
-          <a:lstStyle/>
-          <a:p>
-            <a:pPr algn="ctr">
-              <a:spcAft>
-                <a:spcPts val="1000"/>
-              </a:spcAft>
-            </a:pPr>
-            <a:r>
-              <a:rPr sz="5200" b="1">
-                <a:solidFill>
-                  <a:srgbClr val="468250"/>
-                </a:solidFill>
-                <a:latin typeface="Microsoft YaHei"/>
-              </a:rPr>
-              <a:t>女娲造人</a:t>
-            </a:r>
-          </a:p>
-          <a:p>
-            <a:pPr algn="ctr">
-              <a:spcAft>
-                <a:spcPts val="1000"/>
-              </a:spcAft>
-            </a:pPr>
-            <a:r>
-              <a:rPr sz="2600" b="0">
-                <a:solidFill>
-                  <a:srgbClr val="28462D"/>
-                </a:solidFill>
-                <a:latin typeface="Microsoft YaHei"/>
-              </a:rPr>
-              <a:t>第23课 · 第六、七课时 · 创造与生命</a:t>
-            </a:r>
-          </a:p>
-          <a:p>
-            <a:pPr algn="ctr">
-              <a:spcAft>
-                <a:spcPts val="1000"/>
-              </a:spcAft>
-            </a:pPr>
-            <a:r>
-              <a:rPr sz="2000" b="1">
-                <a:solidFill>
-                  <a:srgbClr val="A0C896"/>
-                </a:solidFill>
-                <a:latin typeface="Microsoft YaHei"/>
-              </a:rPr>
-              <a:t>含课堂笔记 · 2026版</a:t>
-            </a:r>
-          </a:p>
-        </p:txBody>
-      </p:sp>
-      <p:sp>
-        <p:nvSpPr>
-          <p:cNvPr id="9" name="Rectangle 8"/>
+          <p:cNvPr id="5" name="Rectangle 4"/>
           <p:cNvSpPr/>
           <p:nvPr/>
         </p:nvSpPr>
         <p:spPr>
           <a:xfrm>
-            <a:off x="3200400" y="5029200"/>
-            <a:ext cx="5760720" cy="27432"/>
+            <a:off x="274320" y="4572000"/>
+            <a:ext cx="4114800" cy="1828800"/>
           </a:xfrm>
           <a:prstGeom prst="rect">
             <a:avLst/>
           </a:prstGeom>
           <a:solidFill>
-            <a:srgbClr val="A0C896"/>
+            <a:srgbClr val="D8E6DF"/>
           </a:solidFill>
           <a:ln>
             <a:noFill/>
@@ -3407,6 +3263,385 @@
           <a:lstStyle/>
           <a:p>
             <a:pPr algn="ctr"/>
+          </a:p>
+        </p:txBody>
+      </p:sp>
+      <p:sp>
+        <p:nvSpPr>
+          <p:cNvPr id="6" name="Rectangle 5"/>
+          <p:cNvSpPr/>
+          <p:nvPr/>
+        </p:nvSpPr>
+        <p:spPr>
+          <a:xfrm>
+            <a:off x="548640" y="347472"/>
+            <a:ext cx="438912" cy="438912"/>
+          </a:xfrm>
+          <a:prstGeom prst="rect">
+            <a:avLst/>
+          </a:prstGeom>
+          <a:noFill/>
+          <a:ln w="25400">
+            <a:solidFill>
+              <a:srgbClr val="C83C23"/>
+            </a:solidFill>
+          </a:ln>
+        </p:spPr>
+        <p:style>
+          <a:lnRef idx="1">
+            <a:schemeClr val="accent1"/>
+          </a:lnRef>
+          <a:fillRef idx="3">
+            <a:schemeClr val="accent1"/>
+          </a:fillRef>
+          <a:effectRef idx="2">
+            <a:schemeClr val="accent1"/>
+          </a:effectRef>
+          <a:fontRef idx="minor">
+            <a:schemeClr val="lt1"/>
+          </a:fontRef>
+        </p:style>
+        <p:txBody>
+          <a:bodyPr rtlCol="0" anchor="ctr"/>
+          <a:lstStyle/>
+          <a:p>
+            <a:pPr algn="ctr"/>
+          </a:p>
+        </p:txBody>
+      </p:sp>
+      <p:sp>
+        <p:nvSpPr>
+          <p:cNvPr id="7" name="TextBox 6"/>
+          <p:cNvSpPr txBox="1"/>
+          <p:nvPr/>
+        </p:nvSpPr>
+        <p:spPr>
+          <a:xfrm>
+            <a:off x="548640" y="347472"/>
+            <a:ext cx="438912" cy="438912"/>
+          </a:xfrm>
+          <a:prstGeom prst="rect">
+            <a:avLst/>
+          </a:prstGeom>
+          <a:noFill/>
+        </p:spPr>
+        <p:txBody>
+          <a:bodyPr wrap="square" anchor="ctr">
+            <a:spAutoFit/>
+          </a:bodyPr>
+          <a:lstStyle/>
+          <a:p>
+            <a:pPr algn="ctr">
+              <a:spcAft>
+                <a:spcPts val="300"/>
+              </a:spcAft>
+            </a:pPr>
+            <a:r>
+              <a:rPr sz="1100" b="1">
+                <a:solidFill>
+                  <a:srgbClr val="C83C23"/>
+                </a:solidFill>
+                <a:latin typeface="KaiTi"/>
+              </a:rPr>
+              <a:t>廿三</a:t>
+            </a:r>
+          </a:p>
+        </p:txBody>
+      </p:sp>
+      <p:sp>
+        <p:nvSpPr>
+          <p:cNvPr id="8" name="TextBox 7"/>
+          <p:cNvSpPr txBox="1"/>
+          <p:nvPr/>
+        </p:nvSpPr>
+        <p:spPr>
+          <a:xfrm>
+            <a:off x="548640" y="1371600"/>
+            <a:ext cx="7772400" cy="1371600"/>
+          </a:xfrm>
+          <a:prstGeom prst="rect">
+            <a:avLst/>
+          </a:prstGeom>
+          <a:noFill/>
+        </p:spPr>
+        <p:txBody>
+          <a:bodyPr wrap="square" anchor="t">
+            <a:spAutoFit/>
+          </a:bodyPr>
+          <a:lstStyle/>
+          <a:p>
+            <a:pPr algn="l">
+              <a:spcAft>
+                <a:spcPts val="300"/>
+              </a:spcAft>
+            </a:pPr>
+            <a:r>
+              <a:rPr sz="5200" b="1">
+                <a:solidFill>
+                  <a:srgbClr val="1E1E1E"/>
+                </a:solidFill>
+                <a:latin typeface="KaiTi"/>
+              </a:rPr>
+              <a:t>女娲造人</a:t>
+            </a:r>
+          </a:p>
+        </p:txBody>
+      </p:sp>
+      <p:sp>
+        <p:nvSpPr>
+          <p:cNvPr id="9" name="Rectangle 8"/>
+          <p:cNvSpPr/>
+          <p:nvPr/>
+        </p:nvSpPr>
+        <p:spPr>
+          <a:xfrm>
+            <a:off x="548640" y="2880360"/>
+            <a:ext cx="2560320" cy="502920"/>
+          </a:xfrm>
+          <a:prstGeom prst="rect">
+            <a:avLst/>
+          </a:prstGeom>
+          <a:solidFill>
+            <a:srgbClr val="4A7C6F"/>
+          </a:solidFill>
+          <a:ln>
+            <a:noFill/>
+          </a:ln>
+        </p:spPr>
+        <p:style>
+          <a:lnRef idx="1">
+            <a:schemeClr val="accent1"/>
+          </a:lnRef>
+          <a:fillRef idx="3">
+            <a:schemeClr val="accent1"/>
+          </a:fillRef>
+          <a:effectRef idx="2">
+            <a:schemeClr val="accent1"/>
+          </a:effectRef>
+          <a:fontRef idx="minor">
+            <a:schemeClr val="lt1"/>
+          </a:fontRef>
+        </p:style>
+        <p:txBody>
+          <a:bodyPr rtlCol="0" anchor="ctr"/>
+          <a:lstStyle/>
+          <a:p>
+            <a:pPr algn="ctr"/>
+          </a:p>
+        </p:txBody>
+      </p:sp>
+      <p:sp>
+        <p:nvSpPr>
+          <p:cNvPr id="10" name="TextBox 9"/>
+          <p:cNvSpPr txBox="1"/>
+          <p:nvPr/>
+        </p:nvSpPr>
+        <p:spPr>
+          <a:xfrm>
+            <a:off x="685800" y="2926080"/>
+            <a:ext cx="3657600" cy="502920"/>
+          </a:xfrm>
+          <a:prstGeom prst="rect">
+            <a:avLst/>
+          </a:prstGeom>
+          <a:noFill/>
+        </p:spPr>
+        <p:txBody>
+          <a:bodyPr wrap="square" anchor="t">
+            <a:spAutoFit/>
+          </a:bodyPr>
+          <a:lstStyle/>
+          <a:p>
+            <a:pPr algn="l">
+              <a:spcAft>
+                <a:spcPts val="300"/>
+              </a:spcAft>
+            </a:pPr>
+            <a:r>
+              <a:rPr sz="2400" b="1">
+                <a:solidFill>
+                  <a:srgbClr val="4A7C6F"/>
+                </a:solidFill>
+                <a:latin typeface="KaiTi"/>
+              </a:rPr>
+              <a:t>创造与生命</a:t>
+            </a:r>
+          </a:p>
+        </p:txBody>
+      </p:sp>
+      <p:sp>
+        <p:nvSpPr>
+          <p:cNvPr id="11" name="TextBox 10"/>
+          <p:cNvSpPr txBox="1"/>
+          <p:nvPr/>
+        </p:nvSpPr>
+        <p:spPr>
+          <a:xfrm>
+            <a:off x="548640" y="3657600"/>
+            <a:ext cx="6400800" cy="1097280"/>
+          </a:xfrm>
+          <a:prstGeom prst="rect">
+            <a:avLst/>
+          </a:prstGeom>
+          <a:noFill/>
+        </p:spPr>
+        <p:txBody>
+          <a:bodyPr wrap="square" anchor="t">
+            <a:spAutoFit/>
+          </a:bodyPr>
+          <a:lstStyle/>
+          <a:p>
+            <a:pPr algn="l">
+              <a:spcAft>
+                <a:spcPts val="300"/>
+              </a:spcAft>
+            </a:pPr>
+            <a:r>
+              <a:rPr sz="1400" b="0">
+                <a:solidFill>
+                  <a:srgbClr val="5A6A62"/>
+                </a:solidFill>
+                <a:latin typeface="Microsoft YaHei"/>
+              </a:rPr>
+              <a:t>统编版 · 七年级上册第六单元第23课</a:t>
+            </a:r>
+          </a:p>
+          <a:p>
+            <a:pPr algn="l">
+              <a:spcAft>
+                <a:spcPts val="300"/>
+              </a:spcAft>
+            </a:pPr>
+            <a:r>
+              <a:rPr sz="1400" b="0">
+                <a:solidFill>
+                  <a:srgbClr val="5A6A62"/>
+                </a:solidFill>
+                <a:latin typeface="Microsoft YaHei"/>
+              </a:rPr>
+              <a:t>想象力博物馆 · 策展主题：创造与生命</a:t>
+            </a:r>
+          </a:p>
+        </p:txBody>
+      </p:sp>
+      <p:sp>
+        <p:nvSpPr>
+          <p:cNvPr id="12" name="Rectangle 11"/>
+          <p:cNvSpPr/>
+          <p:nvPr/>
+        </p:nvSpPr>
+        <p:spPr>
+          <a:xfrm>
+            <a:off x="548640" y="6035040"/>
+            <a:ext cx="11094415" cy="9144"/>
+          </a:xfrm>
+          <a:prstGeom prst="rect">
+            <a:avLst/>
+          </a:prstGeom>
+          <a:solidFill>
+            <a:srgbClr val="5A6A62"/>
+          </a:solidFill>
+          <a:ln>
+            <a:noFill/>
+          </a:ln>
+        </p:spPr>
+        <p:style>
+          <a:lnRef idx="1">
+            <a:schemeClr val="accent1"/>
+          </a:lnRef>
+          <a:fillRef idx="3">
+            <a:schemeClr val="accent1"/>
+          </a:fillRef>
+          <a:effectRef idx="2">
+            <a:schemeClr val="accent1"/>
+          </a:effectRef>
+          <a:fontRef idx="minor">
+            <a:schemeClr val="lt1"/>
+          </a:fontRef>
+        </p:style>
+        <p:txBody>
+          <a:bodyPr rtlCol="0" anchor="ctr"/>
+          <a:lstStyle/>
+          <a:p>
+            <a:pPr algn="ctr"/>
+          </a:p>
+        </p:txBody>
+      </p:sp>
+      <p:sp>
+        <p:nvSpPr>
+          <p:cNvPr id="13" name="TextBox 12"/>
+          <p:cNvSpPr txBox="1"/>
+          <p:nvPr/>
+        </p:nvSpPr>
+        <p:spPr>
+          <a:xfrm>
+            <a:off x="548640" y="5971032"/>
+            <a:ext cx="11094415" cy="201168"/>
+          </a:xfrm>
+          <a:prstGeom prst="rect">
+            <a:avLst/>
+          </a:prstGeom>
+          <a:noFill/>
+        </p:spPr>
+        <p:txBody>
+          <a:bodyPr wrap="square" anchor="t">
+            <a:spAutoFit/>
+          </a:bodyPr>
+          <a:lstStyle/>
+          <a:p>
+            <a:pPr algn="ctr">
+              <a:spcAft>
+                <a:spcPts val="300"/>
+              </a:spcAft>
+            </a:pPr>
+            <a:r>
+              <a:rPr sz="900" b="0">
+                <a:solidFill>
+                  <a:srgbClr val="5A6A62"/>
+                </a:solidFill>
+                <a:latin typeface="Microsoft YaHei"/>
+              </a:rPr>
+              <a:t>～ ～ ～ ～ ～ ～ ～ ～ ～ ～ ～ ～</a:t>
+            </a:r>
+          </a:p>
+        </p:txBody>
+      </p:sp>
+      <p:sp>
+        <p:nvSpPr>
+          <p:cNvPr id="14" name="TextBox 13"/>
+          <p:cNvSpPr txBox="1"/>
+          <p:nvPr/>
+        </p:nvSpPr>
+        <p:spPr>
+          <a:xfrm>
+            <a:off x="548640" y="6217920"/>
+            <a:ext cx="11094415" cy="320040"/>
+          </a:xfrm>
+          <a:prstGeom prst="rect">
+            <a:avLst/>
+          </a:prstGeom>
+          <a:noFill/>
+        </p:spPr>
+        <p:txBody>
+          <a:bodyPr wrap="square" anchor="t">
+            <a:spAutoFit/>
+          </a:bodyPr>
+          <a:lstStyle/>
+          <a:p>
+            <a:pPr algn="ctr">
+              <a:spcAft>
+                <a:spcPts val="300"/>
+              </a:spcAft>
+            </a:pPr>
+            <a:r>
+              <a:rPr sz="1300" b="0">
+                <a:solidFill>
+                  <a:srgbClr val="4A7C6F"/>
+                </a:solidFill>
+                <a:latin typeface="Microsoft YaHei"/>
+              </a:rPr>
+              <a:t>古籍为骨 · 想象为肉 · 情感为魂</a:t>
+            </a:r>
           </a:p>
         </p:txBody>
       </p:sp>
@@ -3428,20 +3663,12 @@
         <p:nvPr/>
       </p:nvGrpSpPr>
       <p:grpSpPr/>
-      <p:pic>
-        <p:nvPicPr>
-          <p:cNvPr id="2" name="Picture 1" descr="bg_nuwa.png"/>
-          <p:cNvPicPr>
-            <a:picLocks noChangeAspect="1"/>
-          </p:cNvPicPr>
-          <p:nvPr/>
-        </p:nvPicPr>
-        <p:blipFill>
-          <a:blip r:embed="rId2"/>
-          <a:stretch>
-            <a:fillRect/>
-          </a:stretch>
-        </p:blipFill>
+      <p:sp>
+        <p:nvSpPr>
+          <p:cNvPr id="2" name="Rectangle 1"/>
+          <p:cNvSpPr/>
+          <p:nvPr/>
+        </p:nvSpPr>
         <p:spPr>
           <a:xfrm>
             <a:off x="0" y="0"/>
@@ -3450,27 +3677,11 @@
           <a:prstGeom prst="rect">
             <a:avLst/>
           </a:prstGeom>
-        </p:spPr>
-      </p:pic>
-      <p:sp>
-        <p:nvSpPr>
-          <p:cNvPr id="3" name="Rectangle 2"/>
-          <p:cNvSpPr/>
-          <p:nvPr/>
-        </p:nvSpPr>
-        <p:spPr>
-          <a:xfrm>
-            <a:off x="292608" y="274320"/>
-            <a:ext cx="11594592" cy="6300216"/>
-          </a:xfrm>
-          <a:prstGeom prst="rect">
-            <a:avLst/>
-          </a:prstGeom>
-          <a:noFill/>
-          <a:ln w="31750">
-            <a:solidFill>
-              <a:srgbClr val="5A8C5A"/>
-            </a:solidFill>
+          <a:solidFill>
+            <a:srgbClr val="F4F1EA"/>
+          </a:solidFill>
+          <a:ln>
+            <a:noFill/>
           </a:ln>
         </p:spPr>
         <p:style>
@@ -3495,73 +3706,25 @@
           </a:p>
         </p:txBody>
       </p:sp>
-      <p:pic>
-        <p:nvPicPr>
-          <p:cNvPr id="4" name="Picture 3" descr="corner_nuwa_tl.png"/>
-          <p:cNvPicPr>
-            <a:picLocks noChangeAspect="1"/>
-          </p:cNvPicPr>
-          <p:nvPr/>
-        </p:nvPicPr>
-        <p:blipFill>
-          <a:blip r:embed="rId3"/>
-          <a:stretch>
-            <a:fillRect/>
-          </a:stretch>
-        </p:blipFill>
-        <p:spPr>
-          <a:xfrm>
-            <a:off x="-45720" y="-45720"/>
-            <a:ext cx="2011680" cy="2011680"/>
-          </a:xfrm>
-          <a:prstGeom prst="rect">
-            <a:avLst/>
-          </a:prstGeom>
-        </p:spPr>
-      </p:pic>
-      <p:pic>
-        <p:nvPicPr>
-          <p:cNvPr id="5" name="Picture 4" descr="corner_nuwa_tr.png"/>
-          <p:cNvPicPr>
-            <a:picLocks noChangeAspect="1"/>
-          </p:cNvPicPr>
-          <p:nvPr/>
-        </p:nvPicPr>
-        <p:blipFill>
-          <a:blip r:embed="rId4"/>
-          <a:stretch>
-            <a:fillRect/>
-          </a:stretch>
-        </p:blipFill>
-        <p:spPr>
-          <a:xfrm>
-            <a:off x="9875520" y="-45720"/>
-            <a:ext cx="2011680" cy="2011680"/>
-          </a:xfrm>
-          <a:prstGeom prst="rect">
-            <a:avLst/>
-          </a:prstGeom>
-        </p:spPr>
-      </p:pic>
-      <p:sp>
-        <p:nvSpPr>
-          <p:cNvPr id="6" name="Rounded Rectangle 5"/>
+      <p:sp>
+        <p:nvSpPr>
+          <p:cNvPr id="3" name="Rectangle 2"/>
           <p:cNvSpPr/>
           <p:nvPr/>
         </p:nvSpPr>
         <p:spPr>
           <a:xfrm>
-            <a:off x="502920" y="384048"/>
-            <a:ext cx="2011680" cy="384048"/>
-          </a:xfrm>
-          <a:prstGeom prst="roundRect">
-            <a:avLst/>
-          </a:prstGeom>
-          <a:solidFill>
-            <a:srgbClr val="468250"/>
-          </a:solidFill>
-          <a:ln>
-            <a:noFill/>
+            <a:off x="548640" y="347472"/>
+            <a:ext cx="365760" cy="365760"/>
+          </a:xfrm>
+          <a:prstGeom prst="rect">
+            <a:avLst/>
+          </a:prstGeom>
+          <a:noFill/>
+          <a:ln w="25400">
+            <a:solidFill>
+              <a:srgbClr val="C83C23"/>
+            </a:solidFill>
           </a:ln>
         </p:spPr>
         <p:style>
@@ -3588,14 +3751,14 @@
       </p:sp>
       <p:sp>
         <p:nvSpPr>
-          <p:cNvPr id="7" name="TextBox 6"/>
+          <p:cNvPr id="4" name="TextBox 3"/>
           <p:cNvSpPr txBox="1"/>
           <p:nvPr/>
         </p:nvSpPr>
         <p:spPr>
           <a:xfrm>
-            <a:off x="502920" y="402336"/>
-            <a:ext cx="2011680" cy="347472"/>
+            <a:off x="548640" y="347472"/>
+            <a:ext cx="365760" cy="365760"/>
           </a:xfrm>
           <a:prstGeom prst="rect">
             <a:avLst/>
@@ -3603,38 +3766,38 @@
           <a:noFill/>
         </p:spPr>
         <p:txBody>
-          <a:bodyPr wrap="none">
+          <a:bodyPr wrap="square" anchor="ctr">
             <a:spAutoFit/>
           </a:bodyPr>
           <a:lstStyle/>
           <a:p>
             <a:pPr algn="ctr">
               <a:spcAft>
-                <a:spcPts val="1000"/>
-              </a:spcAft>
-            </a:pPr>
-            <a:r>
-              <a:rPr sz="1600" b="1">
-                <a:solidFill>
-                  <a:srgbClr val="FFFFFF"/>
-                </a:solidFill>
-                <a:latin typeface="Microsoft YaHei"/>
-              </a:rPr>
-              <a:t>知识要点</a:t>
-            </a:r>
-          </a:p>
-        </p:txBody>
-      </p:sp>
-      <p:sp>
-        <p:nvSpPr>
-          <p:cNvPr id="8" name="TextBox 7"/>
+                <a:spcPts val="300"/>
+              </a:spcAft>
+            </a:pPr>
+            <a:r>
+              <a:rPr sz="1000" b="1">
+                <a:solidFill>
+                  <a:srgbClr val="C83C23"/>
+                </a:solidFill>
+                <a:latin typeface="KaiTi"/>
+              </a:rPr>
+              <a:t>02</a:t>
+            </a:r>
+          </a:p>
+        </p:txBody>
+      </p:sp>
+      <p:sp>
+        <p:nvSpPr>
+          <p:cNvPr id="5" name="TextBox 4"/>
           <p:cNvSpPr txBox="1"/>
           <p:nvPr/>
         </p:nvSpPr>
         <p:spPr>
           <a:xfrm>
-            <a:off x="1371600" y="384048"/>
-            <a:ext cx="9418320" cy="822960"/>
+            <a:off x="1024128" y="347472"/>
+            <a:ext cx="7766090" cy="365760"/>
           </a:xfrm>
           <a:prstGeom prst="rect">
             <a:avLst/>
@@ -3642,49 +3805,86 @@
           <a:noFill/>
         </p:spPr>
         <p:txBody>
-          <a:bodyPr wrap="square">
+          <a:bodyPr wrap="square" anchor="t">
             <a:spAutoFit/>
           </a:bodyPr>
           <a:lstStyle/>
           <a:p>
-            <a:pPr algn="ctr">
-              <a:spcAft>
-                <a:spcPts val="1000"/>
-              </a:spcAft>
-            </a:pPr>
-            <a:r>
-              <a:rPr sz="3400" b="1">
-                <a:solidFill>
-                  <a:srgbClr val="468250"/>
+            <a:pPr algn="l">
+              <a:spcAft>
+                <a:spcPts val="300"/>
+              </a:spcAft>
+            </a:pPr>
+            <a:r>
+              <a:rPr sz="2000" b="1">
+                <a:solidFill>
+                  <a:srgbClr val="1E1E1E"/>
+                </a:solidFill>
+                <a:latin typeface="KaiTi"/>
+              </a:rPr>
+              <a:t>文学常识</a:t>
+            </a:r>
+          </a:p>
+        </p:txBody>
+      </p:sp>
+      <p:sp>
+        <p:nvSpPr>
+          <p:cNvPr id="6" name="TextBox 5"/>
+          <p:cNvSpPr txBox="1"/>
+          <p:nvPr/>
+        </p:nvSpPr>
+        <p:spPr>
+          <a:xfrm>
+            <a:off x="8869451" y="347472"/>
+            <a:ext cx="2773603" cy="320040"/>
+          </a:xfrm>
+          <a:prstGeom prst="rect">
+            <a:avLst/>
+          </a:prstGeom>
+          <a:noFill/>
+        </p:spPr>
+        <p:txBody>
+          <a:bodyPr wrap="square" anchor="t">
+            <a:spAutoFit/>
+          </a:bodyPr>
+          <a:lstStyle/>
+          <a:p>
+            <a:pPr algn="r">
+              <a:spcAft>
+                <a:spcPts val="300"/>
+              </a:spcAft>
+            </a:pPr>
+            <a:r>
+              <a:rPr sz="1100" b="0">
+                <a:solidFill>
+                  <a:srgbClr val="5A6A62"/>
                 </a:solidFill>
                 <a:latin typeface="Microsoft YaHei"/>
               </a:rPr>
-              <a:t>文学常识</a:t>
-            </a:r>
-          </a:p>
-        </p:txBody>
-      </p:sp>
-      <p:sp>
-        <p:nvSpPr>
-          <p:cNvPr id="9" name="Rounded Rectangle 8"/>
+              <a:t>卷 2/7</a:t>
+            </a:r>
+          </a:p>
+        </p:txBody>
+      </p:sp>
+      <p:sp>
+        <p:nvSpPr>
+          <p:cNvPr id="7" name="Rectangle 6"/>
           <p:cNvSpPr/>
           <p:nvPr/>
         </p:nvSpPr>
         <p:spPr>
           <a:xfrm>
-            <a:off x="1067104" y="1143000"/>
-            <a:ext cx="10058400" cy="3721608"/>
-          </a:xfrm>
-          <a:prstGeom prst="roundRect">
+            <a:off x="548640" y="768096"/>
+            <a:ext cx="11094415" cy="9144"/>
+          </a:xfrm>
+          <a:prstGeom prst="rect">
             <a:avLst/>
           </a:prstGeom>
           <a:solidFill>
-            <a:srgbClr val="FFFCEB"/>
+            <a:srgbClr val="5A6A62"/>
           </a:solidFill>
-          <a:ln w="25400">
-            <a:solidFill>
-              <a:srgbClr val="5A8C5A"/>
-            </a:solidFill>
+          <a:ln>
+            <a:noFill/>
           </a:ln>
         </p:spPr>
         <p:style>
@@ -3711,20 +3911,59 @@
       </p:sp>
       <p:sp>
         <p:nvSpPr>
-          <p:cNvPr id="10" name="Rectangle 9"/>
+          <p:cNvPr id="8" name="TextBox 7"/>
+          <p:cNvSpPr txBox="1"/>
+          <p:nvPr/>
+        </p:nvSpPr>
+        <p:spPr>
+          <a:xfrm>
+            <a:off x="548640" y="704088"/>
+            <a:ext cx="11094415" cy="201168"/>
+          </a:xfrm>
+          <a:prstGeom prst="rect">
+            <a:avLst/>
+          </a:prstGeom>
+          <a:noFill/>
+        </p:spPr>
+        <p:txBody>
+          <a:bodyPr wrap="square" anchor="t">
+            <a:spAutoFit/>
+          </a:bodyPr>
+          <a:lstStyle/>
+          <a:p>
+            <a:pPr algn="ctr">
+              <a:spcAft>
+                <a:spcPts val="300"/>
+              </a:spcAft>
+            </a:pPr>
+            <a:r>
+              <a:rPr sz="900" b="0">
+                <a:solidFill>
+                  <a:srgbClr val="5A6A62"/>
+                </a:solidFill>
+                <a:latin typeface="Microsoft YaHei"/>
+              </a:rPr>
+              <a:t>～ ～ ～ ～ ～ ～ ～ ～ ～ ～ ～ ～</a:t>
+            </a:r>
+          </a:p>
+        </p:txBody>
+      </p:sp>
+      <p:sp>
+        <p:nvSpPr>
+          <p:cNvPr id="9" name="Rectangle 8"/>
           <p:cNvSpPr/>
           <p:nvPr/>
         </p:nvSpPr>
         <p:spPr>
           <a:xfrm>
-            <a:off x="1067104" y="1143000"/>
-            <a:ext cx="10058400" cy="384048"/>
+            <a:off x="548640" y="658368"/>
+            <a:ext cx="5455767" cy="5349240"/>
           </a:xfrm>
           <a:prstGeom prst="rect">
             <a:avLst/>
           </a:prstGeom>
           <a:solidFill>
-            <a:srgbClr val="468250"/>
+            <a:srgbClr val="E4EDE8"/>
           </a:solidFill>
           <a:ln>
             <a:noFill/>
@@ -3754,59 +3993,20 @@
       </p:sp>
       <p:sp>
         <p:nvSpPr>
-          <p:cNvPr id="11" name="TextBox 10"/>
-          <p:cNvSpPr txBox="1"/>
-          <p:nvPr/>
-        </p:nvSpPr>
-        <p:spPr>
-          <a:xfrm>
-            <a:off x="1067104" y="1179576"/>
-            <a:ext cx="10058400" cy="347472"/>
-          </a:xfrm>
-          <a:prstGeom prst="rect">
-            <a:avLst/>
-          </a:prstGeom>
-          <a:noFill/>
-        </p:spPr>
-        <p:txBody>
-          <a:bodyPr wrap="none">
-            <a:spAutoFit/>
-          </a:bodyPr>
-          <a:lstStyle/>
-          <a:p>
-            <a:pPr algn="ctr">
-              <a:spcAft>
-                <a:spcPts val="1000"/>
-              </a:spcAft>
-            </a:pPr>
-            <a:r>
-              <a:rPr sz="1800" b="1">
-                <a:solidFill>
-                  <a:srgbClr val="FFFFFF"/>
-                </a:solidFill>
-                <a:latin typeface="Microsoft YaHei"/>
-              </a:rPr>
-              <a:t>📝  课堂笔记  —  请摘抄要点</a:t>
-            </a:r>
-          </a:p>
-        </p:txBody>
-      </p:sp>
-      <p:sp>
-        <p:nvSpPr>
-          <p:cNvPr id="12" name="Rectangle 11"/>
+          <p:cNvPr id="10" name="Rectangle 9"/>
           <p:cNvSpPr/>
           <p:nvPr/>
         </p:nvSpPr>
         <p:spPr>
           <a:xfrm>
-            <a:off x="1570024" y="1527048"/>
-            <a:ext cx="27432" cy="3337560"/>
+            <a:off x="548640" y="658368"/>
+            <a:ext cx="45720" cy="5349240"/>
           </a:xfrm>
           <a:prstGeom prst="rect">
             <a:avLst/>
           </a:prstGeom>
           <a:solidFill>
-            <a:srgbClr val="DC5050"/>
+            <a:srgbClr val="4A7C6F"/>
           </a:solidFill>
           <a:ln>
             <a:noFill/>
@@ -3836,23 +4036,160 @@
       </p:sp>
       <p:sp>
         <p:nvSpPr>
-          <p:cNvPr id="13" name="Rectangle 12"/>
+          <p:cNvPr id="11" name="TextBox 10"/>
+          <p:cNvSpPr txBox="1"/>
+          <p:nvPr/>
+        </p:nvSpPr>
+        <p:spPr>
+          <a:xfrm>
+            <a:off x="694944" y="768096"/>
+            <a:ext cx="5254599" cy="5184648"/>
+          </a:xfrm>
+          <a:prstGeom prst="rect">
+            <a:avLst/>
+          </a:prstGeom>
+          <a:noFill/>
+        </p:spPr>
+        <p:txBody>
+          <a:bodyPr wrap="square" anchor="t">
+            <a:spAutoFit/>
+          </a:bodyPr>
+          <a:lstStyle/>
+          <a:p>
+            <a:pPr algn="l">
+              <a:spcAft>
+                <a:spcPts val="300"/>
+              </a:spcAft>
+            </a:pPr>
+            <a:r>
+              <a:rPr sz="1600" b="1">
+                <a:solidFill>
+                  <a:srgbClr val="4A7C6F"/>
+                </a:solidFill>
+                <a:latin typeface="KaiTi"/>
+              </a:rPr>
+              <a:t>作者与文体</a:t>
+            </a:r>
+          </a:p>
+          <a:p>
+            <a:pPr algn="l">
+              <a:spcAft>
+                <a:spcPts val="300"/>
+              </a:spcAft>
+            </a:pPr>
+            <a:r>
+              <a:rPr sz="600" b="0">
+                <a:solidFill>
+                  <a:srgbClr val="1E1E1E"/>
+                </a:solidFill>
+                <a:latin typeface="Microsoft YaHei"/>
+              </a:rPr>
+              <a:t/>
+            </a:r>
+          </a:p>
+          <a:p>
+            <a:pPr algn="l">
+              <a:spcAft>
+                <a:spcPts val="300"/>
+              </a:spcAft>
+            </a:pPr>
+            <a:r>
+              <a:rPr sz="1300" b="1">
+                <a:solidFill>
+                  <a:srgbClr val="C83C23"/>
+                </a:solidFill>
+                <a:latin typeface="Microsoft YaHei"/>
+              </a:rPr>
+              <a:t>作者</a:t>
+            </a:r>
+          </a:p>
+          <a:p>
+            <a:pPr algn="l">
+              <a:spcAft>
+                <a:spcPts val="300"/>
+              </a:spcAft>
+            </a:pPr>
+            <a:r>
+              <a:rPr sz="1400" b="0">
+                <a:solidFill>
+                  <a:srgbClr val="1E1E1E"/>
+                </a:solidFill>
+                <a:latin typeface="Microsoft YaHei"/>
+              </a:rPr>
+              <a:t>袁珂（现代作家、神话研究专家）</a:t>
+            </a:r>
+          </a:p>
+          <a:p>
+            <a:pPr algn="l">
+              <a:spcAft>
+                <a:spcPts val="300"/>
+              </a:spcAft>
+            </a:pPr>
+            <a:r>
+              <a:rPr sz="600" b="0">
+                <a:solidFill>
+                  <a:srgbClr val="1E1E1E"/>
+                </a:solidFill>
+                <a:latin typeface="Microsoft YaHei"/>
+              </a:rPr>
+              <a:t/>
+            </a:r>
+          </a:p>
+          <a:p>
+            <a:pPr algn="l">
+              <a:spcAft>
+                <a:spcPts val="300"/>
+              </a:spcAft>
+            </a:pPr>
+            <a:r>
+              <a:rPr sz="1300" b="1">
+                <a:solidFill>
+                  <a:srgbClr val="C83C23"/>
+                </a:solidFill>
+                <a:latin typeface="Microsoft YaHei"/>
+              </a:rPr>
+              <a:t>文体</a:t>
+            </a:r>
+          </a:p>
+          <a:p>
+            <a:pPr algn="l">
+              <a:spcAft>
+                <a:spcPts val="300"/>
+              </a:spcAft>
+            </a:pPr>
+            <a:r>
+              <a:rPr sz="1400" b="0">
+                <a:solidFill>
+                  <a:srgbClr val="1E1E1E"/>
+                </a:solidFill>
+                <a:latin typeface="Microsoft YaHei"/>
+              </a:rPr>
+              <a:t>神话——用想象解释自然与人类起源</a:t>
+            </a:r>
+          </a:p>
+        </p:txBody>
+      </p:sp>
+      <p:sp>
+        <p:nvSpPr>
+          <p:cNvPr id="12" name="Rectangle 11"/>
           <p:cNvSpPr/>
           <p:nvPr/>
         </p:nvSpPr>
         <p:spPr>
           <a:xfrm>
-            <a:off x="1417320" y="2276856"/>
-            <a:ext cx="9601200" cy="13716"/>
+            <a:off x="6187287" y="658368"/>
+            <a:ext cx="5455767" cy="5349240"/>
           </a:xfrm>
           <a:prstGeom prst="rect">
             <a:avLst/>
           </a:prstGeom>
           <a:solidFill>
-            <a:srgbClr val="D2C8AF"/>
+            <a:srgbClr val="F4F1EA"/>
           </a:solidFill>
-          <a:ln>
-            <a:noFill/>
+          <a:ln w="19050">
+            <a:solidFill>
+              <a:srgbClr val="4A7C6F"/>
+            </a:solidFill>
           </a:ln>
         </p:spPr>
         <p:style>
@@ -3879,20 +4216,20 @@
       </p:sp>
       <p:sp>
         <p:nvSpPr>
-          <p:cNvPr id="14" name="Rounded Rectangle 13"/>
+          <p:cNvPr id="13" name="Rectangle 12"/>
           <p:cNvSpPr/>
           <p:nvPr/>
         </p:nvSpPr>
         <p:spPr>
           <a:xfrm>
-            <a:off x="1600200" y="1627632"/>
-            <a:ext cx="1280160" cy="347472"/>
-          </a:xfrm>
-          <a:prstGeom prst="roundRect">
+            <a:off x="6187287" y="658368"/>
+            <a:ext cx="45720" cy="5349240"/>
+          </a:xfrm>
+          <a:prstGeom prst="rect">
             <a:avLst/>
           </a:prstGeom>
           <a:solidFill>
-            <a:srgbClr val="A0C896"/>
+            <a:srgbClr val="4A7C6F"/>
           </a:solidFill>
           <a:ln>
             <a:noFill/>
@@ -3922,14 +4259,14 @@
       </p:sp>
       <p:sp>
         <p:nvSpPr>
-          <p:cNvPr id="15" name="TextBox 14"/>
+          <p:cNvPr id="14" name="TextBox 13"/>
           <p:cNvSpPr txBox="1"/>
           <p:nvPr/>
         </p:nvSpPr>
         <p:spPr>
           <a:xfrm>
-            <a:off x="1600200" y="1645920"/>
-            <a:ext cx="1280160" cy="310896"/>
+            <a:off x="6333591" y="768096"/>
+            <a:ext cx="5254599" cy="5184648"/>
           </a:xfrm>
           <a:prstGeom prst="rect">
             <a:avLst/>
@@ -3937,551 +4274,116 @@
           <a:noFill/>
         </p:spPr>
         <p:txBody>
-          <a:bodyPr wrap="none">
+          <a:bodyPr wrap="square" anchor="t">
             <a:spAutoFit/>
           </a:bodyPr>
           <a:lstStyle/>
           <a:p>
-            <a:pPr algn="ctr">
-              <a:spcAft>
-                <a:spcPts val="1000"/>
-              </a:spcAft>
-            </a:pPr>
-            <a:r>
-              <a:rPr sz="1800" b="1">
-                <a:solidFill>
-                  <a:srgbClr val="28462D"/>
+            <a:pPr algn="l">
+              <a:spcAft>
+                <a:spcPts val="300"/>
+              </a:spcAft>
+            </a:pPr>
+            <a:r>
+              <a:rPr sz="1600" b="1">
+                <a:solidFill>
+                  <a:srgbClr val="4A7C6F"/>
+                </a:solidFill>
+                <a:latin typeface="KaiTi"/>
+              </a:rPr>
+              <a:t>创作特征</a:t>
+            </a:r>
+          </a:p>
+          <a:p>
+            <a:pPr algn="l">
+              <a:spcAft>
+                <a:spcPts val="300"/>
+              </a:spcAft>
+            </a:pPr>
+            <a:r>
+              <a:rPr sz="600" b="0">
+                <a:solidFill>
+                  <a:srgbClr val="1E1E1E"/>
                 </a:solidFill>
                 <a:latin typeface="Microsoft YaHei"/>
               </a:rPr>
-              <a:t>作者</a:t>
-            </a:r>
-          </a:p>
-        </p:txBody>
-      </p:sp>
-      <p:sp>
-        <p:nvSpPr>
-          <p:cNvPr id="16" name="TextBox 15"/>
-          <p:cNvSpPr txBox="1"/>
-          <p:nvPr/>
-        </p:nvSpPr>
-        <p:spPr>
-          <a:xfrm>
-            <a:off x="3017520" y="1627632"/>
-            <a:ext cx="7498079" cy="658368"/>
-          </a:xfrm>
-          <a:prstGeom prst="rect">
-            <a:avLst/>
-          </a:prstGeom>
-          <a:noFill/>
-        </p:spPr>
-        <p:txBody>
-          <a:bodyPr wrap="none">
-            <a:spAutoFit/>
-          </a:bodyPr>
-          <a:lstStyle/>
+              <a:t/>
+            </a:r>
+          </a:p>
           <a:p>
             <a:pPr algn="l">
               <a:spcAft>
-                <a:spcPts val="1000"/>
-              </a:spcAft>
-            </a:pPr>
-            <a:r>
-              <a:rPr sz="2100" b="0">
-                <a:solidFill>
-                  <a:srgbClr val="28462D"/>
+                <a:spcPts val="300"/>
+              </a:spcAft>
+            </a:pPr>
+            <a:r>
+              <a:rPr sz="1300" b="1">
+                <a:solidFill>
+                  <a:srgbClr val="C83C23"/>
                 </a:solidFill>
                 <a:latin typeface="Microsoft YaHei"/>
               </a:rPr>
-              <a:t>袁珂（现代作家，神话研究专家）</a:t>
-            </a:r>
-          </a:p>
-        </p:txBody>
-      </p:sp>
-      <p:sp>
-        <p:nvSpPr>
-          <p:cNvPr id="17" name="Rectangle 16"/>
-          <p:cNvSpPr/>
-          <p:nvPr/>
-        </p:nvSpPr>
-        <p:spPr>
-          <a:xfrm>
-            <a:off x="1417320" y="3081527"/>
-            <a:ext cx="9601200" cy="13716"/>
-          </a:xfrm>
-          <a:prstGeom prst="rect">
-            <a:avLst/>
-          </a:prstGeom>
-          <a:solidFill>
-            <a:srgbClr val="D2C8AF"/>
-          </a:solidFill>
-          <a:ln>
-            <a:noFill/>
-          </a:ln>
-        </p:spPr>
-        <p:style>
-          <a:lnRef idx="1">
-            <a:schemeClr val="accent1"/>
-          </a:lnRef>
-          <a:fillRef idx="3">
-            <a:schemeClr val="accent1"/>
-          </a:fillRef>
-          <a:effectRef idx="2">
-            <a:schemeClr val="accent1"/>
-          </a:effectRef>
-          <a:fontRef idx="minor">
-            <a:schemeClr val="lt1"/>
-          </a:fontRef>
-        </p:style>
-        <p:txBody>
-          <a:bodyPr rtlCol="0" anchor="ctr"/>
-          <a:lstStyle/>
-          <a:p>
-            <a:pPr algn="ctr"/>
-          </a:p>
-        </p:txBody>
-      </p:sp>
-      <p:sp>
-        <p:nvSpPr>
-          <p:cNvPr id="18" name="Rounded Rectangle 17"/>
-          <p:cNvSpPr/>
-          <p:nvPr/>
-        </p:nvSpPr>
-        <p:spPr>
-          <a:xfrm>
-            <a:off x="1600200" y="2432303"/>
-            <a:ext cx="1280160" cy="347472"/>
-          </a:xfrm>
-          <a:prstGeom prst="roundRect">
-            <a:avLst/>
-          </a:prstGeom>
-          <a:solidFill>
-            <a:srgbClr val="A0C896"/>
-          </a:solidFill>
-          <a:ln>
-            <a:noFill/>
-          </a:ln>
-        </p:spPr>
-        <p:style>
-          <a:lnRef idx="1">
-            <a:schemeClr val="accent1"/>
-          </a:lnRef>
-          <a:fillRef idx="3">
-            <a:schemeClr val="accent1"/>
-          </a:fillRef>
-          <a:effectRef idx="2">
-            <a:schemeClr val="accent1"/>
-          </a:effectRef>
-          <a:fontRef idx="minor">
-            <a:schemeClr val="lt1"/>
-          </a:fontRef>
-        </p:style>
-        <p:txBody>
-          <a:bodyPr rtlCol="0" anchor="ctr"/>
-          <a:lstStyle/>
-          <a:p>
-            <a:pPr algn="ctr"/>
-          </a:p>
-        </p:txBody>
-      </p:sp>
-      <p:sp>
-        <p:nvSpPr>
-          <p:cNvPr id="19" name="TextBox 18"/>
-          <p:cNvSpPr txBox="1"/>
-          <p:nvPr/>
-        </p:nvSpPr>
-        <p:spPr>
-          <a:xfrm>
-            <a:off x="1600200" y="2450591"/>
-            <a:ext cx="1280160" cy="310896"/>
-          </a:xfrm>
-          <a:prstGeom prst="rect">
-            <a:avLst/>
-          </a:prstGeom>
-          <a:noFill/>
-        </p:spPr>
-        <p:txBody>
-          <a:bodyPr wrap="none">
-            <a:spAutoFit/>
-          </a:bodyPr>
-          <a:lstStyle/>
-          <a:p>
-            <a:pPr algn="ctr">
-              <a:spcAft>
-                <a:spcPts val="1000"/>
-              </a:spcAft>
-            </a:pPr>
-            <a:r>
-              <a:rPr sz="1800" b="1">
-                <a:solidFill>
-                  <a:srgbClr val="28462D"/>
+              <a:t>改写特点</a:t>
+            </a:r>
+          </a:p>
+          <a:p>
+            <a:pPr algn="l">
+              <a:spcAft>
+                <a:spcPts val="300"/>
+              </a:spcAft>
+            </a:pPr>
+            <a:r>
+              <a:rPr sz="1400" b="0">
+                <a:solidFill>
+                  <a:srgbClr val="1E1E1E"/>
                 </a:solidFill>
                 <a:latin typeface="Microsoft YaHei"/>
               </a:rPr>
-              <a:t>文体</a:t>
-            </a:r>
-          </a:p>
-        </p:txBody>
-      </p:sp>
-      <p:sp>
-        <p:nvSpPr>
-          <p:cNvPr id="20" name="TextBox 19"/>
-          <p:cNvSpPr txBox="1"/>
-          <p:nvPr/>
-        </p:nvSpPr>
-        <p:spPr>
-          <a:xfrm>
-            <a:off x="3017520" y="2432303"/>
-            <a:ext cx="7498079" cy="658368"/>
-          </a:xfrm>
-          <a:prstGeom prst="rect">
-            <a:avLst/>
-          </a:prstGeom>
-          <a:noFill/>
-        </p:spPr>
-        <p:txBody>
-          <a:bodyPr wrap="none">
-            <a:spAutoFit/>
-          </a:bodyPr>
-          <a:lstStyle/>
+              <a:t>基于古籍记载增删改写，赋予现代意识</a:t>
+            </a:r>
+          </a:p>
           <a:p>
             <a:pPr algn="l">
               <a:spcAft>
-                <a:spcPts val="1000"/>
-              </a:spcAft>
-            </a:pPr>
-            <a:r>
-              <a:rPr sz="2100" b="0">
-                <a:solidFill>
-                  <a:srgbClr val="28462D"/>
+                <a:spcPts val="300"/>
+              </a:spcAft>
+            </a:pPr>
+            <a:r>
+              <a:rPr sz="600" b="0">
+                <a:solidFill>
+                  <a:srgbClr val="1E1E1E"/>
                 </a:solidFill>
                 <a:latin typeface="Microsoft YaHei"/>
               </a:rPr>
-              <a:t>神话——用想象解释自然与人类起源</a:t>
-            </a:r>
-          </a:p>
-        </p:txBody>
-      </p:sp>
-      <p:sp>
-        <p:nvSpPr>
-          <p:cNvPr id="21" name="Rectangle 20"/>
-          <p:cNvSpPr/>
-          <p:nvPr/>
-        </p:nvSpPr>
-        <p:spPr>
-          <a:xfrm>
-            <a:off x="1417320" y="3886200"/>
-            <a:ext cx="9601200" cy="13716"/>
-          </a:xfrm>
-          <a:prstGeom prst="rect">
-            <a:avLst/>
-          </a:prstGeom>
-          <a:solidFill>
-            <a:srgbClr val="D2C8AF"/>
-          </a:solidFill>
-          <a:ln>
-            <a:noFill/>
-          </a:ln>
-        </p:spPr>
-        <p:style>
-          <a:lnRef idx="1">
-            <a:schemeClr val="accent1"/>
-          </a:lnRef>
-          <a:fillRef idx="3">
-            <a:schemeClr val="accent1"/>
-          </a:fillRef>
-          <a:effectRef idx="2">
-            <a:schemeClr val="accent1"/>
-          </a:effectRef>
-          <a:fontRef idx="minor">
-            <a:schemeClr val="lt1"/>
-          </a:fontRef>
-        </p:style>
-        <p:txBody>
-          <a:bodyPr rtlCol="0" anchor="ctr"/>
-          <a:lstStyle/>
-          <a:p>
-            <a:pPr algn="ctr"/>
-          </a:p>
-        </p:txBody>
-      </p:sp>
-      <p:sp>
-        <p:nvSpPr>
-          <p:cNvPr id="22" name="Rounded Rectangle 21"/>
-          <p:cNvSpPr/>
-          <p:nvPr/>
-        </p:nvSpPr>
-        <p:spPr>
-          <a:xfrm>
-            <a:off x="1600200" y="3236976"/>
-            <a:ext cx="1444752" cy="347472"/>
-          </a:xfrm>
-          <a:prstGeom prst="roundRect">
-            <a:avLst/>
-          </a:prstGeom>
-          <a:solidFill>
-            <a:srgbClr val="A0C896"/>
-          </a:solidFill>
-          <a:ln>
-            <a:noFill/>
-          </a:ln>
-        </p:spPr>
-        <p:style>
-          <a:lnRef idx="1">
-            <a:schemeClr val="accent1"/>
-          </a:lnRef>
-          <a:fillRef idx="3">
-            <a:schemeClr val="accent1"/>
-          </a:fillRef>
-          <a:effectRef idx="2">
-            <a:schemeClr val="accent1"/>
-          </a:effectRef>
-          <a:fontRef idx="minor">
-            <a:schemeClr val="lt1"/>
-          </a:fontRef>
-        </p:style>
-        <p:txBody>
-          <a:bodyPr rtlCol="0" anchor="ctr"/>
-          <a:lstStyle/>
-          <a:p>
-            <a:pPr algn="ctr"/>
-          </a:p>
-        </p:txBody>
-      </p:sp>
-      <p:sp>
-        <p:nvSpPr>
-          <p:cNvPr id="23" name="TextBox 22"/>
-          <p:cNvSpPr txBox="1"/>
-          <p:nvPr/>
-        </p:nvSpPr>
-        <p:spPr>
-          <a:xfrm>
-            <a:off x="1600200" y="3255264"/>
-            <a:ext cx="1444752" cy="310896"/>
-          </a:xfrm>
-          <a:prstGeom prst="rect">
-            <a:avLst/>
-          </a:prstGeom>
-          <a:noFill/>
-        </p:spPr>
-        <p:txBody>
-          <a:bodyPr wrap="none">
-            <a:spAutoFit/>
-          </a:bodyPr>
-          <a:lstStyle/>
-          <a:p>
-            <a:pPr algn="ctr">
-              <a:spcAft>
-                <a:spcPts val="1000"/>
-              </a:spcAft>
-            </a:pPr>
-            <a:r>
-              <a:rPr sz="1800" b="1">
-                <a:solidFill>
-                  <a:srgbClr val="28462D"/>
+              <a:t/>
+            </a:r>
+          </a:p>
+          <a:p>
+            <a:pPr algn="l">
+              <a:spcAft>
+                <a:spcPts val="300"/>
+              </a:spcAft>
+            </a:pPr>
+            <a:r>
+              <a:rPr sz="1300" b="1">
+                <a:solidFill>
+                  <a:srgbClr val="C83C23"/>
                 </a:solidFill>
                 <a:latin typeface="Microsoft YaHei"/>
               </a:rPr>
-              <a:t>改写特点</a:t>
-            </a:r>
-          </a:p>
-        </p:txBody>
-      </p:sp>
-      <p:sp>
-        <p:nvSpPr>
-          <p:cNvPr id="24" name="TextBox 23"/>
-          <p:cNvSpPr txBox="1"/>
-          <p:nvPr/>
-        </p:nvSpPr>
-        <p:spPr>
-          <a:xfrm>
-            <a:off x="3182112" y="3236976"/>
-            <a:ext cx="7333488" cy="658368"/>
-          </a:xfrm>
-          <a:prstGeom prst="rect">
-            <a:avLst/>
-          </a:prstGeom>
-          <a:noFill/>
-        </p:spPr>
-        <p:txBody>
-          <a:bodyPr wrap="none">
-            <a:spAutoFit/>
-          </a:bodyPr>
-          <a:lstStyle/>
+              <a:t>对比材料</a:t>
+            </a:r>
+          </a:p>
           <a:p>
             <a:pPr algn="l">
               <a:spcAft>
-                <a:spcPts val="1000"/>
-              </a:spcAft>
-            </a:pPr>
-            <a:r>
-              <a:rPr sz="2100" b="0">
-                <a:solidFill>
-                  <a:srgbClr val="28462D"/>
-                </a:solidFill>
-                <a:latin typeface="Microsoft YaHei"/>
-              </a:rPr>
-              <a:t>在古籍记载基础上增删改写，赋予现代意识</a:t>
-            </a:r>
-          </a:p>
-        </p:txBody>
-      </p:sp>
-      <p:sp>
-        <p:nvSpPr>
-          <p:cNvPr id="25" name="Rectangle 24"/>
-          <p:cNvSpPr/>
-          <p:nvPr/>
-        </p:nvSpPr>
-        <p:spPr>
-          <a:xfrm>
-            <a:off x="1417320" y="4690872"/>
-            <a:ext cx="9601200" cy="13716"/>
-          </a:xfrm>
-          <a:prstGeom prst="rect">
-            <a:avLst/>
-          </a:prstGeom>
-          <a:solidFill>
-            <a:srgbClr val="D2C8AF"/>
-          </a:solidFill>
-          <a:ln>
-            <a:noFill/>
-          </a:ln>
-        </p:spPr>
-        <p:style>
-          <a:lnRef idx="1">
-            <a:schemeClr val="accent1"/>
-          </a:lnRef>
-          <a:fillRef idx="3">
-            <a:schemeClr val="accent1"/>
-          </a:fillRef>
-          <a:effectRef idx="2">
-            <a:schemeClr val="accent1"/>
-          </a:effectRef>
-          <a:fontRef idx="minor">
-            <a:schemeClr val="lt1"/>
-          </a:fontRef>
-        </p:style>
-        <p:txBody>
-          <a:bodyPr rtlCol="0" anchor="ctr"/>
-          <a:lstStyle/>
-          <a:p>
-            <a:pPr algn="ctr"/>
-          </a:p>
-        </p:txBody>
-      </p:sp>
-      <p:sp>
-        <p:nvSpPr>
-          <p:cNvPr id="26" name="Rounded Rectangle 25"/>
-          <p:cNvSpPr/>
-          <p:nvPr/>
-        </p:nvSpPr>
-        <p:spPr>
-          <a:xfrm>
-            <a:off x="1600200" y="4041648"/>
-            <a:ext cx="1444752" cy="347472"/>
-          </a:xfrm>
-          <a:prstGeom prst="roundRect">
-            <a:avLst/>
-          </a:prstGeom>
-          <a:solidFill>
-            <a:srgbClr val="A0C896"/>
-          </a:solidFill>
-          <a:ln>
-            <a:noFill/>
-          </a:ln>
-        </p:spPr>
-        <p:style>
-          <a:lnRef idx="1">
-            <a:schemeClr val="accent1"/>
-          </a:lnRef>
-          <a:fillRef idx="3">
-            <a:schemeClr val="accent1"/>
-          </a:fillRef>
-          <a:effectRef idx="2">
-            <a:schemeClr val="accent1"/>
-          </a:effectRef>
-          <a:fontRef idx="minor">
-            <a:schemeClr val="lt1"/>
-          </a:fontRef>
-        </p:style>
-        <p:txBody>
-          <a:bodyPr rtlCol="0" anchor="ctr"/>
-          <a:lstStyle/>
-          <a:p>
-            <a:pPr algn="ctr"/>
-          </a:p>
-        </p:txBody>
-      </p:sp>
-      <p:sp>
-        <p:nvSpPr>
-          <p:cNvPr id="27" name="TextBox 26"/>
-          <p:cNvSpPr txBox="1"/>
-          <p:nvPr/>
-        </p:nvSpPr>
-        <p:spPr>
-          <a:xfrm>
-            <a:off x="1600200" y="4059936"/>
-            <a:ext cx="1444752" cy="310896"/>
-          </a:xfrm>
-          <a:prstGeom prst="rect">
-            <a:avLst/>
-          </a:prstGeom>
-          <a:noFill/>
-        </p:spPr>
-        <p:txBody>
-          <a:bodyPr wrap="none">
-            <a:spAutoFit/>
-          </a:bodyPr>
-          <a:lstStyle/>
-          <a:p>
-            <a:pPr algn="ctr">
-              <a:spcAft>
-                <a:spcPts val="1000"/>
-              </a:spcAft>
-            </a:pPr>
-            <a:r>
-              <a:rPr sz="1800" b="1">
-                <a:solidFill>
-                  <a:srgbClr val="28462D"/>
-                </a:solidFill>
-                <a:latin typeface="Microsoft YaHei"/>
-              </a:rPr>
-              <a:t>对比材料</a:t>
-            </a:r>
-          </a:p>
-        </p:txBody>
-      </p:sp>
-      <p:sp>
-        <p:nvSpPr>
-          <p:cNvPr id="28" name="TextBox 27"/>
-          <p:cNvSpPr txBox="1"/>
-          <p:nvPr/>
-        </p:nvSpPr>
-        <p:spPr>
-          <a:xfrm>
-            <a:off x="3182112" y="4041648"/>
-            <a:ext cx="7333488" cy="658368"/>
-          </a:xfrm>
-          <a:prstGeom prst="rect">
-            <a:avLst/>
-          </a:prstGeom>
-          <a:noFill/>
-        </p:spPr>
-        <p:txBody>
-          <a:bodyPr wrap="none">
-            <a:spAutoFit/>
-          </a:bodyPr>
-          <a:lstStyle/>
-          <a:p>
-            <a:pPr algn="l">
-              <a:spcAft>
-                <a:spcPts val="1000"/>
-              </a:spcAft>
-            </a:pPr>
-            <a:r>
-              <a:rPr sz="2100" b="0">
-                <a:solidFill>
-                  <a:srgbClr val="28462D"/>
+                <a:spcPts val="300"/>
+              </a:spcAft>
+            </a:pPr>
+            <a:r>
+              <a:rPr sz="1400" b="0">
+                <a:solidFill>
+                  <a:srgbClr val="1E1E1E"/>
                 </a:solidFill>
                 <a:latin typeface="Microsoft YaHei"/>
               </a:rPr>
@@ -4508,20 +4410,12 @@
         <p:nvPr/>
       </p:nvGrpSpPr>
       <p:grpSpPr/>
-      <p:pic>
-        <p:nvPicPr>
-          <p:cNvPr id="2" name="Picture 1" descr="bg_nuwa.png"/>
-          <p:cNvPicPr>
-            <a:picLocks noChangeAspect="1"/>
-          </p:cNvPicPr>
-          <p:nvPr/>
-        </p:nvPicPr>
-        <p:blipFill>
-          <a:blip r:embed="rId2"/>
-          <a:stretch>
-            <a:fillRect/>
-          </a:stretch>
-        </p:blipFill>
+      <p:sp>
+        <p:nvSpPr>
+          <p:cNvPr id="2" name="Rectangle 1"/>
+          <p:cNvSpPr/>
+          <p:nvPr/>
+        </p:nvSpPr>
         <p:spPr>
           <a:xfrm>
             <a:off x="0" y="0"/>
@@ -4530,27 +4424,11 @@
           <a:prstGeom prst="rect">
             <a:avLst/>
           </a:prstGeom>
-        </p:spPr>
-      </p:pic>
-      <p:sp>
-        <p:nvSpPr>
-          <p:cNvPr id="3" name="Rectangle 2"/>
-          <p:cNvSpPr/>
-          <p:nvPr/>
-        </p:nvSpPr>
-        <p:spPr>
-          <a:xfrm>
-            <a:off x="292608" y="274320"/>
-            <a:ext cx="11594592" cy="6300216"/>
-          </a:xfrm>
-          <a:prstGeom prst="rect">
-            <a:avLst/>
-          </a:prstGeom>
-          <a:noFill/>
-          <a:ln w="31750">
-            <a:solidFill>
-              <a:srgbClr val="5A8C5A"/>
-            </a:solidFill>
+          <a:solidFill>
+            <a:srgbClr val="F4F1EA"/>
+          </a:solidFill>
+          <a:ln>
+            <a:noFill/>
           </a:ln>
         </p:spPr>
         <p:style>
@@ -4575,73 +4453,25 @@
           </a:p>
         </p:txBody>
       </p:sp>
-      <p:pic>
-        <p:nvPicPr>
-          <p:cNvPr id="4" name="Picture 3" descr="corner_nuwa_tl.png"/>
-          <p:cNvPicPr>
-            <a:picLocks noChangeAspect="1"/>
-          </p:cNvPicPr>
-          <p:nvPr/>
-        </p:nvPicPr>
-        <p:blipFill>
-          <a:blip r:embed="rId3"/>
-          <a:stretch>
-            <a:fillRect/>
-          </a:stretch>
-        </p:blipFill>
-        <p:spPr>
-          <a:xfrm>
-            <a:off x="-45720" y="-45720"/>
-            <a:ext cx="2011680" cy="2011680"/>
-          </a:xfrm>
-          <a:prstGeom prst="rect">
-            <a:avLst/>
-          </a:prstGeom>
-        </p:spPr>
-      </p:pic>
-      <p:pic>
-        <p:nvPicPr>
-          <p:cNvPr id="5" name="Picture 4" descr="corner_nuwa_tr.png"/>
-          <p:cNvPicPr>
-            <a:picLocks noChangeAspect="1"/>
-          </p:cNvPicPr>
-          <p:nvPr/>
-        </p:nvPicPr>
-        <p:blipFill>
-          <a:blip r:embed="rId4"/>
-          <a:stretch>
-            <a:fillRect/>
-          </a:stretch>
-        </p:blipFill>
-        <p:spPr>
-          <a:xfrm>
-            <a:off x="9875520" y="-45720"/>
-            <a:ext cx="2011680" cy="2011680"/>
-          </a:xfrm>
-          <a:prstGeom prst="rect">
-            <a:avLst/>
-          </a:prstGeom>
-        </p:spPr>
-      </p:pic>
-      <p:sp>
-        <p:nvSpPr>
-          <p:cNvPr id="6" name="Rounded Rectangle 5"/>
+      <p:sp>
+        <p:nvSpPr>
+          <p:cNvPr id="3" name="Rectangle 2"/>
           <p:cNvSpPr/>
           <p:nvPr/>
         </p:nvSpPr>
         <p:spPr>
           <a:xfrm>
-            <a:off x="502920" y="384048"/>
-            <a:ext cx="2011680" cy="384048"/>
-          </a:xfrm>
-          <a:prstGeom prst="roundRect">
-            <a:avLst/>
-          </a:prstGeom>
-          <a:solidFill>
-            <a:srgbClr val="468250"/>
-          </a:solidFill>
-          <a:ln>
-            <a:noFill/>
+            <a:off x="548640" y="347472"/>
+            <a:ext cx="365760" cy="365760"/>
+          </a:xfrm>
+          <a:prstGeom prst="rect">
+            <a:avLst/>
+          </a:prstGeom>
+          <a:noFill/>
+          <a:ln w="25400">
+            <a:solidFill>
+              <a:srgbClr val="C83C23"/>
+            </a:solidFill>
           </a:ln>
         </p:spPr>
         <p:style>
@@ -4668,14 +4498,14 @@
       </p:sp>
       <p:sp>
         <p:nvSpPr>
-          <p:cNvPr id="7" name="TextBox 6"/>
+          <p:cNvPr id="4" name="TextBox 3"/>
           <p:cNvSpPr txBox="1"/>
           <p:nvPr/>
         </p:nvSpPr>
         <p:spPr>
           <a:xfrm>
-            <a:off x="502920" y="402336"/>
-            <a:ext cx="2011680" cy="347472"/>
+            <a:off x="548640" y="347472"/>
+            <a:ext cx="365760" cy="365760"/>
           </a:xfrm>
           <a:prstGeom prst="rect">
             <a:avLst/>
@@ -4683,38 +4513,38 @@
           <a:noFill/>
         </p:spPr>
         <p:txBody>
-          <a:bodyPr wrap="none">
+          <a:bodyPr wrap="square" anchor="ctr">
             <a:spAutoFit/>
           </a:bodyPr>
           <a:lstStyle/>
           <a:p>
             <a:pPr algn="ctr">
               <a:spcAft>
-                <a:spcPts val="1000"/>
-              </a:spcAft>
-            </a:pPr>
-            <a:r>
-              <a:rPr sz="1600" b="1">
-                <a:solidFill>
-                  <a:srgbClr val="FFFFFF"/>
-                </a:solidFill>
-                <a:latin typeface="Microsoft YaHei"/>
-              </a:rPr>
-              <a:t>情节笔记</a:t>
-            </a:r>
-          </a:p>
-        </p:txBody>
-      </p:sp>
-      <p:sp>
-        <p:nvSpPr>
-          <p:cNvPr id="8" name="TextBox 7"/>
+                <a:spcPts val="300"/>
+              </a:spcAft>
+            </a:pPr>
+            <a:r>
+              <a:rPr sz="1000" b="1">
+                <a:solidFill>
+                  <a:srgbClr val="C83C23"/>
+                </a:solidFill>
+                <a:latin typeface="KaiTi"/>
+              </a:rPr>
+              <a:t>03</a:t>
+            </a:r>
+          </a:p>
+        </p:txBody>
+      </p:sp>
+      <p:sp>
+        <p:nvSpPr>
+          <p:cNvPr id="5" name="TextBox 4"/>
           <p:cNvSpPr txBox="1"/>
           <p:nvPr/>
         </p:nvSpPr>
         <p:spPr>
           <a:xfrm>
-            <a:off x="1371600" y="384048"/>
-            <a:ext cx="9418320" cy="822960"/>
+            <a:off x="1024128" y="347472"/>
+            <a:ext cx="7766090" cy="365760"/>
           </a:xfrm>
           <a:prstGeom prst="rect">
             <a:avLst/>
@@ -4722,49 +4552,86 @@
           <a:noFill/>
         </p:spPr>
         <p:txBody>
-          <a:bodyPr wrap="square">
+          <a:bodyPr wrap="square" anchor="t">
             <a:spAutoFit/>
           </a:bodyPr>
           <a:lstStyle/>
           <a:p>
-            <a:pPr algn="ctr">
-              <a:spcAft>
-                <a:spcPts val="1000"/>
-              </a:spcAft>
-            </a:pPr>
-            <a:r>
-              <a:rPr sz="3400" b="1">
-                <a:solidFill>
-                  <a:srgbClr val="468250"/>
+            <a:pPr algn="l">
+              <a:spcAft>
+                <a:spcPts val="300"/>
+              </a:spcAft>
+            </a:pPr>
+            <a:r>
+              <a:rPr sz="2000" b="1">
+                <a:solidFill>
+                  <a:srgbClr val="1E1E1E"/>
+                </a:solidFill>
+                <a:latin typeface="KaiTi"/>
+              </a:rPr>
+              <a:t>造人起因与过程</a:t>
+            </a:r>
+          </a:p>
+        </p:txBody>
+      </p:sp>
+      <p:sp>
+        <p:nvSpPr>
+          <p:cNvPr id="6" name="TextBox 5"/>
+          <p:cNvSpPr txBox="1"/>
+          <p:nvPr/>
+        </p:nvSpPr>
+        <p:spPr>
+          <a:xfrm>
+            <a:off x="8869451" y="347472"/>
+            <a:ext cx="2773603" cy="320040"/>
+          </a:xfrm>
+          <a:prstGeom prst="rect">
+            <a:avLst/>
+          </a:prstGeom>
+          <a:noFill/>
+        </p:spPr>
+        <p:txBody>
+          <a:bodyPr wrap="square" anchor="t">
+            <a:spAutoFit/>
+          </a:bodyPr>
+          <a:lstStyle/>
+          <a:p>
+            <a:pPr algn="r">
+              <a:spcAft>
+                <a:spcPts val="300"/>
+              </a:spcAft>
+            </a:pPr>
+            <a:r>
+              <a:rPr sz="1100" b="0">
+                <a:solidFill>
+                  <a:srgbClr val="5A6A62"/>
                 </a:solidFill>
                 <a:latin typeface="Microsoft YaHei"/>
               </a:rPr>
-              <a:t>造人过程</a:t>
-            </a:r>
-          </a:p>
-        </p:txBody>
-      </p:sp>
-      <p:sp>
-        <p:nvSpPr>
-          <p:cNvPr id="9" name="Rounded Rectangle 8"/>
+              <a:t>卷 3/7</a:t>
+            </a:r>
+          </a:p>
+        </p:txBody>
+      </p:sp>
+      <p:sp>
+        <p:nvSpPr>
+          <p:cNvPr id="7" name="Rectangle 6"/>
           <p:cNvSpPr/>
           <p:nvPr/>
         </p:nvSpPr>
         <p:spPr>
           <a:xfrm>
-            <a:off x="1067104" y="1143000"/>
-            <a:ext cx="10058400" cy="3721608"/>
-          </a:xfrm>
-          <a:prstGeom prst="roundRect">
+            <a:off x="548640" y="768096"/>
+            <a:ext cx="11094415" cy="9144"/>
+          </a:xfrm>
+          <a:prstGeom prst="rect">
             <a:avLst/>
           </a:prstGeom>
           <a:solidFill>
-            <a:srgbClr val="FFFCEB"/>
+            <a:srgbClr val="5A6A62"/>
           </a:solidFill>
-          <a:ln w="25400">
-            <a:solidFill>
-              <a:srgbClr val="5A8C5A"/>
-            </a:solidFill>
+          <a:ln>
+            <a:noFill/>
           </a:ln>
         </p:spPr>
         <p:style>
@@ -4791,23 +4658,64 @@
       </p:sp>
       <p:sp>
         <p:nvSpPr>
-          <p:cNvPr id="10" name="Rectangle 9"/>
+          <p:cNvPr id="8" name="TextBox 7"/>
+          <p:cNvSpPr txBox="1"/>
+          <p:nvPr/>
+        </p:nvSpPr>
+        <p:spPr>
+          <a:xfrm>
+            <a:off x="548640" y="704088"/>
+            <a:ext cx="11094415" cy="201168"/>
+          </a:xfrm>
+          <a:prstGeom prst="rect">
+            <a:avLst/>
+          </a:prstGeom>
+          <a:noFill/>
+        </p:spPr>
+        <p:txBody>
+          <a:bodyPr wrap="square" anchor="t">
+            <a:spAutoFit/>
+          </a:bodyPr>
+          <a:lstStyle/>
+          <a:p>
+            <a:pPr algn="ctr">
+              <a:spcAft>
+                <a:spcPts val="300"/>
+              </a:spcAft>
+            </a:pPr>
+            <a:r>
+              <a:rPr sz="900" b="0">
+                <a:solidFill>
+                  <a:srgbClr val="5A6A62"/>
+                </a:solidFill>
+                <a:latin typeface="Microsoft YaHei"/>
+              </a:rPr>
+              <a:t>～ ～ ～ ～ ～ ～ ～ ～ ～ ～ ～ ～</a:t>
+            </a:r>
+          </a:p>
+        </p:txBody>
+      </p:sp>
+      <p:sp>
+        <p:nvSpPr>
+          <p:cNvPr id="9" name="Rectangle 8"/>
           <p:cNvSpPr/>
           <p:nvPr/>
         </p:nvSpPr>
         <p:spPr>
           <a:xfrm>
-            <a:off x="1067104" y="1143000"/>
-            <a:ext cx="10058400" cy="384048"/>
+            <a:off x="3749040" y="685800"/>
+            <a:ext cx="4846320" cy="868680"/>
           </a:xfrm>
           <a:prstGeom prst="rect">
             <a:avLst/>
           </a:prstGeom>
           <a:solidFill>
-            <a:srgbClr val="468250"/>
+            <a:srgbClr val="E4EDE8"/>
           </a:solidFill>
-          <a:ln>
-            <a:noFill/>
+          <a:ln w="25400">
+            <a:solidFill>
+              <a:srgbClr val="4A7C6F"/>
+            </a:solidFill>
           </a:ln>
         </p:spPr>
         <p:style>
@@ -4834,14 +4742,14 @@
       </p:sp>
       <p:sp>
         <p:nvSpPr>
-          <p:cNvPr id="11" name="TextBox 10"/>
+          <p:cNvPr id="10" name="TextBox 9"/>
           <p:cNvSpPr txBox="1"/>
           <p:nvPr/>
         </p:nvSpPr>
         <p:spPr>
           <a:xfrm>
-            <a:off x="1067104" y="1179576"/>
-            <a:ext cx="10058400" cy="347472"/>
+            <a:off x="3886200" y="804672"/>
+            <a:ext cx="4572000" cy="685800"/>
           </a:xfrm>
           <a:prstGeom prst="rect">
             <a:avLst/>
@@ -4849,44 +4757,60 @@
           <a:noFill/>
         </p:spPr>
         <p:txBody>
-          <a:bodyPr wrap="none">
+          <a:bodyPr wrap="square" anchor="ctr">
             <a:spAutoFit/>
           </a:bodyPr>
           <a:lstStyle/>
           <a:p>
             <a:pPr algn="ctr">
               <a:spcAft>
-                <a:spcPts val="1000"/>
-              </a:spcAft>
-            </a:pPr>
-            <a:r>
-              <a:rPr sz="1800" b="1">
-                <a:solidFill>
-                  <a:srgbClr val="FFFFFF"/>
+                <a:spcPts val="300"/>
+              </a:spcAft>
+            </a:pPr>
+            <a:r>
+              <a:rPr sz="1300" b="1">
+                <a:solidFill>
+                  <a:srgbClr val="C83C23"/>
+                </a:solidFill>
+                <a:latin typeface="KaiTi"/>
+              </a:rPr>
+              <a:t>起因</a:t>
+            </a:r>
+          </a:p>
+          <a:p>
+            <a:pPr algn="ctr">
+              <a:spcAft>
+                <a:spcPts val="300"/>
+              </a:spcAft>
+            </a:pPr>
+            <a:r>
+              <a:rPr sz="1600" b="1">
+                <a:solidFill>
+                  <a:srgbClr val="1E1E1E"/>
                 </a:solidFill>
                 <a:latin typeface="Microsoft YaHei"/>
               </a:rPr>
-              <a:t>📝  课堂笔记  —  请摘抄要点</a:t>
-            </a:r>
-          </a:p>
-        </p:txBody>
-      </p:sp>
-      <p:sp>
-        <p:nvSpPr>
-          <p:cNvPr id="12" name="Rectangle 11"/>
+              <a:t>女娲行走世间，感到孤独寂寞</a:t>
+            </a:r>
+          </a:p>
+        </p:txBody>
+      </p:sp>
+      <p:sp>
+        <p:nvSpPr>
+          <p:cNvPr id="11" name="Rectangle 10"/>
           <p:cNvSpPr/>
           <p:nvPr/>
         </p:nvSpPr>
         <p:spPr>
           <a:xfrm>
-            <a:off x="1570024" y="1527048"/>
-            <a:ext cx="27432" cy="3337560"/>
+            <a:off x="6126480" y="1600200"/>
+            <a:ext cx="18288" cy="502920"/>
           </a:xfrm>
           <a:prstGeom prst="rect">
             <a:avLst/>
           </a:prstGeom>
           <a:solidFill>
-            <a:srgbClr val="DC5050"/>
+            <a:srgbClr val="4A7C6F"/>
           </a:solidFill>
           <a:ln>
             <a:noFill/>
@@ -4916,20 +4840,20 @@
       </p:sp>
       <p:sp>
         <p:nvSpPr>
-          <p:cNvPr id="13" name="Rectangle 12"/>
+          <p:cNvPr id="12" name="Rectangle 11"/>
           <p:cNvSpPr/>
           <p:nvPr/>
         </p:nvSpPr>
         <p:spPr>
           <a:xfrm>
-            <a:off x="1417320" y="2276856"/>
-            <a:ext cx="9601200" cy="13716"/>
+            <a:off x="548640" y="2194560"/>
+            <a:ext cx="5120640" cy="2148840"/>
           </a:xfrm>
           <a:prstGeom prst="rect">
             <a:avLst/>
           </a:prstGeom>
           <a:solidFill>
-            <a:srgbClr val="D2C8AF"/>
+            <a:srgbClr val="E4EDE8"/>
           </a:solidFill>
           <a:ln>
             <a:noFill/>
@@ -4959,20 +4883,20 @@
       </p:sp>
       <p:sp>
         <p:nvSpPr>
-          <p:cNvPr id="14" name="Rounded Rectangle 13"/>
+          <p:cNvPr id="13" name="Rectangle 12"/>
           <p:cNvSpPr/>
           <p:nvPr/>
         </p:nvSpPr>
         <p:spPr>
           <a:xfrm>
-            <a:off x="1600200" y="1627632"/>
-            <a:ext cx="1280160" cy="347472"/>
-          </a:xfrm>
-          <a:prstGeom prst="roundRect">
+            <a:off x="548640" y="2194560"/>
+            <a:ext cx="45720" cy="2148840"/>
+          </a:xfrm>
+          <a:prstGeom prst="rect">
             <a:avLst/>
           </a:prstGeom>
           <a:solidFill>
-            <a:srgbClr val="A0C896"/>
+            <a:srgbClr val="4A7C6F"/>
           </a:solidFill>
           <a:ln>
             <a:noFill/>
@@ -5002,14 +4926,14 @@
       </p:sp>
       <p:sp>
         <p:nvSpPr>
-          <p:cNvPr id="15" name="TextBox 14"/>
+          <p:cNvPr id="14" name="TextBox 13"/>
           <p:cNvSpPr txBox="1"/>
           <p:nvPr/>
         </p:nvSpPr>
         <p:spPr>
           <a:xfrm>
-            <a:off x="1600200" y="1645920"/>
-            <a:ext cx="1280160" cy="310896"/>
+            <a:off x="694944" y="2304288"/>
+            <a:ext cx="4919472" cy="1984248"/>
           </a:xfrm>
           <a:prstGeom prst="rect">
             <a:avLst/>
@@ -5017,86 +4941,81 @@
           <a:noFill/>
         </p:spPr>
         <p:txBody>
-          <a:bodyPr wrap="none">
+          <a:bodyPr wrap="square" anchor="t">
             <a:spAutoFit/>
           </a:bodyPr>
           <a:lstStyle/>
           <a:p>
-            <a:pPr algn="ctr">
-              <a:spcAft>
-                <a:spcPts val="1000"/>
-              </a:spcAft>
-            </a:pPr>
-            <a:r>
-              <a:rPr sz="1800" b="1">
-                <a:solidFill>
-                  <a:srgbClr val="28462D"/>
+            <a:pPr algn="l">
+              <a:spcAft>
+                <a:spcPts val="300"/>
+              </a:spcAft>
+            </a:pPr>
+            <a:r>
+              <a:rPr sz="1400" b="1">
+                <a:solidFill>
+                  <a:srgbClr val="4A7C6F"/>
+                </a:solidFill>
+                <a:latin typeface="KaiTi"/>
+              </a:rPr>
+              <a:t>方式一 · 精细制造</a:t>
+            </a:r>
+          </a:p>
+          <a:p>
+            <a:pPr algn="l">
+              <a:spcAft>
+                <a:spcPts val="300"/>
+              </a:spcAft>
+            </a:pPr>
+            <a:r>
+              <a:rPr sz="1400" b="0">
+                <a:solidFill>
+                  <a:srgbClr val="1E1E1E"/>
                 </a:solidFill>
                 <a:latin typeface="Microsoft YaHei"/>
               </a:rPr>
-              <a:t>起因</a:t>
-            </a:r>
-          </a:p>
-        </p:txBody>
-      </p:sp>
-      <p:sp>
-        <p:nvSpPr>
-          <p:cNvPr id="16" name="TextBox 15"/>
-          <p:cNvSpPr txBox="1"/>
-          <p:nvPr/>
-        </p:nvSpPr>
-        <p:spPr>
-          <a:xfrm>
-            <a:off x="3017520" y="1627632"/>
-            <a:ext cx="7498079" cy="658368"/>
-          </a:xfrm>
-          <a:prstGeom prst="rect">
-            <a:avLst/>
-          </a:prstGeom>
-          <a:noFill/>
-        </p:spPr>
-        <p:txBody>
-          <a:bodyPr wrap="none">
-            <a:spAutoFit/>
-          </a:bodyPr>
-          <a:lstStyle/>
+              <a:t>黄泥和水，揉成小泥人</a:t>
+            </a:r>
+          </a:p>
           <a:p>
             <a:pPr algn="l">
               <a:spcAft>
-                <a:spcPts val="1000"/>
-              </a:spcAft>
-            </a:pPr>
-            <a:r>
-              <a:rPr sz="2100" b="0">
-                <a:solidFill>
-                  <a:srgbClr val="28462D"/>
+                <a:spcPts val="300"/>
+              </a:spcAft>
+            </a:pPr>
+            <a:r>
+              <a:rPr sz="1400" b="1">
+                <a:solidFill>
+                  <a:srgbClr val="1E1E1E"/>
                 </a:solidFill>
                 <a:latin typeface="Microsoft YaHei"/>
               </a:rPr>
-              <a:t>女娲行走世间，感到孤独寂寞</a:t>
-            </a:r>
-          </a:p>
-        </p:txBody>
-      </p:sp>
-      <p:sp>
-        <p:nvSpPr>
-          <p:cNvPr id="17" name="Rectangle 16"/>
+              <a:t>泥人落地即活</a:t>
+            </a:r>
+          </a:p>
+        </p:txBody>
+      </p:sp>
+      <p:sp>
+        <p:nvSpPr>
+          <p:cNvPr id="15" name="Rectangle 14"/>
           <p:cNvSpPr/>
           <p:nvPr/>
         </p:nvSpPr>
         <p:spPr>
           <a:xfrm>
-            <a:off x="1417320" y="3081527"/>
-            <a:ext cx="9601200" cy="13716"/>
+            <a:off x="6172200" y="2194560"/>
+            <a:ext cx="5120640" cy="2148840"/>
           </a:xfrm>
           <a:prstGeom prst="rect">
             <a:avLst/>
           </a:prstGeom>
           <a:solidFill>
-            <a:srgbClr val="D2C8AF"/>
+            <a:srgbClr val="F4F1EA"/>
           </a:solidFill>
-          <a:ln>
-            <a:noFill/>
+          <a:ln w="19050">
+            <a:solidFill>
+              <a:srgbClr val="4A7C6F"/>
+            </a:solidFill>
           </a:ln>
         </p:spPr>
         <p:style>
@@ -5123,20 +5042,20 @@
       </p:sp>
       <p:sp>
         <p:nvSpPr>
-          <p:cNvPr id="18" name="Rounded Rectangle 17"/>
+          <p:cNvPr id="16" name="Rectangle 15"/>
           <p:cNvSpPr/>
           <p:nvPr/>
         </p:nvSpPr>
         <p:spPr>
           <a:xfrm>
-            <a:off x="1600200" y="2432303"/>
-            <a:ext cx="1280160" cy="347472"/>
-          </a:xfrm>
-          <a:prstGeom prst="roundRect">
+            <a:off x="6172200" y="2194560"/>
+            <a:ext cx="45720" cy="2148840"/>
+          </a:xfrm>
+          <a:prstGeom prst="rect">
             <a:avLst/>
           </a:prstGeom>
           <a:solidFill>
-            <a:srgbClr val="A0C896"/>
+            <a:srgbClr val="4A7C6F"/>
           </a:solidFill>
           <a:ln>
             <a:noFill/>
@@ -5166,14 +5085,14 @@
       </p:sp>
       <p:sp>
         <p:nvSpPr>
-          <p:cNvPr id="19" name="TextBox 18"/>
+          <p:cNvPr id="17" name="TextBox 16"/>
           <p:cNvSpPr txBox="1"/>
           <p:nvPr/>
         </p:nvSpPr>
         <p:spPr>
           <a:xfrm>
-            <a:off x="1600200" y="2450591"/>
-            <a:ext cx="1280160" cy="310896"/>
+            <a:off x="6318504" y="2304288"/>
+            <a:ext cx="4919472" cy="1984248"/>
           </a:xfrm>
           <a:prstGeom prst="rect">
             <a:avLst/>
@@ -5181,83 +5100,76 @@
           <a:noFill/>
         </p:spPr>
         <p:txBody>
-          <a:bodyPr wrap="none">
+          <a:bodyPr wrap="square" anchor="t">
             <a:spAutoFit/>
           </a:bodyPr>
           <a:lstStyle/>
           <a:p>
-            <a:pPr algn="ctr">
-              <a:spcAft>
-                <a:spcPts val="1000"/>
-              </a:spcAft>
-            </a:pPr>
-            <a:r>
-              <a:rPr sz="1800" b="1">
-                <a:solidFill>
-                  <a:srgbClr val="28462D"/>
+            <a:pPr algn="l">
+              <a:spcAft>
+                <a:spcPts val="300"/>
+              </a:spcAft>
+            </a:pPr>
+            <a:r>
+              <a:rPr sz="1400" b="1">
+                <a:solidFill>
+                  <a:srgbClr val="4A7C6F"/>
+                </a:solidFill>
+                <a:latin typeface="KaiTi"/>
+              </a:rPr>
+              <a:t>方式二 · 批量制造</a:t>
+            </a:r>
+          </a:p>
+          <a:p>
+            <a:pPr algn="l">
+              <a:spcAft>
+                <a:spcPts val="300"/>
+              </a:spcAft>
+            </a:pPr>
+            <a:r>
+              <a:rPr sz="1400" b="0">
+                <a:solidFill>
+                  <a:srgbClr val="1E1E1E"/>
                 </a:solidFill>
                 <a:latin typeface="Microsoft YaHei"/>
               </a:rPr>
-              <a:t>方法一</a:t>
-            </a:r>
-          </a:p>
-        </p:txBody>
-      </p:sp>
-      <p:sp>
-        <p:nvSpPr>
-          <p:cNvPr id="20" name="TextBox 19"/>
-          <p:cNvSpPr txBox="1"/>
-          <p:nvPr/>
-        </p:nvSpPr>
-        <p:spPr>
-          <a:xfrm>
-            <a:off x="3017520" y="2432303"/>
-            <a:ext cx="7498079" cy="658368"/>
-          </a:xfrm>
-          <a:prstGeom prst="rect">
-            <a:avLst/>
-          </a:prstGeom>
-          <a:noFill/>
-        </p:spPr>
-        <p:txBody>
-          <a:bodyPr wrap="none">
-            <a:spAutoFit/>
-          </a:bodyPr>
-          <a:lstStyle/>
+              <a:t>藤条蘸泥浆挥洒</a:t>
+            </a:r>
+          </a:p>
           <a:p>
             <a:pPr algn="l">
               <a:spcAft>
-                <a:spcPts val="1000"/>
-              </a:spcAft>
-            </a:pPr>
-            <a:r>
-              <a:rPr sz="2100" b="0">
-                <a:solidFill>
-                  <a:srgbClr val="28462D"/>
+                <a:spcPts val="300"/>
+              </a:spcAft>
+            </a:pPr>
+            <a:r>
+              <a:rPr sz="1400" b="1">
+                <a:solidFill>
+                  <a:srgbClr val="1E1E1E"/>
                 </a:solidFill>
                 <a:latin typeface="Microsoft YaHei"/>
               </a:rPr>
-              <a:t>黄泥和水，揉成小泥人，泥人落地即活</a:t>
-            </a:r>
-          </a:p>
-        </p:txBody>
-      </p:sp>
-      <p:sp>
-        <p:nvSpPr>
-          <p:cNvPr id="21" name="Rectangle 20"/>
+              <a:t>溅落泥点化为人</a:t>
+            </a:r>
+          </a:p>
+        </p:txBody>
+      </p:sp>
+      <p:sp>
+        <p:nvSpPr>
+          <p:cNvPr id="18" name="Rectangle 17"/>
           <p:cNvSpPr/>
           <p:nvPr/>
         </p:nvSpPr>
         <p:spPr>
           <a:xfrm>
-            <a:off x="1417320" y="3886200"/>
-            <a:ext cx="9601200" cy="13716"/>
+            <a:off x="2560320" y="4434840"/>
+            <a:ext cx="18288" cy="411480"/>
           </a:xfrm>
           <a:prstGeom prst="rect">
             <a:avLst/>
           </a:prstGeom>
           <a:solidFill>
-            <a:srgbClr val="D2C8AF"/>
+            <a:srgbClr val="4A7C6F"/>
           </a:solidFill>
           <a:ln>
             <a:noFill/>
@@ -5287,20 +5199,20 @@
       </p:sp>
       <p:sp>
         <p:nvSpPr>
-          <p:cNvPr id="22" name="Rounded Rectangle 21"/>
+          <p:cNvPr id="19" name="Rectangle 18"/>
           <p:cNvSpPr/>
           <p:nvPr/>
         </p:nvSpPr>
         <p:spPr>
           <a:xfrm>
-            <a:off x="1600200" y="3236976"/>
-            <a:ext cx="1280160" cy="347472"/>
-          </a:xfrm>
-          <a:prstGeom prst="roundRect">
+            <a:off x="8686800" y="4434840"/>
+            <a:ext cx="18288" cy="411480"/>
+          </a:xfrm>
+          <a:prstGeom prst="rect">
             <a:avLst/>
           </a:prstGeom>
           <a:solidFill>
-            <a:srgbClr val="A0C896"/>
+            <a:srgbClr val="4A7C6F"/>
           </a:solidFill>
           <a:ln>
             <a:noFill/>
@@ -5330,98 +5242,20 @@
       </p:sp>
       <p:sp>
         <p:nvSpPr>
-          <p:cNvPr id="23" name="TextBox 22"/>
-          <p:cNvSpPr txBox="1"/>
-          <p:nvPr/>
-        </p:nvSpPr>
-        <p:spPr>
-          <a:xfrm>
-            <a:off x="1600200" y="3255264"/>
-            <a:ext cx="1280160" cy="310896"/>
-          </a:xfrm>
-          <a:prstGeom prst="rect">
-            <a:avLst/>
-          </a:prstGeom>
-          <a:noFill/>
-        </p:spPr>
-        <p:txBody>
-          <a:bodyPr wrap="none">
-            <a:spAutoFit/>
-          </a:bodyPr>
-          <a:lstStyle/>
-          <a:p>
-            <a:pPr algn="ctr">
-              <a:spcAft>
-                <a:spcPts val="1000"/>
-              </a:spcAft>
-            </a:pPr>
-            <a:r>
-              <a:rPr sz="1800" b="1">
-                <a:solidFill>
-                  <a:srgbClr val="28462D"/>
-                </a:solidFill>
-                <a:latin typeface="Microsoft YaHei"/>
-              </a:rPr>
-              <a:t>方法二</a:t>
-            </a:r>
-          </a:p>
-        </p:txBody>
-      </p:sp>
-      <p:sp>
-        <p:nvSpPr>
-          <p:cNvPr id="24" name="TextBox 23"/>
-          <p:cNvSpPr txBox="1"/>
-          <p:nvPr/>
-        </p:nvSpPr>
-        <p:spPr>
-          <a:xfrm>
-            <a:off x="3017520" y="3236976"/>
-            <a:ext cx="7498079" cy="658368"/>
-          </a:xfrm>
-          <a:prstGeom prst="rect">
-            <a:avLst/>
-          </a:prstGeom>
-          <a:noFill/>
-        </p:spPr>
-        <p:txBody>
-          <a:bodyPr wrap="none">
-            <a:spAutoFit/>
-          </a:bodyPr>
-          <a:lstStyle/>
-          <a:p>
-            <a:pPr algn="l">
-              <a:spcAft>
-                <a:spcPts val="1000"/>
-              </a:spcAft>
-            </a:pPr>
-            <a:r>
-              <a:rPr sz="2100" b="0">
-                <a:solidFill>
-                  <a:srgbClr val="28462D"/>
-                </a:solidFill>
-                <a:latin typeface="Microsoft YaHei"/>
-              </a:rPr>
-              <a:t>藤条蘸泥浆挥洒，溅落的泥点也变成人</a:t>
-            </a:r>
-          </a:p>
-        </p:txBody>
-      </p:sp>
-      <p:sp>
-        <p:nvSpPr>
-          <p:cNvPr id="25" name="Rectangle 24"/>
+          <p:cNvPr id="20" name="Rectangle 19"/>
           <p:cNvSpPr/>
           <p:nvPr/>
         </p:nvSpPr>
         <p:spPr>
           <a:xfrm>
-            <a:off x="1417320" y="4690872"/>
-            <a:ext cx="9601200" cy="13716"/>
+            <a:off x="3108960" y="4800600"/>
+            <a:ext cx="6144768" cy="18288"/>
           </a:xfrm>
           <a:prstGeom prst="rect">
             <a:avLst/>
           </a:prstGeom>
           <a:solidFill>
-            <a:srgbClr val="D2C8AF"/>
+            <a:srgbClr val="4A7C6F"/>
           </a:solidFill>
           <a:ln>
             <a:noFill/>
@@ -5451,20 +5285,20 @@
       </p:sp>
       <p:sp>
         <p:nvSpPr>
-          <p:cNvPr id="26" name="Rounded Rectangle 25"/>
+          <p:cNvPr id="21" name="Rectangle 20"/>
           <p:cNvSpPr/>
           <p:nvPr/>
         </p:nvSpPr>
         <p:spPr>
           <a:xfrm>
-            <a:off x="1600200" y="4041648"/>
-            <a:ext cx="1280160" cy="347472"/>
-          </a:xfrm>
-          <a:prstGeom prst="roundRect">
+            <a:off x="6126480" y="4800600"/>
+            <a:ext cx="18288" cy="411480"/>
+          </a:xfrm>
+          <a:prstGeom prst="rect">
             <a:avLst/>
           </a:prstGeom>
           <a:solidFill>
-            <a:srgbClr val="A0C896"/>
+            <a:srgbClr val="4A7C6F"/>
           </a:solidFill>
           <a:ln>
             <a:noFill/>
@@ -5494,14 +5328,59 @@
       </p:sp>
       <p:sp>
         <p:nvSpPr>
-          <p:cNvPr id="27" name="TextBox 26"/>
+          <p:cNvPr id="22" name="Rectangle 21"/>
+          <p:cNvSpPr/>
+          <p:nvPr/>
+        </p:nvSpPr>
+        <p:spPr>
+          <a:xfrm>
+            <a:off x="3108960" y="5257800"/>
+            <a:ext cx="6144768" cy="960120"/>
+          </a:xfrm>
+          <a:prstGeom prst="rect">
+            <a:avLst/>
+          </a:prstGeom>
+          <a:solidFill>
+            <a:srgbClr val="E4EDE8"/>
+          </a:solidFill>
+          <a:ln w="25400">
+            <a:solidFill>
+              <a:srgbClr val="C83C23"/>
+            </a:solidFill>
+          </a:ln>
+        </p:spPr>
+        <p:style>
+          <a:lnRef idx="1">
+            <a:schemeClr val="accent1"/>
+          </a:lnRef>
+          <a:fillRef idx="3">
+            <a:schemeClr val="accent1"/>
+          </a:fillRef>
+          <a:effectRef idx="2">
+            <a:schemeClr val="accent1"/>
+          </a:effectRef>
+          <a:fontRef idx="minor">
+            <a:schemeClr val="lt1"/>
+          </a:fontRef>
+        </p:style>
+        <p:txBody>
+          <a:bodyPr rtlCol="0" anchor="ctr"/>
+          <a:lstStyle/>
+          <a:p>
+            <a:pPr algn="ctr"/>
+          </a:p>
+        </p:txBody>
+      </p:sp>
+      <p:sp>
+        <p:nvSpPr>
+          <p:cNvPr id="23" name="TextBox 22"/>
           <p:cNvSpPr txBox="1"/>
           <p:nvPr/>
         </p:nvSpPr>
         <p:spPr>
           <a:xfrm>
-            <a:off x="1600200" y="4059936"/>
-            <a:ext cx="1280160" cy="310896"/>
+            <a:off x="3291840" y="5376672"/>
+            <a:ext cx="5760720" cy="777240"/>
           </a:xfrm>
           <a:prstGeom prst="rect">
             <a:avLst/>
@@ -5509,59 +5388,36 @@
           <a:noFill/>
         </p:spPr>
         <p:txBody>
-          <a:bodyPr wrap="none">
+          <a:bodyPr wrap="square" anchor="ctr">
             <a:spAutoFit/>
           </a:bodyPr>
           <a:lstStyle/>
           <a:p>
             <a:pPr algn="ctr">
               <a:spcAft>
-                <a:spcPts val="1000"/>
-              </a:spcAft>
-            </a:pPr>
-            <a:r>
-              <a:rPr sz="1800" b="1">
-                <a:solidFill>
-                  <a:srgbClr val="28462D"/>
-                </a:solidFill>
-                <a:latin typeface="Microsoft YaHei"/>
+                <a:spcPts val="300"/>
+              </a:spcAft>
+            </a:pPr>
+            <a:r>
+              <a:rPr sz="1300" b="1">
+                <a:solidFill>
+                  <a:srgbClr val="C83C23"/>
+                </a:solidFill>
+                <a:latin typeface="KaiTi"/>
               </a:rPr>
               <a:t>结果</a:t>
             </a:r>
           </a:p>
-        </p:txBody>
-      </p:sp>
-      <p:sp>
-        <p:nvSpPr>
-          <p:cNvPr id="28" name="TextBox 27"/>
-          <p:cNvSpPr txBox="1"/>
-          <p:nvPr/>
-        </p:nvSpPr>
-        <p:spPr>
-          <a:xfrm>
-            <a:off x="3017520" y="4041648"/>
-            <a:ext cx="7498079" cy="658368"/>
-          </a:xfrm>
-          <a:prstGeom prst="rect">
-            <a:avLst/>
-          </a:prstGeom>
-          <a:noFill/>
-        </p:spPr>
-        <p:txBody>
-          <a:bodyPr wrap="none">
-            <a:spAutoFit/>
-          </a:bodyPr>
-          <a:lstStyle/>
-          <a:p>
-            <a:pPr algn="l">
-              <a:spcAft>
-                <a:spcPts val="1000"/>
-              </a:spcAft>
-            </a:pPr>
-            <a:r>
-              <a:rPr sz="2100" b="0">
-                <a:solidFill>
-                  <a:srgbClr val="28462D"/>
+          <a:p>
+            <a:pPr algn="ctr">
+              <a:spcAft>
+                <a:spcPts val="300"/>
+              </a:spcAft>
+            </a:pPr>
+            <a:r>
+              <a:rPr sz="1600" b="1">
+                <a:solidFill>
+                  <a:srgbClr val="1E1E1E"/>
                 </a:solidFill>
                 <a:latin typeface="Microsoft YaHei"/>
               </a:rPr>
@@ -5588,20 +5444,12 @@
         <p:nvPr/>
       </p:nvGrpSpPr>
       <p:grpSpPr/>
-      <p:pic>
-        <p:nvPicPr>
-          <p:cNvPr id="2" name="Picture 1" descr="bg_nuwa.png"/>
-          <p:cNvPicPr>
-            <a:picLocks noChangeAspect="1"/>
-          </p:cNvPicPr>
-          <p:nvPr/>
-        </p:nvPicPr>
-        <p:blipFill>
-          <a:blip r:embed="rId2"/>
-          <a:stretch>
-            <a:fillRect/>
-          </a:stretch>
-        </p:blipFill>
+      <p:sp>
+        <p:nvSpPr>
+          <p:cNvPr id="2" name="Rectangle 1"/>
+          <p:cNvSpPr/>
+          <p:nvPr/>
+        </p:nvSpPr>
         <p:spPr>
           <a:xfrm>
             <a:off x="0" y="0"/>
@@ -5610,27 +5458,11 @@
           <a:prstGeom prst="rect">
             <a:avLst/>
           </a:prstGeom>
-        </p:spPr>
-      </p:pic>
-      <p:sp>
-        <p:nvSpPr>
-          <p:cNvPr id="3" name="Rectangle 2"/>
-          <p:cNvSpPr/>
-          <p:nvPr/>
-        </p:nvSpPr>
-        <p:spPr>
-          <a:xfrm>
-            <a:off x="292608" y="274320"/>
-            <a:ext cx="11594592" cy="6300216"/>
-          </a:xfrm>
-          <a:prstGeom prst="rect">
-            <a:avLst/>
-          </a:prstGeom>
-          <a:noFill/>
-          <a:ln w="31750">
-            <a:solidFill>
-              <a:srgbClr val="5A8C5A"/>
-            </a:solidFill>
+          <a:solidFill>
+            <a:srgbClr val="F4F1EA"/>
+          </a:solidFill>
+          <a:ln>
+            <a:noFill/>
           </a:ln>
         </p:spPr>
         <p:style>
@@ -5655,73 +5487,25 @@
           </a:p>
         </p:txBody>
       </p:sp>
-      <p:pic>
-        <p:nvPicPr>
-          <p:cNvPr id="4" name="Picture 3" descr="corner_nuwa_tl.png"/>
-          <p:cNvPicPr>
-            <a:picLocks noChangeAspect="1"/>
-          </p:cNvPicPr>
-          <p:nvPr/>
-        </p:nvPicPr>
-        <p:blipFill>
-          <a:blip r:embed="rId3"/>
-          <a:stretch>
-            <a:fillRect/>
-          </a:stretch>
-        </p:blipFill>
-        <p:spPr>
-          <a:xfrm>
-            <a:off x="-45720" y="-45720"/>
-            <a:ext cx="2011680" cy="2011680"/>
-          </a:xfrm>
-          <a:prstGeom prst="rect">
-            <a:avLst/>
-          </a:prstGeom>
-        </p:spPr>
-      </p:pic>
-      <p:pic>
-        <p:nvPicPr>
-          <p:cNvPr id="5" name="Picture 4" descr="corner_nuwa_tr.png"/>
-          <p:cNvPicPr>
-            <a:picLocks noChangeAspect="1"/>
-          </p:cNvPicPr>
-          <p:nvPr/>
-        </p:nvPicPr>
-        <p:blipFill>
-          <a:blip r:embed="rId4"/>
-          <a:stretch>
-            <a:fillRect/>
-          </a:stretch>
-        </p:blipFill>
-        <p:spPr>
-          <a:xfrm>
-            <a:off x="9875520" y="-45720"/>
-            <a:ext cx="2011680" cy="2011680"/>
-          </a:xfrm>
-          <a:prstGeom prst="rect">
-            <a:avLst/>
-          </a:prstGeom>
-        </p:spPr>
-      </p:pic>
-      <p:sp>
-        <p:nvSpPr>
-          <p:cNvPr id="6" name="Rounded Rectangle 5"/>
+      <p:sp>
+        <p:nvSpPr>
+          <p:cNvPr id="3" name="Rectangle 2"/>
           <p:cNvSpPr/>
           <p:nvPr/>
         </p:nvSpPr>
         <p:spPr>
           <a:xfrm>
-            <a:off x="502920" y="384048"/>
-            <a:ext cx="2011680" cy="384048"/>
-          </a:xfrm>
-          <a:prstGeom prst="roundRect">
-            <a:avLst/>
-          </a:prstGeom>
-          <a:solidFill>
-            <a:srgbClr val="468250"/>
-          </a:solidFill>
-          <a:ln>
-            <a:noFill/>
+            <a:off x="548640" y="347472"/>
+            <a:ext cx="365760" cy="365760"/>
+          </a:xfrm>
+          <a:prstGeom prst="rect">
+            <a:avLst/>
+          </a:prstGeom>
+          <a:noFill/>
+          <a:ln w="25400">
+            <a:solidFill>
+              <a:srgbClr val="C83C23"/>
+            </a:solidFill>
           </a:ln>
         </p:spPr>
         <p:style>
@@ -5748,14 +5532,14 @@
       </p:sp>
       <p:sp>
         <p:nvSpPr>
-          <p:cNvPr id="7" name="TextBox 6"/>
+          <p:cNvPr id="4" name="TextBox 3"/>
           <p:cNvSpPr txBox="1"/>
           <p:nvPr/>
         </p:nvSpPr>
         <p:spPr>
           <a:xfrm>
-            <a:off x="502920" y="402336"/>
-            <a:ext cx="2011680" cy="347472"/>
+            <a:off x="548640" y="347472"/>
+            <a:ext cx="365760" cy="365760"/>
           </a:xfrm>
           <a:prstGeom prst="rect">
             <a:avLst/>
@@ -5763,38 +5547,38 @@
           <a:noFill/>
         </p:spPr>
         <p:txBody>
-          <a:bodyPr wrap="none">
+          <a:bodyPr wrap="square" anchor="ctr">
             <a:spAutoFit/>
           </a:bodyPr>
           <a:lstStyle/>
           <a:p>
             <a:pPr algn="ctr">
               <a:spcAft>
-                <a:spcPts val="1000"/>
-              </a:spcAft>
-            </a:pPr>
-            <a:r>
-              <a:rPr sz="1600" b="1">
-                <a:solidFill>
-                  <a:srgbClr val="FFFFFF"/>
-                </a:solidFill>
-                <a:latin typeface="Microsoft YaHei"/>
-              </a:rPr>
-              <a:t>写法笔记</a:t>
-            </a:r>
-          </a:p>
-        </p:txBody>
-      </p:sp>
-      <p:sp>
-        <p:nvSpPr>
-          <p:cNvPr id="8" name="TextBox 7"/>
+                <a:spcPts val="300"/>
+              </a:spcAft>
+            </a:pPr>
+            <a:r>
+              <a:rPr sz="1000" b="1">
+                <a:solidFill>
+                  <a:srgbClr val="C83C23"/>
+                </a:solidFill>
+                <a:latin typeface="KaiTi"/>
+              </a:rPr>
+              <a:t>04</a:t>
+            </a:r>
+          </a:p>
+        </p:txBody>
+      </p:sp>
+      <p:sp>
+        <p:nvSpPr>
+          <p:cNvPr id="5" name="TextBox 4"/>
           <p:cNvSpPr txBox="1"/>
           <p:nvPr/>
         </p:nvSpPr>
         <p:spPr>
           <a:xfrm>
-            <a:off x="1371600" y="384048"/>
-            <a:ext cx="9418320" cy="822960"/>
+            <a:off x="1024128" y="347472"/>
+            <a:ext cx="7766090" cy="365760"/>
           </a:xfrm>
           <a:prstGeom prst="rect">
             <a:avLst/>
@@ -5802,49 +5586,86 @@
           <a:noFill/>
         </p:spPr>
         <p:txBody>
-          <a:bodyPr wrap="square">
+          <a:bodyPr wrap="square" anchor="t">
             <a:spAutoFit/>
           </a:bodyPr>
           <a:lstStyle/>
           <a:p>
-            <a:pPr algn="ctr">
-              <a:spcAft>
-                <a:spcPts val="1000"/>
-              </a:spcAft>
-            </a:pPr>
-            <a:r>
-              <a:rPr sz="3400" b="1">
-                <a:solidFill>
-                  <a:srgbClr val="468250"/>
+            <a:pPr algn="l">
+              <a:spcAft>
+                <a:spcPts val="300"/>
+              </a:spcAft>
+            </a:pPr>
+            <a:r>
+              <a:rPr sz="2000" b="1">
+                <a:solidFill>
+                  <a:srgbClr val="1E1E1E"/>
+                </a:solidFill>
+                <a:latin typeface="KaiTi"/>
+              </a:rPr>
+              <a:t>想象特点分析</a:t>
+            </a:r>
+          </a:p>
+        </p:txBody>
+      </p:sp>
+      <p:sp>
+        <p:nvSpPr>
+          <p:cNvPr id="6" name="TextBox 5"/>
+          <p:cNvSpPr txBox="1"/>
+          <p:nvPr/>
+        </p:nvSpPr>
+        <p:spPr>
+          <a:xfrm>
+            <a:off x="8869451" y="347472"/>
+            <a:ext cx="2773603" cy="320040"/>
+          </a:xfrm>
+          <a:prstGeom prst="rect">
+            <a:avLst/>
+          </a:prstGeom>
+          <a:noFill/>
+        </p:spPr>
+        <p:txBody>
+          <a:bodyPr wrap="square" anchor="t">
+            <a:spAutoFit/>
+          </a:bodyPr>
+          <a:lstStyle/>
+          <a:p>
+            <a:pPr algn="r">
+              <a:spcAft>
+                <a:spcPts val="300"/>
+              </a:spcAft>
+            </a:pPr>
+            <a:r>
+              <a:rPr sz="1100" b="0">
+                <a:solidFill>
+                  <a:srgbClr val="5A6A62"/>
                 </a:solidFill>
                 <a:latin typeface="Microsoft YaHei"/>
               </a:rPr>
-              <a:t>想象特点</a:t>
-            </a:r>
-          </a:p>
-        </p:txBody>
-      </p:sp>
-      <p:sp>
-        <p:nvSpPr>
-          <p:cNvPr id="9" name="Rounded Rectangle 8"/>
+              <a:t>卷 4/7</a:t>
+            </a:r>
+          </a:p>
+        </p:txBody>
+      </p:sp>
+      <p:sp>
+        <p:nvSpPr>
+          <p:cNvPr id="7" name="Rectangle 6"/>
           <p:cNvSpPr/>
           <p:nvPr/>
         </p:nvSpPr>
         <p:spPr>
           <a:xfrm>
-            <a:off x="1067104" y="1143000"/>
-            <a:ext cx="10058400" cy="3721608"/>
-          </a:xfrm>
-          <a:prstGeom prst="roundRect">
+            <a:off x="548640" y="768096"/>
+            <a:ext cx="11094415" cy="9144"/>
+          </a:xfrm>
+          <a:prstGeom prst="rect">
             <a:avLst/>
           </a:prstGeom>
           <a:solidFill>
-            <a:srgbClr val="FFFCEB"/>
+            <a:srgbClr val="5A6A62"/>
           </a:solidFill>
-          <a:ln w="25400">
-            <a:solidFill>
-              <a:srgbClr val="5A8C5A"/>
-            </a:solidFill>
+          <a:ln>
+            <a:noFill/>
           </a:ln>
         </p:spPr>
         <p:style>
@@ -5871,23 +5692,64 @@
       </p:sp>
       <p:sp>
         <p:nvSpPr>
-          <p:cNvPr id="10" name="Rectangle 9"/>
+          <p:cNvPr id="8" name="TextBox 7"/>
+          <p:cNvSpPr txBox="1"/>
+          <p:nvPr/>
+        </p:nvSpPr>
+        <p:spPr>
+          <a:xfrm>
+            <a:off x="548640" y="704088"/>
+            <a:ext cx="11094415" cy="201168"/>
+          </a:xfrm>
+          <a:prstGeom prst="rect">
+            <a:avLst/>
+          </a:prstGeom>
+          <a:noFill/>
+        </p:spPr>
+        <p:txBody>
+          <a:bodyPr wrap="square" anchor="t">
+            <a:spAutoFit/>
+          </a:bodyPr>
+          <a:lstStyle/>
+          <a:p>
+            <a:pPr algn="ctr">
+              <a:spcAft>
+                <a:spcPts val="300"/>
+              </a:spcAft>
+            </a:pPr>
+            <a:r>
+              <a:rPr sz="900" b="0">
+                <a:solidFill>
+                  <a:srgbClr val="5A6A62"/>
+                </a:solidFill>
+                <a:latin typeface="Microsoft YaHei"/>
+              </a:rPr>
+              <a:t>～ ～ ～ ～ ～ ～ ～ ～ ～ ～ ～ ～</a:t>
+            </a:r>
+          </a:p>
+        </p:txBody>
+      </p:sp>
+      <p:sp>
+        <p:nvSpPr>
+          <p:cNvPr id="9" name="Rectangle 8"/>
           <p:cNvSpPr/>
           <p:nvPr/>
         </p:nvSpPr>
         <p:spPr>
           <a:xfrm>
-            <a:off x="1067104" y="1143000"/>
-            <a:ext cx="10058400" cy="384048"/>
+            <a:off x="548640" y="658368"/>
+            <a:ext cx="5478627" cy="2331720"/>
           </a:xfrm>
           <a:prstGeom prst="rect">
             <a:avLst/>
           </a:prstGeom>
           <a:solidFill>
-            <a:srgbClr val="468250"/>
+            <a:srgbClr val="E4EDE8"/>
           </a:solidFill>
-          <a:ln>
-            <a:noFill/>
+          <a:ln w="19050">
+            <a:solidFill>
+              <a:srgbClr val="4A7C6F"/>
+            </a:solidFill>
           </a:ln>
         </p:spPr>
         <p:style>
@@ -5914,59 +5776,20 @@
       </p:sp>
       <p:sp>
         <p:nvSpPr>
-          <p:cNvPr id="11" name="TextBox 10"/>
-          <p:cNvSpPr txBox="1"/>
-          <p:nvPr/>
-        </p:nvSpPr>
-        <p:spPr>
-          <a:xfrm>
-            <a:off x="1067104" y="1179576"/>
-            <a:ext cx="10058400" cy="347472"/>
-          </a:xfrm>
-          <a:prstGeom prst="rect">
-            <a:avLst/>
-          </a:prstGeom>
-          <a:noFill/>
-        </p:spPr>
-        <p:txBody>
-          <a:bodyPr wrap="none">
-            <a:spAutoFit/>
-          </a:bodyPr>
-          <a:lstStyle/>
-          <a:p>
-            <a:pPr algn="ctr">
-              <a:spcAft>
-                <a:spcPts val="1000"/>
-              </a:spcAft>
-            </a:pPr>
-            <a:r>
-              <a:rPr sz="1800" b="1">
-                <a:solidFill>
-                  <a:srgbClr val="FFFFFF"/>
-                </a:solidFill>
-                <a:latin typeface="Microsoft YaHei"/>
-              </a:rPr>
-              <a:t>📝  课堂笔记  —  请摘抄要点</a:t>
-            </a:r>
-          </a:p>
-        </p:txBody>
-      </p:sp>
-      <p:sp>
-        <p:nvSpPr>
-          <p:cNvPr id="12" name="Rectangle 11"/>
+          <p:cNvPr id="10" name="Rectangle 9"/>
           <p:cNvSpPr/>
           <p:nvPr/>
         </p:nvSpPr>
         <p:spPr>
           <a:xfrm>
-            <a:off x="1570024" y="1527048"/>
-            <a:ext cx="27432" cy="3337560"/>
+            <a:off x="548640" y="658368"/>
+            <a:ext cx="45720" cy="2331720"/>
           </a:xfrm>
           <a:prstGeom prst="rect">
             <a:avLst/>
           </a:prstGeom>
           <a:solidFill>
-            <a:srgbClr val="DC5050"/>
+            <a:srgbClr val="4A7C6F"/>
           </a:solidFill>
           <a:ln>
             <a:noFill/>
@@ -5996,23 +5819,23 @@
       </p:sp>
       <p:sp>
         <p:nvSpPr>
-          <p:cNvPr id="13" name="Rectangle 12"/>
+          <p:cNvPr id="11" name="Rectangle 10"/>
           <p:cNvSpPr/>
           <p:nvPr/>
         </p:nvSpPr>
         <p:spPr>
           <a:xfrm>
-            <a:off x="1417320" y="2276856"/>
-            <a:ext cx="9601200" cy="13716"/>
-          </a:xfrm>
-          <a:prstGeom prst="rect">
-            <a:avLst/>
-          </a:prstGeom>
-          <a:solidFill>
-            <a:srgbClr val="D2C8AF"/>
-          </a:solidFill>
-          <a:ln>
-            <a:noFill/>
+            <a:off x="5524347" y="768096"/>
+            <a:ext cx="384048" cy="384048"/>
+          </a:xfrm>
+          <a:prstGeom prst="rect">
+            <a:avLst/>
+          </a:prstGeom>
+          <a:noFill/>
+          <a:ln w="25400">
+            <a:solidFill>
+              <a:srgbClr val="C83C23"/>
+            </a:solidFill>
           </a:ln>
         </p:spPr>
         <p:style>
@@ -6039,23 +5862,135 @@
       </p:sp>
       <p:sp>
         <p:nvSpPr>
-          <p:cNvPr id="14" name="Rounded Rectangle 13"/>
+          <p:cNvPr id="12" name="TextBox 11"/>
+          <p:cNvSpPr txBox="1"/>
+          <p:nvPr/>
+        </p:nvSpPr>
+        <p:spPr>
+          <a:xfrm>
+            <a:off x="5524347" y="768096"/>
+            <a:ext cx="384048" cy="384048"/>
+          </a:xfrm>
+          <a:prstGeom prst="rect">
+            <a:avLst/>
+          </a:prstGeom>
+          <a:noFill/>
+        </p:spPr>
+        <p:txBody>
+          <a:bodyPr wrap="square" anchor="ctr">
+            <a:spAutoFit/>
+          </a:bodyPr>
+          <a:lstStyle/>
+          <a:p>
+            <a:pPr algn="ctr">
+              <a:spcAft>
+                <a:spcPts val="300"/>
+              </a:spcAft>
+            </a:pPr>
+            <a:r>
+              <a:rPr sz="1200" b="1">
+                <a:solidFill>
+                  <a:srgbClr val="C83C23"/>
+                </a:solidFill>
+                <a:latin typeface="KaiTi"/>
+              </a:rPr>
+              <a:t>壹</a:t>
+            </a:r>
+          </a:p>
+        </p:txBody>
+      </p:sp>
+      <p:sp>
+        <p:nvSpPr>
+          <p:cNvPr id="13" name="TextBox 12"/>
+          <p:cNvSpPr txBox="1"/>
+          <p:nvPr/>
+        </p:nvSpPr>
+        <p:spPr>
+          <a:xfrm>
+            <a:off x="694944" y="795528"/>
+            <a:ext cx="5250027" cy="2148840"/>
+          </a:xfrm>
+          <a:prstGeom prst="rect">
+            <a:avLst/>
+          </a:prstGeom>
+          <a:noFill/>
+        </p:spPr>
+        <p:txBody>
+          <a:bodyPr wrap="square" anchor="t">
+            <a:spAutoFit/>
+          </a:bodyPr>
+          <a:lstStyle/>
+          <a:p>
+            <a:pPr algn="l">
+              <a:spcAft>
+                <a:spcPts val="300"/>
+              </a:spcAft>
+            </a:pPr>
+            <a:r>
+              <a:rPr sz="1800" b="1">
+                <a:solidFill>
+                  <a:srgbClr val="4A7C6F"/>
+                </a:solidFill>
+                <a:latin typeface="KaiTi"/>
+              </a:rPr>
+              <a:t>具体</a:t>
+            </a:r>
+          </a:p>
+          <a:p>
+            <a:pPr algn="l">
+              <a:spcAft>
+                <a:spcPts val="300"/>
+              </a:spcAft>
+            </a:pPr>
+            <a:r>
+              <a:rPr sz="400" b="0">
+                <a:solidFill>
+                  <a:srgbClr val="1E1E1E"/>
+                </a:solidFill>
+                <a:latin typeface="Microsoft YaHei"/>
+              </a:rPr>
+              <a:t/>
+            </a:r>
+          </a:p>
+          <a:p>
+            <a:pPr algn="l">
+              <a:spcAft>
+                <a:spcPts val="300"/>
+              </a:spcAft>
+            </a:pPr>
+            <a:r>
+              <a:rPr sz="1400" b="0">
+                <a:solidFill>
+                  <a:srgbClr val="1E1E1E"/>
+                </a:solidFill>
+                <a:latin typeface="Microsoft YaHei"/>
+              </a:rPr>
+              <a:t>池水照影见自己面容 → 想到造同类</a:t>
+            </a:r>
+          </a:p>
+        </p:txBody>
+      </p:sp>
+      <p:sp>
+        <p:nvSpPr>
+          <p:cNvPr id="14" name="Rectangle 13"/>
           <p:cNvSpPr/>
           <p:nvPr/>
         </p:nvSpPr>
         <p:spPr>
           <a:xfrm>
-            <a:off x="1600200" y="1627632"/>
-            <a:ext cx="1280160" cy="347472"/>
-          </a:xfrm>
-          <a:prstGeom prst="roundRect">
+            <a:off x="6164427" y="658368"/>
+            <a:ext cx="5478627" cy="2331720"/>
+          </a:xfrm>
+          <a:prstGeom prst="rect">
             <a:avLst/>
           </a:prstGeom>
           <a:solidFill>
-            <a:srgbClr val="A0C896"/>
+            <a:srgbClr val="F4F1EA"/>
           </a:solidFill>
-          <a:ln>
-            <a:noFill/>
+          <a:ln w="19050">
+            <a:solidFill>
+              <a:srgbClr val="4A7C6F"/>
+            </a:solidFill>
           </a:ln>
         </p:spPr>
         <p:style>
@@ -6082,98 +6017,20 @@
       </p:sp>
       <p:sp>
         <p:nvSpPr>
-          <p:cNvPr id="15" name="TextBox 14"/>
-          <p:cNvSpPr txBox="1"/>
-          <p:nvPr/>
-        </p:nvSpPr>
-        <p:spPr>
-          <a:xfrm>
-            <a:off x="1600200" y="1645920"/>
-            <a:ext cx="1280160" cy="310896"/>
-          </a:xfrm>
-          <a:prstGeom prst="rect">
-            <a:avLst/>
-          </a:prstGeom>
-          <a:noFill/>
-        </p:spPr>
-        <p:txBody>
-          <a:bodyPr wrap="none">
-            <a:spAutoFit/>
-          </a:bodyPr>
-          <a:lstStyle/>
-          <a:p>
-            <a:pPr algn="ctr">
-              <a:spcAft>
-                <a:spcPts val="1000"/>
-              </a:spcAft>
-            </a:pPr>
-            <a:r>
-              <a:rPr sz="1800" b="1">
-                <a:solidFill>
-                  <a:srgbClr val="28462D"/>
-                </a:solidFill>
-                <a:latin typeface="Microsoft YaHei"/>
-              </a:rPr>
-              <a:t>具体</a:t>
-            </a:r>
-          </a:p>
-        </p:txBody>
-      </p:sp>
-      <p:sp>
-        <p:nvSpPr>
-          <p:cNvPr id="16" name="TextBox 15"/>
-          <p:cNvSpPr txBox="1"/>
-          <p:nvPr/>
-        </p:nvSpPr>
-        <p:spPr>
-          <a:xfrm>
-            <a:off x="3017520" y="1627632"/>
-            <a:ext cx="7498079" cy="658368"/>
-          </a:xfrm>
-          <a:prstGeom prst="rect">
-            <a:avLst/>
-          </a:prstGeom>
-          <a:noFill/>
-        </p:spPr>
-        <p:txBody>
-          <a:bodyPr wrap="none">
-            <a:spAutoFit/>
-          </a:bodyPr>
-          <a:lstStyle/>
-          <a:p>
-            <a:pPr algn="l">
-              <a:spcAft>
-                <a:spcPts val="1000"/>
-              </a:spcAft>
-            </a:pPr>
-            <a:r>
-              <a:rPr sz="2100" b="0">
-                <a:solidFill>
-                  <a:srgbClr val="28462D"/>
-                </a:solidFill>
-                <a:latin typeface="Microsoft YaHei"/>
-              </a:rPr>
-              <a:t>池水照影见自己面容→想到造同类</a:t>
-            </a:r>
-          </a:p>
-        </p:txBody>
-      </p:sp>
-      <p:sp>
-        <p:nvSpPr>
-          <p:cNvPr id="17" name="Rectangle 16"/>
+          <p:cNvPr id="15" name="Rectangle 14"/>
           <p:cNvSpPr/>
           <p:nvPr/>
         </p:nvSpPr>
         <p:spPr>
           <a:xfrm>
-            <a:off x="1417320" y="3081527"/>
-            <a:ext cx="9601200" cy="13716"/>
+            <a:off x="6164427" y="658368"/>
+            <a:ext cx="45720" cy="2331720"/>
           </a:xfrm>
           <a:prstGeom prst="rect">
             <a:avLst/>
           </a:prstGeom>
           <a:solidFill>
-            <a:srgbClr val="D2C8AF"/>
+            <a:srgbClr val="4A7C6F"/>
           </a:solidFill>
           <a:ln>
             <a:noFill/>
@@ -6203,23 +6060,23 @@
       </p:sp>
       <p:sp>
         <p:nvSpPr>
-          <p:cNvPr id="18" name="Rounded Rectangle 17"/>
+          <p:cNvPr id="16" name="Rectangle 15"/>
           <p:cNvSpPr/>
           <p:nvPr/>
         </p:nvSpPr>
         <p:spPr>
           <a:xfrm>
-            <a:off x="1600200" y="2432303"/>
-            <a:ext cx="1280160" cy="347472"/>
-          </a:xfrm>
-          <a:prstGeom prst="roundRect">
-            <a:avLst/>
-          </a:prstGeom>
-          <a:solidFill>
-            <a:srgbClr val="A0C896"/>
-          </a:solidFill>
-          <a:ln>
-            <a:noFill/>
+            <a:off x="11140135" y="768096"/>
+            <a:ext cx="384048" cy="384048"/>
+          </a:xfrm>
+          <a:prstGeom prst="rect">
+            <a:avLst/>
+          </a:prstGeom>
+          <a:noFill/>
+          <a:ln w="25400">
+            <a:solidFill>
+              <a:srgbClr val="C83C23"/>
+            </a:solidFill>
           </a:ln>
         </p:spPr>
         <p:style>
@@ -6246,14 +6103,14 @@
       </p:sp>
       <p:sp>
         <p:nvSpPr>
-          <p:cNvPr id="19" name="TextBox 18"/>
+          <p:cNvPr id="17" name="TextBox 16"/>
           <p:cNvSpPr txBox="1"/>
           <p:nvPr/>
         </p:nvSpPr>
         <p:spPr>
           <a:xfrm>
-            <a:off x="1600200" y="2450591"/>
-            <a:ext cx="1280160" cy="310896"/>
+            <a:off x="11140135" y="768096"/>
+            <a:ext cx="384048" cy="384048"/>
           </a:xfrm>
           <a:prstGeom prst="rect">
             <a:avLst/>
@@ -6261,38 +6118,38 @@
           <a:noFill/>
         </p:spPr>
         <p:txBody>
-          <a:bodyPr wrap="none">
+          <a:bodyPr wrap="square" anchor="ctr">
             <a:spAutoFit/>
           </a:bodyPr>
           <a:lstStyle/>
           <a:p>
             <a:pPr algn="ctr">
               <a:spcAft>
-                <a:spcPts val="1000"/>
-              </a:spcAft>
-            </a:pPr>
-            <a:r>
-              <a:rPr sz="1800" b="1">
-                <a:solidFill>
-                  <a:srgbClr val="28462D"/>
-                </a:solidFill>
-                <a:latin typeface="Microsoft YaHei"/>
-              </a:rPr>
-              <a:t>生动</a:t>
-            </a:r>
-          </a:p>
-        </p:txBody>
-      </p:sp>
-      <p:sp>
-        <p:nvSpPr>
-          <p:cNvPr id="20" name="TextBox 19"/>
+                <a:spcPts val="300"/>
+              </a:spcAft>
+            </a:pPr>
+            <a:r>
+              <a:rPr sz="1200" b="1">
+                <a:solidFill>
+                  <a:srgbClr val="C83C23"/>
+                </a:solidFill>
+                <a:latin typeface="KaiTi"/>
+              </a:rPr>
+              <a:t>贰</a:t>
+            </a:r>
+          </a:p>
+        </p:txBody>
+      </p:sp>
+      <p:sp>
+        <p:nvSpPr>
+          <p:cNvPr id="18" name="TextBox 17"/>
           <p:cNvSpPr txBox="1"/>
           <p:nvPr/>
         </p:nvSpPr>
         <p:spPr>
           <a:xfrm>
-            <a:off x="3017520" y="2432303"/>
-            <a:ext cx="7498079" cy="658368"/>
+            <a:off x="6310731" y="795528"/>
+            <a:ext cx="5250027" cy="2148840"/>
           </a:xfrm>
           <a:prstGeom prst="rect">
             <a:avLst/>
@@ -6300,47 +6157,81 @@
           <a:noFill/>
         </p:spPr>
         <p:txBody>
-          <a:bodyPr wrap="none">
+          <a:bodyPr wrap="square" anchor="t">
             <a:spAutoFit/>
           </a:bodyPr>
           <a:lstStyle/>
           <a:p>
             <a:pPr algn="l">
               <a:spcAft>
-                <a:spcPts val="1000"/>
-              </a:spcAft>
-            </a:pPr>
-            <a:r>
-              <a:rPr sz="2100" b="0">
-                <a:solidFill>
-                  <a:srgbClr val="28462D"/>
+                <a:spcPts val="300"/>
+              </a:spcAft>
+            </a:pPr>
+            <a:r>
+              <a:rPr sz="1800" b="1">
+                <a:solidFill>
+                  <a:srgbClr val="4A7C6F"/>
+                </a:solidFill>
+                <a:latin typeface="KaiTi"/>
+              </a:rPr>
+              <a:t>生动</a:t>
+            </a:r>
+          </a:p>
+          <a:p>
+            <a:pPr algn="l">
+              <a:spcAft>
+                <a:spcPts val="300"/>
+              </a:spcAft>
+            </a:pPr>
+            <a:r>
+              <a:rPr sz="400" b="0">
+                <a:solidFill>
+                  <a:srgbClr val="1E1E1E"/>
                 </a:solidFill>
                 <a:latin typeface="Microsoft YaHei"/>
               </a:rPr>
-              <a:t>「藤条一挥，满天泥浆洒落」画面感强</a:t>
-            </a:r>
-          </a:p>
-        </p:txBody>
-      </p:sp>
-      <p:sp>
-        <p:nvSpPr>
-          <p:cNvPr id="21" name="Rectangle 20"/>
+              <a:t/>
+            </a:r>
+          </a:p>
+          <a:p>
+            <a:pPr algn="l">
+              <a:spcAft>
+                <a:spcPts val="300"/>
+              </a:spcAft>
+            </a:pPr>
+            <a:r>
+              <a:rPr sz="1400" b="0">
+                <a:solidFill>
+                  <a:srgbClr val="1E1E1E"/>
+                </a:solidFill>
+                <a:latin typeface="Microsoft YaHei"/>
+              </a:rPr>
+              <a:t>藤条一挥，满天泥浆洒落，画面感强</a:t>
+            </a:r>
+          </a:p>
+        </p:txBody>
+      </p:sp>
+      <p:sp>
+        <p:nvSpPr>
+          <p:cNvPr id="19" name="Rectangle 18"/>
           <p:cNvSpPr/>
           <p:nvPr/>
         </p:nvSpPr>
         <p:spPr>
           <a:xfrm>
-            <a:off x="1417320" y="3886200"/>
-            <a:ext cx="9601200" cy="13716"/>
+            <a:off x="548640" y="3127248"/>
+            <a:ext cx="5478627" cy="2331720"/>
           </a:xfrm>
           <a:prstGeom prst="rect">
             <a:avLst/>
           </a:prstGeom>
           <a:solidFill>
-            <a:srgbClr val="D2C8AF"/>
+            <a:srgbClr val="E4EDE8"/>
           </a:solidFill>
-          <a:ln>
-            <a:noFill/>
+          <a:ln w="19050">
+            <a:solidFill>
+              <a:srgbClr val="4A7C6F"/>
+            </a:solidFill>
           </a:ln>
         </p:spPr>
         <p:style>
@@ -6367,20 +6258,20 @@
       </p:sp>
       <p:sp>
         <p:nvSpPr>
-          <p:cNvPr id="22" name="Rounded Rectangle 21"/>
+          <p:cNvPr id="20" name="Rectangle 19"/>
           <p:cNvSpPr/>
           <p:nvPr/>
         </p:nvSpPr>
         <p:spPr>
           <a:xfrm>
-            <a:off x="1600200" y="3236976"/>
-            <a:ext cx="1280160" cy="347472"/>
-          </a:xfrm>
-          <a:prstGeom prst="roundRect">
+            <a:off x="548640" y="3127248"/>
+            <a:ext cx="45720" cy="2331720"/>
+          </a:xfrm>
+          <a:prstGeom prst="rect">
             <a:avLst/>
           </a:prstGeom>
           <a:solidFill>
-            <a:srgbClr val="A0C896"/>
+            <a:srgbClr val="4A7C6F"/>
           </a:solidFill>
           <a:ln>
             <a:noFill/>
@@ -6410,101 +6301,23 @@
       </p:sp>
       <p:sp>
         <p:nvSpPr>
-          <p:cNvPr id="23" name="TextBox 22"/>
-          <p:cNvSpPr txBox="1"/>
-          <p:nvPr/>
-        </p:nvSpPr>
-        <p:spPr>
-          <a:xfrm>
-            <a:off x="1600200" y="3255264"/>
-            <a:ext cx="1280160" cy="310896"/>
+          <p:cNvPr id="21" name="Rectangle 20"/>
+          <p:cNvSpPr/>
+          <p:nvPr/>
+        </p:nvSpPr>
+        <p:spPr>
+          <a:xfrm>
+            <a:off x="5524347" y="3236976"/>
+            <a:ext cx="384048" cy="384048"/>
           </a:xfrm>
           <a:prstGeom prst="rect">
             <a:avLst/>
           </a:prstGeom>
           <a:noFill/>
-        </p:spPr>
-        <p:txBody>
-          <a:bodyPr wrap="none">
-            <a:spAutoFit/>
-          </a:bodyPr>
-          <a:lstStyle/>
-          <a:p>
-            <a:pPr algn="ctr">
-              <a:spcAft>
-                <a:spcPts val="1000"/>
-              </a:spcAft>
-            </a:pPr>
-            <a:r>
-              <a:rPr sz="1800" b="1">
-                <a:solidFill>
-                  <a:srgbClr val="28462D"/>
-                </a:solidFill>
-                <a:latin typeface="Microsoft YaHei"/>
-              </a:rPr>
-              <a:t>温暖</a:t>
-            </a:r>
-          </a:p>
-        </p:txBody>
-      </p:sp>
-      <p:sp>
-        <p:nvSpPr>
-          <p:cNvPr id="24" name="TextBox 23"/>
-          <p:cNvSpPr txBox="1"/>
-          <p:nvPr/>
-        </p:nvSpPr>
-        <p:spPr>
-          <a:xfrm>
-            <a:off x="3017520" y="3236976"/>
-            <a:ext cx="7498079" cy="658368"/>
-          </a:xfrm>
-          <a:prstGeom prst="rect">
-            <a:avLst/>
-          </a:prstGeom>
-          <a:noFill/>
-        </p:spPr>
-        <p:txBody>
-          <a:bodyPr wrap="none">
-            <a:spAutoFit/>
-          </a:bodyPr>
-          <a:lstStyle/>
-          <a:p>
-            <a:pPr algn="l">
-              <a:spcAft>
-                <a:spcPts val="1000"/>
-              </a:spcAft>
-            </a:pPr>
-            <a:r>
-              <a:rPr sz="2100" b="0">
-                <a:solidFill>
-                  <a:srgbClr val="28462D"/>
-                </a:solidFill>
-                <a:latin typeface="Microsoft YaHei"/>
-              </a:rPr>
-              <a:t>造人后的疲倦、喜悦，赋予神以人的情感</a:t>
-            </a:r>
-          </a:p>
-        </p:txBody>
-      </p:sp>
-      <p:sp>
-        <p:nvSpPr>
-          <p:cNvPr id="25" name="Rectangle 24"/>
-          <p:cNvSpPr/>
-          <p:nvPr/>
-        </p:nvSpPr>
-        <p:spPr>
-          <a:xfrm>
-            <a:off x="1417320" y="4690872"/>
-            <a:ext cx="9601200" cy="13716"/>
-          </a:xfrm>
-          <a:prstGeom prst="rect">
-            <a:avLst/>
-          </a:prstGeom>
-          <a:solidFill>
-            <a:srgbClr val="D2C8AF"/>
-          </a:solidFill>
-          <a:ln>
-            <a:noFill/>
+          <a:ln w="25400">
+            <a:solidFill>
+              <a:srgbClr val="C83C23"/>
+            </a:solidFill>
           </a:ln>
         </p:spPr>
         <p:style>
@@ -6531,23 +6344,135 @@
       </p:sp>
       <p:sp>
         <p:nvSpPr>
-          <p:cNvPr id="26" name="Rounded Rectangle 25"/>
+          <p:cNvPr id="22" name="TextBox 21"/>
+          <p:cNvSpPr txBox="1"/>
+          <p:nvPr/>
+        </p:nvSpPr>
+        <p:spPr>
+          <a:xfrm>
+            <a:off x="5524347" y="3236976"/>
+            <a:ext cx="384048" cy="384048"/>
+          </a:xfrm>
+          <a:prstGeom prst="rect">
+            <a:avLst/>
+          </a:prstGeom>
+          <a:noFill/>
+        </p:spPr>
+        <p:txBody>
+          <a:bodyPr wrap="square" anchor="ctr">
+            <a:spAutoFit/>
+          </a:bodyPr>
+          <a:lstStyle/>
+          <a:p>
+            <a:pPr algn="ctr">
+              <a:spcAft>
+                <a:spcPts val="300"/>
+              </a:spcAft>
+            </a:pPr>
+            <a:r>
+              <a:rPr sz="1200" b="1">
+                <a:solidFill>
+                  <a:srgbClr val="C83C23"/>
+                </a:solidFill>
+                <a:latin typeface="KaiTi"/>
+              </a:rPr>
+              <a:t>叁</a:t>
+            </a:r>
+          </a:p>
+        </p:txBody>
+      </p:sp>
+      <p:sp>
+        <p:nvSpPr>
+          <p:cNvPr id="23" name="TextBox 22"/>
+          <p:cNvSpPr txBox="1"/>
+          <p:nvPr/>
+        </p:nvSpPr>
+        <p:spPr>
+          <a:xfrm>
+            <a:off x="694944" y="3264408"/>
+            <a:ext cx="5250027" cy="2148840"/>
+          </a:xfrm>
+          <a:prstGeom prst="rect">
+            <a:avLst/>
+          </a:prstGeom>
+          <a:noFill/>
+        </p:spPr>
+        <p:txBody>
+          <a:bodyPr wrap="square" anchor="t">
+            <a:spAutoFit/>
+          </a:bodyPr>
+          <a:lstStyle/>
+          <a:p>
+            <a:pPr algn="l">
+              <a:spcAft>
+                <a:spcPts val="300"/>
+              </a:spcAft>
+            </a:pPr>
+            <a:r>
+              <a:rPr sz="1800" b="1">
+                <a:solidFill>
+                  <a:srgbClr val="4A7C6F"/>
+                </a:solidFill>
+                <a:latin typeface="KaiTi"/>
+              </a:rPr>
+              <a:t>温暖</a:t>
+            </a:r>
+          </a:p>
+          <a:p>
+            <a:pPr algn="l">
+              <a:spcAft>
+                <a:spcPts val="300"/>
+              </a:spcAft>
+            </a:pPr>
+            <a:r>
+              <a:rPr sz="400" b="0">
+                <a:solidFill>
+                  <a:srgbClr val="1E1E1E"/>
+                </a:solidFill>
+                <a:latin typeface="Microsoft YaHei"/>
+              </a:rPr>
+              <a:t/>
+            </a:r>
+          </a:p>
+          <a:p>
+            <a:pPr algn="l">
+              <a:spcAft>
+                <a:spcPts val="300"/>
+              </a:spcAft>
+            </a:pPr>
+            <a:r>
+              <a:rPr sz="1400" b="0">
+                <a:solidFill>
+                  <a:srgbClr val="1E1E1E"/>
+                </a:solidFill>
+                <a:latin typeface="Microsoft YaHei"/>
+              </a:rPr>
+              <a:t>造人后的疲倦与喜悦，赋予神以人的情感</a:t>
+            </a:r>
+          </a:p>
+        </p:txBody>
+      </p:sp>
+      <p:sp>
+        <p:nvSpPr>
+          <p:cNvPr id="24" name="Rectangle 23"/>
           <p:cNvSpPr/>
           <p:nvPr/>
         </p:nvSpPr>
         <p:spPr>
           <a:xfrm>
-            <a:off x="1600200" y="4041648"/>
-            <a:ext cx="1280160" cy="347472"/>
-          </a:xfrm>
-          <a:prstGeom prst="roundRect">
+            <a:off x="6164427" y="3127248"/>
+            <a:ext cx="5478627" cy="2331720"/>
+          </a:xfrm>
+          <a:prstGeom prst="rect">
             <a:avLst/>
           </a:prstGeom>
           <a:solidFill>
-            <a:srgbClr val="A0C896"/>
+            <a:srgbClr val="F4F1EA"/>
           </a:solidFill>
-          <a:ln>
-            <a:noFill/>
+          <a:ln w="19050">
+            <a:solidFill>
+              <a:srgbClr val="4A7C6F"/>
+            </a:solidFill>
           </a:ln>
         </p:spPr>
         <p:style>
@@ -6574,14 +6499,100 @@
       </p:sp>
       <p:sp>
         <p:nvSpPr>
+          <p:cNvPr id="25" name="Rectangle 24"/>
+          <p:cNvSpPr/>
+          <p:nvPr/>
+        </p:nvSpPr>
+        <p:spPr>
+          <a:xfrm>
+            <a:off x="6164427" y="3127248"/>
+            <a:ext cx="45720" cy="2331720"/>
+          </a:xfrm>
+          <a:prstGeom prst="rect">
+            <a:avLst/>
+          </a:prstGeom>
+          <a:solidFill>
+            <a:srgbClr val="4A7C6F"/>
+          </a:solidFill>
+          <a:ln>
+            <a:noFill/>
+          </a:ln>
+        </p:spPr>
+        <p:style>
+          <a:lnRef idx="1">
+            <a:schemeClr val="accent1"/>
+          </a:lnRef>
+          <a:fillRef idx="3">
+            <a:schemeClr val="accent1"/>
+          </a:fillRef>
+          <a:effectRef idx="2">
+            <a:schemeClr val="accent1"/>
+          </a:effectRef>
+          <a:fontRef idx="minor">
+            <a:schemeClr val="lt1"/>
+          </a:fontRef>
+        </p:style>
+        <p:txBody>
+          <a:bodyPr rtlCol="0" anchor="ctr"/>
+          <a:lstStyle/>
+          <a:p>
+            <a:pPr algn="ctr"/>
+          </a:p>
+        </p:txBody>
+      </p:sp>
+      <p:sp>
+        <p:nvSpPr>
+          <p:cNvPr id="26" name="Rectangle 25"/>
+          <p:cNvSpPr/>
+          <p:nvPr/>
+        </p:nvSpPr>
+        <p:spPr>
+          <a:xfrm>
+            <a:off x="11140135" y="3236976"/>
+            <a:ext cx="384048" cy="384048"/>
+          </a:xfrm>
+          <a:prstGeom prst="rect">
+            <a:avLst/>
+          </a:prstGeom>
+          <a:noFill/>
+          <a:ln w="25400">
+            <a:solidFill>
+              <a:srgbClr val="C83C23"/>
+            </a:solidFill>
+          </a:ln>
+        </p:spPr>
+        <p:style>
+          <a:lnRef idx="1">
+            <a:schemeClr val="accent1"/>
+          </a:lnRef>
+          <a:fillRef idx="3">
+            <a:schemeClr val="accent1"/>
+          </a:fillRef>
+          <a:effectRef idx="2">
+            <a:schemeClr val="accent1"/>
+          </a:effectRef>
+          <a:fontRef idx="minor">
+            <a:schemeClr val="lt1"/>
+          </a:fontRef>
+        </p:style>
+        <p:txBody>
+          <a:bodyPr rtlCol="0" anchor="ctr"/>
+          <a:lstStyle/>
+          <a:p>
+            <a:pPr algn="ctr"/>
+          </a:p>
+        </p:txBody>
+      </p:sp>
+      <p:sp>
+        <p:nvSpPr>
           <p:cNvPr id="27" name="TextBox 26"/>
           <p:cNvSpPr txBox="1"/>
           <p:nvPr/>
         </p:nvSpPr>
         <p:spPr>
           <a:xfrm>
-            <a:off x="1600200" y="4059936"/>
-            <a:ext cx="1280160" cy="310896"/>
+            <a:off x="11140135" y="3236976"/>
+            <a:ext cx="384048" cy="384048"/>
           </a:xfrm>
           <a:prstGeom prst="rect">
             <a:avLst/>
@@ -6589,24 +6600,24 @@
           <a:noFill/>
         </p:spPr>
         <p:txBody>
-          <a:bodyPr wrap="none">
+          <a:bodyPr wrap="square" anchor="ctr">
             <a:spAutoFit/>
           </a:bodyPr>
           <a:lstStyle/>
           <a:p>
             <a:pPr algn="ctr">
               <a:spcAft>
-                <a:spcPts val="1000"/>
-              </a:spcAft>
-            </a:pPr>
-            <a:r>
-              <a:rPr sz="1800" b="1">
-                <a:solidFill>
-                  <a:srgbClr val="28462D"/>
-                </a:solidFill>
-                <a:latin typeface="Microsoft YaHei"/>
-              </a:rPr>
-              <a:t>规律</a:t>
+                <a:spcPts val="300"/>
+              </a:spcAft>
+            </a:pPr>
+            <a:r>
+              <a:rPr sz="1200" b="1">
+                <a:solidFill>
+                  <a:srgbClr val="C83C23"/>
+                </a:solidFill>
+                <a:latin typeface="KaiTi"/>
+              </a:rPr>
+              <a:t>肆</a:t>
             </a:r>
           </a:p>
         </p:txBody>
@@ -6619,8 +6630,8 @@
         </p:nvSpPr>
         <p:spPr>
           <a:xfrm>
-            <a:off x="3017520" y="4041648"/>
-            <a:ext cx="7498079" cy="658368"/>
+            <a:off x="6310731" y="3264408"/>
+            <a:ext cx="5250027" cy="2148840"/>
           </a:xfrm>
           <a:prstGeom prst="rect">
             <a:avLst/>
@@ -6628,20 +6639,52 @@
           <a:noFill/>
         </p:spPr>
         <p:txBody>
-          <a:bodyPr wrap="none">
+          <a:bodyPr wrap="square" anchor="t">
             <a:spAutoFit/>
           </a:bodyPr>
           <a:lstStyle/>
           <a:p>
             <a:pPr algn="l">
               <a:spcAft>
-                <a:spcPts val="1000"/>
-              </a:spcAft>
-            </a:pPr>
-            <a:r>
-              <a:rPr sz="2100" b="0">
-                <a:solidFill>
-                  <a:srgbClr val="28462D"/>
+                <a:spcPts val="300"/>
+              </a:spcAft>
+            </a:pPr>
+            <a:r>
+              <a:rPr sz="1800" b="1">
+                <a:solidFill>
+                  <a:srgbClr val="4A7C6F"/>
+                </a:solidFill>
+                <a:latin typeface="KaiTi"/>
+              </a:rPr>
+              <a:t>规律</a:t>
+            </a:r>
+          </a:p>
+          <a:p>
+            <a:pPr algn="l">
+              <a:spcAft>
+                <a:spcPts val="300"/>
+              </a:spcAft>
+            </a:pPr>
+            <a:r>
+              <a:rPr sz="400" b="0">
+                <a:solidFill>
+                  <a:srgbClr val="1E1E1E"/>
+                </a:solidFill>
+                <a:latin typeface="Microsoft YaHei"/>
+              </a:rPr>
+              <a:t/>
+            </a:r>
+          </a:p>
+          <a:p>
+            <a:pPr algn="l">
+              <a:spcAft>
+                <a:spcPts val="300"/>
+              </a:spcAft>
+            </a:pPr>
+            <a:r>
+              <a:rPr sz="1400" b="0">
+                <a:solidFill>
+                  <a:srgbClr val="1E1E1E"/>
                 </a:solidFill>
                 <a:latin typeface="Microsoft YaHei"/>
               </a:rPr>
@@ -6668,20 +6711,12 @@
         <p:nvPr/>
       </p:nvGrpSpPr>
       <p:grpSpPr/>
-      <p:pic>
-        <p:nvPicPr>
-          <p:cNvPr id="2" name="Picture 1" descr="bg_nuwa.png"/>
-          <p:cNvPicPr>
-            <a:picLocks noChangeAspect="1"/>
-          </p:cNvPicPr>
-          <p:nvPr/>
-        </p:nvPicPr>
-        <p:blipFill>
-          <a:blip r:embed="rId2"/>
-          <a:stretch>
-            <a:fillRect/>
-          </a:stretch>
-        </p:blipFill>
+      <p:sp>
+        <p:nvSpPr>
+          <p:cNvPr id="2" name="Rectangle 1"/>
+          <p:cNvSpPr/>
+          <p:nvPr/>
+        </p:nvSpPr>
         <p:spPr>
           <a:xfrm>
             <a:off x="0" y="0"/>
@@ -6690,27 +6725,11 @@
           <a:prstGeom prst="rect">
             <a:avLst/>
           </a:prstGeom>
-        </p:spPr>
-      </p:pic>
-      <p:sp>
-        <p:nvSpPr>
-          <p:cNvPr id="3" name="Rectangle 2"/>
-          <p:cNvSpPr/>
-          <p:nvPr/>
-        </p:nvSpPr>
-        <p:spPr>
-          <a:xfrm>
-            <a:off x="292608" y="274320"/>
-            <a:ext cx="11594592" cy="6300216"/>
-          </a:xfrm>
-          <a:prstGeom prst="rect">
-            <a:avLst/>
-          </a:prstGeom>
-          <a:noFill/>
-          <a:ln w="31750">
-            <a:solidFill>
-              <a:srgbClr val="5A8C5A"/>
-            </a:solidFill>
+          <a:solidFill>
+            <a:srgbClr val="F4F1EA"/>
+          </a:solidFill>
+          <a:ln>
+            <a:noFill/>
           </a:ln>
         </p:spPr>
         <p:style>
@@ -6735,73 +6754,25 @@
           </a:p>
         </p:txBody>
       </p:sp>
-      <p:pic>
-        <p:nvPicPr>
-          <p:cNvPr id="4" name="Picture 3" descr="corner_nuwa_tl.png"/>
-          <p:cNvPicPr>
-            <a:picLocks noChangeAspect="1"/>
-          </p:cNvPicPr>
-          <p:nvPr/>
-        </p:nvPicPr>
-        <p:blipFill>
-          <a:blip r:embed="rId3"/>
-          <a:stretch>
-            <a:fillRect/>
-          </a:stretch>
-        </p:blipFill>
-        <p:spPr>
-          <a:xfrm>
-            <a:off x="-45720" y="-45720"/>
-            <a:ext cx="2011680" cy="2011680"/>
-          </a:xfrm>
-          <a:prstGeom prst="rect">
-            <a:avLst/>
-          </a:prstGeom>
-        </p:spPr>
-      </p:pic>
-      <p:pic>
-        <p:nvPicPr>
-          <p:cNvPr id="5" name="Picture 4" descr="corner_nuwa_tr.png"/>
-          <p:cNvPicPr>
-            <a:picLocks noChangeAspect="1"/>
-          </p:cNvPicPr>
-          <p:nvPr/>
-        </p:nvPicPr>
-        <p:blipFill>
-          <a:blip r:embed="rId4"/>
-          <a:stretch>
-            <a:fillRect/>
-          </a:stretch>
-        </p:blipFill>
-        <p:spPr>
-          <a:xfrm>
-            <a:off x="9875520" y="-45720"/>
-            <a:ext cx="2011680" cy="2011680"/>
-          </a:xfrm>
-          <a:prstGeom prst="rect">
-            <a:avLst/>
-          </a:prstGeom>
-        </p:spPr>
-      </p:pic>
-      <p:sp>
-        <p:nvSpPr>
-          <p:cNvPr id="6" name="Rounded Rectangle 5"/>
+      <p:sp>
+        <p:nvSpPr>
+          <p:cNvPr id="3" name="Rectangle 2"/>
           <p:cNvSpPr/>
           <p:nvPr/>
         </p:nvSpPr>
         <p:spPr>
           <a:xfrm>
-            <a:off x="502920" y="384048"/>
-            <a:ext cx="2011680" cy="384048"/>
-          </a:xfrm>
-          <a:prstGeom prst="roundRect">
-            <a:avLst/>
-          </a:prstGeom>
-          <a:solidFill>
-            <a:srgbClr val="468250"/>
-          </a:solidFill>
-          <a:ln>
-            <a:noFill/>
+            <a:off x="548640" y="347472"/>
+            <a:ext cx="365760" cy="365760"/>
+          </a:xfrm>
+          <a:prstGeom prst="rect">
+            <a:avLst/>
+          </a:prstGeom>
+          <a:noFill/>
+          <a:ln w="25400">
+            <a:solidFill>
+              <a:srgbClr val="C83C23"/>
+            </a:solidFill>
           </a:ln>
         </p:spPr>
         <p:style>
@@ -6828,14 +6799,14 @@
       </p:sp>
       <p:sp>
         <p:nvSpPr>
-          <p:cNvPr id="7" name="TextBox 6"/>
+          <p:cNvPr id="4" name="TextBox 3"/>
           <p:cNvSpPr txBox="1"/>
           <p:nvPr/>
         </p:nvSpPr>
         <p:spPr>
           <a:xfrm>
-            <a:off x="502920" y="402336"/>
-            <a:ext cx="2011680" cy="347472"/>
+            <a:off x="548640" y="347472"/>
+            <a:ext cx="365760" cy="365760"/>
           </a:xfrm>
           <a:prstGeom prst="rect">
             <a:avLst/>
@@ -6843,38 +6814,38 @@
           <a:noFill/>
         </p:spPr>
         <p:txBody>
-          <a:bodyPr wrap="none">
+          <a:bodyPr wrap="square" anchor="ctr">
             <a:spAutoFit/>
           </a:bodyPr>
           <a:lstStyle/>
           <a:p>
             <a:pPr algn="ctr">
               <a:spcAft>
-                <a:spcPts val="1000"/>
-              </a:spcAft>
-            </a:pPr>
-            <a:r>
-              <a:rPr sz="1600" b="1">
-                <a:solidFill>
-                  <a:srgbClr val="FFFFFF"/>
-                </a:solidFill>
-                <a:latin typeface="Microsoft YaHei"/>
-              </a:rPr>
-              <a:t>主题笔记</a:t>
-            </a:r>
-          </a:p>
-        </p:txBody>
-      </p:sp>
-      <p:sp>
-        <p:nvSpPr>
-          <p:cNvPr id="8" name="TextBox 7"/>
+                <a:spcPts val="300"/>
+              </a:spcAft>
+            </a:pPr>
+            <a:r>
+              <a:rPr sz="1000" b="1">
+                <a:solidFill>
+                  <a:srgbClr val="C83C23"/>
+                </a:solidFill>
+                <a:latin typeface="KaiTi"/>
+              </a:rPr>
+              <a:t>05</a:t>
+            </a:r>
+          </a:p>
+        </p:txBody>
+      </p:sp>
+      <p:sp>
+        <p:nvSpPr>
+          <p:cNvPr id="5" name="TextBox 4"/>
           <p:cNvSpPr txBox="1"/>
           <p:nvPr/>
         </p:nvSpPr>
         <p:spPr>
           <a:xfrm>
-            <a:off x="1371600" y="384048"/>
-            <a:ext cx="9418320" cy="822960"/>
+            <a:off x="1024128" y="347472"/>
+            <a:ext cx="7766090" cy="365760"/>
           </a:xfrm>
           <a:prstGeom prst="rect">
             <a:avLst/>
@@ -6882,49 +6853,86 @@
           <a:noFill/>
         </p:spPr>
         <p:txBody>
-          <a:bodyPr wrap="square">
+          <a:bodyPr wrap="square" anchor="t">
             <a:spAutoFit/>
           </a:bodyPr>
           <a:lstStyle/>
           <a:p>
-            <a:pPr algn="ctr">
-              <a:spcAft>
-                <a:spcPts val="1000"/>
-              </a:spcAft>
-            </a:pPr>
-            <a:r>
-              <a:rPr sz="3400" b="1">
-                <a:solidFill>
-                  <a:srgbClr val="468250"/>
+            <a:pPr algn="l">
+              <a:spcAft>
+                <a:spcPts val="300"/>
+              </a:spcAft>
+            </a:pPr>
+            <a:r>
+              <a:rPr sz="2000" b="1">
+                <a:solidFill>
+                  <a:srgbClr val="1E1E1E"/>
+                </a:solidFill>
+                <a:latin typeface="KaiTi"/>
+              </a:rPr>
+              <a:t>比较阅读</a:t>
+            </a:r>
+          </a:p>
+        </p:txBody>
+      </p:sp>
+      <p:sp>
+        <p:nvSpPr>
+          <p:cNvPr id="6" name="TextBox 5"/>
+          <p:cNvSpPr txBox="1"/>
+          <p:nvPr/>
+        </p:nvSpPr>
+        <p:spPr>
+          <a:xfrm>
+            <a:off x="8869451" y="347472"/>
+            <a:ext cx="2773603" cy="320040"/>
+          </a:xfrm>
+          <a:prstGeom prst="rect">
+            <a:avLst/>
+          </a:prstGeom>
+          <a:noFill/>
+        </p:spPr>
+        <p:txBody>
+          <a:bodyPr wrap="square" anchor="t">
+            <a:spAutoFit/>
+          </a:bodyPr>
+          <a:lstStyle/>
+          <a:p>
+            <a:pPr algn="r">
+              <a:spcAft>
+                <a:spcPts val="300"/>
+              </a:spcAft>
+            </a:pPr>
+            <a:r>
+              <a:rPr sz="1100" b="0">
+                <a:solidFill>
+                  <a:srgbClr val="5A6A62"/>
                 </a:solidFill>
                 <a:latin typeface="Microsoft YaHei"/>
               </a:rPr>
-              <a:t>比较阅读</a:t>
-            </a:r>
-          </a:p>
-        </p:txBody>
-      </p:sp>
-      <p:sp>
-        <p:nvSpPr>
-          <p:cNvPr id="9" name="Rounded Rectangle 8"/>
+              <a:t>卷 5/7</a:t>
+            </a:r>
+          </a:p>
+        </p:txBody>
+      </p:sp>
+      <p:sp>
+        <p:nvSpPr>
+          <p:cNvPr id="7" name="Rectangle 6"/>
           <p:cNvSpPr/>
           <p:nvPr/>
         </p:nvSpPr>
         <p:spPr>
           <a:xfrm>
-            <a:off x="1067104" y="1143000"/>
-            <a:ext cx="10058400" cy="3721608"/>
-          </a:xfrm>
-          <a:prstGeom prst="roundRect">
+            <a:off x="548640" y="768096"/>
+            <a:ext cx="11094415" cy="9144"/>
+          </a:xfrm>
+          <a:prstGeom prst="rect">
             <a:avLst/>
           </a:prstGeom>
           <a:solidFill>
-            <a:srgbClr val="FFFCEB"/>
+            <a:srgbClr val="5A6A62"/>
           </a:solidFill>
-          <a:ln w="25400">
-            <a:solidFill>
-              <a:srgbClr val="5A8C5A"/>
-            </a:solidFill>
+          <a:ln>
+            <a:noFill/>
           </a:ln>
         </p:spPr>
         <p:style>
@@ -6951,20 +6959,59 @@
       </p:sp>
       <p:sp>
         <p:nvSpPr>
-          <p:cNvPr id="10" name="Rectangle 9"/>
+          <p:cNvPr id="8" name="TextBox 7"/>
+          <p:cNvSpPr txBox="1"/>
+          <p:nvPr/>
+        </p:nvSpPr>
+        <p:spPr>
+          <a:xfrm>
+            <a:off x="548640" y="704088"/>
+            <a:ext cx="11094415" cy="201168"/>
+          </a:xfrm>
+          <a:prstGeom prst="rect">
+            <a:avLst/>
+          </a:prstGeom>
+          <a:noFill/>
+        </p:spPr>
+        <p:txBody>
+          <a:bodyPr wrap="square" anchor="t">
+            <a:spAutoFit/>
+          </a:bodyPr>
+          <a:lstStyle/>
+          <a:p>
+            <a:pPr algn="ctr">
+              <a:spcAft>
+                <a:spcPts val="300"/>
+              </a:spcAft>
+            </a:pPr>
+            <a:r>
+              <a:rPr sz="900" b="0">
+                <a:solidFill>
+                  <a:srgbClr val="5A6A62"/>
+                </a:solidFill>
+                <a:latin typeface="Microsoft YaHei"/>
+              </a:rPr>
+              <a:t>～ ～ ～ ～ ～ ～ ～ ～ ～ ～ ～ ～</a:t>
+            </a:r>
+          </a:p>
+        </p:txBody>
+      </p:sp>
+      <p:sp>
+        <p:nvSpPr>
+          <p:cNvPr id="9" name="Rectangle 8"/>
           <p:cNvSpPr/>
           <p:nvPr/>
         </p:nvSpPr>
         <p:spPr>
           <a:xfrm>
-            <a:off x="1067104" y="1143000"/>
-            <a:ext cx="10058400" cy="384048"/>
+            <a:off x="548640" y="658368"/>
+            <a:ext cx="5455767" cy="3246120"/>
           </a:xfrm>
           <a:prstGeom prst="rect">
             <a:avLst/>
           </a:prstGeom>
           <a:solidFill>
-            <a:srgbClr val="468250"/>
+            <a:srgbClr val="D8E6DF"/>
           </a:solidFill>
           <a:ln>
             <a:noFill/>
@@ -6994,59 +7041,20 @@
       </p:sp>
       <p:sp>
         <p:nvSpPr>
-          <p:cNvPr id="11" name="TextBox 10"/>
-          <p:cNvSpPr txBox="1"/>
-          <p:nvPr/>
-        </p:nvSpPr>
-        <p:spPr>
-          <a:xfrm>
-            <a:off x="1067104" y="1179576"/>
-            <a:ext cx="10058400" cy="347472"/>
-          </a:xfrm>
-          <a:prstGeom prst="rect">
-            <a:avLst/>
-          </a:prstGeom>
-          <a:noFill/>
-        </p:spPr>
-        <p:txBody>
-          <a:bodyPr wrap="none">
-            <a:spAutoFit/>
-          </a:bodyPr>
-          <a:lstStyle/>
-          <a:p>
-            <a:pPr algn="ctr">
-              <a:spcAft>
-                <a:spcPts val="1000"/>
-              </a:spcAft>
-            </a:pPr>
-            <a:r>
-              <a:rPr sz="1800" b="1">
-                <a:solidFill>
-                  <a:srgbClr val="FFFFFF"/>
-                </a:solidFill>
-                <a:latin typeface="Microsoft YaHei"/>
-              </a:rPr>
-              <a:t>📝  课堂笔记  —  请摘抄要点</a:t>
-            </a:r>
-          </a:p>
-        </p:txBody>
-      </p:sp>
-      <p:sp>
-        <p:nvSpPr>
-          <p:cNvPr id="12" name="Rectangle 11"/>
+          <p:cNvPr id="10" name="Rectangle 9"/>
           <p:cNvSpPr/>
           <p:nvPr/>
         </p:nvSpPr>
         <p:spPr>
           <a:xfrm>
-            <a:off x="1570024" y="1527048"/>
-            <a:ext cx="27432" cy="3337560"/>
+            <a:off x="548640" y="658368"/>
+            <a:ext cx="45720" cy="3246120"/>
           </a:xfrm>
           <a:prstGeom prst="rect">
             <a:avLst/>
           </a:prstGeom>
           <a:solidFill>
-            <a:srgbClr val="DC5050"/>
+            <a:srgbClr val="4A7C6F"/>
           </a:solidFill>
           <a:ln>
             <a:noFill/>
@@ -7076,20 +7084,139 @@
       </p:sp>
       <p:sp>
         <p:nvSpPr>
-          <p:cNvPr id="13" name="Rectangle 12"/>
+          <p:cNvPr id="11" name="TextBox 10"/>
+          <p:cNvSpPr txBox="1"/>
+          <p:nvPr/>
+        </p:nvSpPr>
+        <p:spPr>
+          <a:xfrm>
+            <a:off x="694944" y="768096"/>
+            <a:ext cx="5254599" cy="3081528"/>
+          </a:xfrm>
+          <a:prstGeom prst="rect">
+            <a:avLst/>
+          </a:prstGeom>
+          <a:noFill/>
+        </p:spPr>
+        <p:txBody>
+          <a:bodyPr wrap="square" anchor="t">
+            <a:spAutoFit/>
+          </a:bodyPr>
+          <a:lstStyle/>
+          <a:p>
+            <a:pPr algn="l">
+              <a:spcAft>
+                <a:spcPts val="300"/>
+              </a:spcAft>
+            </a:pPr>
+            <a:r>
+              <a:rPr sz="1600" b="1">
+                <a:solidFill>
+                  <a:srgbClr val="4A7C6F"/>
+                </a:solidFill>
+                <a:latin typeface="KaiTi"/>
+              </a:rPr>
+              <a:t>《风俗通》古籍原文</a:t>
+            </a:r>
+          </a:p>
+          <a:p>
+            <a:pPr algn="l">
+              <a:spcAft>
+                <a:spcPts val="300"/>
+              </a:spcAft>
+            </a:pPr>
+            <a:r>
+              <a:rPr sz="600" b="0">
+                <a:solidFill>
+                  <a:srgbClr val="1E1E1E"/>
+                </a:solidFill>
+                <a:latin typeface="Microsoft YaHei"/>
+              </a:rPr>
+              <a:t/>
+            </a:r>
+          </a:p>
+          <a:p>
+            <a:pPr algn="l">
+              <a:spcAft>
+                <a:spcPts val="300"/>
+              </a:spcAft>
+            </a:pPr>
+            <a:r>
+              <a:rPr sz="1500" b="0">
+                <a:solidFill>
+                  <a:srgbClr val="1E1E1E"/>
+                </a:solidFill>
+                <a:latin typeface="Microsoft YaHei"/>
+              </a:rPr>
+              <a:t>文字简洁，重在说明造人方法。</a:t>
+            </a:r>
+          </a:p>
+          <a:p>
+            <a:pPr algn="l">
+              <a:spcAft>
+                <a:spcPts val="300"/>
+              </a:spcAft>
+            </a:pPr>
+            <a:r>
+              <a:rPr sz="600" b="0">
+                <a:solidFill>
+                  <a:srgbClr val="1E1E1E"/>
+                </a:solidFill>
+                <a:latin typeface="Microsoft YaHei"/>
+              </a:rPr>
+              <a:t/>
+            </a:r>
+          </a:p>
+          <a:p>
+            <a:pPr algn="l">
+              <a:spcAft>
+                <a:spcPts val="300"/>
+              </a:spcAft>
+            </a:pPr>
+            <a:r>
+              <a:rPr sz="1400" b="0">
+                <a:solidFill>
+                  <a:srgbClr val="5A6A62"/>
+                </a:solidFill>
+                <a:latin typeface="Microsoft YaHei"/>
+              </a:rPr>
+              <a:t>「女娲抟黄土作人……</a:t>
+            </a:r>
+          </a:p>
+          <a:p>
+            <a:pPr algn="l">
+              <a:spcAft>
+                <a:spcPts val="300"/>
+              </a:spcAft>
+            </a:pPr>
+            <a:r>
+              <a:rPr sz="1400" b="0">
+                <a:solidFill>
+                  <a:srgbClr val="5A6A62"/>
+                </a:solidFill>
+                <a:latin typeface="Microsoft YaHei"/>
+              </a:rPr>
+              <a:t>引绳于泥中，举以为人。」</a:t>
+            </a:r>
+          </a:p>
+        </p:txBody>
+      </p:sp>
+      <p:sp>
+        <p:nvSpPr>
+          <p:cNvPr id="12" name="Rectangle 11"/>
           <p:cNvSpPr/>
           <p:nvPr/>
         </p:nvSpPr>
         <p:spPr>
           <a:xfrm>
-            <a:off x="1417320" y="2276856"/>
-            <a:ext cx="9601200" cy="13716"/>
+            <a:off x="6187287" y="658368"/>
+            <a:ext cx="5455767" cy="3246120"/>
           </a:xfrm>
           <a:prstGeom prst="rect">
             <a:avLst/>
           </a:prstGeom>
           <a:solidFill>
-            <a:srgbClr val="D2C8AF"/>
+            <a:srgbClr val="E4EDE8"/>
           </a:solidFill>
           <a:ln>
             <a:noFill/>
@@ -7119,20 +7246,20 @@
       </p:sp>
       <p:sp>
         <p:nvSpPr>
-          <p:cNvPr id="14" name="Rounded Rectangle 13"/>
+          <p:cNvPr id="13" name="Rectangle 12"/>
           <p:cNvSpPr/>
           <p:nvPr/>
         </p:nvSpPr>
         <p:spPr>
           <a:xfrm>
-            <a:off x="1600200" y="1627632"/>
-            <a:ext cx="1737360" cy="347472"/>
-          </a:xfrm>
-          <a:prstGeom prst="roundRect">
+            <a:off x="6187287" y="658368"/>
+            <a:ext cx="45720" cy="3246120"/>
+          </a:xfrm>
+          <a:prstGeom prst="rect">
             <a:avLst/>
           </a:prstGeom>
           <a:solidFill>
-            <a:srgbClr val="A0C896"/>
+            <a:srgbClr val="4A7C6F"/>
           </a:solidFill>
           <a:ln>
             <a:noFill/>
@@ -7162,14 +7289,14 @@
       </p:sp>
       <p:sp>
         <p:nvSpPr>
-          <p:cNvPr id="15" name="TextBox 14"/>
+          <p:cNvPr id="14" name="TextBox 13"/>
           <p:cNvSpPr txBox="1"/>
           <p:nvPr/>
         </p:nvSpPr>
         <p:spPr>
           <a:xfrm>
-            <a:off x="1600200" y="1645920"/>
-            <a:ext cx="1737360" cy="310896"/>
+            <a:off x="6333591" y="768096"/>
+            <a:ext cx="5254599" cy="3081528"/>
           </a:xfrm>
           <a:prstGeom prst="rect">
             <a:avLst/>
@@ -7177,86 +7304,97 @@
           <a:noFill/>
         </p:spPr>
         <p:txBody>
-          <a:bodyPr wrap="none">
+          <a:bodyPr wrap="square" anchor="t">
             <a:spAutoFit/>
           </a:bodyPr>
           <a:lstStyle/>
           <a:p>
-            <a:pPr algn="ctr">
-              <a:spcAft>
-                <a:spcPts val="1000"/>
-              </a:spcAft>
-            </a:pPr>
-            <a:r>
-              <a:rPr sz="1800" b="1">
-                <a:solidFill>
-                  <a:srgbClr val="28462D"/>
+            <a:pPr algn="l">
+              <a:spcAft>
+                <a:spcPts val="300"/>
+              </a:spcAft>
+            </a:pPr>
+            <a:r>
+              <a:rPr sz="1600" b="1">
+                <a:solidFill>
+                  <a:srgbClr val="4A7C6F"/>
+                </a:solidFill>
+                <a:latin typeface="KaiTi"/>
+              </a:rPr>
+              <a:t>课文改写</a:t>
+            </a:r>
+          </a:p>
+          <a:p>
+            <a:pPr algn="l">
+              <a:spcAft>
+                <a:spcPts val="300"/>
+              </a:spcAft>
+            </a:pPr>
+            <a:r>
+              <a:rPr sz="600" b="0">
+                <a:solidFill>
+                  <a:srgbClr val="1E1E1E"/>
                 </a:solidFill>
                 <a:latin typeface="Microsoft YaHei"/>
               </a:rPr>
-              <a:t>《风俗通》</a:t>
-            </a:r>
-          </a:p>
-        </p:txBody>
-      </p:sp>
-      <p:sp>
-        <p:nvSpPr>
-          <p:cNvPr id="16" name="TextBox 15"/>
-          <p:cNvSpPr txBox="1"/>
-          <p:nvPr/>
-        </p:nvSpPr>
-        <p:spPr>
-          <a:xfrm>
-            <a:off x="3474720" y="1627632"/>
-            <a:ext cx="7040879" cy="658368"/>
-          </a:xfrm>
-          <a:prstGeom prst="rect">
-            <a:avLst/>
-          </a:prstGeom>
-          <a:noFill/>
-        </p:spPr>
-        <p:txBody>
-          <a:bodyPr wrap="none">
-            <a:spAutoFit/>
-          </a:bodyPr>
-          <a:lstStyle/>
+              <a:t/>
+            </a:r>
+          </a:p>
           <a:p>
             <a:pPr algn="l">
               <a:spcAft>
-                <a:spcPts val="1000"/>
-              </a:spcAft>
-            </a:pPr>
-            <a:r>
-              <a:rPr sz="2100" b="0">
-                <a:solidFill>
-                  <a:srgbClr val="28462D"/>
+                <a:spcPts val="300"/>
+              </a:spcAft>
+            </a:pPr>
+            <a:r>
+              <a:rPr sz="1500" b="0">
+                <a:solidFill>
+                  <a:srgbClr val="1E1E1E"/>
                 </a:solidFill>
                 <a:latin typeface="Microsoft YaHei"/>
               </a:rPr>
-              <a:t>记载简洁，重在说明造人方法</a:t>
-            </a:r>
-          </a:p>
-        </p:txBody>
-      </p:sp>
-      <p:sp>
-        <p:nvSpPr>
-          <p:cNvPr id="17" name="Rectangle 16"/>
+              <a:t>增加孤独心理、造人细节</a:t>
+            </a:r>
+          </a:p>
+          <a:p>
+            <a:pPr algn="l">
+              <a:spcAft>
+                <a:spcPts val="300"/>
+              </a:spcAft>
+            </a:pPr>
+            <a:r>
+              <a:rPr sz="1500" b="0">
+                <a:solidFill>
+                  <a:srgbClr val="1E1E1E"/>
+                </a:solidFill>
+                <a:latin typeface="Microsoft YaHei"/>
+              </a:rPr>
+              <a:t>与情感描写，更具温度。</a:t>
+            </a:r>
+          </a:p>
+        </p:txBody>
+      </p:sp>
+      <p:sp>
+        <p:nvSpPr>
+          <p:cNvPr id="15" name="Rectangle 14"/>
           <p:cNvSpPr/>
           <p:nvPr/>
         </p:nvSpPr>
         <p:spPr>
           <a:xfrm>
-            <a:off x="1417320" y="3081527"/>
-            <a:ext cx="9601200" cy="13716"/>
+            <a:off x="548640" y="4114800"/>
+            <a:ext cx="11094415" cy="1874519"/>
           </a:xfrm>
           <a:prstGeom prst="rect">
             <a:avLst/>
           </a:prstGeom>
           <a:solidFill>
-            <a:srgbClr val="D2C8AF"/>
+            <a:srgbClr val="F4F1EA"/>
           </a:solidFill>
-          <a:ln>
-            <a:noFill/>
+          <a:ln w="25400">
+            <a:solidFill>
+              <a:srgbClr val="C83C23"/>
+            </a:solidFill>
           </a:ln>
         </p:spPr>
         <p:style>
@@ -7283,20 +7421,20 @@
       </p:sp>
       <p:sp>
         <p:nvSpPr>
-          <p:cNvPr id="18" name="Rounded Rectangle 17"/>
+          <p:cNvPr id="16" name="Rectangle 15"/>
           <p:cNvSpPr/>
           <p:nvPr/>
         </p:nvSpPr>
         <p:spPr>
           <a:xfrm>
-            <a:off x="1600200" y="2432303"/>
-            <a:ext cx="1280160" cy="347472"/>
-          </a:xfrm>
-          <a:prstGeom prst="roundRect">
+            <a:off x="548640" y="4114800"/>
+            <a:ext cx="54864" cy="1874519"/>
+          </a:xfrm>
+          <a:prstGeom prst="rect">
             <a:avLst/>
           </a:prstGeom>
           <a:solidFill>
-            <a:srgbClr val="A0C896"/>
+            <a:srgbClr val="4A7C6F"/>
           </a:solidFill>
           <a:ln>
             <a:noFill/>
@@ -7326,14 +7464,14 @@
       </p:sp>
       <p:sp>
         <p:nvSpPr>
-          <p:cNvPr id="19" name="TextBox 18"/>
+          <p:cNvPr id="17" name="TextBox 16"/>
           <p:cNvSpPr txBox="1"/>
           <p:nvPr/>
         </p:nvSpPr>
         <p:spPr>
           <a:xfrm>
-            <a:off x="1600200" y="2450591"/>
-            <a:ext cx="1280160" cy="310896"/>
+            <a:off x="731520" y="4251960"/>
+            <a:ext cx="10774375" cy="1600200"/>
           </a:xfrm>
           <a:prstGeom prst="rect">
             <a:avLst/>
@@ -7341,391 +7479,56 @@
           <a:noFill/>
         </p:spPr>
         <p:txBody>
-          <a:bodyPr wrap="none">
+          <a:bodyPr wrap="square" anchor="t">
             <a:spAutoFit/>
           </a:bodyPr>
           <a:lstStyle/>
           <a:p>
-            <a:pPr algn="ctr">
-              <a:spcAft>
-                <a:spcPts val="1000"/>
-              </a:spcAft>
-            </a:pPr>
-            <a:r>
-              <a:rPr sz="1800" b="1">
-                <a:solidFill>
-                  <a:srgbClr val="28462D"/>
+            <a:pPr algn="l">
+              <a:spcAft>
+                <a:spcPts val="300"/>
+              </a:spcAft>
+            </a:pPr>
+            <a:r>
+              <a:rPr sz="1400" b="1">
+                <a:solidFill>
+                  <a:srgbClr val="C83C23"/>
+                </a:solidFill>
+                <a:latin typeface="KaiTi"/>
+              </a:rPr>
+              <a:t>改写意图与主题</a:t>
+            </a:r>
+          </a:p>
+          <a:p>
+            <a:pPr algn="l">
+              <a:spcAft>
+                <a:spcPts val="300"/>
+              </a:spcAft>
+            </a:pPr>
+            <a:r>
+              <a:rPr sz="1600" b="1">
+                <a:solidFill>
+                  <a:srgbClr val="1E1E1E"/>
                 </a:solidFill>
                 <a:latin typeface="Microsoft YaHei"/>
               </a:rPr>
-              <a:t>课文</a:t>
-            </a:r>
-          </a:p>
-        </p:txBody>
-      </p:sp>
-      <p:sp>
-        <p:nvSpPr>
-          <p:cNvPr id="20" name="TextBox 19"/>
-          <p:cNvSpPr txBox="1"/>
-          <p:nvPr/>
-        </p:nvSpPr>
-        <p:spPr>
-          <a:xfrm>
-            <a:off x="3017520" y="2432303"/>
-            <a:ext cx="7498079" cy="658368"/>
-          </a:xfrm>
-          <a:prstGeom prst="rect">
-            <a:avLst/>
-          </a:prstGeom>
-          <a:noFill/>
-        </p:spPr>
-        <p:txBody>
-          <a:bodyPr wrap="none">
-            <a:spAutoFit/>
-          </a:bodyPr>
-          <a:lstStyle/>
+              <a:t>让神话更生动，表达对生命与创造的礼赞</a:t>
+            </a:r>
+          </a:p>
           <a:p>
             <a:pPr algn="l">
               <a:spcAft>
-                <a:spcPts val="1000"/>
-              </a:spcAft>
-            </a:pPr>
-            <a:r>
-              <a:rPr sz="2100" b="0">
-                <a:solidFill>
-                  <a:srgbClr val="28462D"/>
+                <a:spcPts val="300"/>
+              </a:spcAft>
+            </a:pPr>
+            <a:r>
+              <a:rPr sz="1400" b="0">
+                <a:solidFill>
+                  <a:srgbClr val="4A7C6F"/>
                 </a:solidFill>
                 <a:latin typeface="Microsoft YaHei"/>
               </a:rPr>
-              <a:t>增加孤独心理、造人细节、情感描写</a:t>
-            </a:r>
-          </a:p>
-        </p:txBody>
-      </p:sp>
-      <p:sp>
-        <p:nvSpPr>
-          <p:cNvPr id="21" name="Rectangle 20"/>
-          <p:cNvSpPr/>
-          <p:nvPr/>
-        </p:nvSpPr>
-        <p:spPr>
-          <a:xfrm>
-            <a:off x="1417320" y="3886200"/>
-            <a:ext cx="9601200" cy="13716"/>
-          </a:xfrm>
-          <a:prstGeom prst="rect">
-            <a:avLst/>
-          </a:prstGeom>
-          <a:solidFill>
-            <a:srgbClr val="D2C8AF"/>
-          </a:solidFill>
-          <a:ln>
-            <a:noFill/>
-          </a:ln>
-        </p:spPr>
-        <p:style>
-          <a:lnRef idx="1">
-            <a:schemeClr val="accent1"/>
-          </a:lnRef>
-          <a:fillRef idx="3">
-            <a:schemeClr val="accent1"/>
-          </a:fillRef>
-          <a:effectRef idx="2">
-            <a:schemeClr val="accent1"/>
-          </a:effectRef>
-          <a:fontRef idx="minor">
-            <a:schemeClr val="lt1"/>
-          </a:fontRef>
-        </p:style>
-        <p:txBody>
-          <a:bodyPr rtlCol="0" anchor="ctr"/>
-          <a:lstStyle/>
-          <a:p>
-            <a:pPr algn="ctr"/>
-          </a:p>
-        </p:txBody>
-      </p:sp>
-      <p:sp>
-        <p:nvSpPr>
-          <p:cNvPr id="22" name="Rounded Rectangle 21"/>
-          <p:cNvSpPr/>
-          <p:nvPr/>
-        </p:nvSpPr>
-        <p:spPr>
-          <a:xfrm>
-            <a:off x="1600200" y="3236976"/>
-            <a:ext cx="1444752" cy="347472"/>
-          </a:xfrm>
-          <a:prstGeom prst="roundRect">
-            <a:avLst/>
-          </a:prstGeom>
-          <a:solidFill>
-            <a:srgbClr val="A0C896"/>
-          </a:solidFill>
-          <a:ln>
-            <a:noFill/>
-          </a:ln>
-        </p:spPr>
-        <p:style>
-          <a:lnRef idx="1">
-            <a:schemeClr val="accent1"/>
-          </a:lnRef>
-          <a:fillRef idx="3">
-            <a:schemeClr val="accent1"/>
-          </a:fillRef>
-          <a:effectRef idx="2">
-            <a:schemeClr val="accent1"/>
-          </a:effectRef>
-          <a:fontRef idx="minor">
-            <a:schemeClr val="lt1"/>
-          </a:fontRef>
-        </p:style>
-        <p:txBody>
-          <a:bodyPr rtlCol="0" anchor="ctr"/>
-          <a:lstStyle/>
-          <a:p>
-            <a:pPr algn="ctr"/>
-          </a:p>
-        </p:txBody>
-      </p:sp>
-      <p:sp>
-        <p:nvSpPr>
-          <p:cNvPr id="23" name="TextBox 22"/>
-          <p:cNvSpPr txBox="1"/>
-          <p:nvPr/>
-        </p:nvSpPr>
-        <p:spPr>
-          <a:xfrm>
-            <a:off x="1600200" y="3255264"/>
-            <a:ext cx="1444752" cy="310896"/>
-          </a:xfrm>
-          <a:prstGeom prst="rect">
-            <a:avLst/>
-          </a:prstGeom>
-          <a:noFill/>
-        </p:spPr>
-        <p:txBody>
-          <a:bodyPr wrap="none">
-            <a:spAutoFit/>
-          </a:bodyPr>
-          <a:lstStyle/>
-          <a:p>
-            <a:pPr algn="ctr">
-              <a:spcAft>
-                <a:spcPts val="1000"/>
-              </a:spcAft>
-            </a:pPr>
-            <a:r>
-              <a:rPr sz="1800" b="1">
-                <a:solidFill>
-                  <a:srgbClr val="28462D"/>
-                </a:solidFill>
-                <a:latin typeface="Microsoft YaHei"/>
-              </a:rPr>
-              <a:t>改写意图</a:t>
-            </a:r>
-          </a:p>
-        </p:txBody>
-      </p:sp>
-      <p:sp>
-        <p:nvSpPr>
-          <p:cNvPr id="24" name="TextBox 23"/>
-          <p:cNvSpPr txBox="1"/>
-          <p:nvPr/>
-        </p:nvSpPr>
-        <p:spPr>
-          <a:xfrm>
-            <a:off x="3182112" y="3236976"/>
-            <a:ext cx="7333488" cy="658368"/>
-          </a:xfrm>
-          <a:prstGeom prst="rect">
-            <a:avLst/>
-          </a:prstGeom>
-          <a:noFill/>
-        </p:spPr>
-        <p:txBody>
-          <a:bodyPr wrap="none">
-            <a:spAutoFit/>
-          </a:bodyPr>
-          <a:lstStyle/>
-          <a:p>
-            <a:pPr algn="l">
-              <a:spcAft>
-                <a:spcPts val="1000"/>
-              </a:spcAft>
-            </a:pPr>
-            <a:r>
-              <a:rPr sz="2100" b="0">
-                <a:solidFill>
-                  <a:srgbClr val="28462D"/>
-                </a:solidFill>
-                <a:latin typeface="Microsoft YaHei"/>
-              </a:rPr>
-              <a:t>让神话更生动，表达对生命与创造的礼赞</a:t>
-            </a:r>
-          </a:p>
-        </p:txBody>
-      </p:sp>
-      <p:sp>
-        <p:nvSpPr>
-          <p:cNvPr id="25" name="Rectangle 24"/>
-          <p:cNvSpPr/>
-          <p:nvPr/>
-        </p:nvSpPr>
-        <p:spPr>
-          <a:xfrm>
-            <a:off x="1417320" y="4690872"/>
-            <a:ext cx="9601200" cy="13716"/>
-          </a:xfrm>
-          <a:prstGeom prst="rect">
-            <a:avLst/>
-          </a:prstGeom>
-          <a:solidFill>
-            <a:srgbClr val="D2C8AF"/>
-          </a:solidFill>
-          <a:ln>
-            <a:noFill/>
-          </a:ln>
-        </p:spPr>
-        <p:style>
-          <a:lnRef idx="1">
-            <a:schemeClr val="accent1"/>
-          </a:lnRef>
-          <a:fillRef idx="3">
-            <a:schemeClr val="accent1"/>
-          </a:fillRef>
-          <a:effectRef idx="2">
-            <a:schemeClr val="accent1"/>
-          </a:effectRef>
-          <a:fontRef idx="minor">
-            <a:schemeClr val="lt1"/>
-          </a:fontRef>
-        </p:style>
-        <p:txBody>
-          <a:bodyPr rtlCol="0" anchor="ctr"/>
-          <a:lstStyle/>
-          <a:p>
-            <a:pPr algn="ctr"/>
-          </a:p>
-        </p:txBody>
-      </p:sp>
-      <p:sp>
-        <p:nvSpPr>
-          <p:cNvPr id="26" name="Rounded Rectangle 25"/>
-          <p:cNvSpPr/>
-          <p:nvPr/>
-        </p:nvSpPr>
-        <p:spPr>
-          <a:xfrm>
-            <a:off x="1600200" y="4041648"/>
-            <a:ext cx="1444752" cy="347472"/>
-          </a:xfrm>
-          <a:prstGeom prst="roundRect">
-            <a:avLst/>
-          </a:prstGeom>
-          <a:solidFill>
-            <a:srgbClr val="A0C896"/>
-          </a:solidFill>
-          <a:ln>
-            <a:noFill/>
-          </a:ln>
-        </p:spPr>
-        <p:style>
-          <a:lnRef idx="1">
-            <a:schemeClr val="accent1"/>
-          </a:lnRef>
-          <a:fillRef idx="3">
-            <a:schemeClr val="accent1"/>
-          </a:fillRef>
-          <a:effectRef idx="2">
-            <a:schemeClr val="accent1"/>
-          </a:effectRef>
-          <a:fontRef idx="minor">
-            <a:schemeClr val="lt1"/>
-          </a:fontRef>
-        </p:style>
-        <p:txBody>
-          <a:bodyPr rtlCol="0" anchor="ctr"/>
-          <a:lstStyle/>
-          <a:p>
-            <a:pPr algn="ctr"/>
-          </a:p>
-        </p:txBody>
-      </p:sp>
-      <p:sp>
-        <p:nvSpPr>
-          <p:cNvPr id="27" name="TextBox 26"/>
-          <p:cNvSpPr txBox="1"/>
-          <p:nvPr/>
-        </p:nvSpPr>
-        <p:spPr>
-          <a:xfrm>
-            <a:off x="1600200" y="4059936"/>
-            <a:ext cx="1444752" cy="310896"/>
-          </a:xfrm>
-          <a:prstGeom prst="rect">
-            <a:avLst/>
-          </a:prstGeom>
-          <a:noFill/>
-        </p:spPr>
-        <p:txBody>
-          <a:bodyPr wrap="none">
-            <a:spAutoFit/>
-          </a:bodyPr>
-          <a:lstStyle/>
-          <a:p>
-            <a:pPr algn="ctr">
-              <a:spcAft>
-                <a:spcPts val="1000"/>
-              </a:spcAft>
-            </a:pPr>
-            <a:r>
-              <a:rPr sz="1800" b="1">
-                <a:solidFill>
-                  <a:srgbClr val="28462D"/>
-                </a:solidFill>
-                <a:latin typeface="Microsoft YaHei"/>
-              </a:rPr>
-              <a:t>策展主题</a:t>
-            </a:r>
-          </a:p>
-        </p:txBody>
-      </p:sp>
-      <p:sp>
-        <p:nvSpPr>
-          <p:cNvPr id="28" name="TextBox 27"/>
-          <p:cNvSpPr txBox="1"/>
-          <p:nvPr/>
-        </p:nvSpPr>
-        <p:spPr>
-          <a:xfrm>
-            <a:off x="3182112" y="4041648"/>
-            <a:ext cx="7333488" cy="658368"/>
-          </a:xfrm>
-          <a:prstGeom prst="rect">
-            <a:avLst/>
-          </a:prstGeom>
-          <a:noFill/>
-        </p:spPr>
-        <p:txBody>
-          <a:bodyPr wrap="none">
-            <a:spAutoFit/>
-          </a:bodyPr>
-          <a:lstStyle/>
-          <a:p>
-            <a:pPr algn="l">
-              <a:spcAft>
-                <a:spcPts val="1000"/>
-              </a:spcAft>
-            </a:pPr>
-            <a:r>
-              <a:rPr sz="2100" b="0">
-                <a:solidFill>
-                  <a:srgbClr val="28462D"/>
-                </a:solidFill>
-                <a:latin typeface="Microsoft YaHei"/>
-              </a:rPr>
-              <a:t>生命来之不易，创造值得珍视（创造与生命）</a:t>
+              <a:t>策展主题：生命来之不易，创造值得珍视（创造与生命）</a:t>
             </a:r>
           </a:p>
         </p:txBody>
@@ -7748,20 +7551,12 @@
         <p:nvPr/>
       </p:nvGrpSpPr>
       <p:grpSpPr/>
-      <p:pic>
-        <p:nvPicPr>
-          <p:cNvPr id="2" name="Picture 1" descr="bg_nuwa.png"/>
-          <p:cNvPicPr>
-            <a:picLocks noChangeAspect="1"/>
-          </p:cNvPicPr>
-          <p:nvPr/>
-        </p:nvPicPr>
-        <p:blipFill>
-          <a:blip r:embed="rId2"/>
-          <a:stretch>
-            <a:fillRect/>
-          </a:stretch>
-        </p:blipFill>
+      <p:sp>
+        <p:nvSpPr>
+          <p:cNvPr id="2" name="Rectangle 1"/>
+          <p:cNvSpPr/>
+          <p:nvPr/>
+        </p:nvSpPr>
         <p:spPr>
           <a:xfrm>
             <a:off x="0" y="0"/>
@@ -7770,27 +7565,11 @@
           <a:prstGeom prst="rect">
             <a:avLst/>
           </a:prstGeom>
-        </p:spPr>
-      </p:pic>
-      <p:sp>
-        <p:nvSpPr>
-          <p:cNvPr id="3" name="Rectangle 2"/>
-          <p:cNvSpPr/>
-          <p:nvPr/>
-        </p:nvSpPr>
-        <p:spPr>
-          <a:xfrm>
-            <a:off x="292608" y="274320"/>
-            <a:ext cx="11594592" cy="6300216"/>
-          </a:xfrm>
-          <a:prstGeom prst="rect">
-            <a:avLst/>
-          </a:prstGeom>
-          <a:noFill/>
-          <a:ln w="31750">
-            <a:solidFill>
-              <a:srgbClr val="5A8C5A"/>
-            </a:solidFill>
+          <a:solidFill>
+            <a:srgbClr val="F4F1EA"/>
+          </a:solidFill>
+          <a:ln>
+            <a:noFill/>
           </a:ln>
         </p:spPr>
         <p:style>
@@ -7815,73 +7594,25 @@
           </a:p>
         </p:txBody>
       </p:sp>
-      <p:pic>
-        <p:nvPicPr>
-          <p:cNvPr id="4" name="Picture 3" descr="corner_nuwa_tl.png"/>
-          <p:cNvPicPr>
-            <a:picLocks noChangeAspect="1"/>
-          </p:cNvPicPr>
-          <p:nvPr/>
-        </p:nvPicPr>
-        <p:blipFill>
-          <a:blip r:embed="rId3"/>
-          <a:stretch>
-            <a:fillRect/>
-          </a:stretch>
-        </p:blipFill>
-        <p:spPr>
-          <a:xfrm>
-            <a:off x="-45720" y="-45720"/>
-            <a:ext cx="2011680" cy="2011680"/>
-          </a:xfrm>
-          <a:prstGeom prst="rect">
-            <a:avLst/>
-          </a:prstGeom>
-        </p:spPr>
-      </p:pic>
-      <p:pic>
-        <p:nvPicPr>
-          <p:cNvPr id="5" name="Picture 4" descr="corner_nuwa_tr.png"/>
-          <p:cNvPicPr>
-            <a:picLocks noChangeAspect="1"/>
-          </p:cNvPicPr>
-          <p:nvPr/>
-        </p:nvPicPr>
-        <p:blipFill>
-          <a:blip r:embed="rId4"/>
-          <a:stretch>
-            <a:fillRect/>
-          </a:stretch>
-        </p:blipFill>
-        <p:spPr>
-          <a:xfrm>
-            <a:off x="9875520" y="-45720"/>
-            <a:ext cx="2011680" cy="2011680"/>
-          </a:xfrm>
-          <a:prstGeom prst="rect">
-            <a:avLst/>
-          </a:prstGeom>
-        </p:spPr>
-      </p:pic>
-      <p:sp>
-        <p:nvSpPr>
-          <p:cNvPr id="6" name="Rounded Rectangle 5"/>
+      <p:sp>
+        <p:nvSpPr>
+          <p:cNvPr id="3" name="Rectangle 2"/>
           <p:cNvSpPr/>
           <p:nvPr/>
         </p:nvSpPr>
         <p:spPr>
           <a:xfrm>
-            <a:off x="502920" y="384048"/>
-            <a:ext cx="2011680" cy="384048"/>
-          </a:xfrm>
-          <a:prstGeom prst="roundRect">
-            <a:avLst/>
-          </a:prstGeom>
-          <a:solidFill>
-            <a:srgbClr val="3C9664"/>
-          </a:solidFill>
-          <a:ln>
-            <a:noFill/>
+            <a:off x="548640" y="347472"/>
+            <a:ext cx="365760" cy="365760"/>
+          </a:xfrm>
+          <a:prstGeom prst="rect">
+            <a:avLst/>
+          </a:prstGeom>
+          <a:noFill/>
+          <a:ln w="25400">
+            <a:solidFill>
+              <a:srgbClr val="C83C23"/>
+            </a:solidFill>
           </a:ln>
         </p:spPr>
         <p:style>
@@ -7908,14 +7639,14 @@
       </p:sp>
       <p:sp>
         <p:nvSpPr>
-          <p:cNvPr id="7" name="TextBox 6"/>
+          <p:cNvPr id="4" name="TextBox 3"/>
           <p:cNvSpPr txBox="1"/>
           <p:nvPr/>
         </p:nvSpPr>
         <p:spPr>
           <a:xfrm>
-            <a:off x="502920" y="402336"/>
-            <a:ext cx="2011680" cy="347472"/>
+            <a:off x="548640" y="347472"/>
+            <a:ext cx="365760" cy="365760"/>
           </a:xfrm>
           <a:prstGeom prst="rect">
             <a:avLst/>
@@ -7923,44 +7654,122 @@
           <a:noFill/>
         </p:spPr>
         <p:txBody>
-          <a:bodyPr wrap="none">
+          <a:bodyPr wrap="square" anchor="ctr">
             <a:spAutoFit/>
           </a:bodyPr>
           <a:lstStyle/>
           <a:p>
             <a:pPr algn="ctr">
               <a:spcAft>
-                <a:spcPts val="1000"/>
-              </a:spcAft>
-            </a:pPr>
-            <a:r>
-              <a:rPr sz="1600" b="1">
-                <a:solidFill>
-                  <a:srgbClr val="FFFFFF"/>
+                <a:spcPts val="300"/>
+              </a:spcAft>
+            </a:pPr>
+            <a:r>
+              <a:rPr sz="1000" b="1">
+                <a:solidFill>
+                  <a:srgbClr val="C83C23"/>
+                </a:solidFill>
+                <a:latin typeface="KaiTi"/>
+              </a:rPr>
+              <a:t>06</a:t>
+            </a:r>
+          </a:p>
+        </p:txBody>
+      </p:sp>
+      <p:sp>
+        <p:nvSpPr>
+          <p:cNvPr id="5" name="TextBox 4"/>
+          <p:cNvSpPr txBox="1"/>
+          <p:nvPr/>
+        </p:nvSpPr>
+        <p:spPr>
+          <a:xfrm>
+            <a:off x="1024128" y="347472"/>
+            <a:ext cx="7766090" cy="365760"/>
+          </a:xfrm>
+          <a:prstGeom prst="rect">
+            <a:avLst/>
+          </a:prstGeom>
+          <a:noFill/>
+        </p:spPr>
+        <p:txBody>
+          <a:bodyPr wrap="square" anchor="t">
+            <a:spAutoFit/>
+          </a:bodyPr>
+          <a:lstStyle/>
+          <a:p>
+            <a:pPr algn="l">
+              <a:spcAft>
+                <a:spcPts val="300"/>
+              </a:spcAft>
+            </a:pPr>
+            <a:r>
+              <a:rPr sz="2000" b="1">
+                <a:solidFill>
+                  <a:srgbClr val="1E1E1E"/>
+                </a:solidFill>
+                <a:latin typeface="KaiTi"/>
+              </a:rPr>
+              <a:t>课堂小结</a:t>
+            </a:r>
+          </a:p>
+        </p:txBody>
+      </p:sp>
+      <p:sp>
+        <p:nvSpPr>
+          <p:cNvPr id="6" name="TextBox 5"/>
+          <p:cNvSpPr txBox="1"/>
+          <p:nvPr/>
+        </p:nvSpPr>
+        <p:spPr>
+          <a:xfrm>
+            <a:off x="8869451" y="347472"/>
+            <a:ext cx="2773603" cy="320040"/>
+          </a:xfrm>
+          <a:prstGeom prst="rect">
+            <a:avLst/>
+          </a:prstGeom>
+          <a:noFill/>
+        </p:spPr>
+        <p:txBody>
+          <a:bodyPr wrap="square" anchor="t">
+            <a:spAutoFit/>
+          </a:bodyPr>
+          <a:lstStyle/>
+          <a:p>
+            <a:pPr algn="r">
+              <a:spcAft>
+                <a:spcPts val="300"/>
+              </a:spcAft>
+            </a:pPr>
+            <a:r>
+              <a:rPr sz="1100" b="0">
+                <a:solidFill>
+                  <a:srgbClr val="5A6A62"/>
                 </a:solidFill>
                 <a:latin typeface="Microsoft YaHei"/>
               </a:rPr>
-              <a:t>课堂活动</a:t>
-            </a:r>
-          </a:p>
-        </p:txBody>
-      </p:sp>
-      <p:sp>
-        <p:nvSpPr>
-          <p:cNvPr id="8" name="Rounded Rectangle 7"/>
+              <a:t>卷 6/7</a:t>
+            </a:r>
+          </a:p>
+        </p:txBody>
+      </p:sp>
+      <p:sp>
+        <p:nvSpPr>
+          <p:cNvPr id="7" name="Rectangle 6"/>
           <p:cNvSpPr/>
           <p:nvPr/>
         </p:nvSpPr>
         <p:spPr>
           <a:xfrm>
-            <a:off x="4953304" y="502920"/>
-            <a:ext cx="2286000" cy="411480"/>
-          </a:xfrm>
-          <a:prstGeom prst="roundRect">
+            <a:off x="548640" y="768096"/>
+            <a:ext cx="11094415" cy="9144"/>
+          </a:xfrm>
+          <a:prstGeom prst="rect">
             <a:avLst/>
           </a:prstGeom>
           <a:solidFill>
-            <a:srgbClr val="A0C896"/>
+            <a:srgbClr val="5A6A62"/>
           </a:solidFill>
           <a:ln>
             <a:noFill/>
@@ -7990,14 +7799,14 @@
       </p:sp>
       <p:sp>
         <p:nvSpPr>
-          <p:cNvPr id="9" name="TextBox 8"/>
+          <p:cNvPr id="8" name="TextBox 7"/>
           <p:cNvSpPr txBox="1"/>
           <p:nvPr/>
         </p:nvSpPr>
         <p:spPr>
           <a:xfrm>
-            <a:off x="4953304" y="521208"/>
-            <a:ext cx="2286000" cy="384048"/>
+            <a:off x="548640" y="704088"/>
+            <a:ext cx="11094415" cy="201168"/>
           </a:xfrm>
           <a:prstGeom prst="rect">
             <a:avLst/>
@@ -8005,83 +7814,44 @@
           <a:noFill/>
         </p:spPr>
         <p:txBody>
-          <a:bodyPr wrap="none">
+          <a:bodyPr wrap="square" anchor="t">
             <a:spAutoFit/>
           </a:bodyPr>
           <a:lstStyle/>
           <a:p>
             <a:pPr algn="ctr">
               <a:spcAft>
-                <a:spcPts val="1000"/>
-              </a:spcAft>
-            </a:pPr>
-            <a:r>
-              <a:rPr sz="1800" b="1">
-                <a:solidFill>
-                  <a:srgbClr val="28462D"/>
+                <a:spcPts val="300"/>
+              </a:spcAft>
+            </a:pPr>
+            <a:r>
+              <a:rPr sz="900" b="0">
+                <a:solidFill>
+                  <a:srgbClr val="5A6A62"/>
                 </a:solidFill>
                 <a:latin typeface="Microsoft YaHei"/>
               </a:rPr>
-              <a:t>课堂活动</a:t>
-            </a:r>
-          </a:p>
-        </p:txBody>
-      </p:sp>
-      <p:sp>
-        <p:nvSpPr>
-          <p:cNvPr id="10" name="TextBox 9"/>
-          <p:cNvSpPr txBox="1"/>
-          <p:nvPr/>
-        </p:nvSpPr>
-        <p:spPr>
-          <a:xfrm>
-            <a:off x="1371600" y="960120"/>
-            <a:ext cx="9418320" cy="822960"/>
-          </a:xfrm>
-          <a:prstGeom prst="rect">
-            <a:avLst/>
-          </a:prstGeom>
-          <a:noFill/>
-        </p:spPr>
-        <p:txBody>
-          <a:bodyPr wrap="square">
-            <a:spAutoFit/>
-          </a:bodyPr>
-          <a:lstStyle/>
-          <a:p>
-            <a:pPr algn="ctr">
-              <a:spcAft>
-                <a:spcPts val="1000"/>
-              </a:spcAft>
-            </a:pPr>
-            <a:r>
-              <a:rPr sz="3600" b="1">
-                <a:solidFill>
-                  <a:srgbClr val="468250"/>
-                </a:solidFill>
-                <a:latin typeface="Microsoft YaHei"/>
-              </a:rPr>
-              <a:t>学习任务</a:t>
-            </a:r>
-          </a:p>
-        </p:txBody>
-      </p:sp>
-      <p:sp>
-        <p:nvSpPr>
-          <p:cNvPr id="11" name="Rectangle 10"/>
+              <a:t>～ ～ ～ ～ ～ ～ ～ ～ ～ ～ ～ ～</a:t>
+            </a:r>
+          </a:p>
+        </p:txBody>
+      </p:sp>
+      <p:sp>
+        <p:nvSpPr>
+          <p:cNvPr id="9" name="Rectangle 8"/>
           <p:cNvSpPr/>
           <p:nvPr/>
         </p:nvSpPr>
         <p:spPr>
           <a:xfrm>
-            <a:off x="3200400" y="1600200"/>
-            <a:ext cx="5760720" cy="27432"/>
+            <a:off x="548640" y="777240"/>
+            <a:ext cx="5455767" cy="5029200"/>
           </a:xfrm>
           <a:prstGeom prst="rect">
             <a:avLst/>
           </a:prstGeom>
           <a:solidFill>
-            <a:srgbClr val="A0C896"/>
+            <a:srgbClr val="E4EDE8"/>
           </a:solidFill>
           <a:ln>
             <a:noFill/>
@@ -8111,25 +7881,23 @@
       </p:sp>
       <p:sp>
         <p:nvSpPr>
-          <p:cNvPr id="12" name="Rounded Rectangle 11"/>
+          <p:cNvPr id="10" name="Rectangle 9"/>
           <p:cNvSpPr/>
           <p:nvPr/>
         </p:nvSpPr>
         <p:spPr>
           <a:xfrm>
-            <a:off x="1295704" y="1645920"/>
-            <a:ext cx="9601200" cy="2112264"/>
-          </a:xfrm>
-          <a:prstGeom prst="roundRect">
+            <a:off x="548640" y="777240"/>
+            <a:ext cx="45720" cy="5029200"/>
+          </a:xfrm>
+          <a:prstGeom prst="rect">
             <a:avLst/>
           </a:prstGeom>
           <a:solidFill>
-            <a:srgbClr val="F8FCF5"/>
+            <a:srgbClr val="4A7C6F"/>
           </a:solidFill>
-          <a:ln w="19050">
-            <a:solidFill>
-              <a:srgbClr val="A0C896"/>
-            </a:solidFill>
+          <a:ln>
+            <a:noFill/>
           </a:ln>
         </p:spPr>
         <p:style>
@@ -8156,23 +7924,128 @@
       </p:sp>
       <p:sp>
         <p:nvSpPr>
-          <p:cNvPr id="13" name="Oval 12"/>
+          <p:cNvPr id="11" name="TextBox 10"/>
+          <p:cNvSpPr txBox="1"/>
+          <p:nvPr/>
+        </p:nvSpPr>
+        <p:spPr>
+          <a:xfrm>
+            <a:off x="694944" y="886968"/>
+            <a:ext cx="5254599" cy="4864608"/>
+          </a:xfrm>
+          <a:prstGeom prst="rect">
+            <a:avLst/>
+          </a:prstGeom>
+          <a:noFill/>
+        </p:spPr>
+        <p:txBody>
+          <a:bodyPr wrap="square" anchor="t">
+            <a:spAutoFit/>
+          </a:bodyPr>
+          <a:lstStyle/>
+          <a:p>
+            <a:pPr algn="l">
+              <a:spcAft>
+                <a:spcPts val="300"/>
+              </a:spcAft>
+            </a:pPr>
+            <a:r>
+              <a:rPr sz="1800" b="1">
+                <a:solidFill>
+                  <a:srgbClr val="4A7C6F"/>
+                </a:solidFill>
+                <a:latin typeface="KaiTi"/>
+              </a:rPr>
+              <a:t>核心一 · 神话想象</a:t>
+            </a:r>
+          </a:p>
+          <a:p>
+            <a:pPr algn="l">
+              <a:spcAft>
+                <a:spcPts val="300"/>
+              </a:spcAft>
+            </a:pPr>
+            <a:r>
+              <a:rPr sz="800" b="0">
+                <a:solidFill>
+                  <a:srgbClr val="1E1E1E"/>
+                </a:solidFill>
+                <a:latin typeface="Microsoft YaHei"/>
+              </a:rPr>
+              <a:t/>
+            </a:r>
+          </a:p>
+          <a:p>
+            <a:pPr algn="l">
+              <a:spcAft>
+                <a:spcPts val="300"/>
+              </a:spcAft>
+            </a:pPr>
+            <a:r>
+              <a:rPr sz="2000" b="1">
+                <a:solidFill>
+                  <a:srgbClr val="1E1E1E"/>
+                </a:solidFill>
+                <a:latin typeface="Microsoft YaHei"/>
+              </a:rPr>
+              <a:t>基于古籍</a:t>
+            </a:r>
+          </a:p>
+          <a:p>
+            <a:pPr algn="l">
+              <a:spcAft>
+                <a:spcPts val="300"/>
+              </a:spcAft>
+            </a:pPr>
+            <a:r>
+              <a:rPr sz="2000" b="1">
+                <a:solidFill>
+                  <a:srgbClr val="1E1E1E"/>
+                </a:solidFill>
+                <a:latin typeface="Microsoft YaHei"/>
+              </a:rPr>
+              <a:t>超越古籍</a:t>
+            </a:r>
+          </a:p>
+          <a:p>
+            <a:pPr algn="l">
+              <a:spcAft>
+                <a:spcPts val="300"/>
+              </a:spcAft>
+            </a:pPr>
+            <a:r>
+              <a:rPr sz="2000" b="1">
+                <a:solidFill>
+                  <a:srgbClr val="C83C23"/>
+                </a:solidFill>
+                <a:latin typeface="Microsoft YaHei"/>
+              </a:rPr>
+              <a:t>富有温度</a:t>
+            </a:r>
+          </a:p>
+        </p:txBody>
+      </p:sp>
+      <p:sp>
+        <p:nvSpPr>
+          <p:cNvPr id="12" name="Rectangle 11"/>
           <p:cNvSpPr/>
           <p:nvPr/>
         </p:nvSpPr>
         <p:spPr>
           <a:xfrm>
-            <a:off x="2255824" y="1828800"/>
-            <a:ext cx="347472" cy="347472"/>
-          </a:xfrm>
-          <a:prstGeom prst="ellipse">
+            <a:off x="6187287" y="777240"/>
+            <a:ext cx="5455767" cy="5029200"/>
+          </a:xfrm>
+          <a:prstGeom prst="rect">
             <a:avLst/>
           </a:prstGeom>
           <a:solidFill>
-            <a:srgbClr val="468250"/>
+            <a:srgbClr val="F4F1EA"/>
           </a:solidFill>
-          <a:ln>
-            <a:noFill/>
+          <a:ln w="19050">
+            <a:solidFill>
+              <a:srgbClr val="4A7C6F"/>
+            </a:solidFill>
           </a:ln>
         </p:spPr>
         <p:style>
@@ -8199,98 +8072,20 @@
       </p:sp>
       <p:sp>
         <p:nvSpPr>
-          <p:cNvPr id="14" name="TextBox 13"/>
-          <p:cNvSpPr txBox="1"/>
-          <p:nvPr/>
-        </p:nvSpPr>
-        <p:spPr>
-          <a:xfrm>
-            <a:off x="2255824" y="1847088"/>
-            <a:ext cx="347472" cy="329184"/>
-          </a:xfrm>
-          <a:prstGeom prst="rect">
-            <a:avLst/>
-          </a:prstGeom>
-          <a:noFill/>
-        </p:spPr>
-        <p:txBody>
-          <a:bodyPr wrap="none">
-            <a:spAutoFit/>
-          </a:bodyPr>
-          <a:lstStyle/>
-          <a:p>
-            <a:pPr algn="ctr">
-              <a:spcAft>
-                <a:spcPts val="1000"/>
-              </a:spcAft>
-            </a:pPr>
-            <a:r>
-              <a:rPr sz="1400" b="1">
-                <a:solidFill>
-                  <a:srgbClr val="FFFFFF"/>
-                </a:solidFill>
-                <a:latin typeface="Microsoft YaHei"/>
-              </a:rPr>
-              <a:t>1</a:t>
-            </a:r>
-          </a:p>
-        </p:txBody>
-      </p:sp>
-      <p:sp>
-        <p:nvSpPr>
-          <p:cNvPr id="15" name="TextBox 14"/>
-          <p:cNvSpPr txBox="1"/>
-          <p:nvPr/>
-        </p:nvSpPr>
-        <p:spPr>
-          <a:xfrm>
-            <a:off x="2713024" y="1810512"/>
-            <a:ext cx="7863840" cy="457200"/>
-          </a:xfrm>
-          <a:prstGeom prst="rect">
-            <a:avLst/>
-          </a:prstGeom>
-          <a:noFill/>
-        </p:spPr>
-        <p:txBody>
-          <a:bodyPr wrap="none">
-            <a:spAutoFit/>
-          </a:bodyPr>
-          <a:lstStyle/>
-          <a:p>
-            <a:pPr algn="l">
-              <a:spcAft>
-                <a:spcPts val="1000"/>
-              </a:spcAft>
-            </a:pPr>
-            <a:r>
-              <a:rPr sz="2400" b="0">
-                <a:solidFill>
-                  <a:srgbClr val="28462D"/>
-                </a:solidFill>
-                <a:latin typeface="Microsoft YaHei"/>
-              </a:rPr>
-              <a:t>给女娲行动排序，比较两种造人方法</a:t>
-            </a:r>
-          </a:p>
-        </p:txBody>
-      </p:sp>
-      <p:sp>
-        <p:nvSpPr>
-          <p:cNvPr id="16" name="Oval 15"/>
+          <p:cNvPr id="13" name="Rectangle 12"/>
           <p:cNvSpPr/>
           <p:nvPr/>
         </p:nvSpPr>
         <p:spPr>
           <a:xfrm>
-            <a:off x="2255824" y="2395728"/>
-            <a:ext cx="347472" cy="347472"/>
-          </a:xfrm>
-          <a:prstGeom prst="ellipse">
+            <a:off x="6187287" y="777240"/>
+            <a:ext cx="45720" cy="5029200"/>
+          </a:xfrm>
+          <a:prstGeom prst="rect">
             <a:avLst/>
           </a:prstGeom>
           <a:solidFill>
-            <a:srgbClr val="468250"/>
+            <a:srgbClr val="4A7C6F"/>
           </a:solidFill>
           <a:ln>
             <a:noFill/>
@@ -8320,14 +8115,14 @@
       </p:sp>
       <p:sp>
         <p:nvSpPr>
-          <p:cNvPr id="17" name="TextBox 16"/>
+          <p:cNvPr id="14" name="TextBox 13"/>
           <p:cNvSpPr txBox="1"/>
           <p:nvPr/>
         </p:nvSpPr>
         <p:spPr>
           <a:xfrm>
-            <a:off x="2255824" y="2414016"/>
-            <a:ext cx="347472" cy="329184"/>
+            <a:off x="6333591" y="886968"/>
+            <a:ext cx="5254599" cy="4864608"/>
           </a:xfrm>
           <a:prstGeom prst="rect">
             <a:avLst/>
@@ -8335,184 +8130,120 @@
           <a:noFill/>
         </p:spPr>
         <p:txBody>
-          <a:bodyPr wrap="none">
+          <a:bodyPr wrap="square" anchor="t">
             <a:spAutoFit/>
           </a:bodyPr>
           <a:lstStyle/>
           <a:p>
-            <a:pPr algn="ctr">
-              <a:spcAft>
-                <a:spcPts val="1000"/>
-              </a:spcAft>
-            </a:pPr>
-            <a:r>
-              <a:rPr sz="1400" b="1">
-                <a:solidFill>
-                  <a:srgbClr val="FFFFFF"/>
+            <a:pPr algn="l">
+              <a:spcAft>
+                <a:spcPts val="300"/>
+              </a:spcAft>
+            </a:pPr>
+            <a:r>
+              <a:rPr sz="1800" b="1">
+                <a:solidFill>
+                  <a:srgbClr val="4A7C6F"/>
+                </a:solidFill>
+                <a:latin typeface="KaiTi"/>
+              </a:rPr>
+              <a:t>核心二 · 女娲形象</a:t>
+            </a:r>
+          </a:p>
+          <a:p>
+            <a:pPr algn="l">
+              <a:spcAft>
+                <a:spcPts val="300"/>
+              </a:spcAft>
+            </a:pPr>
+            <a:r>
+              <a:rPr sz="800" b="0">
+                <a:solidFill>
+                  <a:srgbClr val="1E1E1E"/>
                 </a:solidFill>
                 <a:latin typeface="Microsoft YaHei"/>
               </a:rPr>
-              <a:t>2</a:t>
-            </a:r>
-          </a:p>
-        </p:txBody>
-      </p:sp>
-      <p:sp>
-        <p:nvSpPr>
-          <p:cNvPr id="18" name="TextBox 17"/>
-          <p:cNvSpPr txBox="1"/>
-          <p:nvPr/>
-        </p:nvSpPr>
-        <p:spPr>
-          <a:xfrm>
-            <a:off x="2713024" y="2377440"/>
-            <a:ext cx="7863840" cy="457200"/>
-          </a:xfrm>
-          <a:prstGeom prst="rect">
-            <a:avLst/>
-          </a:prstGeom>
-          <a:noFill/>
-        </p:spPr>
-        <p:txBody>
-          <a:bodyPr wrap="none">
-            <a:spAutoFit/>
-          </a:bodyPr>
-          <a:lstStyle/>
+              <a:t/>
+            </a:r>
+          </a:p>
           <a:p>
             <a:pPr algn="l">
               <a:spcAft>
-                <a:spcPts val="1000"/>
-              </a:spcAft>
-            </a:pPr>
-            <a:r>
-              <a:rPr sz="2400" b="0">
-                <a:solidFill>
-                  <a:srgbClr val="28462D"/>
+                <a:spcPts val="300"/>
+              </a:spcAft>
+            </a:pPr>
+            <a:r>
+              <a:rPr sz="1600" b="1">
+                <a:solidFill>
+                  <a:srgbClr val="1E1E1E"/>
                 </a:solidFill>
                 <a:latin typeface="Microsoft YaHei"/>
               </a:rPr>
-              <a:t>完成「古籍与课文」比较表</a:t>
-            </a:r>
-          </a:p>
-        </p:txBody>
-      </p:sp>
-      <p:sp>
-        <p:nvSpPr>
-          <p:cNvPr id="19" name="Oval 18"/>
-          <p:cNvSpPr/>
-          <p:nvPr/>
-        </p:nvSpPr>
-        <p:spPr>
-          <a:xfrm>
-            <a:off x="2255824" y="2962656"/>
-            <a:ext cx="347472" cy="347472"/>
-          </a:xfrm>
-          <a:prstGeom prst="ellipse">
-            <a:avLst/>
-          </a:prstGeom>
-          <a:solidFill>
-            <a:srgbClr val="468250"/>
-          </a:solidFill>
-          <a:ln>
-            <a:noFill/>
-          </a:ln>
-        </p:spPr>
-        <p:style>
-          <a:lnRef idx="1">
-            <a:schemeClr val="accent1"/>
-          </a:lnRef>
-          <a:fillRef idx="3">
-            <a:schemeClr val="accent1"/>
-          </a:fillRef>
-          <a:effectRef idx="2">
-            <a:schemeClr val="accent1"/>
-          </a:effectRef>
-          <a:fontRef idx="minor">
-            <a:schemeClr val="lt1"/>
-          </a:fontRef>
-        </p:style>
-        <p:txBody>
-          <a:bodyPr rtlCol="0" anchor="ctr"/>
-          <a:lstStyle/>
-          <a:p>
-            <a:pPr algn="ctr"/>
-          </a:p>
-        </p:txBody>
-      </p:sp>
-      <p:sp>
-        <p:nvSpPr>
-          <p:cNvPr id="20" name="TextBox 19"/>
-          <p:cNvSpPr txBox="1"/>
-          <p:nvPr/>
-        </p:nvSpPr>
-        <p:spPr>
-          <a:xfrm>
-            <a:off x="2255824" y="2980944"/>
-            <a:ext cx="347472" cy="329184"/>
-          </a:xfrm>
-          <a:prstGeom prst="rect">
-            <a:avLst/>
-          </a:prstGeom>
-          <a:noFill/>
-        </p:spPr>
-        <p:txBody>
-          <a:bodyPr wrap="none">
-            <a:spAutoFit/>
-          </a:bodyPr>
-          <a:lstStyle/>
-          <a:p>
-            <a:pPr algn="ctr">
-              <a:spcAft>
-                <a:spcPts val="1000"/>
-              </a:spcAft>
-            </a:pPr>
-            <a:r>
-              <a:rPr sz="1400" b="1">
-                <a:solidFill>
-                  <a:srgbClr val="FFFFFF"/>
+              <a:t>神性与人性并存</a:t>
+            </a:r>
+          </a:p>
+          <a:p>
+            <a:pPr algn="l">
+              <a:spcAft>
+                <a:spcPts val="300"/>
+              </a:spcAft>
+            </a:pPr>
+            <a:r>
+              <a:rPr sz="600" b="0">
+                <a:solidFill>
+                  <a:srgbClr val="1E1E1E"/>
                 </a:solidFill>
                 <a:latin typeface="Microsoft YaHei"/>
               </a:rPr>
-              <a:t>3</a:t>
-            </a:r>
-          </a:p>
-        </p:txBody>
-      </p:sp>
-      <p:sp>
-        <p:nvSpPr>
-          <p:cNvPr id="21" name="TextBox 20"/>
-          <p:cNvSpPr txBox="1"/>
-          <p:nvPr/>
-        </p:nvSpPr>
-        <p:spPr>
-          <a:xfrm>
-            <a:off x="2713024" y="2944368"/>
-            <a:ext cx="7863840" cy="457200"/>
-          </a:xfrm>
-          <a:prstGeom prst="rect">
-            <a:avLst/>
-          </a:prstGeom>
-          <a:noFill/>
-        </p:spPr>
-        <p:txBody>
-          <a:bodyPr wrap="none">
-            <a:spAutoFit/>
-          </a:bodyPr>
-          <a:lstStyle/>
+              <a:t/>
+            </a:r>
+          </a:p>
           <a:p>
             <a:pPr algn="l">
               <a:spcAft>
-                <a:spcPts val="1000"/>
-              </a:spcAft>
-            </a:pPr>
-            <a:r>
-              <a:rPr sz="2400" b="0">
-                <a:solidFill>
-                  <a:srgbClr val="28462D"/>
+                <a:spcPts val="300"/>
+              </a:spcAft>
+            </a:pPr>
+            <a:r>
+              <a:rPr sz="2200" b="1">
+                <a:solidFill>
+                  <a:srgbClr val="C83C23"/>
                 </a:solidFill>
                 <a:latin typeface="Microsoft YaHei"/>
               </a:rPr>
-              <a:t>以「我看见女娲……」写100字画面描述</a:t>
+              <a:t>孤独 · 疲倦 · 喜悦</a:t>
+            </a:r>
+          </a:p>
+          <a:p>
+            <a:pPr algn="l">
+              <a:spcAft>
+                <a:spcPts val="300"/>
+              </a:spcAft>
+            </a:pPr>
+            <a:r>
+              <a:rPr sz="600" b="0">
+                <a:solidFill>
+                  <a:srgbClr val="1E1E1E"/>
+                </a:solidFill>
+                <a:latin typeface="Microsoft YaHei"/>
+              </a:rPr>
+              <a:t/>
+            </a:r>
+          </a:p>
+          <a:p>
+            <a:pPr algn="l">
+              <a:spcAft>
+                <a:spcPts val="300"/>
+              </a:spcAft>
+            </a:pPr>
+            <a:r>
+              <a:rPr sz="1400" b="0">
+                <a:solidFill>
+                  <a:srgbClr val="5A6A62"/>
+                </a:solidFill>
+                <a:latin typeface="Microsoft YaHei"/>
+              </a:rPr>
+              <a:t>涵盖情感变化的完整母亲形象</a:t>
             </a:r>
           </a:p>
         </p:txBody>
@@ -8535,20 +8266,12 @@
         <p:nvPr/>
       </p:nvGrpSpPr>
       <p:grpSpPr/>
-      <p:pic>
-        <p:nvPicPr>
-          <p:cNvPr id="2" name="Picture 1" descr="bg_nuwa.png"/>
-          <p:cNvPicPr>
-            <a:picLocks noChangeAspect="1"/>
-          </p:cNvPicPr>
-          <p:nvPr/>
-        </p:nvPicPr>
-        <p:blipFill>
-          <a:blip r:embed="rId2"/>
-          <a:stretch>
-            <a:fillRect/>
-          </a:stretch>
-        </p:blipFill>
+      <p:sp>
+        <p:nvSpPr>
+          <p:cNvPr id="2" name="Rectangle 1"/>
+          <p:cNvSpPr/>
+          <p:nvPr/>
+        </p:nvSpPr>
         <p:spPr>
           <a:xfrm>
             <a:off x="0" y="0"/>
@@ -8557,27 +8280,11 @@
           <a:prstGeom prst="rect">
             <a:avLst/>
           </a:prstGeom>
-        </p:spPr>
-      </p:pic>
-      <p:sp>
-        <p:nvSpPr>
-          <p:cNvPr id="3" name="Rectangle 2"/>
-          <p:cNvSpPr/>
-          <p:nvPr/>
-        </p:nvSpPr>
-        <p:spPr>
-          <a:xfrm>
-            <a:off x="292608" y="274320"/>
-            <a:ext cx="11594592" cy="6300216"/>
-          </a:xfrm>
-          <a:prstGeom prst="rect">
-            <a:avLst/>
-          </a:prstGeom>
-          <a:noFill/>
-          <a:ln w="31750">
-            <a:solidFill>
-              <a:srgbClr val="5A8C5A"/>
-            </a:solidFill>
+          <a:solidFill>
+            <a:srgbClr val="F4F1EA"/>
+          </a:solidFill>
+          <a:ln>
+            <a:noFill/>
           </a:ln>
         </p:spPr>
         <p:style>
@@ -8602,73 +8309,25 @@
           </a:p>
         </p:txBody>
       </p:sp>
-      <p:pic>
-        <p:nvPicPr>
-          <p:cNvPr id="4" name="Picture 3" descr="corner_nuwa_tl.png"/>
-          <p:cNvPicPr>
-            <a:picLocks noChangeAspect="1"/>
-          </p:cNvPicPr>
-          <p:nvPr/>
-        </p:nvPicPr>
-        <p:blipFill>
-          <a:blip r:embed="rId3"/>
-          <a:stretch>
-            <a:fillRect/>
-          </a:stretch>
-        </p:blipFill>
-        <p:spPr>
-          <a:xfrm>
-            <a:off x="-45720" y="-45720"/>
-            <a:ext cx="2011680" cy="2011680"/>
-          </a:xfrm>
-          <a:prstGeom prst="rect">
-            <a:avLst/>
-          </a:prstGeom>
-        </p:spPr>
-      </p:pic>
-      <p:pic>
-        <p:nvPicPr>
-          <p:cNvPr id="5" name="Picture 4" descr="corner_nuwa_tr.png"/>
-          <p:cNvPicPr>
-            <a:picLocks noChangeAspect="1"/>
-          </p:cNvPicPr>
-          <p:nvPr/>
-        </p:nvPicPr>
-        <p:blipFill>
-          <a:blip r:embed="rId4"/>
-          <a:stretch>
-            <a:fillRect/>
-          </a:stretch>
-        </p:blipFill>
-        <p:spPr>
-          <a:xfrm>
-            <a:off x="9875520" y="-45720"/>
-            <a:ext cx="2011680" cy="2011680"/>
-          </a:xfrm>
-          <a:prstGeom prst="rect">
-            <a:avLst/>
-          </a:prstGeom>
-        </p:spPr>
-      </p:pic>
-      <p:sp>
-        <p:nvSpPr>
-          <p:cNvPr id="6" name="Rounded Rectangle 5"/>
+      <p:sp>
+        <p:nvSpPr>
+          <p:cNvPr id="3" name="Rectangle 2"/>
           <p:cNvSpPr/>
           <p:nvPr/>
         </p:nvSpPr>
         <p:spPr>
           <a:xfrm>
-            <a:off x="502920" y="384048"/>
-            <a:ext cx="2011680" cy="384048"/>
-          </a:xfrm>
-          <a:prstGeom prst="roundRect">
-            <a:avLst/>
-          </a:prstGeom>
-          <a:solidFill>
-            <a:srgbClr val="3C9664"/>
-          </a:solidFill>
-          <a:ln>
-            <a:noFill/>
+            <a:off x="548640" y="347472"/>
+            <a:ext cx="365760" cy="365760"/>
+          </a:xfrm>
+          <a:prstGeom prst="rect">
+            <a:avLst/>
+          </a:prstGeom>
+          <a:noFill/>
+          <a:ln w="25400">
+            <a:solidFill>
+              <a:srgbClr val="C83C23"/>
+            </a:solidFill>
           </a:ln>
         </p:spPr>
         <p:style>
@@ -8695,14 +8354,14 @@
       </p:sp>
       <p:sp>
         <p:nvSpPr>
-          <p:cNvPr id="7" name="TextBox 6"/>
+          <p:cNvPr id="4" name="TextBox 3"/>
           <p:cNvSpPr txBox="1"/>
           <p:nvPr/>
         </p:nvSpPr>
         <p:spPr>
           <a:xfrm>
-            <a:off x="502920" y="402336"/>
-            <a:ext cx="2011680" cy="347472"/>
+            <a:off x="548640" y="347472"/>
+            <a:ext cx="365760" cy="365760"/>
           </a:xfrm>
           <a:prstGeom prst="rect">
             <a:avLst/>
@@ -8710,44 +8369,122 @@
           <a:noFill/>
         </p:spPr>
         <p:txBody>
-          <a:bodyPr wrap="none">
+          <a:bodyPr wrap="square" anchor="ctr">
             <a:spAutoFit/>
           </a:bodyPr>
           <a:lstStyle/>
           <a:p>
             <a:pPr algn="ctr">
               <a:spcAft>
-                <a:spcPts val="1000"/>
-              </a:spcAft>
-            </a:pPr>
-            <a:r>
-              <a:rPr sz="1600" b="1">
-                <a:solidFill>
-                  <a:srgbClr val="FFFFFF"/>
+                <a:spcPts val="300"/>
+              </a:spcAft>
+            </a:pPr>
+            <a:r>
+              <a:rPr sz="1000" b="1">
+                <a:solidFill>
+                  <a:srgbClr val="C83C23"/>
+                </a:solidFill>
+                <a:latin typeface="KaiTi"/>
+              </a:rPr>
+              <a:t>07</a:t>
+            </a:r>
+          </a:p>
+        </p:txBody>
+      </p:sp>
+      <p:sp>
+        <p:nvSpPr>
+          <p:cNvPr id="5" name="TextBox 4"/>
+          <p:cNvSpPr txBox="1"/>
+          <p:nvPr/>
+        </p:nvSpPr>
+        <p:spPr>
+          <a:xfrm>
+            <a:off x="1024128" y="347472"/>
+            <a:ext cx="7766090" cy="365760"/>
+          </a:xfrm>
+          <a:prstGeom prst="rect">
+            <a:avLst/>
+          </a:prstGeom>
+          <a:noFill/>
+        </p:spPr>
+        <p:txBody>
+          <a:bodyPr wrap="square" anchor="t">
+            <a:spAutoFit/>
+          </a:bodyPr>
+          <a:lstStyle/>
+          <a:p>
+            <a:pPr algn="l">
+              <a:spcAft>
+                <a:spcPts val="300"/>
+              </a:spcAft>
+            </a:pPr>
+            <a:r>
+              <a:rPr sz="2000" b="1">
+                <a:solidFill>
+                  <a:srgbClr val="1E1E1E"/>
+                </a:solidFill>
+                <a:latin typeface="KaiTi"/>
+              </a:rPr>
+              <a:t>课后延伸</a:t>
+            </a:r>
+          </a:p>
+        </p:txBody>
+      </p:sp>
+      <p:sp>
+        <p:nvSpPr>
+          <p:cNvPr id="6" name="TextBox 5"/>
+          <p:cNvSpPr txBox="1"/>
+          <p:nvPr/>
+        </p:nvSpPr>
+        <p:spPr>
+          <a:xfrm>
+            <a:off x="8869451" y="347472"/>
+            <a:ext cx="2773603" cy="320040"/>
+          </a:xfrm>
+          <a:prstGeom prst="rect">
+            <a:avLst/>
+          </a:prstGeom>
+          <a:noFill/>
+        </p:spPr>
+        <p:txBody>
+          <a:bodyPr wrap="square" anchor="t">
+            <a:spAutoFit/>
+          </a:bodyPr>
+          <a:lstStyle/>
+          <a:p>
+            <a:pPr algn="r">
+              <a:spcAft>
+                <a:spcPts val="300"/>
+              </a:spcAft>
+            </a:pPr>
+            <a:r>
+              <a:rPr sz="1100" b="0">
+                <a:solidFill>
+                  <a:srgbClr val="5A6A62"/>
                 </a:solidFill>
                 <a:latin typeface="Microsoft YaHei"/>
               </a:rPr>
-              <a:t>课堂活动</a:t>
-            </a:r>
-          </a:p>
-        </p:txBody>
-      </p:sp>
-      <p:sp>
-        <p:nvSpPr>
-          <p:cNvPr id="8" name="Rounded Rectangle 7"/>
+              <a:t>卷 7/7</a:t>
+            </a:r>
+          </a:p>
+        </p:txBody>
+      </p:sp>
+      <p:sp>
+        <p:nvSpPr>
+          <p:cNvPr id="7" name="Rectangle 6"/>
           <p:cNvSpPr/>
           <p:nvPr/>
         </p:nvSpPr>
         <p:spPr>
           <a:xfrm>
-            <a:off x="4953304" y="502920"/>
-            <a:ext cx="2286000" cy="411480"/>
-          </a:xfrm>
-          <a:prstGeom prst="roundRect">
+            <a:off x="548640" y="768096"/>
+            <a:ext cx="11094415" cy="9144"/>
+          </a:xfrm>
+          <a:prstGeom prst="rect">
             <a:avLst/>
           </a:prstGeom>
           <a:solidFill>
-            <a:srgbClr val="A0C896"/>
+            <a:srgbClr val="5A6A62"/>
           </a:solidFill>
           <a:ln>
             <a:noFill/>
@@ -8777,14 +8514,14 @@
       </p:sp>
       <p:sp>
         <p:nvSpPr>
-          <p:cNvPr id="9" name="TextBox 8"/>
+          <p:cNvPr id="8" name="TextBox 7"/>
           <p:cNvSpPr txBox="1"/>
           <p:nvPr/>
         </p:nvSpPr>
         <p:spPr>
           <a:xfrm>
-            <a:off x="4953304" y="521208"/>
-            <a:ext cx="2286000" cy="384048"/>
+            <a:off x="548640" y="704088"/>
+            <a:ext cx="11094415" cy="201168"/>
           </a:xfrm>
           <a:prstGeom prst="rect">
             <a:avLst/>
@@ -8792,86 +8529,49 @@
           <a:noFill/>
         </p:spPr>
         <p:txBody>
-          <a:bodyPr wrap="none">
+          <a:bodyPr wrap="square" anchor="t">
             <a:spAutoFit/>
           </a:bodyPr>
           <a:lstStyle/>
           <a:p>
             <a:pPr algn="ctr">
               <a:spcAft>
-                <a:spcPts val="1000"/>
-              </a:spcAft>
-            </a:pPr>
-            <a:r>
-              <a:rPr sz="1800" b="1">
-                <a:solidFill>
-                  <a:srgbClr val="28462D"/>
+                <a:spcPts val="300"/>
+              </a:spcAft>
+            </a:pPr>
+            <a:r>
+              <a:rPr sz="900" b="0">
+                <a:solidFill>
+                  <a:srgbClr val="5A6A62"/>
                 </a:solidFill>
                 <a:latin typeface="Microsoft YaHei"/>
               </a:rPr>
-              <a:t>回顾收获</a:t>
-            </a:r>
-          </a:p>
-        </p:txBody>
-      </p:sp>
-      <p:sp>
-        <p:nvSpPr>
-          <p:cNvPr id="10" name="TextBox 9"/>
-          <p:cNvSpPr txBox="1"/>
-          <p:nvPr/>
-        </p:nvSpPr>
-        <p:spPr>
-          <a:xfrm>
-            <a:off x="1371600" y="960120"/>
-            <a:ext cx="9418320" cy="822960"/>
-          </a:xfrm>
-          <a:prstGeom prst="rect">
-            <a:avLst/>
-          </a:prstGeom>
-          <a:noFill/>
-        </p:spPr>
-        <p:txBody>
-          <a:bodyPr wrap="square">
-            <a:spAutoFit/>
-          </a:bodyPr>
-          <a:lstStyle/>
-          <a:p>
-            <a:pPr algn="ctr">
-              <a:spcAft>
-                <a:spcPts val="1000"/>
-              </a:spcAft>
-            </a:pPr>
-            <a:r>
-              <a:rPr sz="3600" b="1">
-                <a:solidFill>
-                  <a:srgbClr val="468250"/>
-                </a:solidFill>
-                <a:latin typeface="Microsoft YaHei"/>
-              </a:rPr>
-              <a:t>课堂小结</a:t>
-            </a:r>
-          </a:p>
-        </p:txBody>
-      </p:sp>
-      <p:sp>
-        <p:nvSpPr>
-          <p:cNvPr id="11" name="Rectangle 10"/>
+              <a:t>～ ～ ～ ～ ～ ～ ～ ～ ～ ～ ～ ～</a:t>
+            </a:r>
+          </a:p>
+        </p:txBody>
+      </p:sp>
+      <p:sp>
+        <p:nvSpPr>
+          <p:cNvPr id="9" name="Rectangle 8"/>
           <p:cNvSpPr/>
           <p:nvPr/>
         </p:nvSpPr>
         <p:spPr>
           <a:xfrm>
-            <a:off x="3200400" y="1600200"/>
-            <a:ext cx="5760720" cy="27432"/>
+            <a:off x="548640" y="777240"/>
+            <a:ext cx="11094415" cy="2240280"/>
           </a:xfrm>
           <a:prstGeom prst="rect">
             <a:avLst/>
           </a:prstGeom>
           <a:solidFill>
-            <a:srgbClr val="A0C896"/>
+            <a:srgbClr val="E4EDE8"/>
           </a:solidFill>
-          <a:ln>
-            <a:noFill/>
+          <a:ln w="25400">
+            <a:solidFill>
+              <a:srgbClr val="4A7C6F"/>
+            </a:solidFill>
           </a:ln>
         </p:spPr>
         <p:style>
@@ -8898,24 +8598,22 @@
       </p:sp>
       <p:sp>
         <p:nvSpPr>
-          <p:cNvPr id="12" name="Rounded Rectangle 11"/>
+          <p:cNvPr id="10" name="Rectangle 9"/>
           <p:cNvSpPr/>
           <p:nvPr/>
         </p:nvSpPr>
         <p:spPr>
           <a:xfrm>
-            <a:off x="1295704" y="1645920"/>
-            <a:ext cx="9601200" cy="1837944"/>
-          </a:xfrm>
-          <a:prstGeom prst="roundRect">
-            <a:avLst/>
-          </a:prstGeom>
-          <a:solidFill>
-            <a:srgbClr val="F8FCF5"/>
-          </a:solidFill>
-          <a:ln w="19050">
+            <a:off x="685800" y="960120"/>
+            <a:ext cx="438912" cy="438912"/>
+          </a:xfrm>
+          <a:prstGeom prst="rect">
+            <a:avLst/>
+          </a:prstGeom>
+          <a:noFill/>
+          <a:ln w="25400">
             <a:solidFill>
-              <a:srgbClr val="A0C896"/>
+              <a:srgbClr val="C83C23"/>
             </a:solidFill>
           </a:ln>
         </p:spPr>
@@ -8943,23 +8641,135 @@
       </p:sp>
       <p:sp>
         <p:nvSpPr>
-          <p:cNvPr id="13" name="Oval 12"/>
+          <p:cNvPr id="11" name="TextBox 10"/>
+          <p:cNvSpPr txBox="1"/>
+          <p:nvPr/>
+        </p:nvSpPr>
+        <p:spPr>
+          <a:xfrm>
+            <a:off x="685800" y="960120"/>
+            <a:ext cx="438912" cy="438912"/>
+          </a:xfrm>
+          <a:prstGeom prst="rect">
+            <a:avLst/>
+          </a:prstGeom>
+          <a:noFill/>
+        </p:spPr>
+        <p:txBody>
+          <a:bodyPr wrap="square" anchor="ctr">
+            <a:spAutoFit/>
+          </a:bodyPr>
+          <a:lstStyle/>
+          <a:p>
+            <a:pPr algn="ctr">
+              <a:spcAft>
+                <a:spcPts val="300"/>
+              </a:spcAft>
+            </a:pPr>
+            <a:r>
+              <a:rPr sz="1300" b="1">
+                <a:solidFill>
+                  <a:srgbClr val="C83C23"/>
+                </a:solidFill>
+                <a:latin typeface="KaiTi"/>
+              </a:rPr>
+              <a:t>必</a:t>
+            </a:r>
+          </a:p>
+        </p:txBody>
+      </p:sp>
+      <p:sp>
+        <p:nvSpPr>
+          <p:cNvPr id="12" name="TextBox 11"/>
+          <p:cNvSpPr txBox="1"/>
+          <p:nvPr/>
+        </p:nvSpPr>
+        <p:spPr>
+          <a:xfrm>
+            <a:off x="1234440" y="914400"/>
+            <a:ext cx="10271455" cy="1920240"/>
+          </a:xfrm>
+          <a:prstGeom prst="rect">
+            <a:avLst/>
+          </a:prstGeom>
+          <a:noFill/>
+        </p:spPr>
+        <p:txBody>
+          <a:bodyPr wrap="square" anchor="t">
+            <a:spAutoFit/>
+          </a:bodyPr>
+          <a:lstStyle/>
+          <a:p>
+            <a:pPr algn="l">
+              <a:spcAft>
+                <a:spcPts val="300"/>
+              </a:spcAft>
+            </a:pPr>
+            <a:r>
+              <a:rPr sz="1600" b="1">
+                <a:solidFill>
+                  <a:srgbClr val="4A7C6F"/>
+                </a:solidFill>
+                <a:latin typeface="KaiTi"/>
+              </a:rPr>
+              <a:t>任务一 · 必做</a:t>
+            </a:r>
+          </a:p>
+          <a:p>
+            <a:pPr algn="l">
+              <a:spcAft>
+                <a:spcPts val="300"/>
+              </a:spcAft>
+            </a:pPr>
+            <a:r>
+              <a:rPr sz="1600" b="0">
+                <a:solidFill>
+                  <a:srgbClr val="1E1E1E"/>
+                </a:solidFill>
+                <a:latin typeface="Microsoft YaHei"/>
+              </a:rPr>
+              <a:t>以「我看见女娲……」为题，描写100字画面。</a:t>
+            </a:r>
+          </a:p>
+          <a:p>
+            <a:pPr algn="l">
+              <a:spcAft>
+                <a:spcPts val="300"/>
+              </a:spcAft>
+            </a:pPr>
+            <a:r>
+              <a:rPr sz="1300" b="0">
+                <a:solidFill>
+                  <a:srgbClr val="5A6A62"/>
+                </a:solidFill>
+                <a:latin typeface="Microsoft YaHei"/>
+              </a:rPr>
+              <a:t>要求：有具体动作或细节，体现造人的神奇与温情。</a:t>
+            </a:r>
+          </a:p>
+        </p:txBody>
+      </p:sp>
+      <p:sp>
+        <p:nvSpPr>
+          <p:cNvPr id="13" name="Rectangle 12"/>
           <p:cNvSpPr/>
           <p:nvPr/>
         </p:nvSpPr>
         <p:spPr>
           <a:xfrm>
-            <a:off x="2255824" y="1828800"/>
-            <a:ext cx="347472" cy="347472"/>
-          </a:xfrm>
-          <a:prstGeom prst="ellipse">
+            <a:off x="548640" y="3246120"/>
+            <a:ext cx="11094415" cy="2240280"/>
+          </a:xfrm>
+          <a:prstGeom prst="rect">
             <a:avLst/>
           </a:prstGeom>
           <a:solidFill>
-            <a:srgbClr val="468250"/>
+            <a:srgbClr val="F4F1EA"/>
           </a:solidFill>
-          <a:ln>
-            <a:noFill/>
+          <a:ln w="25400">
+            <a:solidFill>
+              <a:srgbClr val="C83C23"/>
+            </a:solidFill>
           </a:ln>
         </p:spPr>
         <p:style>
@@ -8986,101 +8796,23 @@
       </p:sp>
       <p:sp>
         <p:nvSpPr>
-          <p:cNvPr id="14" name="TextBox 13"/>
-          <p:cNvSpPr txBox="1"/>
-          <p:nvPr/>
-        </p:nvSpPr>
-        <p:spPr>
-          <a:xfrm>
-            <a:off x="2255824" y="1847088"/>
-            <a:ext cx="347472" cy="329184"/>
+          <p:cNvPr id="14" name="Rectangle 13"/>
+          <p:cNvSpPr/>
+          <p:nvPr/>
+        </p:nvSpPr>
+        <p:spPr>
+          <a:xfrm>
+            <a:off x="685800" y="3429000"/>
+            <a:ext cx="438912" cy="438912"/>
           </a:xfrm>
           <a:prstGeom prst="rect">
             <a:avLst/>
           </a:prstGeom>
           <a:noFill/>
-        </p:spPr>
-        <p:txBody>
-          <a:bodyPr wrap="none">
-            <a:spAutoFit/>
-          </a:bodyPr>
-          <a:lstStyle/>
-          <a:p>
-            <a:pPr algn="ctr">
-              <a:spcAft>
-                <a:spcPts val="1000"/>
-              </a:spcAft>
-            </a:pPr>
-            <a:r>
-              <a:rPr sz="1400" b="1">
-                <a:solidFill>
-                  <a:srgbClr val="FFFFFF"/>
-                </a:solidFill>
-                <a:latin typeface="Microsoft YaHei"/>
-              </a:rPr>
-              <a:t>1</a:t>
-            </a:r>
-          </a:p>
-        </p:txBody>
-      </p:sp>
-      <p:sp>
-        <p:nvSpPr>
-          <p:cNvPr id="15" name="TextBox 14"/>
-          <p:cNvSpPr txBox="1"/>
-          <p:nvPr/>
-        </p:nvSpPr>
-        <p:spPr>
-          <a:xfrm>
-            <a:off x="2713024" y="1810512"/>
-            <a:ext cx="7863840" cy="457200"/>
-          </a:xfrm>
-          <a:prstGeom prst="rect">
-            <a:avLst/>
-          </a:prstGeom>
-          <a:noFill/>
-        </p:spPr>
-        <p:txBody>
-          <a:bodyPr wrap="none">
-            <a:spAutoFit/>
-          </a:bodyPr>
-          <a:lstStyle/>
-          <a:p>
-            <a:pPr algn="l">
-              <a:spcAft>
-                <a:spcPts val="1000"/>
-              </a:spcAft>
-            </a:pPr>
-            <a:r>
-              <a:rPr sz="2200" b="0">
-                <a:solidFill>
-                  <a:srgbClr val="28462D"/>
-                </a:solidFill>
-                <a:latin typeface="Microsoft YaHei"/>
-              </a:rPr>
-              <a:t>神话想象：基于古籍，超越古籍，有温度</a:t>
-            </a:r>
-          </a:p>
-        </p:txBody>
-      </p:sp>
-      <p:sp>
-        <p:nvSpPr>
-          <p:cNvPr id="16" name="Oval 15"/>
-          <p:cNvSpPr/>
-          <p:nvPr/>
-        </p:nvSpPr>
-        <p:spPr>
-          <a:xfrm>
-            <a:off x="2255824" y="2304288"/>
-            <a:ext cx="347472" cy="347472"/>
-          </a:xfrm>
-          <a:prstGeom prst="ellipse">
-            <a:avLst/>
-          </a:prstGeom>
-          <a:solidFill>
-            <a:srgbClr val="468250"/>
-          </a:solidFill>
-          <a:ln>
-            <a:noFill/>
+          <a:ln w="25400">
+            <a:solidFill>
+              <a:srgbClr val="C83C23"/>
+            </a:solidFill>
           </a:ln>
         </p:spPr>
         <p:style>
@@ -9107,14 +8839,14 @@
       </p:sp>
       <p:sp>
         <p:nvSpPr>
-          <p:cNvPr id="17" name="TextBox 16"/>
+          <p:cNvPr id="15" name="TextBox 14"/>
           <p:cNvSpPr txBox="1"/>
           <p:nvPr/>
         </p:nvSpPr>
         <p:spPr>
           <a:xfrm>
-            <a:off x="2255824" y="2322576"/>
-            <a:ext cx="347472" cy="329184"/>
+            <a:off x="685800" y="3429000"/>
+            <a:ext cx="438912" cy="438912"/>
           </a:xfrm>
           <a:prstGeom prst="rect">
             <a:avLst/>
@@ -9122,38 +8854,38 @@
           <a:noFill/>
         </p:spPr>
         <p:txBody>
-          <a:bodyPr wrap="none">
+          <a:bodyPr wrap="square" anchor="ctr">
             <a:spAutoFit/>
           </a:bodyPr>
           <a:lstStyle/>
           <a:p>
             <a:pPr algn="ctr">
               <a:spcAft>
-                <a:spcPts val="1000"/>
-              </a:spcAft>
-            </a:pPr>
-            <a:r>
-              <a:rPr sz="1400" b="1">
-                <a:solidFill>
-                  <a:srgbClr val="FFFFFF"/>
-                </a:solidFill>
-                <a:latin typeface="Microsoft YaHei"/>
-              </a:rPr>
-              <a:t>2</a:t>
-            </a:r>
-          </a:p>
-        </p:txBody>
-      </p:sp>
-      <p:sp>
-        <p:nvSpPr>
-          <p:cNvPr id="18" name="TextBox 17"/>
+                <a:spcPts val="300"/>
+              </a:spcAft>
+            </a:pPr>
+            <a:r>
+              <a:rPr sz="1300" b="1">
+                <a:solidFill>
+                  <a:srgbClr val="C83C23"/>
+                </a:solidFill>
+                <a:latin typeface="KaiTi"/>
+              </a:rPr>
+              <a:t>选</a:t>
+            </a:r>
+          </a:p>
+        </p:txBody>
+      </p:sp>
+      <p:sp>
+        <p:nvSpPr>
+          <p:cNvPr id="16" name="TextBox 15"/>
           <p:cNvSpPr txBox="1"/>
           <p:nvPr/>
         </p:nvSpPr>
         <p:spPr>
           <a:xfrm>
-            <a:off x="2713024" y="2286000"/>
-            <a:ext cx="7863840" cy="457200"/>
+            <a:off x="1234440" y="3383280"/>
+            <a:ext cx="10271455" cy="1920240"/>
           </a:xfrm>
           <a:prstGeom prst="rect">
             <a:avLst/>
@@ -9161,44 +8893,76 @@
           <a:noFill/>
         </p:spPr>
         <p:txBody>
-          <a:bodyPr wrap="none">
+          <a:bodyPr wrap="square" anchor="t">
             <a:spAutoFit/>
           </a:bodyPr>
           <a:lstStyle/>
           <a:p>
             <a:pPr algn="l">
               <a:spcAft>
-                <a:spcPts val="1000"/>
-              </a:spcAft>
-            </a:pPr>
-            <a:r>
-              <a:rPr sz="2200" b="0">
-                <a:solidFill>
-                  <a:srgbClr val="28462D"/>
+                <a:spcPts val="300"/>
+              </a:spcAft>
+            </a:pPr>
+            <a:r>
+              <a:rPr sz="1600" b="1">
+                <a:solidFill>
+                  <a:srgbClr val="C83C23"/>
+                </a:solidFill>
+                <a:latin typeface="KaiTi"/>
+              </a:rPr>
+              <a:t>任务二 · 选做</a:t>
+            </a:r>
+          </a:p>
+          <a:p>
+            <a:pPr algn="l">
+              <a:spcAft>
+                <a:spcPts val="300"/>
+              </a:spcAft>
+            </a:pPr>
+            <a:r>
+              <a:rPr sz="1600" b="0">
+                <a:solidFill>
+                  <a:srgbClr val="1E1E1E"/>
                 </a:solidFill>
                 <a:latin typeface="Microsoft YaHei"/>
               </a:rPr>
-              <a:t>女娲：神性与人性并存——孤独、疲倦、喜悦</a:t>
-            </a:r>
-          </a:p>
-        </p:txBody>
-      </p:sp>
-      <p:sp>
-        <p:nvSpPr>
-          <p:cNvPr id="19" name="Oval 18"/>
+              <a:t>查找一个中国创世神话，与本文进行比较阅读。</a:t>
+            </a:r>
+          </a:p>
+          <a:p>
+            <a:pPr algn="l">
+              <a:spcAft>
+                <a:spcPts val="300"/>
+              </a:spcAft>
+            </a:pPr>
+            <a:r>
+              <a:rPr sz="1300" b="0">
+                <a:solidFill>
+                  <a:srgbClr val="5A6A62"/>
+                </a:solidFill>
+                <a:latin typeface="Microsoft YaHei"/>
+              </a:rPr>
+              <a:t>思考：想象依据、表现方式、现实意味有何异同。</a:t>
+            </a:r>
+          </a:p>
+        </p:txBody>
+      </p:sp>
+      <p:sp>
+        <p:nvSpPr>
+          <p:cNvPr id="17" name="Rectangle 16"/>
           <p:cNvSpPr/>
           <p:nvPr/>
         </p:nvSpPr>
         <p:spPr>
           <a:xfrm>
-            <a:off x="2255824" y="2779776"/>
-            <a:ext cx="347472" cy="347472"/>
-          </a:xfrm>
-          <a:prstGeom prst="ellipse">
+            <a:off x="548640" y="5806440"/>
+            <a:ext cx="11094415" cy="9144"/>
+          </a:xfrm>
+          <a:prstGeom prst="rect">
             <a:avLst/>
           </a:prstGeom>
           <a:solidFill>
-            <a:srgbClr val="468250"/>
+            <a:srgbClr val="5A6A62"/>
           </a:solidFill>
           <a:ln>
             <a:noFill/>
@@ -9228,14 +8992,14 @@
       </p:sp>
       <p:sp>
         <p:nvSpPr>
-          <p:cNvPr id="20" name="TextBox 19"/>
+          <p:cNvPr id="18" name="TextBox 17"/>
           <p:cNvSpPr txBox="1"/>
           <p:nvPr/>
         </p:nvSpPr>
         <p:spPr>
           <a:xfrm>
-            <a:off x="2255824" y="2798064"/>
-            <a:ext cx="347472" cy="329184"/>
+            <a:off x="548640" y="5742432"/>
+            <a:ext cx="11094415" cy="201168"/>
           </a:xfrm>
           <a:prstGeom prst="rect">
             <a:avLst/>
@@ -9243,38 +9007,38 @@
           <a:noFill/>
         </p:spPr>
         <p:txBody>
-          <a:bodyPr wrap="none">
+          <a:bodyPr wrap="square" anchor="t">
             <a:spAutoFit/>
           </a:bodyPr>
           <a:lstStyle/>
           <a:p>
             <a:pPr algn="ctr">
               <a:spcAft>
-                <a:spcPts val="1000"/>
-              </a:spcAft>
-            </a:pPr>
-            <a:r>
-              <a:rPr sz="1400" b="1">
-                <a:solidFill>
-                  <a:srgbClr val="FFFFFF"/>
+                <a:spcPts val="300"/>
+              </a:spcAft>
+            </a:pPr>
+            <a:r>
+              <a:rPr sz="900" b="0">
+                <a:solidFill>
+                  <a:srgbClr val="5A6A62"/>
                 </a:solidFill>
                 <a:latin typeface="Microsoft YaHei"/>
               </a:rPr>
-              <a:t>3</a:t>
-            </a:r>
-          </a:p>
-        </p:txBody>
-      </p:sp>
-      <p:sp>
-        <p:nvSpPr>
-          <p:cNvPr id="21" name="TextBox 20"/>
+              <a:t>～ ～ ～ ～ ～ ～ ～ ～ ～ ～ ～ ～</a:t>
+            </a:r>
+          </a:p>
+        </p:txBody>
+      </p:sp>
+      <p:sp>
+        <p:nvSpPr>
+          <p:cNvPr id="19" name="TextBox 18"/>
           <p:cNvSpPr txBox="1"/>
           <p:nvPr/>
         </p:nvSpPr>
         <p:spPr>
           <a:xfrm>
-            <a:off x="2713024" y="2761488"/>
-            <a:ext cx="7863840" cy="457200"/>
+            <a:off x="548640" y="5943600"/>
+            <a:ext cx="11094415" cy="365760"/>
           </a:xfrm>
           <a:prstGeom prst="rect">
             <a:avLst/>
@@ -9282,690 +9046,24 @@
           <a:noFill/>
         </p:spPr>
         <p:txBody>
-          <a:bodyPr wrap="none">
+          <a:bodyPr wrap="square" anchor="t">
             <a:spAutoFit/>
           </a:bodyPr>
           <a:lstStyle/>
           <a:p>
-            <a:pPr algn="l">
-              <a:spcAft>
-                <a:spcPts val="1000"/>
-              </a:spcAft>
-            </a:pPr>
-            <a:r>
-              <a:rPr sz="2200" b="0">
-                <a:solidFill>
-                  <a:srgbClr val="28462D"/>
+            <a:pPr algn="ctr">
+              <a:spcAft>
+                <a:spcPts val="300"/>
+              </a:spcAft>
+            </a:pPr>
+            <a:r>
+              <a:rPr sz="1300" b="0">
+                <a:solidFill>
+                  <a:srgbClr val="4A7C6F"/>
                 </a:solidFill>
                 <a:latin typeface="Microsoft YaHei"/>
               </a:rPr>
-              <a:t>策展主题三：创造与生命</a:t>
-            </a:r>
-          </a:p>
-        </p:txBody>
-      </p:sp>
-    </p:spTree>
-  </p:cSld>
-  <p:clrMapOvr>
-    <a:masterClrMapping/>
-  </p:clrMapOvr>
-</p:sld>
-</file>
-
-<file path=ppt/slides/slide8.xml><?xml version="1.0" encoding="utf-8"?>
-<p:sld xmlns:a="http://schemas.openxmlformats.org/drawingml/2006/main" xmlns:p="http://schemas.openxmlformats.org/presentationml/2006/main" xmlns:r="http://schemas.openxmlformats.org/officeDocument/2006/relationships">
-  <p:cSld>
-    <p:spTree>
-      <p:nvGrpSpPr>
-        <p:cNvPr id="1" name=""/>
-        <p:cNvGrpSpPr/>
-        <p:nvPr/>
-      </p:nvGrpSpPr>
-      <p:grpSpPr/>
-      <p:pic>
-        <p:nvPicPr>
-          <p:cNvPr id="2" name="Picture 1" descr="bg_nuwa.png"/>
-          <p:cNvPicPr>
-            <a:picLocks noChangeAspect="1"/>
-          </p:cNvPicPr>
-          <p:nvPr/>
-        </p:nvPicPr>
-        <p:blipFill>
-          <a:blip r:embed="rId2"/>
-          <a:stretch>
-            <a:fillRect/>
-          </a:stretch>
-        </p:blipFill>
-        <p:spPr>
-          <a:xfrm>
-            <a:off x="0" y="0"/>
-            <a:ext cx="12191695" cy="6858000"/>
-          </a:xfrm>
-          <a:prstGeom prst="rect">
-            <a:avLst/>
-          </a:prstGeom>
-        </p:spPr>
-      </p:pic>
-      <p:sp>
-        <p:nvSpPr>
-          <p:cNvPr id="3" name="Rectangle 2"/>
-          <p:cNvSpPr/>
-          <p:nvPr/>
-        </p:nvSpPr>
-        <p:spPr>
-          <a:xfrm>
-            <a:off x="292608" y="274320"/>
-            <a:ext cx="11594592" cy="6300216"/>
-          </a:xfrm>
-          <a:prstGeom prst="rect">
-            <a:avLst/>
-          </a:prstGeom>
-          <a:noFill/>
-          <a:ln w="31750">
-            <a:solidFill>
-              <a:srgbClr val="5A8C5A"/>
-            </a:solidFill>
-          </a:ln>
-        </p:spPr>
-        <p:style>
-          <a:lnRef idx="1">
-            <a:schemeClr val="accent1"/>
-          </a:lnRef>
-          <a:fillRef idx="3">
-            <a:schemeClr val="accent1"/>
-          </a:fillRef>
-          <a:effectRef idx="2">
-            <a:schemeClr val="accent1"/>
-          </a:effectRef>
-          <a:fontRef idx="minor">
-            <a:schemeClr val="lt1"/>
-          </a:fontRef>
-        </p:style>
-        <p:txBody>
-          <a:bodyPr rtlCol="0" anchor="ctr"/>
-          <a:lstStyle/>
-          <a:p>
-            <a:pPr algn="ctr"/>
-          </a:p>
-        </p:txBody>
-      </p:sp>
-      <p:pic>
-        <p:nvPicPr>
-          <p:cNvPr id="4" name="Picture 3" descr="corner_nuwa_tl.png"/>
-          <p:cNvPicPr>
-            <a:picLocks noChangeAspect="1"/>
-          </p:cNvPicPr>
-          <p:nvPr/>
-        </p:nvPicPr>
-        <p:blipFill>
-          <a:blip r:embed="rId3"/>
-          <a:stretch>
-            <a:fillRect/>
-          </a:stretch>
-        </p:blipFill>
-        <p:spPr>
-          <a:xfrm>
-            <a:off x="-45720" y="-45720"/>
-            <a:ext cx="2011680" cy="2011680"/>
-          </a:xfrm>
-          <a:prstGeom prst="rect">
-            <a:avLst/>
-          </a:prstGeom>
-        </p:spPr>
-      </p:pic>
-      <p:pic>
-        <p:nvPicPr>
-          <p:cNvPr id="5" name="Picture 4" descr="corner_nuwa_tr.png"/>
-          <p:cNvPicPr>
-            <a:picLocks noChangeAspect="1"/>
-          </p:cNvPicPr>
-          <p:nvPr/>
-        </p:nvPicPr>
-        <p:blipFill>
-          <a:blip r:embed="rId4"/>
-          <a:stretch>
-            <a:fillRect/>
-          </a:stretch>
-        </p:blipFill>
-        <p:spPr>
-          <a:xfrm>
-            <a:off x="9875520" y="-45720"/>
-            <a:ext cx="2011680" cy="2011680"/>
-          </a:xfrm>
-          <a:prstGeom prst="rect">
-            <a:avLst/>
-          </a:prstGeom>
-        </p:spPr>
-      </p:pic>
-      <p:sp>
-        <p:nvSpPr>
-          <p:cNvPr id="6" name="Rounded Rectangle 5"/>
-          <p:cNvSpPr/>
-          <p:nvPr/>
-        </p:nvSpPr>
-        <p:spPr>
-          <a:xfrm>
-            <a:off x="502920" y="384048"/>
-            <a:ext cx="2011680" cy="384048"/>
-          </a:xfrm>
-          <a:prstGeom prst="roundRect">
-            <a:avLst/>
-          </a:prstGeom>
-          <a:solidFill>
-            <a:srgbClr val="3C9664"/>
-          </a:solidFill>
-          <a:ln>
-            <a:noFill/>
-          </a:ln>
-        </p:spPr>
-        <p:style>
-          <a:lnRef idx="1">
-            <a:schemeClr val="accent1"/>
-          </a:lnRef>
-          <a:fillRef idx="3">
-            <a:schemeClr val="accent1"/>
-          </a:fillRef>
-          <a:effectRef idx="2">
-            <a:schemeClr val="accent1"/>
-          </a:effectRef>
-          <a:fontRef idx="minor">
-            <a:schemeClr val="lt1"/>
-          </a:fontRef>
-        </p:style>
-        <p:txBody>
-          <a:bodyPr rtlCol="0" anchor="ctr"/>
-          <a:lstStyle/>
-          <a:p>
-            <a:pPr algn="ctr"/>
-          </a:p>
-        </p:txBody>
-      </p:sp>
-      <p:sp>
-        <p:nvSpPr>
-          <p:cNvPr id="7" name="TextBox 6"/>
-          <p:cNvSpPr txBox="1"/>
-          <p:nvPr/>
-        </p:nvSpPr>
-        <p:spPr>
-          <a:xfrm>
-            <a:off x="502920" y="402336"/>
-            <a:ext cx="2011680" cy="347472"/>
-          </a:xfrm>
-          <a:prstGeom prst="rect">
-            <a:avLst/>
-          </a:prstGeom>
-          <a:noFill/>
-        </p:spPr>
-        <p:txBody>
-          <a:bodyPr wrap="none">
-            <a:spAutoFit/>
-          </a:bodyPr>
-          <a:lstStyle/>
-          <a:p>
-            <a:pPr algn="ctr">
-              <a:spcAft>
-                <a:spcPts val="1000"/>
-              </a:spcAft>
-            </a:pPr>
-            <a:r>
-              <a:rPr sz="1600" b="1">
-                <a:solidFill>
-                  <a:srgbClr val="FFFFFF"/>
-                </a:solidFill>
-                <a:latin typeface="Microsoft YaHei"/>
-              </a:rPr>
-              <a:t>课堂活动</a:t>
-            </a:r>
-          </a:p>
-        </p:txBody>
-      </p:sp>
-      <p:sp>
-        <p:nvSpPr>
-          <p:cNvPr id="8" name="Rounded Rectangle 7"/>
-          <p:cNvSpPr/>
-          <p:nvPr/>
-        </p:nvSpPr>
-        <p:spPr>
-          <a:xfrm>
-            <a:off x="4953304" y="502920"/>
-            <a:ext cx="2286000" cy="411480"/>
-          </a:xfrm>
-          <a:prstGeom prst="roundRect">
-            <a:avLst/>
-          </a:prstGeom>
-          <a:solidFill>
-            <a:srgbClr val="A0C896"/>
-          </a:solidFill>
-          <a:ln>
-            <a:noFill/>
-          </a:ln>
-        </p:spPr>
-        <p:style>
-          <a:lnRef idx="1">
-            <a:schemeClr val="accent1"/>
-          </a:lnRef>
-          <a:fillRef idx="3">
-            <a:schemeClr val="accent1"/>
-          </a:fillRef>
-          <a:effectRef idx="2">
-            <a:schemeClr val="accent1"/>
-          </a:effectRef>
-          <a:fontRef idx="minor">
-            <a:schemeClr val="lt1"/>
-          </a:fontRef>
-        </p:style>
-        <p:txBody>
-          <a:bodyPr rtlCol="0" anchor="ctr"/>
-          <a:lstStyle/>
-          <a:p>
-            <a:pPr algn="ctr"/>
-          </a:p>
-        </p:txBody>
-      </p:sp>
-      <p:sp>
-        <p:nvSpPr>
-          <p:cNvPr id="9" name="TextBox 8"/>
-          <p:cNvSpPr txBox="1"/>
-          <p:nvPr/>
-        </p:nvSpPr>
-        <p:spPr>
-          <a:xfrm>
-            <a:off x="4953304" y="521208"/>
-            <a:ext cx="2286000" cy="384048"/>
-          </a:xfrm>
-          <a:prstGeom prst="rect">
-            <a:avLst/>
-          </a:prstGeom>
-          <a:noFill/>
-        </p:spPr>
-        <p:txBody>
-          <a:bodyPr wrap="none">
-            <a:spAutoFit/>
-          </a:bodyPr>
-          <a:lstStyle/>
-          <a:p>
-            <a:pPr algn="ctr">
-              <a:spcAft>
-                <a:spcPts val="1000"/>
-              </a:spcAft>
-            </a:pPr>
-            <a:r>
-              <a:rPr sz="1800" b="1">
-                <a:solidFill>
-                  <a:srgbClr val="28462D"/>
-                </a:solidFill>
-                <a:latin typeface="Microsoft YaHei"/>
-              </a:rPr>
-              <a:t>课后延伸</a:t>
-            </a:r>
-          </a:p>
-        </p:txBody>
-      </p:sp>
-      <p:sp>
-        <p:nvSpPr>
-          <p:cNvPr id="10" name="TextBox 9"/>
-          <p:cNvSpPr txBox="1"/>
-          <p:nvPr/>
-        </p:nvSpPr>
-        <p:spPr>
-          <a:xfrm>
-            <a:off x="1371600" y="960120"/>
-            <a:ext cx="9418320" cy="822960"/>
-          </a:xfrm>
-          <a:prstGeom prst="rect">
-            <a:avLst/>
-          </a:prstGeom>
-          <a:noFill/>
-        </p:spPr>
-        <p:txBody>
-          <a:bodyPr wrap="square">
-            <a:spAutoFit/>
-          </a:bodyPr>
-          <a:lstStyle/>
-          <a:p>
-            <a:pPr algn="ctr">
-              <a:spcAft>
-                <a:spcPts val="1000"/>
-              </a:spcAft>
-            </a:pPr>
-            <a:r>
-              <a:rPr sz="3600" b="1">
-                <a:solidFill>
-                  <a:srgbClr val="468250"/>
-                </a:solidFill>
-                <a:latin typeface="Microsoft YaHei"/>
-              </a:rPr>
-              <a:t>课后作业</a:t>
-            </a:r>
-          </a:p>
-        </p:txBody>
-      </p:sp>
-      <p:sp>
-        <p:nvSpPr>
-          <p:cNvPr id="11" name="Rectangle 10"/>
-          <p:cNvSpPr/>
-          <p:nvPr/>
-        </p:nvSpPr>
-        <p:spPr>
-          <a:xfrm>
-            <a:off x="3200400" y="1600200"/>
-            <a:ext cx="5760720" cy="27432"/>
-          </a:xfrm>
-          <a:prstGeom prst="rect">
-            <a:avLst/>
-          </a:prstGeom>
-          <a:solidFill>
-            <a:srgbClr val="A0C896"/>
-          </a:solidFill>
-          <a:ln>
-            <a:noFill/>
-          </a:ln>
-        </p:spPr>
-        <p:style>
-          <a:lnRef idx="1">
-            <a:schemeClr val="accent1"/>
-          </a:lnRef>
-          <a:fillRef idx="3">
-            <a:schemeClr val="accent1"/>
-          </a:fillRef>
-          <a:effectRef idx="2">
-            <a:schemeClr val="accent1"/>
-          </a:effectRef>
-          <a:fontRef idx="minor">
-            <a:schemeClr val="lt1"/>
-          </a:fontRef>
-        </p:style>
-        <p:txBody>
-          <a:bodyPr rtlCol="0" anchor="ctr"/>
-          <a:lstStyle/>
-          <a:p>
-            <a:pPr algn="ctr"/>
-          </a:p>
-        </p:txBody>
-      </p:sp>
-      <p:sp>
-        <p:nvSpPr>
-          <p:cNvPr id="12" name="Rounded Rectangle 11"/>
-          <p:cNvSpPr/>
-          <p:nvPr/>
-        </p:nvSpPr>
-        <p:spPr>
-          <a:xfrm>
-            <a:off x="1295704" y="1645920"/>
-            <a:ext cx="9601200" cy="1545336"/>
-          </a:xfrm>
-          <a:prstGeom prst="roundRect">
-            <a:avLst/>
-          </a:prstGeom>
-          <a:solidFill>
-            <a:srgbClr val="F8FCF5"/>
-          </a:solidFill>
-          <a:ln w="19050">
-            <a:solidFill>
-              <a:srgbClr val="A0C896"/>
-            </a:solidFill>
-          </a:ln>
-        </p:spPr>
-        <p:style>
-          <a:lnRef idx="1">
-            <a:schemeClr val="accent1"/>
-          </a:lnRef>
-          <a:fillRef idx="3">
-            <a:schemeClr val="accent1"/>
-          </a:fillRef>
-          <a:effectRef idx="2">
-            <a:schemeClr val="accent1"/>
-          </a:effectRef>
-          <a:fontRef idx="minor">
-            <a:schemeClr val="lt1"/>
-          </a:fontRef>
-        </p:style>
-        <p:txBody>
-          <a:bodyPr rtlCol="0" anchor="ctr"/>
-          <a:lstStyle/>
-          <a:p>
-            <a:pPr algn="ctr"/>
-          </a:p>
-        </p:txBody>
-      </p:sp>
-      <p:sp>
-        <p:nvSpPr>
-          <p:cNvPr id="13" name="Oval 12"/>
-          <p:cNvSpPr/>
-          <p:nvPr/>
-        </p:nvSpPr>
-        <p:spPr>
-          <a:xfrm>
-            <a:off x="2255824" y="1828800"/>
-            <a:ext cx="347472" cy="347472"/>
-          </a:xfrm>
-          <a:prstGeom prst="ellipse">
-            <a:avLst/>
-          </a:prstGeom>
-          <a:solidFill>
-            <a:srgbClr val="468250"/>
-          </a:solidFill>
-          <a:ln>
-            <a:noFill/>
-          </a:ln>
-        </p:spPr>
-        <p:style>
-          <a:lnRef idx="1">
-            <a:schemeClr val="accent1"/>
-          </a:lnRef>
-          <a:fillRef idx="3">
-            <a:schemeClr val="accent1"/>
-          </a:fillRef>
-          <a:effectRef idx="2">
-            <a:schemeClr val="accent1"/>
-          </a:effectRef>
-          <a:fontRef idx="minor">
-            <a:schemeClr val="lt1"/>
-          </a:fontRef>
-        </p:style>
-        <p:txBody>
-          <a:bodyPr rtlCol="0" anchor="ctr"/>
-          <a:lstStyle/>
-          <a:p>
-            <a:pPr algn="ctr"/>
-          </a:p>
-        </p:txBody>
-      </p:sp>
-      <p:sp>
-        <p:nvSpPr>
-          <p:cNvPr id="14" name="TextBox 13"/>
-          <p:cNvSpPr txBox="1"/>
-          <p:nvPr/>
-        </p:nvSpPr>
-        <p:spPr>
-          <a:xfrm>
-            <a:off x="2255824" y="1847088"/>
-            <a:ext cx="347472" cy="329184"/>
-          </a:xfrm>
-          <a:prstGeom prst="rect">
-            <a:avLst/>
-          </a:prstGeom>
-          <a:noFill/>
-        </p:spPr>
-        <p:txBody>
-          <a:bodyPr wrap="none">
-            <a:spAutoFit/>
-          </a:bodyPr>
-          <a:lstStyle/>
-          <a:p>
-            <a:pPr algn="ctr">
-              <a:spcAft>
-                <a:spcPts val="1000"/>
-              </a:spcAft>
-            </a:pPr>
-            <a:r>
-              <a:rPr sz="1400" b="1">
-                <a:solidFill>
-                  <a:srgbClr val="FFFFFF"/>
-                </a:solidFill>
-                <a:latin typeface="Microsoft YaHei"/>
-              </a:rPr>
-              <a:t>1</a:t>
-            </a:r>
-          </a:p>
-        </p:txBody>
-      </p:sp>
-      <p:sp>
-        <p:nvSpPr>
-          <p:cNvPr id="15" name="TextBox 14"/>
-          <p:cNvSpPr txBox="1"/>
-          <p:nvPr/>
-        </p:nvSpPr>
-        <p:spPr>
-          <a:xfrm>
-            <a:off x="2713024" y="1810512"/>
-            <a:ext cx="7863840" cy="457200"/>
-          </a:xfrm>
-          <a:prstGeom prst="rect">
-            <a:avLst/>
-          </a:prstGeom>
-          <a:noFill/>
-        </p:spPr>
-        <p:txBody>
-          <a:bodyPr wrap="none">
-            <a:spAutoFit/>
-          </a:bodyPr>
-          <a:lstStyle/>
-          <a:p>
-            <a:pPr algn="l">
-              <a:spcAft>
-                <a:spcPts val="1000"/>
-              </a:spcAft>
-            </a:pPr>
-            <a:r>
-              <a:rPr sz="2400" b="0">
-                <a:solidFill>
-                  <a:srgbClr val="28462D"/>
-                </a:solidFill>
-                <a:latin typeface="Microsoft YaHei"/>
-              </a:rPr>
-              <a:t>必做：以「我看见女娲……」写100字画面</a:t>
-            </a:r>
-          </a:p>
-        </p:txBody>
-      </p:sp>
-      <p:sp>
-        <p:nvSpPr>
-          <p:cNvPr id="16" name="Oval 15"/>
-          <p:cNvSpPr/>
-          <p:nvPr/>
-        </p:nvSpPr>
-        <p:spPr>
-          <a:xfrm>
-            <a:off x="2255824" y="2395728"/>
-            <a:ext cx="347472" cy="347472"/>
-          </a:xfrm>
-          <a:prstGeom prst="ellipse">
-            <a:avLst/>
-          </a:prstGeom>
-          <a:solidFill>
-            <a:srgbClr val="468250"/>
-          </a:solidFill>
-          <a:ln>
-            <a:noFill/>
-          </a:ln>
-        </p:spPr>
-        <p:style>
-          <a:lnRef idx="1">
-            <a:schemeClr val="accent1"/>
-          </a:lnRef>
-          <a:fillRef idx="3">
-            <a:schemeClr val="accent1"/>
-          </a:fillRef>
-          <a:effectRef idx="2">
-            <a:schemeClr val="accent1"/>
-          </a:effectRef>
-          <a:fontRef idx="minor">
-            <a:schemeClr val="lt1"/>
-          </a:fontRef>
-        </p:style>
-        <p:txBody>
-          <a:bodyPr rtlCol="0" anchor="ctr"/>
-          <a:lstStyle/>
-          <a:p>
-            <a:pPr algn="ctr"/>
-          </a:p>
-        </p:txBody>
-      </p:sp>
-      <p:sp>
-        <p:nvSpPr>
-          <p:cNvPr id="17" name="TextBox 16"/>
-          <p:cNvSpPr txBox="1"/>
-          <p:nvPr/>
-        </p:nvSpPr>
-        <p:spPr>
-          <a:xfrm>
-            <a:off x="2255824" y="2414016"/>
-            <a:ext cx="347472" cy="329184"/>
-          </a:xfrm>
-          <a:prstGeom prst="rect">
-            <a:avLst/>
-          </a:prstGeom>
-          <a:noFill/>
-        </p:spPr>
-        <p:txBody>
-          <a:bodyPr wrap="none">
-            <a:spAutoFit/>
-          </a:bodyPr>
-          <a:lstStyle/>
-          <a:p>
-            <a:pPr algn="ctr">
-              <a:spcAft>
-                <a:spcPts val="1000"/>
-              </a:spcAft>
-            </a:pPr>
-            <a:r>
-              <a:rPr sz="1400" b="1">
-                <a:solidFill>
-                  <a:srgbClr val="FFFFFF"/>
-                </a:solidFill>
-                <a:latin typeface="Microsoft YaHei"/>
-              </a:rPr>
-              <a:t>2</a:t>
-            </a:r>
-          </a:p>
-        </p:txBody>
-      </p:sp>
-      <p:sp>
-        <p:nvSpPr>
-          <p:cNvPr id="18" name="TextBox 17"/>
-          <p:cNvSpPr txBox="1"/>
-          <p:nvPr/>
-        </p:nvSpPr>
-        <p:spPr>
-          <a:xfrm>
-            <a:off x="2713024" y="2377440"/>
-            <a:ext cx="7863840" cy="457200"/>
-          </a:xfrm>
-          <a:prstGeom prst="rect">
-            <a:avLst/>
-          </a:prstGeom>
-          <a:noFill/>
-        </p:spPr>
-        <p:txBody>
-          <a:bodyPr wrap="none">
-            <a:spAutoFit/>
-          </a:bodyPr>
-          <a:lstStyle/>
-          <a:p>
-            <a:pPr algn="l">
-              <a:spcAft>
-                <a:spcPts val="1000"/>
-              </a:spcAft>
-            </a:pPr>
-            <a:r>
-              <a:rPr sz="2400" b="0">
-                <a:solidFill>
-                  <a:srgbClr val="28462D"/>
-                </a:solidFill>
-                <a:latin typeface="Microsoft YaHei"/>
-              </a:rPr>
-              <a:t>选做：查找一个中国创世神话，与本文比较</a:t>
+              <a:t>创造与生命 · 在神话中照见人类对存在的追问</a:t>
             </a:r>
           </a:p>
         </p:txBody>
